--- a/docs/submission/Irene-AI-Builder-Cup.pptx
+++ b/docs/submission/Irene-AI-Builder-Cup.pptx
@@ -2,46 +2,46 @@
 <file path=ppt/presentation.xml><?xml version="1.0" encoding="utf-8"?>
 <p:presentation xmlns:p="http://schemas.openxmlformats.org/presentationml/2006/main" embedTrueTypeFonts="1" saveSubsetFonts="0">
   <p:sldMasterIdLst>
-    <p:sldMasterId xmlns:r="http://schemas.openxmlformats.org/officeDocument/2006/relationships" id="2147483648" r:id="R7658c58f9cc6439a"/>
+    <p:sldMasterId xmlns:r="http://schemas.openxmlformats.org/officeDocument/2006/relationships" id="2147483648" r:id="Rf82d6318373c4427"/>
   </p:sldMasterIdLst>
   <p:notesMasterIdLst>
-    <p:notesMasterId xmlns:r="http://schemas.openxmlformats.org/officeDocument/2006/relationships" r:id="R2a62d3006c7746b4"/>
+    <p:notesMasterId xmlns:r="http://schemas.openxmlformats.org/officeDocument/2006/relationships" r:id="R55af141a9a91461f"/>
   </p:notesMasterIdLst>
   <p:sldIdLst>
-    <p:sldId xmlns:r="http://schemas.openxmlformats.org/officeDocument/2006/relationships" id="256" r:id="R4c849b58a09048ac"/>
-    <p:sldId xmlns:r="http://schemas.openxmlformats.org/officeDocument/2006/relationships" id="257" r:id="R4b12c262e7ec4103"/>
-    <p:sldId xmlns:r="http://schemas.openxmlformats.org/officeDocument/2006/relationships" id="258" r:id="Ra583fa2cdb074dfd"/>
-    <p:sldId xmlns:r="http://schemas.openxmlformats.org/officeDocument/2006/relationships" id="259" r:id="Re87d27f5c85847a4"/>
-    <p:sldId xmlns:r="http://schemas.openxmlformats.org/officeDocument/2006/relationships" id="260" r:id="Re4db2699db8a4ed5"/>
-    <p:sldId xmlns:r="http://schemas.openxmlformats.org/officeDocument/2006/relationships" id="261" r:id="R2adf550535f441a4"/>
-    <p:sldId xmlns:r="http://schemas.openxmlformats.org/officeDocument/2006/relationships" id="262" r:id="Rade880b232af4f6d"/>
-    <p:sldId xmlns:r="http://schemas.openxmlformats.org/officeDocument/2006/relationships" id="263" r:id="R0c0c34c842894438"/>
-    <p:sldId xmlns:r="http://schemas.openxmlformats.org/officeDocument/2006/relationships" id="264" r:id="Rf355d25bfdde40a1"/>
-    <p:sldId xmlns:r="http://schemas.openxmlformats.org/officeDocument/2006/relationships" id="265" r:id="Rf9ddd2e6d9bd453c"/>
-    <p:sldId xmlns:r="http://schemas.openxmlformats.org/officeDocument/2006/relationships" id="266" r:id="R2d58cc63f0104285"/>
-    <p:sldId xmlns:r="http://schemas.openxmlformats.org/officeDocument/2006/relationships" id="267" r:id="R4b3815f9e3ab4b25"/>
-    <p:sldId xmlns:r="http://schemas.openxmlformats.org/officeDocument/2006/relationships" id="268" r:id="R02987e72be1540d3"/>
-    <p:sldId xmlns:r="http://schemas.openxmlformats.org/officeDocument/2006/relationships" id="269" r:id="Rfdd3d549baaf491c"/>
-    <p:sldId xmlns:r="http://schemas.openxmlformats.org/officeDocument/2006/relationships" id="270" r:id="R8aed6398376840da"/>
-    <p:sldId xmlns:r="http://schemas.openxmlformats.org/officeDocument/2006/relationships" id="271" r:id="Rb39f5e39dc1d4956"/>
+    <p:sldId xmlns:r="http://schemas.openxmlformats.org/officeDocument/2006/relationships" id="256" r:id="R90bb4c7345bc40cf"/>
+    <p:sldId xmlns:r="http://schemas.openxmlformats.org/officeDocument/2006/relationships" id="257" r:id="Rc46abe00eacc4fbd"/>
+    <p:sldId xmlns:r="http://schemas.openxmlformats.org/officeDocument/2006/relationships" id="258" r:id="Rf3714d8e49d64aa4"/>
+    <p:sldId xmlns:r="http://schemas.openxmlformats.org/officeDocument/2006/relationships" id="259" r:id="R9f3498fad9494989"/>
+    <p:sldId xmlns:r="http://schemas.openxmlformats.org/officeDocument/2006/relationships" id="260" r:id="R68455f57373a4559"/>
+    <p:sldId xmlns:r="http://schemas.openxmlformats.org/officeDocument/2006/relationships" id="261" r:id="R23fff55b99f44afa"/>
+    <p:sldId xmlns:r="http://schemas.openxmlformats.org/officeDocument/2006/relationships" id="262" r:id="Ra9c84be9d87c438c"/>
+    <p:sldId xmlns:r="http://schemas.openxmlformats.org/officeDocument/2006/relationships" id="263" r:id="Rbc3125a9dd0b4a63"/>
+    <p:sldId xmlns:r="http://schemas.openxmlformats.org/officeDocument/2006/relationships" id="264" r:id="R1cb98cf856164204"/>
+    <p:sldId xmlns:r="http://schemas.openxmlformats.org/officeDocument/2006/relationships" id="265" r:id="R01bad33f4335462e"/>
+    <p:sldId xmlns:r="http://schemas.openxmlformats.org/officeDocument/2006/relationships" id="266" r:id="Rdeb2233a0a334bad"/>
+    <p:sldId xmlns:r="http://schemas.openxmlformats.org/officeDocument/2006/relationships" id="267" r:id="R8121f76cf68e441f"/>
+    <p:sldId xmlns:r="http://schemas.openxmlformats.org/officeDocument/2006/relationships" id="268" r:id="R73e22d4bcc434f21"/>
+    <p:sldId xmlns:r="http://schemas.openxmlformats.org/officeDocument/2006/relationships" id="269" r:id="Rebfd2b0d4d124a18"/>
+    <p:sldId xmlns:r="http://schemas.openxmlformats.org/officeDocument/2006/relationships" id="270" r:id="R6a163afca3234aed"/>
+    <p:sldId xmlns:r="http://schemas.openxmlformats.org/officeDocument/2006/relationships" id="271" r:id="Rc78e485df60b4ef3"/>
   </p:sldIdLst>
   <p:sldSz cx="9144000" cy="5143500"/>
   <p:notesSz cx="6858000" cy="9144000"/>
   <p:embeddedFontLst>
     <p:embeddedFont>
       <p:font typeface="Google Sans Flex Medium"/>
-      <p:regular xmlns:r="http://schemas.openxmlformats.org/officeDocument/2006/relationships" r:id="Rc82ab1cc2b564720"/>
-      <p:bold xmlns:r="http://schemas.openxmlformats.org/officeDocument/2006/relationships" r:id="R65bdf4051ecc45ef"/>
+      <p:regular xmlns:r="http://schemas.openxmlformats.org/officeDocument/2006/relationships" r:id="Rf753d3bd16ca4ade"/>
+      <p:bold xmlns:r="http://schemas.openxmlformats.org/officeDocument/2006/relationships" r:id="R680633637e434962"/>
     </p:embeddedFont>
     <p:embeddedFont>
       <p:font typeface="Google Sans Flex"/>
-      <p:regular xmlns:r="http://schemas.openxmlformats.org/officeDocument/2006/relationships" r:id="R8e1fc158ed404609"/>
-      <p:bold xmlns:r="http://schemas.openxmlformats.org/officeDocument/2006/relationships" r:id="Rad63dc035fb34602"/>
+      <p:regular xmlns:r="http://schemas.openxmlformats.org/officeDocument/2006/relationships" r:id="R800fcb10882f4e1c"/>
+      <p:bold xmlns:r="http://schemas.openxmlformats.org/officeDocument/2006/relationships" r:id="R16f9d30fe7104131"/>
     </p:embeddedFont>
     <p:embeddedFont>
       <p:font typeface="Google Sans Flex SemiBold"/>
-      <p:regular xmlns:r="http://schemas.openxmlformats.org/officeDocument/2006/relationships" r:id="R070398e810874027"/>
-      <p:bold xmlns:r="http://schemas.openxmlformats.org/officeDocument/2006/relationships" r:id="Rd8a9bbe6b3524b84"/>
+      <p:regular xmlns:r="http://schemas.openxmlformats.org/officeDocument/2006/relationships" r:id="Re52c896f7e6b43db"/>
+      <p:bold xmlns:r="http://schemas.openxmlformats.org/officeDocument/2006/relationships" r:id="Reb22b6189cef4569"/>
     </p:embeddedFont>
   </p:embeddedFontLst>
   <p:defaultTextStyle>
@@ -1136,7 +1136,7 @@
               <a:buNone/>
             </a:pPr>
             <a:r>
-              <a:t>Repository and deployment links must be checked without account access before submission. Public demo-video URL must be supplied before submitting this deck if the pending label remains. Prepared video: docs/submission/video/Irene-Demo-English.mp4, 150.12 seconds, 1920x1080 with English synthetic narration and captions.</a:t>
+              <a:t>Repository and deployment links must be checked without account access before submission. Public demo-video URL must be supplied before submitting this deck if the pending label remains. Prepared video: docs/submission/video/Irene-Demo-English.mp4, under three minutes, 1920x1080 with Indian English synthetic narration and captions.</a:t>
             </a:r>
             <a:endParaRPr/>
           </a:p>
@@ -1984,7 +1984,7 @@
           <ns0:cNvPr id="10" name="Google Shape;10;p2">
             <ns1:extLst>
               <ns1:ext uri="{FF2B5EF4-FFF2-40B4-BE49-F238E27FC236}">
-                <ns2:creationId id="{74DD7BC2-7BA4-439F-83DF-0B276771658A}"/>
+                <ns2:creationId id="{DBBF676E-E66E-4548-81CA-57BFC5FFE9BC}"/>
               </ns1:ext>
             </ns1:extLst>
           </ns0:cNvPr>
@@ -2117,7 +2117,7 @@
           <ns0:cNvPr id="11" name="Google Shape;11;p2">
             <ns1:extLst>
               <ns1:ext uri="{FF2B5EF4-FFF2-40B4-BE49-F238E27FC236}">
-                <ns2:creationId id="{8A764BD5-D328-43EA-BD61-4FB01EAAF410}"/>
+                <ns2:creationId id="{2E80DC09-9B15-4CC3-A794-549C4750ECCE}"/>
               </ns1:ext>
             </ns1:extLst>
           </ns0:cNvPr>
@@ -2277,7 +2277,7 @@
           <ns0:cNvPr id="12" name="Google Shape;12;p2">
             <ns1:extLst>
               <ns1:ext uri="{FF2B5EF4-FFF2-40B4-BE49-F238E27FC236}">
-                <ns2:creationId id="{4991934C-53F1-4F67-B193-559C279EBD7D}"/>
+                <ns2:creationId id="{37639444-9CE8-4AF0-83C6-F27670ED7761}"/>
               </ns1:ext>
             </ns1:extLst>
           </ns0:cNvPr>
@@ -2378,7 +2378,7 @@
           <ns0:cNvPr id="45" name="Google Shape;45;p11">
             <ns1:extLst>
               <ns1:ext uri="{FF2B5EF4-FFF2-40B4-BE49-F238E27FC236}">
-                <ns2:creationId id="{223334A1-AFAA-44FF-AABA-DF86A2FAAA77}"/>
+                <ns2:creationId id="{3741BE2E-BC22-4225-A616-FD454D9C81E3}"/>
               </ns1:ext>
             </ns1:extLst>
           </ns0:cNvPr>
@@ -2515,7 +2515,7 @@
           <ns0:cNvPr id="46" name="Google Shape;46;p11">
             <ns1:extLst>
               <ns1:ext uri="{FF2B5EF4-FFF2-40B4-BE49-F238E27FC236}">
-                <ns2:creationId id="{9AE315C0-27FB-4A70-A678-3A1804D38CD6}"/>
+                <ns2:creationId id="{1A0E04AD-E6A4-48DA-85B8-5AC49A2B8D37}"/>
               </ns1:ext>
             </ns1:extLst>
           </ns0:cNvPr>
@@ -2648,7 +2648,7 @@
           <ns0:cNvPr id="47" name="Google Shape;47;p11">
             <ns1:extLst>
               <ns1:ext uri="{FF2B5EF4-FFF2-40B4-BE49-F238E27FC236}">
-                <ns2:creationId id="{7FB06389-43F4-42E5-A98B-ED2D23D2D571}"/>
+                <ns2:creationId id="{397E6DA4-9A0B-472A-A63D-57715575482B}"/>
               </ns1:ext>
             </ns1:extLst>
           </ns0:cNvPr>
@@ -2749,7 +2749,7 @@
           <ns0:cNvPr id="49" name="Google Shape;49;p12">
             <ns1:extLst>
               <ns1:ext uri="{FF2B5EF4-FFF2-40B4-BE49-F238E27FC236}">
-                <ns2:creationId id="{F13D6DD8-7EC2-4D59-B9CA-43206672570E}"/>
+                <ns2:creationId id="{82B6124D-6FB5-4201-AD63-9A9D802F97BC}"/>
               </ns1:ext>
             </ns1:extLst>
           </ns0:cNvPr>
@@ -2850,7 +2850,7 @@
           <ns0:cNvPr id="14" name="Google Shape;14;p3">
             <ns1:extLst>
               <ns1:ext uri="{FF2B5EF4-FFF2-40B4-BE49-F238E27FC236}">
-                <ns2:creationId id="{577A20F0-89E4-4E55-AABB-97CCA8C0D789}"/>
+                <ns2:creationId id="{6C1BE077-DE54-4945-95C7-8582B9DE652A}"/>
               </ns1:ext>
             </ns1:extLst>
           </ns0:cNvPr>
@@ -2983,7 +2983,7 @@
           <ns0:cNvPr id="15" name="Google Shape;15;p3">
             <ns1:extLst>
               <ns1:ext uri="{FF2B5EF4-FFF2-40B4-BE49-F238E27FC236}">
-                <ns2:creationId id="{2CF83E14-59FA-4EC9-AD10-06E6304CAE67}"/>
+                <ns2:creationId id="{DCD6A61F-682A-4A8F-9102-27572A57EB0C}"/>
               </ns1:ext>
             </ns1:extLst>
           </ns0:cNvPr>
@@ -3084,7 +3084,7 @@
           <ns0:cNvPr id="17" name="Google Shape;17;p4">
             <ns1:extLst>
               <ns1:ext uri="{FF2B5EF4-FFF2-40B4-BE49-F238E27FC236}">
-                <ns2:creationId id="{EE63D17C-830E-4563-A9C0-C19CCD03C646}"/>
+                <ns2:creationId id="{3633E63B-7B27-4A5F-A2FB-C14C4BDCC20D}"/>
               </ns1:ext>
             </ns1:extLst>
           </ns0:cNvPr>
@@ -3217,7 +3217,7 @@
           <ns0:cNvPr id="18" name="Google Shape;18;p4">
             <ns1:extLst>
               <ns1:ext uri="{FF2B5EF4-FFF2-40B4-BE49-F238E27FC236}">
-                <ns2:creationId id="{F7F65C9B-3465-4048-9360-922310C74EDF}"/>
+                <ns2:creationId id="{BAB20372-40C7-4FB3-9133-BE26D930FC5A}"/>
               </ns1:ext>
             </ns1:extLst>
           </ns0:cNvPr>
@@ -3350,7 +3350,7 @@
           <ns0:cNvPr id="19" name="Google Shape;19;p4">
             <ns1:extLst>
               <ns1:ext uri="{FF2B5EF4-FFF2-40B4-BE49-F238E27FC236}">
-                <ns2:creationId id="{992359C8-50AF-446E-8DC0-D9C7ECADD941}"/>
+                <ns2:creationId id="{EEF2260D-163A-476D-90EF-E2DDB2CC4712}"/>
               </ns1:ext>
             </ns1:extLst>
           </ns0:cNvPr>
@@ -3451,7 +3451,7 @@
           <ns0:cNvPr id="21" name="Google Shape;21;p5">
             <ns1:extLst>
               <ns1:ext uri="{FF2B5EF4-FFF2-40B4-BE49-F238E27FC236}">
-                <ns2:creationId id="{39710154-F0E9-449D-851A-C515942F5A55}"/>
+                <ns2:creationId id="{104B52B5-0090-4261-AA3B-FF2ECF18900F}"/>
               </ns1:ext>
             </ns1:extLst>
           </ns0:cNvPr>
@@ -3584,7 +3584,7 @@
           <ns0:cNvPr id="22" name="Google Shape;22;p5">
             <ns1:extLst>
               <ns1:ext uri="{FF2B5EF4-FFF2-40B4-BE49-F238E27FC236}">
-                <ns2:creationId id="{19CAE132-131A-4925-A7A2-61D0509DA936}"/>
+                <ns2:creationId id="{DA2B9E08-11C7-47D6-BA40-7A7DB45775A2}"/>
               </ns1:ext>
             </ns1:extLst>
           </ns0:cNvPr>
@@ -3717,7 +3717,7 @@
           <ns0:cNvPr id="23" name="Google Shape;23;p5">
             <ns1:extLst>
               <ns1:ext uri="{FF2B5EF4-FFF2-40B4-BE49-F238E27FC236}">
-                <ns2:creationId id="{D810C015-B559-45B8-A950-F2CCD368F337}"/>
+                <ns2:creationId id="{8623ADB1-4626-4567-AEB2-07794BB56A56}"/>
               </ns1:ext>
             </ns1:extLst>
           </ns0:cNvPr>
@@ -3850,7 +3850,7 @@
           <ns0:cNvPr id="24" name="Google Shape;24;p5">
             <ns1:extLst>
               <ns1:ext uri="{FF2B5EF4-FFF2-40B4-BE49-F238E27FC236}">
-                <ns2:creationId id="{7319CB17-4EF4-40D6-B337-5BCF69693459}"/>
+                <ns2:creationId id="{82587E6D-7562-4F04-91E1-FF4B2EA536E8}"/>
               </ns1:ext>
             </ns1:extLst>
           </ns0:cNvPr>
@@ -3951,7 +3951,7 @@
           <ns0:cNvPr id="26" name="Google Shape;26;p6">
             <ns1:extLst>
               <ns1:ext uri="{FF2B5EF4-FFF2-40B4-BE49-F238E27FC236}">
-                <ns2:creationId id="{64AE43C6-FF26-456A-8CB7-04A2A6EBDCA4}"/>
+                <ns2:creationId id="{95A8D21E-0854-46E5-AAD0-11D4CA4C03D0}"/>
               </ns1:ext>
             </ns1:extLst>
           </ns0:cNvPr>
@@ -4084,7 +4084,7 @@
           <ns0:cNvPr id="27" name="Google Shape;27;p6">
             <ns1:extLst>
               <ns1:ext uri="{FF2B5EF4-FFF2-40B4-BE49-F238E27FC236}">
-                <ns2:creationId id="{B17377F6-31D2-40EA-BBB0-2C0C70BA855B}"/>
+                <ns2:creationId id="{F1C8A8E8-3B24-4F13-B848-88E68E7C4F47}"/>
               </ns1:ext>
             </ns1:extLst>
           </ns0:cNvPr>
@@ -4185,7 +4185,7 @@
           <ns0:cNvPr id="29" name="Google Shape;29;p7">
             <ns1:extLst>
               <ns1:ext uri="{FF2B5EF4-FFF2-40B4-BE49-F238E27FC236}">
-                <ns2:creationId id="{370951D0-3C9C-4C1A-8E0C-48F2C5F6707F}"/>
+                <ns2:creationId id="{3AE5EDEB-F393-49F5-ABC5-82DBBE854C0C}"/>
               </ns1:ext>
             </ns1:extLst>
           </ns0:cNvPr>
@@ -4318,7 +4318,7 @@
           <ns0:cNvPr id="30" name="Google Shape;30;p7">
             <ns1:extLst>
               <ns1:ext uri="{FF2B5EF4-FFF2-40B4-BE49-F238E27FC236}">
-                <ns2:creationId id="{8720259D-B0B7-4547-B39F-816956DCCB8B}"/>
+                <ns2:creationId id="{E2422727-7620-41A6-AF89-AA51FCDE25C8}"/>
               </ns1:ext>
             </ns1:extLst>
           </ns0:cNvPr>
@@ -4451,7 +4451,7 @@
           <ns0:cNvPr id="31" name="Google Shape;31;p7">
             <ns1:extLst>
               <ns1:ext uri="{FF2B5EF4-FFF2-40B4-BE49-F238E27FC236}">
-                <ns2:creationId id="{4D135CCD-EE2D-4D77-AFF0-87A23C7B2D47}"/>
+                <ns2:creationId id="{BB1DBB76-3152-4FB2-BAC7-C2643971A1EC}"/>
               </ns1:ext>
             </ns1:extLst>
           </ns0:cNvPr>
@@ -4552,7 +4552,7 @@
           <ns0:cNvPr id="33" name="Google Shape;33;p8">
             <ns1:extLst>
               <ns1:ext uri="{FF2B5EF4-FFF2-40B4-BE49-F238E27FC236}">
-                <ns2:creationId id="{3E57A622-4860-4E85-995D-FFBCD086642A}"/>
+                <ns2:creationId id="{2D8469DF-E0F2-49DF-B0D6-38CC52881D3A}"/>
               </ns1:ext>
             </ns1:extLst>
           </ns0:cNvPr>
@@ -4685,7 +4685,7 @@
           <ns0:cNvPr id="34" name="Google Shape;34;p8">
             <ns1:extLst>
               <ns1:ext uri="{FF2B5EF4-FFF2-40B4-BE49-F238E27FC236}">
-                <ns2:creationId id="{D661FC1B-98D1-405B-AC83-FC8CF5D6CF07}"/>
+                <ns2:creationId id="{7AEF65CE-6DF5-4DE3-98C6-404296BEB6A5}"/>
               </ns1:ext>
             </ns1:extLst>
           </ns0:cNvPr>
@@ -4786,7 +4786,7 @@
           <ns0:cNvPr id="36" name="Google Shape;36;p9">
             <ns1:extLst>
               <ns1:ext uri="{FF2B5EF4-FFF2-40B4-BE49-F238E27FC236}">
-                <ns2:creationId id="{4AD68A7C-A28A-4952-B4FE-BD470C5C39F7}"/>
+                <ns2:creationId id="{AE134925-52A6-4CC5-90BA-2067F987E5EA}"/>
               </ns1:ext>
             </ns1:extLst>
           </ns0:cNvPr>
@@ -4837,7 +4837,7 @@
           <ns0:cNvPr id="37" name="Google Shape;37;p9">
             <ns1:extLst>
               <ns1:ext uri="{FF2B5EF4-FFF2-40B4-BE49-F238E27FC236}">
-                <ns2:creationId id="{3B42638E-569B-4F9E-AED8-816BEB1506EC}"/>
+                <ns2:creationId id="{013FB23A-661D-4DBC-917E-5DC31603255C}"/>
               </ns1:ext>
             </ns1:extLst>
           </ns0:cNvPr>
@@ -4970,7 +4970,7 @@
           <ns0:cNvPr id="38" name="Google Shape;38;p9">
             <ns1:extLst>
               <ns1:ext uri="{FF2B5EF4-FFF2-40B4-BE49-F238E27FC236}">
-                <ns2:creationId id="{264F2ED0-24A5-4C80-8784-BC7CD1E41A8F}"/>
+                <ns2:creationId id="{89A3672C-A45F-47B8-80F8-A3921AA79776}"/>
               </ns1:ext>
             </ns1:extLst>
           </ns0:cNvPr>
@@ -5130,7 +5130,7 @@
           <ns0:cNvPr id="39" name="Google Shape;39;p9">
             <ns1:extLst>
               <ns1:ext uri="{FF2B5EF4-FFF2-40B4-BE49-F238E27FC236}">
-                <ns2:creationId id="{AB56BB75-96B7-4109-80FA-18EE26FEC2D8}"/>
+                <ns2:creationId id="{28488527-98FF-4BF8-95D9-F58D35860635}"/>
               </ns1:ext>
             </ns1:extLst>
           </ns0:cNvPr>
@@ -5263,7 +5263,7 @@
           <ns0:cNvPr id="40" name="Google Shape;40;p9">
             <ns1:extLst>
               <ns1:ext uri="{FF2B5EF4-FFF2-40B4-BE49-F238E27FC236}">
-                <ns2:creationId id="{9D7EF5B9-B04D-468D-BEDE-5FE67F11139F}"/>
+                <ns2:creationId id="{5D01E29D-204E-49D1-BAA9-E6C018ACA7B7}"/>
               </ns1:ext>
             </ns1:extLst>
           </ns0:cNvPr>
@@ -5364,7 +5364,7 @@
           <ns0:cNvPr id="42" name="Google Shape;42;p10">
             <ns1:extLst>
               <ns1:ext uri="{FF2B5EF4-FFF2-40B4-BE49-F238E27FC236}">
-                <ns2:creationId id="{2211E5A4-64AB-472F-BF17-FEEB8BD0488A}"/>
+                <ns2:creationId id="{94EDCE73-61D0-409E-8D5E-289AEFE951A0}"/>
               </ns1:ext>
             </ns1:extLst>
           </ns0:cNvPr>
@@ -5412,7 +5412,7 @@
           <ns0:cNvPr id="43" name="Google Shape;43;p10">
             <ns1:extLst>
               <ns1:ext uri="{FF2B5EF4-FFF2-40B4-BE49-F238E27FC236}">
-                <ns2:creationId id="{B1E83551-813D-47A0-BB3F-32902232FE43}"/>
+                <ns2:creationId id="{8F9B2313-F063-404D-97C4-FFE724916165}"/>
               </ns1:ext>
             </ns1:extLst>
           </ns0:cNvPr>
@@ -5520,7 +5520,7 @@
           <ns0:cNvPr id="6" name="Google Shape;6;p1">
             <ns1:extLst>
               <ns1:ext uri="{FF2B5EF4-FFF2-40B4-BE49-F238E27FC236}">
-                <ns2:creationId id="{CEA6BA4D-8712-42E2-AE66-A0071A8CE250}"/>
+                <ns2:creationId id="{743C563A-B5CA-46D8-B318-714E17F29ABC}"/>
               </ns1:ext>
             </ns1:extLst>
           </ns0:cNvPr>
@@ -5720,7 +5720,7 @@
           <ns0:cNvPr id="7" name="Google Shape;7;p1">
             <ns1:extLst>
               <ns1:ext uri="{FF2B5EF4-FFF2-40B4-BE49-F238E27FC236}">
-                <ns2:creationId id="{0A892055-8FA9-47BB-A795-41BEA47D1534}"/>
+                <ns2:creationId id="{F504E5E2-7A15-48AD-94FF-74579E2E0D79}"/>
               </ns1:ext>
             </ns1:extLst>
           </ns0:cNvPr>
@@ -5947,7 +5947,7 @@
           <ns0:cNvPr id="8" name="Google Shape;8;p1">
             <ns1:extLst>
               <ns1:ext uri="{FF2B5EF4-FFF2-40B4-BE49-F238E27FC236}">
-                <ns2:creationId id="{F5641FE3-1E78-4ED9-A090-ADDC31E973A1}"/>
+                <ns2:creationId id="{8119565D-AF08-4DE4-A5B5-6071FDAA04B8}"/>
               </ns1:ext>
             </ns1:extLst>
           </ns0:cNvPr>
@@ -6070,17 +6070,17 @@
   </ns0:cSld>
   <ns0:clrMap bg1="lt1" tx1="dk1" bg2="dk2" tx2="lt2" accent1="accent1" accent2="accent2" accent3="accent3" accent4="accent4" accent5="accent5" accent6="accent6" hlink="hlink" folHlink="folHlink"/>
   <ns0:sldLayoutIdLst>
-    <ns0:sldLayoutId id="2147483649" ns3:id="R639077a723014678"/>
-    <ns0:sldLayoutId id="2147483650" ns3:id="R9fc5300a24ed47a7"/>
-    <ns0:sldLayoutId id="2147483651" ns3:id="R0f1e94979c6446b4"/>
-    <ns0:sldLayoutId id="2147483652" ns3:id="R99837e74fae348d1"/>
-    <ns0:sldLayoutId id="2147483653" ns3:id="R944b205ba58e4238"/>
-    <ns0:sldLayoutId id="2147483654" ns3:id="Rd1320fd8b8484dbc"/>
-    <ns0:sldLayoutId id="2147483655" ns3:id="R81b02ec872da4b8e"/>
-    <ns0:sldLayoutId id="2147483656" ns3:id="R65fd264a678f4eba"/>
-    <ns0:sldLayoutId id="2147483657" ns3:id="R450831d62d204561"/>
-    <ns0:sldLayoutId id="2147483658" ns3:id="Rcf3fde984a384249"/>
-    <ns0:sldLayoutId id="2147483659" ns3:id="R6ffb4b28b298487b"/>
+    <ns0:sldLayoutId id="2147483649" ns3:id="Rfe7aa11a9a7645c0"/>
+    <ns0:sldLayoutId id="2147483650" ns3:id="R8848c413f26e4a34"/>
+    <ns0:sldLayoutId id="2147483651" ns3:id="R81155668c3914ac7"/>
+    <ns0:sldLayoutId id="2147483652" ns3:id="R9a74d84ecfc4417f"/>
+    <ns0:sldLayoutId id="2147483653" ns3:id="R39206dbdfbdf4d61"/>
+    <ns0:sldLayoutId id="2147483654" ns3:id="R1a2fbc0bbb7246d2"/>
+    <ns0:sldLayoutId id="2147483655" ns3:id="Ra54e6fd47eac44c4"/>
+    <ns0:sldLayoutId id="2147483656" ns3:id="R35f97a78e5fb4e30"/>
+    <ns0:sldLayoutId id="2147483657" ns3:id="Ra6433f0adba14e60"/>
+    <ns0:sldLayoutId id="2147483658" ns3:id="R3a7c41157f4a482c"/>
+    <ns0:sldLayoutId id="2147483659" ns3:id="Rcf1ba87ae69448d5"/>
   </ns0:sldLayoutIdLst>
   <ns0:hf sldNum="0" hdr="0" ftr="0" dt="0"/>
   <ns0:txStyles>
@@ -7027,7 +7027,7 @@
           <p:cNvPr id="54" name="Google Shape;54;p13">
             <a:extLst xmlns:a="http://schemas.openxmlformats.org/drawingml/2006/main">
               <a:ext uri="{FF2B5EF4-FFF2-40B4-BE49-F238E27FC236}">
-                <a16:creationId xmlns:a16="http://schemas.microsoft.com/office/drawing/2014/main" id="{2E9D689D-AC9F-4AA2-9901-8E580D04B3C6}"/>
+                <a16:creationId xmlns:a16="http://schemas.microsoft.com/office/drawing/2014/main" id="{4DC99E5C-39E6-4A87-9400-4F428F80903F}"/>
               </a:ext>
             </a:extLst>
           </p:cNvPr>
@@ -7089,7 +7089,7 @@
           <p:nvPr/>
         </p:nvPicPr>
         <p:blipFill>
-          <a:blip xmlns:r="http://schemas.openxmlformats.org/officeDocument/2006/relationships" xmlns:a="http://schemas.openxmlformats.org/drawingml/2006/main" r:embed="R37920fa6be4f4db5">
+          <a:blip xmlns:r="http://schemas.openxmlformats.org/officeDocument/2006/relationships" xmlns:a="http://schemas.openxmlformats.org/drawingml/2006/main" r:embed="Raef72ea5647244d7">
             <a:alphaModFix/>
           </a:blip>
           <a:stretch xmlns:a="http://schemas.openxmlformats.org/drawingml/2006/main">
@@ -7118,7 +7118,7 @@
           <p:nvPr/>
         </p:nvPicPr>
         <p:blipFill rotWithShape="1">
-          <a:blip xmlns:r="http://schemas.openxmlformats.org/officeDocument/2006/relationships" xmlns:a="http://schemas.openxmlformats.org/drawingml/2006/main" r:embed="R4eae3fbe16374634">
+          <a:blip xmlns:r="http://schemas.openxmlformats.org/officeDocument/2006/relationships" xmlns:a="http://schemas.openxmlformats.org/drawingml/2006/main" r:embed="Rf599dba51daa4875">
             <a:alphaModFix/>
           </a:blip>
           <a:srcRect xmlns:a="http://schemas.openxmlformats.org/drawingml/2006/main" l="0" t="0" r="0" b="98001"/>
@@ -7142,7 +7142,7 @@
           <p:cNvPr id="57" name="">
             <a:extLst xmlns:a="http://schemas.openxmlformats.org/drawingml/2006/main">
               <a:ext uri="{FF2B5EF4-FFF2-40B4-BE49-F238E27FC236}">
-                <a16:creationId xmlns:a16="http://schemas.microsoft.com/office/drawing/2014/main" id="{A58D263D-5995-4D59-B487-C403155A090A}"/>
+                <a16:creationId xmlns:a16="http://schemas.microsoft.com/office/drawing/2014/main" id="{43D0B2E9-37DF-4C84-A38B-136A8EE428F4}"/>
               </a:ext>
             </a:extLst>
           </p:cNvPr>
@@ -7199,7 +7199,7 @@
           <p:cNvPr id="58" name="">
             <a:extLst xmlns:a="http://schemas.openxmlformats.org/drawingml/2006/main">
               <a:ext uri="{FF2B5EF4-FFF2-40B4-BE49-F238E27FC236}">
-                <a16:creationId xmlns:a16="http://schemas.microsoft.com/office/drawing/2014/main" id="{3EC10399-A991-4A77-A733-631ECF75501E}"/>
+                <a16:creationId xmlns:a16="http://schemas.microsoft.com/office/drawing/2014/main" id="{ECE9030F-E86D-4E3F-9285-B97D567EFECD}"/>
               </a:ext>
             </a:extLst>
           </p:cNvPr>
@@ -7256,7 +7256,7 @@
           <p:cNvPr id="59" name="">
             <a:extLst xmlns:a="http://schemas.openxmlformats.org/drawingml/2006/main">
               <a:ext uri="{FF2B5EF4-FFF2-40B4-BE49-F238E27FC236}">
-                <a16:creationId xmlns:a16="http://schemas.microsoft.com/office/drawing/2014/main" id="{4D726DDD-6FFC-49B9-958C-D58B022192AD}"/>
+                <a16:creationId xmlns:a16="http://schemas.microsoft.com/office/drawing/2014/main" id="{FA257850-E044-4C45-87A9-6343700294A7}"/>
               </a:ext>
             </a:extLst>
           </p:cNvPr>
@@ -7334,7 +7334,7 @@
     </p:spTree>
     <p:extLst>
       <p:ext uri="{BB962C8B-B14F-4D97-AF65-F5344CB8AC3E}">
-        <p14:creationId xmlns:p14="http://schemas.microsoft.com/office/powerpoint/2010/main" val="854468067"/>
+        <p14:creationId xmlns:p14="http://schemas.microsoft.com/office/powerpoint/2010/main" val="325652219"/>
       </p:ext>
     </p:extLst>
   </p:cSld>
@@ -7362,7 +7362,7 @@
           <p:nvPr/>
         </p:nvPicPr>
         <p:blipFill rotWithShape="1">
-          <a:blip xmlns:r="http://schemas.openxmlformats.org/officeDocument/2006/relationships" xmlns:a="http://schemas.openxmlformats.org/drawingml/2006/main" r:embed="Re02e51b7064f433e">
+          <a:blip xmlns:r="http://schemas.openxmlformats.org/officeDocument/2006/relationships" xmlns:a="http://schemas.openxmlformats.org/drawingml/2006/main" r:embed="R8290d9a1d5d44be0">
             <a:alphaModFix/>
           </a:blip>
           <a:srcRect xmlns:a="http://schemas.openxmlformats.org/drawingml/2006/main" l="0" t="0" r="0" b="98001"/>
@@ -7390,7 +7390,7 @@
           <p:nvPr/>
         </p:nvPicPr>
         <p:blipFill>
-          <a:blip xmlns:r="http://schemas.openxmlformats.org/officeDocument/2006/relationships" xmlns:a="http://schemas.openxmlformats.org/drawingml/2006/main" r:embed="R0740e5cd229b40f3">
+          <a:blip xmlns:r="http://schemas.openxmlformats.org/officeDocument/2006/relationships" xmlns:a="http://schemas.openxmlformats.org/drawingml/2006/main" r:embed="R8e11143d0fc14746">
             <a:alphaModFix/>
           </a:blip>
           <a:stretch xmlns:a="http://schemas.openxmlformats.org/drawingml/2006/main">
@@ -7415,7 +7415,7 @@
           <p:cNvPr id="126" name="Google Shape;126;p22">
             <a:extLst xmlns:a="http://schemas.openxmlformats.org/drawingml/2006/main">
               <a:ext uri="{FF2B5EF4-FFF2-40B4-BE49-F238E27FC236}">
-                <a16:creationId xmlns:a16="http://schemas.microsoft.com/office/drawing/2014/main" id="{56AAFB54-7B20-4A09-9DF0-3D6B9F5FE7C7}"/>
+                <a16:creationId xmlns:a16="http://schemas.microsoft.com/office/drawing/2014/main" id="{6C07F881-8EC1-485E-8117-C29A84687152}"/>
               </a:ext>
             </a:extLst>
           </p:cNvPr>
@@ -7466,7 +7466,7 @@
           <p:cNvPr id="127" name="Google Shape;127;p22">
             <a:extLst xmlns:a="http://schemas.openxmlformats.org/drawingml/2006/main">
               <a:ext uri="{FF2B5EF4-FFF2-40B4-BE49-F238E27FC236}">
-                <a16:creationId xmlns:a16="http://schemas.microsoft.com/office/drawing/2014/main" id="{073C36BA-EAF1-4CD6-8C16-AD5CF59E9DD7}"/>
+                <a16:creationId xmlns:a16="http://schemas.microsoft.com/office/drawing/2014/main" id="{C006001B-416B-4F26-A921-A5EBB966D3AA}"/>
               </a:ext>
             </a:extLst>
           </p:cNvPr>
@@ -7524,7 +7524,7 @@
           <p:cNvPr id="130" name="">
             <a:extLst xmlns:a="http://schemas.openxmlformats.org/drawingml/2006/main">
               <a:ext uri="{FF2B5EF4-FFF2-40B4-BE49-F238E27FC236}">
-                <a16:creationId xmlns:a16="http://schemas.microsoft.com/office/drawing/2014/main" id="{C96AF20D-0EC5-4905-8BB1-C256B96FEF93}"/>
+                <a16:creationId xmlns:a16="http://schemas.microsoft.com/office/drawing/2014/main" id="{0E6AB673-A6F3-43E4-8EFD-2AFF50F59058}"/>
               </a:ext>
             </a:extLst>
           </p:cNvPr>
@@ -7581,7 +7581,7 @@
           <p:cNvPr id="131" name="">
             <a:extLst xmlns:a="http://schemas.openxmlformats.org/drawingml/2006/main">
               <a:ext uri="{FF2B5EF4-FFF2-40B4-BE49-F238E27FC236}">
-                <a16:creationId xmlns:a16="http://schemas.microsoft.com/office/drawing/2014/main" id="{0C737C6D-78C1-49F9-8154-CA8AEEC56A2D}"/>
+                <a16:creationId xmlns:a16="http://schemas.microsoft.com/office/drawing/2014/main" id="{156E6164-4544-4607-9DF0-FC0A8E4B80FA}"/>
               </a:ext>
             </a:extLst>
           </p:cNvPr>
@@ -7638,7 +7638,7 @@
           <p:cNvPr id="132" name="">
             <a:extLst xmlns:a="http://schemas.openxmlformats.org/drawingml/2006/main">
               <a:ext uri="{FF2B5EF4-FFF2-40B4-BE49-F238E27FC236}">
-                <a16:creationId xmlns:a16="http://schemas.microsoft.com/office/drawing/2014/main" id="{51FEF07B-8F36-473D-BF3C-04016A30AFCF}"/>
+                <a16:creationId xmlns:a16="http://schemas.microsoft.com/office/drawing/2014/main" id="{A2580528-59DC-4D3D-B9A7-0410DE560AF5}"/>
               </a:ext>
             </a:extLst>
           </p:cNvPr>
@@ -7695,7 +7695,7 @@
           <p:cNvPr id="133" name="">
             <a:extLst xmlns:a="http://schemas.openxmlformats.org/drawingml/2006/main">
               <a:ext uri="{FF2B5EF4-FFF2-40B4-BE49-F238E27FC236}">
-                <a16:creationId xmlns:a16="http://schemas.microsoft.com/office/drawing/2014/main" id="{9417088B-07D2-4EEC-9A06-CB989EE0816A}"/>
+                <a16:creationId xmlns:a16="http://schemas.microsoft.com/office/drawing/2014/main" id="{2AA2662F-D711-48CE-A05C-2C881D2AEB61}"/>
               </a:ext>
             </a:extLst>
           </p:cNvPr>
@@ -7798,7 +7798,7 @@
           <p:cNvPr id="134" name="">
             <a:extLst xmlns:a="http://schemas.openxmlformats.org/drawingml/2006/main">
               <a:ext uri="{FF2B5EF4-FFF2-40B4-BE49-F238E27FC236}">
-                <a16:creationId xmlns:a16="http://schemas.microsoft.com/office/drawing/2014/main" id="{BD6CFF58-151A-4D2E-8172-19FC2C8D1433}"/>
+                <a16:creationId xmlns:a16="http://schemas.microsoft.com/office/drawing/2014/main" id="{CA550382-7CED-46DD-A403-DB057BBB03A9}"/>
               </a:ext>
             </a:extLst>
           </p:cNvPr>
@@ -7855,7 +7855,7 @@
           <p:cNvPr id="135" name="">
             <a:extLst xmlns:a="http://schemas.openxmlformats.org/drawingml/2006/main">
               <a:ext uri="{FF2B5EF4-FFF2-40B4-BE49-F238E27FC236}">
-                <a16:creationId xmlns:a16="http://schemas.microsoft.com/office/drawing/2014/main" id="{D4F8D07E-721F-4E7A-A74B-A75FC1E19B94}"/>
+                <a16:creationId xmlns:a16="http://schemas.microsoft.com/office/drawing/2014/main" id="{5E1B870E-DDAF-47D9-A013-B6E4C4DBA5BA}"/>
               </a:ext>
             </a:extLst>
           </p:cNvPr>
@@ -7958,7 +7958,7 @@
           <p:cNvPr id="136" name="">
             <a:extLst xmlns:a="http://schemas.openxmlformats.org/drawingml/2006/main">
               <a:ext uri="{FF2B5EF4-FFF2-40B4-BE49-F238E27FC236}">
-                <a16:creationId xmlns:a16="http://schemas.microsoft.com/office/drawing/2014/main" id="{BD790BE4-0CEC-42FA-9F04-4C25CBD5ABCD}"/>
+                <a16:creationId xmlns:a16="http://schemas.microsoft.com/office/drawing/2014/main" id="{56D13A12-3657-46C9-854E-62DDC0F18676}"/>
               </a:ext>
             </a:extLst>
           </p:cNvPr>
@@ -8015,7 +8015,7 @@
           <p:cNvPr id="137" name="">
             <a:extLst xmlns:a="http://schemas.openxmlformats.org/drawingml/2006/main">
               <a:ext uri="{FF2B5EF4-FFF2-40B4-BE49-F238E27FC236}">
-                <a16:creationId xmlns:a16="http://schemas.microsoft.com/office/drawing/2014/main" id="{F9589C75-B9D2-49D7-8256-459C47729E27}"/>
+                <a16:creationId xmlns:a16="http://schemas.microsoft.com/office/drawing/2014/main" id="{30E72B08-18FB-4011-8051-EF922B7A1BBE}"/>
               </a:ext>
             </a:extLst>
           </p:cNvPr>
@@ -8118,7 +8118,7 @@
           <p:cNvPr id="138" name="">
             <a:extLst xmlns:a="http://schemas.openxmlformats.org/drawingml/2006/main">
               <a:ext uri="{FF2B5EF4-FFF2-40B4-BE49-F238E27FC236}">
-                <a16:creationId xmlns:a16="http://schemas.microsoft.com/office/drawing/2014/main" id="{628D368A-35B6-4949-9835-4E4F50F3E230}"/>
+                <a16:creationId xmlns:a16="http://schemas.microsoft.com/office/drawing/2014/main" id="{18111C9A-2E42-4DC4-928E-F51359E958BE}"/>
               </a:ext>
             </a:extLst>
           </p:cNvPr>
@@ -8173,7 +8173,7 @@
     </p:spTree>
     <p:extLst>
       <p:ext uri="{BB962C8B-B14F-4D97-AF65-F5344CB8AC3E}">
-        <p14:creationId xmlns:p14="http://schemas.microsoft.com/office/powerpoint/2010/main" val="429607446"/>
+        <p14:creationId xmlns:p14="http://schemas.microsoft.com/office/powerpoint/2010/main" val="418742469"/>
       </p:ext>
     </p:extLst>
   </p:cSld>
@@ -8201,7 +8201,7 @@
           <p:nvPr/>
         </p:nvPicPr>
         <p:blipFill rotWithShape="1">
-          <a:blip xmlns:r="http://schemas.openxmlformats.org/officeDocument/2006/relationships" xmlns:a="http://schemas.openxmlformats.org/drawingml/2006/main" r:embed="R60b74a7d931a4265">
+          <a:blip xmlns:r="http://schemas.openxmlformats.org/officeDocument/2006/relationships" xmlns:a="http://schemas.openxmlformats.org/drawingml/2006/main" r:embed="R602c28aa57584698">
             <a:alphaModFix/>
           </a:blip>
           <a:srcRect xmlns:a="http://schemas.openxmlformats.org/drawingml/2006/main" l="0" t="0" r="0" b="98001"/>
@@ -8229,7 +8229,7 @@
           <p:nvPr/>
         </p:nvPicPr>
         <p:blipFill>
-          <a:blip xmlns:r="http://schemas.openxmlformats.org/officeDocument/2006/relationships" xmlns:a="http://schemas.openxmlformats.org/drawingml/2006/main" r:embed="R9d5bd7b7aa11488d">
+          <a:blip xmlns:r="http://schemas.openxmlformats.org/officeDocument/2006/relationships" xmlns:a="http://schemas.openxmlformats.org/drawingml/2006/main" r:embed="Rc8f6470172fc4d15">
             <a:alphaModFix/>
           </a:blip>
           <a:stretch xmlns:a="http://schemas.openxmlformats.org/drawingml/2006/main">
@@ -8254,7 +8254,7 @@
           <p:cNvPr id="134" name="Google Shape;134;p23">
             <a:extLst xmlns:a="http://schemas.openxmlformats.org/drawingml/2006/main">
               <a:ext uri="{FF2B5EF4-FFF2-40B4-BE49-F238E27FC236}">
-                <a16:creationId xmlns:a16="http://schemas.microsoft.com/office/drawing/2014/main" id="{FD5DCD66-5FDB-4DED-B40E-BD20986F1329}"/>
+                <a16:creationId xmlns:a16="http://schemas.microsoft.com/office/drawing/2014/main" id="{40BFC248-C1A2-4CFB-A904-EF8D2C049687}"/>
               </a:ext>
             </a:extLst>
           </p:cNvPr>
@@ -8305,7 +8305,7 @@
           <p:cNvPr id="135" name="Google Shape;135;p23">
             <a:extLst xmlns:a="http://schemas.openxmlformats.org/drawingml/2006/main">
               <a:ext uri="{FF2B5EF4-FFF2-40B4-BE49-F238E27FC236}">
-                <a16:creationId xmlns:a16="http://schemas.microsoft.com/office/drawing/2014/main" id="{E04BC908-E70B-4D03-8FCB-67466BAC1B3B}"/>
+                <a16:creationId xmlns:a16="http://schemas.microsoft.com/office/drawing/2014/main" id="{B10E1687-0ADB-4A64-9D1E-E7E6549F9654}"/>
               </a:ext>
             </a:extLst>
           </p:cNvPr>
@@ -8363,7 +8363,7 @@
           <p:cNvPr id="138" name="">
             <a:extLst xmlns:a="http://schemas.openxmlformats.org/drawingml/2006/main">
               <a:ext uri="{FF2B5EF4-FFF2-40B4-BE49-F238E27FC236}">
-                <a16:creationId xmlns:a16="http://schemas.microsoft.com/office/drawing/2014/main" id="{9B80E177-2EC0-45CB-B640-C92852563CBC}"/>
+                <a16:creationId xmlns:a16="http://schemas.microsoft.com/office/drawing/2014/main" id="{972AE5A4-C6AC-4C90-AE0B-98D2F6D9016A}"/>
               </a:ext>
             </a:extLst>
           </p:cNvPr>
@@ -8420,7 +8420,7 @@
           <p:cNvPr id="139" name="">
             <a:extLst xmlns:a="http://schemas.openxmlformats.org/drawingml/2006/main">
               <a:ext uri="{FF2B5EF4-FFF2-40B4-BE49-F238E27FC236}">
-                <a16:creationId xmlns:a16="http://schemas.microsoft.com/office/drawing/2014/main" id="{2D5DE1AC-455C-499F-8027-2906A1D3A704}"/>
+                <a16:creationId xmlns:a16="http://schemas.microsoft.com/office/drawing/2014/main" id="{45AE225D-AFB3-405B-9BDA-D196389D4108}"/>
               </a:ext>
             </a:extLst>
           </p:cNvPr>
@@ -8477,7 +8477,7 @@
           <p:cNvPr id="140" name="">
             <a:extLst xmlns:a="http://schemas.openxmlformats.org/drawingml/2006/main">
               <a:ext uri="{FF2B5EF4-FFF2-40B4-BE49-F238E27FC236}">
-                <a16:creationId xmlns:a16="http://schemas.microsoft.com/office/drawing/2014/main" id="{882EA021-B3ED-40A7-B7DB-449EE8BD5BFD}"/>
+                <a16:creationId xmlns:a16="http://schemas.microsoft.com/office/drawing/2014/main" id="{B4574AA0-300E-46E4-BBE2-3B0C8535E5C9}"/>
               </a:ext>
             </a:extLst>
           </p:cNvPr>
@@ -8538,7 +8538,7 @@
           <p:nvPr/>
         </p:nvPicPr>
         <p:blipFill>
-          <a:blip xmlns:r="http://schemas.openxmlformats.org/officeDocument/2006/relationships" xmlns:a="http://schemas.openxmlformats.org/drawingml/2006/main" r:embed="R68971e28b7ce4bda"/>
+          <a:blip xmlns:r="http://schemas.openxmlformats.org/officeDocument/2006/relationships" xmlns:a="http://schemas.openxmlformats.org/drawingml/2006/main" r:embed="Ra21301f1a29544da"/>
           <a:srcRect xmlns:a="http://schemas.openxmlformats.org/drawingml/2006/main" l="25000" t="8000" r="2500" b="6000"/>
           <a:stretch xmlns:a="http://schemas.openxmlformats.org/drawingml/2006/main"/>
         </p:blipFill>
@@ -8561,7 +8561,7 @@
           <p:nvPr/>
         </p:nvPicPr>
         <p:blipFill>
-          <a:blip xmlns:r="http://schemas.openxmlformats.org/officeDocument/2006/relationships" xmlns:a="http://schemas.openxmlformats.org/drawingml/2006/main" r:embed="Rce84518d5f6845f9"/>
+          <a:blip xmlns:r="http://schemas.openxmlformats.org/officeDocument/2006/relationships" xmlns:a="http://schemas.openxmlformats.org/drawingml/2006/main" r:embed="Rc75d413a10044575"/>
           <a:srcRect xmlns:a="http://schemas.openxmlformats.org/drawingml/2006/main" l="25000" t="17000" r="2500" b="1500"/>
           <a:stretch xmlns:a="http://schemas.openxmlformats.org/drawingml/2006/main"/>
         </p:blipFill>
@@ -8580,7 +8580,7 @@
           <p:cNvPr id="143" name="">
             <a:extLst xmlns:a="http://schemas.openxmlformats.org/drawingml/2006/main">
               <a:ext uri="{FF2B5EF4-FFF2-40B4-BE49-F238E27FC236}">
-                <a16:creationId xmlns:a16="http://schemas.microsoft.com/office/drawing/2014/main" id="{38A155B9-41A8-4661-BB0F-9ED2F0DE087F}"/>
+                <a16:creationId xmlns:a16="http://schemas.microsoft.com/office/drawing/2014/main" id="{2531F245-98F9-4672-BC94-D040853030A6}"/>
               </a:ext>
             </a:extLst>
           </p:cNvPr>
@@ -8637,7 +8637,7 @@
           <p:cNvPr id="144" name="">
             <a:extLst xmlns:a="http://schemas.openxmlformats.org/drawingml/2006/main">
               <a:ext uri="{FF2B5EF4-FFF2-40B4-BE49-F238E27FC236}">
-                <a16:creationId xmlns:a16="http://schemas.microsoft.com/office/drawing/2014/main" id="{2EFA31E9-4016-4545-8F36-C3216F81E9A5}"/>
+                <a16:creationId xmlns:a16="http://schemas.microsoft.com/office/drawing/2014/main" id="{73BA5A46-87FE-4FA1-8882-2FD45770E3FE}"/>
               </a:ext>
             </a:extLst>
           </p:cNvPr>
@@ -8692,7 +8692,7 @@
     </p:spTree>
     <p:extLst>
       <p:ext uri="{BB962C8B-B14F-4D97-AF65-F5344CB8AC3E}">
-        <p14:creationId xmlns:p14="http://schemas.microsoft.com/office/powerpoint/2010/main" val="2068414457"/>
+        <p14:creationId xmlns:p14="http://schemas.microsoft.com/office/powerpoint/2010/main" val="2079700727"/>
       </p:ext>
     </p:extLst>
   </p:cSld>
@@ -8720,7 +8720,7 @@
           <p:nvPr/>
         </p:nvPicPr>
         <p:blipFill rotWithShape="1">
-          <a:blip xmlns:r="http://schemas.openxmlformats.org/officeDocument/2006/relationships" xmlns:a="http://schemas.openxmlformats.org/drawingml/2006/main" r:embed="R44e2f09946464f1e">
+          <a:blip xmlns:r="http://schemas.openxmlformats.org/officeDocument/2006/relationships" xmlns:a="http://schemas.openxmlformats.org/drawingml/2006/main" r:embed="R69c9bf2cbc6a479d">
             <a:alphaModFix/>
           </a:blip>
           <a:srcRect xmlns:a="http://schemas.openxmlformats.org/drawingml/2006/main" l="0" t="0" r="0" b="98001"/>
@@ -8748,7 +8748,7 @@
           <p:nvPr/>
         </p:nvPicPr>
         <p:blipFill>
-          <a:blip xmlns:r="http://schemas.openxmlformats.org/officeDocument/2006/relationships" xmlns:a="http://schemas.openxmlformats.org/drawingml/2006/main" r:embed="R9763a45fc32148a8">
+          <a:blip xmlns:r="http://schemas.openxmlformats.org/officeDocument/2006/relationships" xmlns:a="http://schemas.openxmlformats.org/drawingml/2006/main" r:embed="R1330e33878474eec">
             <a:alphaModFix/>
           </a:blip>
           <a:stretch xmlns:a="http://schemas.openxmlformats.org/drawingml/2006/main">
@@ -8773,7 +8773,7 @@
           <p:cNvPr id="142" name="Google Shape;142;p24">
             <a:extLst xmlns:a="http://schemas.openxmlformats.org/drawingml/2006/main">
               <a:ext uri="{FF2B5EF4-FFF2-40B4-BE49-F238E27FC236}">
-                <a16:creationId xmlns:a16="http://schemas.microsoft.com/office/drawing/2014/main" id="{99DDED96-1445-4D13-82DD-DA00EB77F9B7}"/>
+                <a16:creationId xmlns:a16="http://schemas.microsoft.com/office/drawing/2014/main" id="{232F800C-1699-4231-8280-81CA6F1AC928}"/>
               </a:ext>
             </a:extLst>
           </p:cNvPr>
@@ -8824,7 +8824,7 @@
           <p:cNvPr id="143" name="Google Shape;143;p24">
             <a:extLst xmlns:a="http://schemas.openxmlformats.org/drawingml/2006/main">
               <a:ext uri="{FF2B5EF4-FFF2-40B4-BE49-F238E27FC236}">
-                <a16:creationId xmlns:a16="http://schemas.microsoft.com/office/drawing/2014/main" id="{DA6626B9-7724-49DE-8402-8E1EAF363C7C}"/>
+                <a16:creationId xmlns:a16="http://schemas.microsoft.com/office/drawing/2014/main" id="{6AD5076A-E82D-4FC6-A31E-2D1C8EF249A3}"/>
               </a:ext>
             </a:extLst>
           </p:cNvPr>
@@ -8882,7 +8882,7 @@
           <p:cNvPr id="146" name="">
             <a:extLst xmlns:a="http://schemas.openxmlformats.org/drawingml/2006/main">
               <a:ext uri="{FF2B5EF4-FFF2-40B4-BE49-F238E27FC236}">
-                <a16:creationId xmlns:a16="http://schemas.microsoft.com/office/drawing/2014/main" id="{2B2EF22F-D003-4625-B549-A8A5FE2BD7DB}"/>
+                <a16:creationId xmlns:a16="http://schemas.microsoft.com/office/drawing/2014/main" id="{F223EA7C-7099-40EA-BEAC-CF2FD3686B05}"/>
               </a:ext>
             </a:extLst>
           </p:cNvPr>
@@ -8939,7 +8939,7 @@
           <p:cNvPr id="147" name="">
             <a:extLst xmlns:a="http://schemas.openxmlformats.org/drawingml/2006/main">
               <a:ext uri="{FF2B5EF4-FFF2-40B4-BE49-F238E27FC236}">
-                <a16:creationId xmlns:a16="http://schemas.microsoft.com/office/drawing/2014/main" id="{0EF466D8-9252-42CF-99C7-22D5543A85D6}"/>
+                <a16:creationId xmlns:a16="http://schemas.microsoft.com/office/drawing/2014/main" id="{785A12B3-FE18-4486-80E7-17348BC4D8C5}"/>
               </a:ext>
             </a:extLst>
           </p:cNvPr>
@@ -8996,7 +8996,7 @@
           <p:cNvPr id="148" name="">
             <a:extLst xmlns:a="http://schemas.openxmlformats.org/drawingml/2006/main">
               <a:ext uri="{FF2B5EF4-FFF2-40B4-BE49-F238E27FC236}">
-                <a16:creationId xmlns:a16="http://schemas.microsoft.com/office/drawing/2014/main" id="{890F5EED-05A0-45A1-85E0-5212F0ACE587}"/>
+                <a16:creationId xmlns:a16="http://schemas.microsoft.com/office/drawing/2014/main" id="{03AA726B-3AC2-40B7-8BC7-720C06C2BDC4}"/>
               </a:ext>
             </a:extLst>
           </p:cNvPr>
@@ -9053,7 +9053,7 @@
           <p:cNvPr id="149" name="">
             <a:extLst xmlns:a="http://schemas.openxmlformats.org/drawingml/2006/main">
               <a:ext uri="{FF2B5EF4-FFF2-40B4-BE49-F238E27FC236}">
-                <a16:creationId xmlns:a16="http://schemas.microsoft.com/office/drawing/2014/main" id="{A9C8BEEE-B7F3-43C1-B14A-9B762D0F8C7A}"/>
+                <a16:creationId xmlns:a16="http://schemas.microsoft.com/office/drawing/2014/main" id="{04502CC8-0BA5-49A1-B0FB-62999341499E}"/>
               </a:ext>
             </a:extLst>
           </p:cNvPr>
@@ -9110,7 +9110,7 @@
           <p:cNvPr id="150" name="">
             <a:extLst xmlns:a="http://schemas.openxmlformats.org/drawingml/2006/main">
               <a:ext uri="{FF2B5EF4-FFF2-40B4-BE49-F238E27FC236}">
-                <a16:creationId xmlns:a16="http://schemas.microsoft.com/office/drawing/2014/main" id="{1DD76465-91CB-4384-88B7-16138DD60CAA}"/>
+                <a16:creationId xmlns:a16="http://schemas.microsoft.com/office/drawing/2014/main" id="{8151EB5D-6E3C-444F-80D3-A816A799DFC6}"/>
               </a:ext>
             </a:extLst>
           </p:cNvPr>
@@ -9167,7 +9167,7 @@
           <p:cNvPr id="151" name="">
             <a:extLst xmlns:a="http://schemas.openxmlformats.org/drawingml/2006/main">
               <a:ext uri="{FF2B5EF4-FFF2-40B4-BE49-F238E27FC236}">
-                <a16:creationId xmlns:a16="http://schemas.microsoft.com/office/drawing/2014/main" id="{7D441C9E-BDC6-4387-B9CF-78E8F930D77C}"/>
+                <a16:creationId xmlns:a16="http://schemas.microsoft.com/office/drawing/2014/main" id="{CAB504E0-CA66-4339-A34A-828C62468AFB}"/>
               </a:ext>
             </a:extLst>
           </p:cNvPr>
@@ -9224,7 +9224,7 @@
           <p:cNvPr id="152" name="">
             <a:extLst xmlns:a="http://schemas.openxmlformats.org/drawingml/2006/main">
               <a:ext uri="{FF2B5EF4-FFF2-40B4-BE49-F238E27FC236}">
-                <a16:creationId xmlns:a16="http://schemas.microsoft.com/office/drawing/2014/main" id="{F5CDDCDF-D890-4E45-ACE2-E216C460E802}"/>
+                <a16:creationId xmlns:a16="http://schemas.microsoft.com/office/drawing/2014/main" id="{FB51A3D3-5949-48F1-9043-156F9F379C7E}"/>
               </a:ext>
             </a:extLst>
           </p:cNvPr>
@@ -9281,7 +9281,7 @@
           <p:cNvPr id="153" name="">
             <a:extLst xmlns:a="http://schemas.openxmlformats.org/drawingml/2006/main">
               <a:ext uri="{FF2B5EF4-FFF2-40B4-BE49-F238E27FC236}">
-                <a16:creationId xmlns:a16="http://schemas.microsoft.com/office/drawing/2014/main" id="{44FF1599-2589-4B6E-9DB6-BA2B6084919E}"/>
+                <a16:creationId xmlns:a16="http://schemas.microsoft.com/office/drawing/2014/main" id="{7D62885B-B6BD-4EDD-84CD-71EBA6DAFC6D}"/>
               </a:ext>
             </a:extLst>
           </p:cNvPr>
@@ -9338,7 +9338,7 @@
           <p:cNvPr id="154" name="">
             <a:extLst xmlns:a="http://schemas.openxmlformats.org/drawingml/2006/main">
               <a:ext uri="{FF2B5EF4-FFF2-40B4-BE49-F238E27FC236}">
-                <a16:creationId xmlns:a16="http://schemas.microsoft.com/office/drawing/2014/main" id="{7BD67747-A33E-4C49-AED1-5A1EE842F1B3}"/>
+                <a16:creationId xmlns:a16="http://schemas.microsoft.com/office/drawing/2014/main" id="{5AE3D68F-9C93-40AD-B239-D9DCFFACC6E9}"/>
               </a:ext>
             </a:extLst>
           </p:cNvPr>
@@ -9395,7 +9395,7 @@
           <p:cNvPr id="155" name="">
             <a:extLst xmlns:a="http://schemas.openxmlformats.org/drawingml/2006/main">
               <a:ext uri="{FF2B5EF4-FFF2-40B4-BE49-F238E27FC236}">
-                <a16:creationId xmlns:a16="http://schemas.microsoft.com/office/drawing/2014/main" id="{27C2F9E4-B4A2-4650-A57D-CB3C6BCA43AD}"/>
+                <a16:creationId xmlns:a16="http://schemas.microsoft.com/office/drawing/2014/main" id="{181F0172-FBEA-4B96-8304-28CC667B3339}"/>
               </a:ext>
             </a:extLst>
           </p:cNvPr>
@@ -9475,7 +9475,7 @@
           <p:cNvPr id="156" name="">
             <a:extLst xmlns:a="http://schemas.openxmlformats.org/drawingml/2006/main">
               <a:ext uri="{FF2B5EF4-FFF2-40B4-BE49-F238E27FC236}">
-                <a16:creationId xmlns:a16="http://schemas.microsoft.com/office/drawing/2014/main" id="{CE9BD8D4-8B67-41A1-86A7-5DEAB2348F5B}"/>
+                <a16:creationId xmlns:a16="http://schemas.microsoft.com/office/drawing/2014/main" id="{028527F5-334E-440E-909B-CA8F3A40AE9F}"/>
               </a:ext>
             </a:extLst>
           </p:cNvPr>
@@ -9532,7 +9532,7 @@
           <p:cNvPr id="157" name="">
             <a:extLst xmlns:a="http://schemas.openxmlformats.org/drawingml/2006/main">
               <a:ext uri="{FF2B5EF4-FFF2-40B4-BE49-F238E27FC236}">
-                <a16:creationId xmlns:a16="http://schemas.microsoft.com/office/drawing/2014/main" id="{0A431E20-AE98-49DA-B17C-CA94E0EA22CE}"/>
+                <a16:creationId xmlns:a16="http://schemas.microsoft.com/office/drawing/2014/main" id="{4E337374-4EB9-44E5-A7CB-88B6737ABD2C}"/>
               </a:ext>
             </a:extLst>
           </p:cNvPr>
@@ -9610,7 +9610,7 @@
     </p:spTree>
     <p:extLst>
       <p:ext uri="{BB962C8B-B14F-4D97-AF65-F5344CB8AC3E}">
-        <p14:creationId xmlns:p14="http://schemas.microsoft.com/office/powerpoint/2010/main" val="2078228785"/>
+        <p14:creationId xmlns:p14="http://schemas.microsoft.com/office/powerpoint/2010/main" val="23912900"/>
       </p:ext>
     </p:extLst>
   </p:cSld>
@@ -9638,7 +9638,7 @@
           <p:nvPr/>
         </p:nvPicPr>
         <p:blipFill rotWithShape="1">
-          <a:blip xmlns:r="http://schemas.openxmlformats.org/officeDocument/2006/relationships" xmlns:a="http://schemas.openxmlformats.org/drawingml/2006/main" r:embed="Rd8ec881b27114591">
+          <a:blip xmlns:r="http://schemas.openxmlformats.org/officeDocument/2006/relationships" xmlns:a="http://schemas.openxmlformats.org/drawingml/2006/main" r:embed="Rf08e7c7b3c914cc5">
             <a:alphaModFix/>
           </a:blip>
           <a:srcRect xmlns:a="http://schemas.openxmlformats.org/drawingml/2006/main" l="0" t="0" r="0" b="98001"/>
@@ -9666,7 +9666,7 @@
           <p:nvPr/>
         </p:nvPicPr>
         <p:blipFill>
-          <a:blip xmlns:r="http://schemas.openxmlformats.org/officeDocument/2006/relationships" xmlns:a="http://schemas.openxmlformats.org/drawingml/2006/main" r:embed="Rd1c6bc069d7e4c08">
+          <a:blip xmlns:r="http://schemas.openxmlformats.org/officeDocument/2006/relationships" xmlns:a="http://schemas.openxmlformats.org/drawingml/2006/main" r:embed="Rd844edd81a2a4b42">
             <a:alphaModFix/>
           </a:blip>
           <a:stretch xmlns:a="http://schemas.openxmlformats.org/drawingml/2006/main">
@@ -9691,7 +9691,7 @@
           <p:cNvPr id="150" name="Google Shape;150;p25">
             <a:extLst xmlns:a="http://schemas.openxmlformats.org/drawingml/2006/main">
               <a:ext uri="{FF2B5EF4-FFF2-40B4-BE49-F238E27FC236}">
-                <a16:creationId xmlns:a16="http://schemas.microsoft.com/office/drawing/2014/main" id="{B55D5CF6-8AD4-4846-B6A9-8A1D6D8C6FFF}"/>
+                <a16:creationId xmlns:a16="http://schemas.microsoft.com/office/drawing/2014/main" id="{0589BCE8-962A-4A59-8E2F-F66BA4B441D9}"/>
               </a:ext>
             </a:extLst>
           </p:cNvPr>
@@ -9742,7 +9742,7 @@
           <p:cNvPr id="151" name="Google Shape;151;p25">
             <a:extLst xmlns:a="http://schemas.openxmlformats.org/drawingml/2006/main">
               <a:ext uri="{FF2B5EF4-FFF2-40B4-BE49-F238E27FC236}">
-                <a16:creationId xmlns:a16="http://schemas.microsoft.com/office/drawing/2014/main" id="{A19D63E1-0B84-4B5C-A826-DF67B93011E9}"/>
+                <a16:creationId xmlns:a16="http://schemas.microsoft.com/office/drawing/2014/main" id="{1EE4D743-E4A2-4A0A-BD98-4FE2A012F9CC}"/>
               </a:ext>
             </a:extLst>
           </p:cNvPr>
@@ -9800,7 +9800,7 @@
           <p:cNvPr id="154" name="">
             <a:extLst xmlns:a="http://schemas.openxmlformats.org/drawingml/2006/main">
               <a:ext uri="{FF2B5EF4-FFF2-40B4-BE49-F238E27FC236}">
-                <a16:creationId xmlns:a16="http://schemas.microsoft.com/office/drawing/2014/main" id="{7CD20BF9-91A7-4E4C-9C98-12A68802B47F}"/>
+                <a16:creationId xmlns:a16="http://schemas.microsoft.com/office/drawing/2014/main" id="{BF8A59F0-9F13-4D9D-A91B-944764492055}"/>
               </a:ext>
             </a:extLst>
           </p:cNvPr>
@@ -9857,7 +9857,7 @@
           <p:cNvPr id="155" name="">
             <a:extLst xmlns:a="http://schemas.openxmlformats.org/drawingml/2006/main">
               <a:ext uri="{FF2B5EF4-FFF2-40B4-BE49-F238E27FC236}">
-                <a16:creationId xmlns:a16="http://schemas.microsoft.com/office/drawing/2014/main" id="{97F0868A-396E-43E1-AAB2-EE4F7FC24B85}"/>
+                <a16:creationId xmlns:a16="http://schemas.microsoft.com/office/drawing/2014/main" id="{34980469-B794-40B3-BF5C-2F728594475D}"/>
               </a:ext>
             </a:extLst>
           </p:cNvPr>
@@ -9914,7 +9914,7 @@
           <p:cNvPr id="156" name="">
             <a:extLst xmlns:a="http://schemas.openxmlformats.org/drawingml/2006/main">
               <a:ext uri="{FF2B5EF4-FFF2-40B4-BE49-F238E27FC236}">
-                <a16:creationId xmlns:a16="http://schemas.microsoft.com/office/drawing/2014/main" id="{2541D72D-C6F4-44D0-9624-3FA50B417D24}"/>
+                <a16:creationId xmlns:a16="http://schemas.microsoft.com/office/drawing/2014/main" id="{7A020715-259F-4730-AC7B-BA43848E52B8}"/>
               </a:ext>
             </a:extLst>
           </p:cNvPr>
@@ -9971,7 +9971,7 @@
           <p:cNvPr id="157" name="">
             <a:extLst xmlns:a="http://schemas.openxmlformats.org/drawingml/2006/main">
               <a:ext uri="{FF2B5EF4-FFF2-40B4-BE49-F238E27FC236}">
-                <a16:creationId xmlns:a16="http://schemas.microsoft.com/office/drawing/2014/main" id="{13CF4DFD-B7B6-44E9-B28B-B1D76D6A3E48}"/>
+                <a16:creationId xmlns:a16="http://schemas.microsoft.com/office/drawing/2014/main" id="{BF7154BB-9782-41D0-AF47-E677972601FF}"/>
               </a:ext>
             </a:extLst>
           </p:cNvPr>
@@ -10051,7 +10051,7 @@
           <p:cNvPr id="158" name="">
             <a:extLst xmlns:a="http://schemas.openxmlformats.org/drawingml/2006/main">
               <a:ext uri="{FF2B5EF4-FFF2-40B4-BE49-F238E27FC236}">
-                <a16:creationId xmlns:a16="http://schemas.microsoft.com/office/drawing/2014/main" id="{3914AF6E-73B5-4941-8072-F8E778F5857A}"/>
+                <a16:creationId xmlns:a16="http://schemas.microsoft.com/office/drawing/2014/main" id="{F8CD0810-5E85-4A0A-9895-254BD1980AA3}"/>
               </a:ext>
             </a:extLst>
           </p:cNvPr>
@@ -10108,7 +10108,7 @@
           <p:cNvPr id="159" name="">
             <a:extLst xmlns:a="http://schemas.openxmlformats.org/drawingml/2006/main">
               <a:ext uri="{FF2B5EF4-FFF2-40B4-BE49-F238E27FC236}">
-                <a16:creationId xmlns:a16="http://schemas.microsoft.com/office/drawing/2014/main" id="{3B64335D-FF6C-4841-83EB-21FD41D0D551}"/>
+                <a16:creationId xmlns:a16="http://schemas.microsoft.com/office/drawing/2014/main" id="{5DEF2C3E-311D-4698-9249-BDB0BC9532BC}"/>
               </a:ext>
             </a:extLst>
           </p:cNvPr>
@@ -10188,7 +10188,7 @@
           <p:cNvPr id="160" name="">
             <a:extLst xmlns:a="http://schemas.openxmlformats.org/drawingml/2006/main">
               <a:ext uri="{FF2B5EF4-FFF2-40B4-BE49-F238E27FC236}">
-                <a16:creationId xmlns:a16="http://schemas.microsoft.com/office/drawing/2014/main" id="{7CE0EBFE-0966-413D-9594-18E377953385}"/>
+                <a16:creationId xmlns:a16="http://schemas.microsoft.com/office/drawing/2014/main" id="{113842FD-BC1D-48A4-A7F5-386B62602280}"/>
               </a:ext>
             </a:extLst>
           </p:cNvPr>
@@ -10245,7 +10245,7 @@
           <p:cNvPr id="161" name="">
             <a:extLst xmlns:a="http://schemas.openxmlformats.org/drawingml/2006/main">
               <a:ext uri="{FF2B5EF4-FFF2-40B4-BE49-F238E27FC236}">
-                <a16:creationId xmlns:a16="http://schemas.microsoft.com/office/drawing/2014/main" id="{0C66DB32-38F3-4AF2-B7DB-31F92655A172}"/>
+                <a16:creationId xmlns:a16="http://schemas.microsoft.com/office/drawing/2014/main" id="{3529C3AB-3725-4C5D-9A82-2A3E285BC35D}"/>
               </a:ext>
             </a:extLst>
           </p:cNvPr>
@@ -10323,7 +10323,7 @@
     </p:spTree>
     <p:extLst>
       <p:ext uri="{BB962C8B-B14F-4D97-AF65-F5344CB8AC3E}">
-        <p14:creationId xmlns:p14="http://schemas.microsoft.com/office/powerpoint/2010/main" val="1202776973"/>
+        <p14:creationId xmlns:p14="http://schemas.microsoft.com/office/powerpoint/2010/main" val="539658165"/>
       </p:ext>
     </p:extLst>
   </p:cSld>
@@ -10351,7 +10351,7 @@
           <p:nvPr/>
         </p:nvPicPr>
         <p:blipFill rotWithShape="1">
-          <a:blip xmlns:r="http://schemas.openxmlformats.org/officeDocument/2006/relationships" xmlns:a="http://schemas.openxmlformats.org/drawingml/2006/main" r:embed="Rcb3f8b3f44514785">
+          <a:blip xmlns:r="http://schemas.openxmlformats.org/officeDocument/2006/relationships" xmlns:a="http://schemas.openxmlformats.org/drawingml/2006/main" r:embed="R82de5509c1924010">
             <a:alphaModFix/>
           </a:blip>
           <a:srcRect xmlns:a="http://schemas.openxmlformats.org/drawingml/2006/main" l="0" t="0" r="0" b="98001"/>
@@ -10379,7 +10379,7 @@
           <p:nvPr/>
         </p:nvPicPr>
         <p:blipFill>
-          <a:blip xmlns:r="http://schemas.openxmlformats.org/officeDocument/2006/relationships" xmlns:a="http://schemas.openxmlformats.org/drawingml/2006/main" r:embed="R787bbea9cc9f4062">
+          <a:blip xmlns:r="http://schemas.openxmlformats.org/officeDocument/2006/relationships" xmlns:a="http://schemas.openxmlformats.org/drawingml/2006/main" r:embed="R1d828aa8433a406e">
             <a:alphaModFix/>
           </a:blip>
           <a:stretch xmlns:a="http://schemas.openxmlformats.org/drawingml/2006/main">
@@ -10404,7 +10404,7 @@
           <p:cNvPr id="158" name="Google Shape;158;p26">
             <a:extLst xmlns:a="http://schemas.openxmlformats.org/drawingml/2006/main">
               <a:ext uri="{FF2B5EF4-FFF2-40B4-BE49-F238E27FC236}">
-                <a16:creationId xmlns:a16="http://schemas.microsoft.com/office/drawing/2014/main" id="{37CB4E84-5CC3-41D1-9E97-D9A83B45D6C3}"/>
+                <a16:creationId xmlns:a16="http://schemas.microsoft.com/office/drawing/2014/main" id="{49C59653-D308-4885-8643-69DCC53ADD80}"/>
               </a:ext>
             </a:extLst>
           </p:cNvPr>
@@ -10455,7 +10455,7 @@
           <p:cNvPr id="159" name="Google Shape;159;p26">
             <a:extLst xmlns:a="http://schemas.openxmlformats.org/drawingml/2006/main">
               <a:ext uri="{FF2B5EF4-FFF2-40B4-BE49-F238E27FC236}">
-                <a16:creationId xmlns:a16="http://schemas.microsoft.com/office/drawing/2014/main" id="{A97974A5-3373-4B61-A619-312C46949103}"/>
+                <a16:creationId xmlns:a16="http://schemas.microsoft.com/office/drawing/2014/main" id="{0788FBE2-21BE-44A6-A935-50065C2C303B}"/>
               </a:ext>
             </a:extLst>
           </p:cNvPr>
@@ -10513,7 +10513,7 @@
           <p:cNvPr id="162" name="">
             <a:extLst xmlns:a="http://schemas.openxmlformats.org/drawingml/2006/main">
               <a:ext uri="{FF2B5EF4-FFF2-40B4-BE49-F238E27FC236}">
-                <a16:creationId xmlns:a16="http://schemas.microsoft.com/office/drawing/2014/main" id="{1A3486C3-53B2-4BE2-9F0C-73D6C4CA4C8E}"/>
+                <a16:creationId xmlns:a16="http://schemas.microsoft.com/office/drawing/2014/main" id="{5EA1535D-E9A3-4201-A450-70FAA6E4EA7E}"/>
               </a:ext>
             </a:extLst>
           </p:cNvPr>
@@ -10570,7 +10570,7 @@
           <p:cNvPr id="163" name="">
             <a:extLst xmlns:a="http://schemas.openxmlformats.org/drawingml/2006/main">
               <a:ext uri="{FF2B5EF4-FFF2-40B4-BE49-F238E27FC236}">
-                <a16:creationId xmlns:a16="http://schemas.microsoft.com/office/drawing/2014/main" id="{06A8BB68-95CC-45EF-ADF8-34734DB54DD4}"/>
+                <a16:creationId xmlns:a16="http://schemas.microsoft.com/office/drawing/2014/main" id="{E60829E2-9585-466A-90DD-1035CD7881A5}"/>
               </a:ext>
             </a:extLst>
           </p:cNvPr>
@@ -10627,7 +10627,7 @@
           <p:cNvPr id="164" name="">
             <a:extLst xmlns:a="http://schemas.openxmlformats.org/drawingml/2006/main">
               <a:ext uri="{FF2B5EF4-FFF2-40B4-BE49-F238E27FC236}">
-                <a16:creationId xmlns:a16="http://schemas.microsoft.com/office/drawing/2014/main" id="{FD899940-2C0D-4EF5-9108-92F161B33A6B}"/>
+                <a16:creationId xmlns:a16="http://schemas.microsoft.com/office/drawing/2014/main" id="{B90BABF8-0A7C-4227-8E37-AD113D897282}"/>
               </a:ext>
             </a:extLst>
           </p:cNvPr>
@@ -10684,7 +10684,7 @@
           <p:cNvPr id="165" name="">
             <a:extLst xmlns:a="http://schemas.openxmlformats.org/drawingml/2006/main">
               <a:ext uri="{FF2B5EF4-FFF2-40B4-BE49-F238E27FC236}">
-                <a16:creationId xmlns:a16="http://schemas.microsoft.com/office/drawing/2014/main" id="{5A1D7CDE-0C94-484E-B39E-07899D323FE3}"/>
+                <a16:creationId xmlns:a16="http://schemas.microsoft.com/office/drawing/2014/main" id="{FD9B782B-C133-4EA8-9D8D-1B02041AB5AB}"/>
               </a:ext>
             </a:extLst>
           </p:cNvPr>
@@ -10730,7 +10730,7 @@
                 <a:latin typeface="Google Sans Flex"/>
                 <a:ea typeface="Google Sans Flex"/>
                 <a:cs typeface="Google Sans Flex"/>
-                <a:hlinkClick xmlns:r="http://schemas.openxmlformats.org/officeDocument/2006/relationships" r:id="Rcb26b08011474d00"/>
+                <a:hlinkClick xmlns:r="http://schemas.openxmlformats.org/officeDocument/2006/relationships" r:id="R5c5e6cf7e2a24a1b"/>
               </a:rPr>
               <a:t>github.com/TheAverageGatsby13/project-irene</a:t>
             </a:r>
@@ -10742,7 +10742,7 @@
           <p:cNvPr id="166" name="">
             <a:extLst xmlns:a="http://schemas.openxmlformats.org/drawingml/2006/main">
               <a:ext uri="{FF2B5EF4-FFF2-40B4-BE49-F238E27FC236}">
-                <a16:creationId xmlns:a16="http://schemas.microsoft.com/office/drawing/2014/main" id="{3F52A968-A331-4416-8DBD-AB2A5A1070E3}"/>
+                <a16:creationId xmlns:a16="http://schemas.microsoft.com/office/drawing/2014/main" id="{8F117AAC-E885-46B5-ACB2-69DF2F5F915C}"/>
               </a:ext>
             </a:extLst>
           </p:cNvPr>
@@ -10799,7 +10799,7 @@
           <p:cNvPr id="167" name="">
             <a:extLst xmlns:a="http://schemas.openxmlformats.org/drawingml/2006/main">
               <a:ext uri="{FF2B5EF4-FFF2-40B4-BE49-F238E27FC236}">
-                <a16:creationId xmlns:a16="http://schemas.microsoft.com/office/drawing/2014/main" id="{ACC81ADD-F8E4-4550-B50F-8469BE2C992E}"/>
+                <a16:creationId xmlns:a16="http://schemas.microsoft.com/office/drawing/2014/main" id="{15797DBC-2E61-4C00-9F64-FDD2E76F6BB6}"/>
               </a:ext>
             </a:extLst>
           </p:cNvPr>
@@ -10846,7 +10846,7 @@
                 <a:ea typeface="Google Sans Flex"/>
                 <a:cs typeface="Google Sans Flex"/>
               </a:rPr>
-              <a:t>2:30 English demo prepared · public upload link pending</a:t>
+              <a:t>Indian English demo prepared · public upload link pending</a:t>
             </a:r>
           </a:p>
         </p:txBody>
@@ -10856,7 +10856,7 @@
           <p:cNvPr id="168" name="">
             <a:extLst xmlns:a="http://schemas.openxmlformats.org/drawingml/2006/main">
               <a:ext uri="{FF2B5EF4-FFF2-40B4-BE49-F238E27FC236}">
-                <a16:creationId xmlns:a16="http://schemas.microsoft.com/office/drawing/2014/main" id="{E4FFC966-8864-4625-8545-FA361E12E26A}"/>
+                <a16:creationId xmlns:a16="http://schemas.microsoft.com/office/drawing/2014/main" id="{857B263D-310E-4C55-88CE-2212416DA6B7}"/>
               </a:ext>
             </a:extLst>
           </p:cNvPr>
@@ -10913,7 +10913,7 @@
           <p:cNvPr id="169" name="">
             <a:extLst xmlns:a="http://schemas.openxmlformats.org/drawingml/2006/main">
               <a:ext uri="{FF2B5EF4-FFF2-40B4-BE49-F238E27FC236}">
-                <a16:creationId xmlns:a16="http://schemas.microsoft.com/office/drawing/2014/main" id="{996DE277-68B0-4B3D-91BE-6A34917D8315}"/>
+                <a16:creationId xmlns:a16="http://schemas.microsoft.com/office/drawing/2014/main" id="{3594865C-30BD-4BB9-9442-87AB0AC62F71}"/>
               </a:ext>
             </a:extLst>
           </p:cNvPr>
@@ -10959,7 +10959,7 @@
                 <a:latin typeface="Google Sans Flex"/>
                 <a:ea typeface="Google Sans Flex"/>
                 <a:cs typeface="Google Sans Flex"/>
-                <a:hlinkClick xmlns:r="http://schemas.openxmlformats.org/officeDocument/2006/relationships" r:id="R8083dd3bd8e04740"/>
+                <a:hlinkClick xmlns:r="http://schemas.openxmlformats.org/officeDocument/2006/relationships" r:id="R78a9432adea94257"/>
               </a:rPr>
               <a:t>project-irene-fd39e.web.app</a:t>
             </a:r>
@@ -10969,7 +10969,7 @@
     </p:spTree>
     <p:extLst>
       <p:ext uri="{BB962C8B-B14F-4D97-AF65-F5344CB8AC3E}">
-        <p14:creationId xmlns:p14="http://schemas.microsoft.com/office/powerpoint/2010/main" val="1486847945"/>
+        <p14:creationId xmlns:p14="http://schemas.microsoft.com/office/powerpoint/2010/main" val="907229998"/>
       </p:ext>
     </p:extLst>
   </p:cSld>
@@ -10997,7 +10997,7 @@
           <p:nvPr/>
         </p:nvPicPr>
         <p:blipFill rotWithShape="1">
-          <a:blip xmlns:r="http://schemas.openxmlformats.org/officeDocument/2006/relationships" xmlns:a="http://schemas.openxmlformats.org/drawingml/2006/main" r:embed="R8f82f2a76ec84253">
+          <a:blip xmlns:r="http://schemas.openxmlformats.org/officeDocument/2006/relationships" xmlns:a="http://schemas.openxmlformats.org/drawingml/2006/main" r:embed="Rf17df55246a243ed">
             <a:alphaModFix/>
           </a:blip>
           <a:srcRect xmlns:a="http://schemas.openxmlformats.org/drawingml/2006/main" l="0" t="0" r="0" b="98001"/>
@@ -11025,7 +11025,7 @@
           <p:nvPr/>
         </p:nvPicPr>
         <p:blipFill>
-          <a:blip xmlns:r="http://schemas.openxmlformats.org/officeDocument/2006/relationships" xmlns:a="http://schemas.openxmlformats.org/drawingml/2006/main" r:embed="Rd6b7d0aa59a04ddc">
+          <a:blip xmlns:r="http://schemas.openxmlformats.org/officeDocument/2006/relationships" xmlns:a="http://schemas.openxmlformats.org/drawingml/2006/main" r:embed="R953a9aeb45e44872">
             <a:alphaModFix/>
           </a:blip>
           <a:stretch xmlns:a="http://schemas.openxmlformats.org/drawingml/2006/main">
@@ -11050,7 +11050,7 @@
           <p:cNvPr id="166" name="Google Shape;166;p27">
             <a:extLst xmlns:a="http://schemas.openxmlformats.org/drawingml/2006/main">
               <a:ext uri="{FF2B5EF4-FFF2-40B4-BE49-F238E27FC236}">
-                <a16:creationId xmlns:a16="http://schemas.microsoft.com/office/drawing/2014/main" id="{8C636203-09A0-4E1F-949E-64D88AC5D340}"/>
+                <a16:creationId xmlns:a16="http://schemas.microsoft.com/office/drawing/2014/main" id="{2CB8DE78-985E-47FC-815E-C8B41EF2179B}"/>
               </a:ext>
             </a:extLst>
           </p:cNvPr>
@@ -11101,7 +11101,7 @@
           <p:cNvPr id="169" name="">
             <a:extLst xmlns:a="http://schemas.openxmlformats.org/drawingml/2006/main">
               <a:ext uri="{FF2B5EF4-FFF2-40B4-BE49-F238E27FC236}">
-                <a16:creationId xmlns:a16="http://schemas.microsoft.com/office/drawing/2014/main" id="{C905ECFA-6638-4783-A7B4-5D950840B142}"/>
+                <a16:creationId xmlns:a16="http://schemas.microsoft.com/office/drawing/2014/main" id="{F3333427-8BA2-46F3-87C3-57CAD7A6BF31}"/>
               </a:ext>
             </a:extLst>
           </p:cNvPr>
@@ -11158,7 +11158,7 @@
           <p:cNvPr id="170" name="">
             <a:extLst xmlns:a="http://schemas.openxmlformats.org/drawingml/2006/main">
               <a:ext uri="{FF2B5EF4-FFF2-40B4-BE49-F238E27FC236}">
-                <a16:creationId xmlns:a16="http://schemas.microsoft.com/office/drawing/2014/main" id="{59CB0851-431C-4460-897F-011C67BE2225}"/>
+                <a16:creationId xmlns:a16="http://schemas.microsoft.com/office/drawing/2014/main" id="{86F48CD7-EE74-4EA6-AB26-01DDDD35D692}"/>
               </a:ext>
             </a:extLst>
           </p:cNvPr>
@@ -11215,7 +11215,7 @@
           <p:cNvPr id="171" name="">
             <a:extLst xmlns:a="http://schemas.openxmlformats.org/drawingml/2006/main">
               <a:ext uri="{FF2B5EF4-FFF2-40B4-BE49-F238E27FC236}">
-                <a16:creationId xmlns:a16="http://schemas.microsoft.com/office/drawing/2014/main" id="{E95EF541-79F0-4CFE-9C39-2648ACBCEFB2}"/>
+                <a16:creationId xmlns:a16="http://schemas.microsoft.com/office/drawing/2014/main" id="{97E13543-31C6-4731-9050-8E960FD8DB14}"/>
               </a:ext>
             </a:extLst>
           </p:cNvPr>
@@ -11272,7 +11272,7 @@
           <p:cNvPr id="172" name="">
             <a:extLst xmlns:a="http://schemas.openxmlformats.org/drawingml/2006/main">
               <a:ext uri="{FF2B5EF4-FFF2-40B4-BE49-F238E27FC236}">
-                <a16:creationId xmlns:a16="http://schemas.microsoft.com/office/drawing/2014/main" id="{78C5CE51-A21D-424B-BA3A-85CEC09410FA}"/>
+                <a16:creationId xmlns:a16="http://schemas.microsoft.com/office/drawing/2014/main" id="{AADC9253-E845-4DBD-B698-EED822484611}"/>
               </a:ext>
             </a:extLst>
           </p:cNvPr>
@@ -11352,7 +11352,7 @@
           <p:cNvPr id="173" name="">
             <a:extLst xmlns:a="http://schemas.openxmlformats.org/drawingml/2006/main">
               <a:ext uri="{FF2B5EF4-FFF2-40B4-BE49-F238E27FC236}">
-                <a16:creationId xmlns:a16="http://schemas.microsoft.com/office/drawing/2014/main" id="{4D99C0FB-5B06-459E-96BE-2B0DA2704A79}"/>
+                <a16:creationId xmlns:a16="http://schemas.microsoft.com/office/drawing/2014/main" id="{87E84E20-6666-45A0-9DD6-2939A0D859B4}"/>
               </a:ext>
             </a:extLst>
           </p:cNvPr>
@@ -11455,7 +11455,7 @@
           <p:cNvPr id="174" name="">
             <a:extLst xmlns:a="http://schemas.openxmlformats.org/drawingml/2006/main">
               <a:ext uri="{FF2B5EF4-FFF2-40B4-BE49-F238E27FC236}">
-                <a16:creationId xmlns:a16="http://schemas.microsoft.com/office/drawing/2014/main" id="{F6E062B8-AC77-45F3-BBD4-1DFBE62B6C3E}"/>
+                <a16:creationId xmlns:a16="http://schemas.microsoft.com/office/drawing/2014/main" id="{6A8FF37E-ABEF-4F33-A352-337B1019810B}"/>
               </a:ext>
             </a:extLst>
           </p:cNvPr>
@@ -11533,7 +11533,7 @@
     </p:spTree>
     <p:extLst>
       <p:ext uri="{BB962C8B-B14F-4D97-AF65-F5344CB8AC3E}">
-        <p14:creationId xmlns:p14="http://schemas.microsoft.com/office/powerpoint/2010/main" val="1749244910"/>
+        <p14:creationId xmlns:p14="http://schemas.microsoft.com/office/powerpoint/2010/main" val="728019578"/>
       </p:ext>
     </p:extLst>
   </p:cSld>
@@ -11561,7 +11561,7 @@
           <p:nvPr/>
         </p:nvPicPr>
         <p:blipFill rotWithShape="1">
-          <a:blip xmlns:r="http://schemas.openxmlformats.org/officeDocument/2006/relationships" xmlns:a="http://schemas.openxmlformats.org/drawingml/2006/main" r:embed="Rae41d00096a64177">
+          <a:blip xmlns:r="http://schemas.openxmlformats.org/officeDocument/2006/relationships" xmlns:a="http://schemas.openxmlformats.org/drawingml/2006/main" r:embed="R3e12989d5ecd4cb1">
             <a:alphaModFix/>
           </a:blip>
           <a:srcRect xmlns:a="http://schemas.openxmlformats.org/drawingml/2006/main" l="0" t="0" r="0" b="98001"/>
@@ -11589,7 +11589,7 @@
           <p:nvPr/>
         </p:nvPicPr>
         <p:blipFill>
-          <a:blip xmlns:r="http://schemas.openxmlformats.org/officeDocument/2006/relationships" xmlns:a="http://schemas.openxmlformats.org/drawingml/2006/main" r:embed="Rc4ba03c7fbd74b45">
+          <a:blip xmlns:r="http://schemas.openxmlformats.org/officeDocument/2006/relationships" xmlns:a="http://schemas.openxmlformats.org/drawingml/2006/main" r:embed="R4e91b71b6b5d45bc">
             <a:alphaModFix/>
           </a:blip>
           <a:stretch xmlns:a="http://schemas.openxmlformats.org/drawingml/2006/main">
@@ -11612,7 +11612,7 @@
     </p:spTree>
     <p:extLst>
       <p:ext uri="{BB962C8B-B14F-4D97-AF65-F5344CB8AC3E}">
-        <p14:creationId xmlns:p14="http://schemas.microsoft.com/office/powerpoint/2010/main" val="862463832"/>
+        <p14:creationId xmlns:p14="http://schemas.microsoft.com/office/powerpoint/2010/main" val="1871000649"/>
       </p:ext>
     </p:extLst>
   </p:cSld>
@@ -11640,7 +11640,7 @@
           <p:nvPr/>
         </p:nvPicPr>
         <p:blipFill rotWithShape="1">
-          <a:blip xmlns:r="http://schemas.openxmlformats.org/officeDocument/2006/relationships" xmlns:a="http://schemas.openxmlformats.org/drawingml/2006/main" r:embed="R663579db234c4213">
+          <a:blip xmlns:r="http://schemas.openxmlformats.org/officeDocument/2006/relationships" xmlns:a="http://schemas.openxmlformats.org/drawingml/2006/main" r:embed="R11f4a562c4004cfb">
             <a:alphaModFix/>
           </a:blip>
           <a:srcRect xmlns:a="http://schemas.openxmlformats.org/drawingml/2006/main" l="0" t="0" r="0" b="98001"/>
@@ -11664,7 +11664,7 @@
           <p:cNvPr id="62" name="Google Shape;62;p14">
             <a:extLst xmlns:a="http://schemas.openxmlformats.org/drawingml/2006/main">
               <a:ext uri="{FF2B5EF4-FFF2-40B4-BE49-F238E27FC236}">
-                <a16:creationId xmlns:a16="http://schemas.microsoft.com/office/drawing/2014/main" id="{33C0E38D-EFFA-412F-AA2C-C12587CF87C6}"/>
+                <a16:creationId xmlns:a16="http://schemas.microsoft.com/office/drawing/2014/main" id="{D157B527-DD6B-47E2-AA6E-6FAD386FD201}"/>
               </a:ext>
             </a:extLst>
           </p:cNvPr>
@@ -11715,7 +11715,7 @@
           <p:cNvPr id="63" name="Google Shape;63;p14">
             <a:extLst xmlns:a="http://schemas.openxmlformats.org/drawingml/2006/main">
               <a:ext uri="{FF2B5EF4-FFF2-40B4-BE49-F238E27FC236}">
-                <a16:creationId xmlns:a16="http://schemas.microsoft.com/office/drawing/2014/main" id="{C59BDFF5-39E6-4F92-A6AE-E18239A7859B}"/>
+                <a16:creationId xmlns:a16="http://schemas.microsoft.com/office/drawing/2014/main" id="{B0FC6282-BFF4-4F8A-9C08-E95B534EC6A1}"/>
               </a:ext>
             </a:extLst>
           </p:cNvPr>
@@ -11847,7 +11847,7 @@
           <p:nvPr/>
         </p:nvPicPr>
         <p:blipFill>
-          <a:blip xmlns:r="http://schemas.openxmlformats.org/officeDocument/2006/relationships" xmlns:a="http://schemas.openxmlformats.org/drawingml/2006/main" r:embed="R9760340e0a814363">
+          <a:blip xmlns:r="http://schemas.openxmlformats.org/officeDocument/2006/relationships" xmlns:a="http://schemas.openxmlformats.org/drawingml/2006/main" r:embed="Rb1a9e66847c94f4e">
             <a:alphaModFix/>
           </a:blip>
           <a:stretch xmlns:a="http://schemas.openxmlformats.org/drawingml/2006/main">
@@ -11877,7 +11877,7 @@
     </p:spTree>
     <p:extLst>
       <p:ext uri="{BB962C8B-B14F-4D97-AF65-F5344CB8AC3E}">
-        <p14:creationId xmlns:p14="http://schemas.microsoft.com/office/powerpoint/2010/main" val="479927935"/>
+        <p14:creationId xmlns:p14="http://schemas.microsoft.com/office/powerpoint/2010/main" val="1727501649"/>
       </p:ext>
     </p:extLst>
   </p:cSld>
@@ -11905,7 +11905,7 @@
           <p:nvPr/>
         </p:nvPicPr>
         <p:blipFill>
-          <a:blip xmlns:r="http://schemas.openxmlformats.org/officeDocument/2006/relationships" xmlns:a="http://schemas.openxmlformats.org/drawingml/2006/main" r:embed="Rf8b3d200ec6a42a3">
+          <a:blip xmlns:r="http://schemas.openxmlformats.org/officeDocument/2006/relationships" xmlns:a="http://schemas.openxmlformats.org/drawingml/2006/main" r:embed="R3aa18ca2fb1e4ff1">
             <a:alphaModFix/>
           </a:blip>
           <a:stretch xmlns:a="http://schemas.openxmlformats.org/drawingml/2006/main">
@@ -11930,7 +11930,7 @@
           <p:cNvPr id="70" name="Google Shape;70;p15">
             <a:extLst xmlns:a="http://schemas.openxmlformats.org/drawingml/2006/main">
               <a:ext uri="{FF2B5EF4-FFF2-40B4-BE49-F238E27FC236}">
-                <a16:creationId xmlns:a16="http://schemas.microsoft.com/office/drawing/2014/main" id="{87CFD46F-9F4F-40DD-A164-0AB1536407E0}"/>
+                <a16:creationId xmlns:a16="http://schemas.microsoft.com/office/drawing/2014/main" id="{D2DCD4EC-20D8-4169-BD01-AB672536E7F8}"/>
               </a:ext>
             </a:extLst>
           </p:cNvPr>
@@ -11981,7 +11981,7 @@
           <p:cNvPr id="71" name="Google Shape;71;p15">
             <a:extLst xmlns:a="http://schemas.openxmlformats.org/drawingml/2006/main">
               <a:ext uri="{FF2B5EF4-FFF2-40B4-BE49-F238E27FC236}">
-                <a16:creationId xmlns:a16="http://schemas.microsoft.com/office/drawing/2014/main" id="{6A07A33C-CE8B-4F2B-A302-BF35B48D8536}"/>
+                <a16:creationId xmlns:a16="http://schemas.microsoft.com/office/drawing/2014/main" id="{80D6FC02-9BFB-49AE-B10B-EDA579692FF7}"/>
               </a:ext>
             </a:extLst>
           </p:cNvPr>
@@ -12039,7 +12039,7 @@
           <p:cNvPr id="73" name="">
             <a:extLst xmlns:a="http://schemas.openxmlformats.org/drawingml/2006/main">
               <a:ext uri="{FF2B5EF4-FFF2-40B4-BE49-F238E27FC236}">
-                <a16:creationId xmlns:a16="http://schemas.microsoft.com/office/drawing/2014/main" id="{C823A350-150E-4903-9EC2-AFFFB6DAA556}"/>
+                <a16:creationId xmlns:a16="http://schemas.microsoft.com/office/drawing/2014/main" id="{42E399E6-8C5A-447A-B61F-2AB040590889}"/>
               </a:ext>
             </a:extLst>
           </p:cNvPr>
@@ -12096,7 +12096,7 @@
           <p:cNvPr id="74" name="">
             <a:extLst xmlns:a="http://schemas.openxmlformats.org/drawingml/2006/main">
               <a:ext uri="{FF2B5EF4-FFF2-40B4-BE49-F238E27FC236}">
-                <a16:creationId xmlns:a16="http://schemas.microsoft.com/office/drawing/2014/main" id="{8173B509-385D-41E6-A02F-2426FC3A4EC4}"/>
+                <a16:creationId xmlns:a16="http://schemas.microsoft.com/office/drawing/2014/main" id="{0990BA18-49AD-4908-BCBC-CE4FAEC6F6B6}"/>
               </a:ext>
             </a:extLst>
           </p:cNvPr>
@@ -12153,7 +12153,7 @@
           <p:cNvPr id="75" name="">
             <a:extLst xmlns:a="http://schemas.openxmlformats.org/drawingml/2006/main">
               <a:ext uri="{FF2B5EF4-FFF2-40B4-BE49-F238E27FC236}">
-                <a16:creationId xmlns:a16="http://schemas.microsoft.com/office/drawing/2014/main" id="{D27487EA-043B-4FE4-A0A5-6209E694BB4F}"/>
+                <a16:creationId xmlns:a16="http://schemas.microsoft.com/office/drawing/2014/main" id="{7E4A2C4F-BA84-40CC-B7FB-A1C123AA4BD4}"/>
               </a:ext>
             </a:extLst>
           </p:cNvPr>
@@ -12210,7 +12210,7 @@
           <p:cNvPr id="76" name="">
             <a:extLst xmlns:a="http://schemas.openxmlformats.org/drawingml/2006/main">
               <a:ext uri="{FF2B5EF4-FFF2-40B4-BE49-F238E27FC236}">
-                <a16:creationId xmlns:a16="http://schemas.microsoft.com/office/drawing/2014/main" id="{D138082E-9552-45BA-BEB1-D1DDF6DF5B64}"/>
+                <a16:creationId xmlns:a16="http://schemas.microsoft.com/office/drawing/2014/main" id="{1B710133-DDBD-4B8F-89FA-95752EABD3B3}"/>
               </a:ext>
             </a:extLst>
           </p:cNvPr>
@@ -12290,7 +12290,7 @@
           <p:cNvPr id="77" name="">
             <a:extLst xmlns:a="http://schemas.openxmlformats.org/drawingml/2006/main">
               <a:ext uri="{FF2B5EF4-FFF2-40B4-BE49-F238E27FC236}">
-                <a16:creationId xmlns:a16="http://schemas.microsoft.com/office/drawing/2014/main" id="{97ACB5E1-E45D-47B9-8993-C0345D67935E}"/>
+                <a16:creationId xmlns:a16="http://schemas.microsoft.com/office/drawing/2014/main" id="{A0695601-7345-4460-9890-5D49A65A6D45}"/>
               </a:ext>
             </a:extLst>
           </p:cNvPr>
@@ -12347,7 +12347,7 @@
           <p:cNvPr id="78" name="">
             <a:extLst xmlns:a="http://schemas.openxmlformats.org/drawingml/2006/main">
               <a:ext uri="{FF2B5EF4-FFF2-40B4-BE49-F238E27FC236}">
-                <a16:creationId xmlns:a16="http://schemas.microsoft.com/office/drawing/2014/main" id="{FD16545F-48B8-4293-A49D-256D79F429EB}"/>
+                <a16:creationId xmlns:a16="http://schemas.microsoft.com/office/drawing/2014/main" id="{03DA9020-7C49-4ED0-85F9-7E855D8CF250}"/>
               </a:ext>
             </a:extLst>
           </p:cNvPr>
@@ -12404,7 +12404,7 @@
           <p:cNvPr id="79" name="">
             <a:extLst xmlns:a="http://schemas.openxmlformats.org/drawingml/2006/main">
               <a:ext uri="{FF2B5EF4-FFF2-40B4-BE49-F238E27FC236}">
-                <a16:creationId xmlns:a16="http://schemas.microsoft.com/office/drawing/2014/main" id="{89E00886-5265-4CD1-8EAA-DC9503EA9C18}"/>
+                <a16:creationId xmlns:a16="http://schemas.microsoft.com/office/drawing/2014/main" id="{FD20D6C4-AF70-49A7-B962-1D7FE1B2B68C}"/>
               </a:ext>
             </a:extLst>
           </p:cNvPr>
@@ -12505,7 +12505,7 @@
     </p:spTree>
     <p:extLst>
       <p:ext uri="{BB962C8B-B14F-4D97-AF65-F5344CB8AC3E}">
-        <p14:creationId xmlns:p14="http://schemas.microsoft.com/office/powerpoint/2010/main" val="2119570847"/>
+        <p14:creationId xmlns:p14="http://schemas.microsoft.com/office/powerpoint/2010/main" val="225447409"/>
       </p:ext>
     </p:extLst>
   </p:cSld>
@@ -12533,7 +12533,7 @@
           <p:nvPr/>
         </p:nvPicPr>
         <p:blipFill rotWithShape="1">
-          <a:blip xmlns:r="http://schemas.openxmlformats.org/officeDocument/2006/relationships" xmlns:a="http://schemas.openxmlformats.org/drawingml/2006/main" r:embed="R3c48dbaa7b794f48">
+          <a:blip xmlns:r="http://schemas.openxmlformats.org/officeDocument/2006/relationships" xmlns:a="http://schemas.openxmlformats.org/drawingml/2006/main" r:embed="R33d18bd7d57e425c">
             <a:alphaModFix/>
           </a:blip>
           <a:srcRect xmlns:a="http://schemas.openxmlformats.org/drawingml/2006/main" l="0" t="0" r="0" b="98001"/>
@@ -12561,7 +12561,7 @@
           <p:nvPr/>
         </p:nvPicPr>
         <p:blipFill>
-          <a:blip xmlns:r="http://schemas.openxmlformats.org/officeDocument/2006/relationships" xmlns:a="http://schemas.openxmlformats.org/drawingml/2006/main" r:embed="R7887131dfb1a4069">
+          <a:blip xmlns:r="http://schemas.openxmlformats.org/officeDocument/2006/relationships" xmlns:a="http://schemas.openxmlformats.org/drawingml/2006/main" r:embed="R3b44a68883ee4ee3">
             <a:alphaModFix/>
           </a:blip>
           <a:stretch xmlns:a="http://schemas.openxmlformats.org/drawingml/2006/main">
@@ -12586,7 +12586,7 @@
           <p:cNvPr id="78" name="Google Shape;78;p16">
             <a:extLst xmlns:a="http://schemas.openxmlformats.org/drawingml/2006/main">
               <a:ext uri="{FF2B5EF4-FFF2-40B4-BE49-F238E27FC236}">
-                <a16:creationId xmlns:a16="http://schemas.microsoft.com/office/drawing/2014/main" id="{39D7EE38-52AC-4A65-B1FA-3138BD755492}"/>
+                <a16:creationId xmlns:a16="http://schemas.microsoft.com/office/drawing/2014/main" id="{D7F2F6C4-39C1-418C-B45B-5884D86D8EAC}"/>
               </a:ext>
             </a:extLst>
           </p:cNvPr>
@@ -12637,7 +12637,7 @@
           <p:cNvPr id="79" name="Google Shape;79;p16">
             <a:extLst xmlns:a="http://schemas.openxmlformats.org/drawingml/2006/main">
               <a:ext uri="{FF2B5EF4-FFF2-40B4-BE49-F238E27FC236}">
-                <a16:creationId xmlns:a16="http://schemas.microsoft.com/office/drawing/2014/main" id="{FC9F6961-CFA9-49AC-8719-87A62A1AF457}"/>
+                <a16:creationId xmlns:a16="http://schemas.microsoft.com/office/drawing/2014/main" id="{69AB7D52-CB0A-4785-896B-A3DFDA0B7C39}"/>
               </a:ext>
             </a:extLst>
           </p:cNvPr>
@@ -12695,7 +12695,7 @@
           <p:cNvPr id="82" name="">
             <a:extLst xmlns:a="http://schemas.openxmlformats.org/drawingml/2006/main">
               <a:ext uri="{FF2B5EF4-FFF2-40B4-BE49-F238E27FC236}">
-                <a16:creationId xmlns:a16="http://schemas.microsoft.com/office/drawing/2014/main" id="{ABA2A59B-278B-4EC1-AE27-A7DB3F4A972C}"/>
+                <a16:creationId xmlns:a16="http://schemas.microsoft.com/office/drawing/2014/main" id="{F7E97993-4B27-4488-8D95-D946688659BA}"/>
               </a:ext>
             </a:extLst>
           </p:cNvPr>
@@ -12752,7 +12752,7 @@
           <p:cNvPr id="83" name="">
             <a:extLst xmlns:a="http://schemas.openxmlformats.org/drawingml/2006/main">
               <a:ext uri="{FF2B5EF4-FFF2-40B4-BE49-F238E27FC236}">
-                <a16:creationId xmlns:a16="http://schemas.microsoft.com/office/drawing/2014/main" id="{20226696-B883-4748-8E49-AAE22CF34A6E}"/>
+                <a16:creationId xmlns:a16="http://schemas.microsoft.com/office/drawing/2014/main" id="{FA5D01CE-AE1B-427B-A4D8-F8F2E76DD160}"/>
               </a:ext>
             </a:extLst>
           </p:cNvPr>
@@ -12809,7 +12809,7 @@
           <p:cNvPr id="84" name="">
             <a:extLst xmlns:a="http://schemas.openxmlformats.org/drawingml/2006/main">
               <a:ext uri="{FF2B5EF4-FFF2-40B4-BE49-F238E27FC236}">
-                <a16:creationId xmlns:a16="http://schemas.microsoft.com/office/drawing/2014/main" id="{53924C69-BE40-49E4-8239-34B9FCC12890}"/>
+                <a16:creationId xmlns:a16="http://schemas.microsoft.com/office/drawing/2014/main" id="{550325B2-31BD-4F41-91B1-69A4549A1008}"/>
               </a:ext>
             </a:extLst>
           </p:cNvPr>
@@ -12866,7 +12866,7 @@
           <p:cNvPr id="85" name="">
             <a:extLst xmlns:a="http://schemas.openxmlformats.org/drawingml/2006/main">
               <a:ext uri="{FF2B5EF4-FFF2-40B4-BE49-F238E27FC236}">
-                <a16:creationId xmlns:a16="http://schemas.microsoft.com/office/drawing/2014/main" id="{CD02742E-61F5-4F30-8C5D-6314F7B6B217}"/>
+                <a16:creationId xmlns:a16="http://schemas.microsoft.com/office/drawing/2014/main" id="{2DDB3936-CA78-4628-96C4-CB37FE2CE584}"/>
               </a:ext>
             </a:extLst>
           </p:cNvPr>
@@ -12946,7 +12946,7 @@
           <p:cNvPr id="86" name="">
             <a:extLst xmlns:a="http://schemas.openxmlformats.org/drawingml/2006/main">
               <a:ext uri="{FF2B5EF4-FFF2-40B4-BE49-F238E27FC236}">
-                <a16:creationId xmlns:a16="http://schemas.microsoft.com/office/drawing/2014/main" id="{D8ADE953-A2B4-4BA5-974F-F0D2F19594B1}"/>
+                <a16:creationId xmlns:a16="http://schemas.microsoft.com/office/drawing/2014/main" id="{BB99CB79-E206-4E2A-9AB4-2377E62AA34E}"/>
               </a:ext>
             </a:extLst>
           </p:cNvPr>
@@ -13003,7 +13003,7 @@
           <p:cNvPr id="87" name="">
             <a:extLst xmlns:a="http://schemas.openxmlformats.org/drawingml/2006/main">
               <a:ext uri="{FF2B5EF4-FFF2-40B4-BE49-F238E27FC236}">
-                <a16:creationId xmlns:a16="http://schemas.microsoft.com/office/drawing/2014/main" id="{ABBC8134-096D-4C0A-A7F9-F7DC97FC9CF7}"/>
+                <a16:creationId xmlns:a16="http://schemas.microsoft.com/office/drawing/2014/main" id="{2DF4AD66-57BF-409B-AB5C-E7DEE9EE63D1}"/>
               </a:ext>
             </a:extLst>
           </p:cNvPr>
@@ -13083,7 +13083,7 @@
           <p:cNvPr id="88" name="">
             <a:extLst xmlns:a="http://schemas.openxmlformats.org/drawingml/2006/main">
               <a:ext uri="{FF2B5EF4-FFF2-40B4-BE49-F238E27FC236}">
-                <a16:creationId xmlns:a16="http://schemas.microsoft.com/office/drawing/2014/main" id="{0900F2FA-8283-4743-B46F-DF8C70EE1564}"/>
+                <a16:creationId xmlns:a16="http://schemas.microsoft.com/office/drawing/2014/main" id="{8C7F13FB-33B5-415F-8AB3-B76AD610E360}"/>
               </a:ext>
             </a:extLst>
           </p:cNvPr>
@@ -13140,7 +13140,7 @@
           <p:cNvPr id="89" name="">
             <a:extLst xmlns:a="http://schemas.openxmlformats.org/drawingml/2006/main">
               <a:ext uri="{FF2B5EF4-FFF2-40B4-BE49-F238E27FC236}">
-                <a16:creationId xmlns:a16="http://schemas.microsoft.com/office/drawing/2014/main" id="{BDACAB67-FE54-4485-8906-56D9E4EE1F59}"/>
+                <a16:creationId xmlns:a16="http://schemas.microsoft.com/office/drawing/2014/main" id="{F0F8E88E-6CE6-4B74-A850-98BF2AA0959A}"/>
               </a:ext>
             </a:extLst>
           </p:cNvPr>
@@ -13218,7 +13218,7 @@
     </p:spTree>
     <p:extLst>
       <p:ext uri="{BB962C8B-B14F-4D97-AF65-F5344CB8AC3E}">
-        <p14:creationId xmlns:p14="http://schemas.microsoft.com/office/powerpoint/2010/main" val="1963787566"/>
+        <p14:creationId xmlns:p14="http://schemas.microsoft.com/office/powerpoint/2010/main" val="325604593"/>
       </p:ext>
     </p:extLst>
   </p:cSld>
@@ -13246,7 +13246,7 @@
           <p:nvPr/>
         </p:nvPicPr>
         <p:blipFill rotWithShape="1">
-          <a:blip xmlns:r="http://schemas.openxmlformats.org/officeDocument/2006/relationships" xmlns:a="http://schemas.openxmlformats.org/drawingml/2006/main" r:embed="Rc2792707f73940b1">
+          <a:blip xmlns:r="http://schemas.openxmlformats.org/officeDocument/2006/relationships" xmlns:a="http://schemas.openxmlformats.org/drawingml/2006/main" r:embed="R1cb18f818bbb4fa8">
             <a:alphaModFix/>
           </a:blip>
           <a:srcRect xmlns:a="http://schemas.openxmlformats.org/drawingml/2006/main" l="0" t="0" r="0" b="98001"/>
@@ -13274,7 +13274,7 @@
           <p:nvPr/>
         </p:nvPicPr>
         <p:blipFill>
-          <a:blip xmlns:r="http://schemas.openxmlformats.org/officeDocument/2006/relationships" xmlns:a="http://schemas.openxmlformats.org/drawingml/2006/main" r:embed="Re70352de55af401e">
+          <a:blip xmlns:r="http://schemas.openxmlformats.org/officeDocument/2006/relationships" xmlns:a="http://schemas.openxmlformats.org/drawingml/2006/main" r:embed="Rf26c328b516241ae">
             <a:alphaModFix/>
           </a:blip>
           <a:stretch xmlns:a="http://schemas.openxmlformats.org/drawingml/2006/main">
@@ -13299,7 +13299,7 @@
           <p:cNvPr id="86" name="Google Shape;86;p17">
             <a:extLst xmlns:a="http://schemas.openxmlformats.org/drawingml/2006/main">
               <a:ext uri="{FF2B5EF4-FFF2-40B4-BE49-F238E27FC236}">
-                <a16:creationId xmlns:a16="http://schemas.microsoft.com/office/drawing/2014/main" id="{CDDB4F4D-4151-467B-8FFF-F564236BAD10}"/>
+                <a16:creationId xmlns:a16="http://schemas.microsoft.com/office/drawing/2014/main" id="{170CE3A2-42A6-46EC-814E-608AC7902ECB}"/>
               </a:ext>
             </a:extLst>
           </p:cNvPr>
@@ -13350,7 +13350,7 @@
           <p:cNvPr id="87" name="Google Shape;87;p17">
             <a:extLst xmlns:a="http://schemas.openxmlformats.org/drawingml/2006/main">
               <a:ext uri="{FF2B5EF4-FFF2-40B4-BE49-F238E27FC236}">
-                <a16:creationId xmlns:a16="http://schemas.microsoft.com/office/drawing/2014/main" id="{DCEC98FB-AB7D-4CD4-BBF3-C36199E4E21E}"/>
+                <a16:creationId xmlns:a16="http://schemas.microsoft.com/office/drawing/2014/main" id="{ADEFFC55-147F-4E91-9A7B-B4A0AE9AADB5}"/>
               </a:ext>
             </a:extLst>
           </p:cNvPr>
@@ -13408,7 +13408,7 @@
           <p:cNvPr id="90" name="">
             <a:extLst xmlns:a="http://schemas.openxmlformats.org/drawingml/2006/main">
               <a:ext uri="{FF2B5EF4-FFF2-40B4-BE49-F238E27FC236}">
-                <a16:creationId xmlns:a16="http://schemas.microsoft.com/office/drawing/2014/main" id="{9FA81121-8576-469B-BA54-27949AB93330}"/>
+                <a16:creationId xmlns:a16="http://schemas.microsoft.com/office/drawing/2014/main" id="{985A15C6-4045-47B4-BB1D-689F58CE1F8F}"/>
               </a:ext>
             </a:extLst>
           </p:cNvPr>
@@ -13465,7 +13465,7 @@
           <p:cNvPr id="91" name="">
             <a:extLst xmlns:a="http://schemas.openxmlformats.org/drawingml/2006/main">
               <a:ext uri="{FF2B5EF4-FFF2-40B4-BE49-F238E27FC236}">
-                <a16:creationId xmlns:a16="http://schemas.microsoft.com/office/drawing/2014/main" id="{22C3EEBC-B881-4B0C-8155-780B4F49F524}"/>
+                <a16:creationId xmlns:a16="http://schemas.microsoft.com/office/drawing/2014/main" id="{3278132C-FA35-4756-B051-B6355BCAB62D}"/>
               </a:ext>
             </a:extLst>
           </p:cNvPr>
@@ -13522,7 +13522,7 @@
           <p:cNvPr id="92" name="">
             <a:extLst xmlns:a="http://schemas.openxmlformats.org/drawingml/2006/main">
               <a:ext uri="{FF2B5EF4-FFF2-40B4-BE49-F238E27FC236}">
-                <a16:creationId xmlns:a16="http://schemas.microsoft.com/office/drawing/2014/main" id="{814A19A7-64EB-453A-8AC9-8F8083D621A6}"/>
+                <a16:creationId xmlns:a16="http://schemas.microsoft.com/office/drawing/2014/main" id="{EB0277C6-0029-4A1A-AF5B-7723ACEF488C}"/>
               </a:ext>
             </a:extLst>
           </p:cNvPr>
@@ -13579,7 +13579,7 @@
           <p:cNvPr id="93" name="">
             <a:extLst xmlns:a="http://schemas.openxmlformats.org/drawingml/2006/main">
               <a:ext uri="{FF2B5EF4-FFF2-40B4-BE49-F238E27FC236}">
-                <a16:creationId xmlns:a16="http://schemas.microsoft.com/office/drawing/2014/main" id="{F323AF46-128D-45B9-85F1-A14DE87F0E59}"/>
+                <a16:creationId xmlns:a16="http://schemas.microsoft.com/office/drawing/2014/main" id="{B55E720F-21EB-4156-94BD-B77691D24887}"/>
               </a:ext>
             </a:extLst>
           </p:cNvPr>
@@ -13659,7 +13659,7 @@
           <p:cNvPr id="94" name="">
             <a:extLst xmlns:a="http://schemas.openxmlformats.org/drawingml/2006/main">
               <a:ext uri="{FF2B5EF4-FFF2-40B4-BE49-F238E27FC236}">
-                <a16:creationId xmlns:a16="http://schemas.microsoft.com/office/drawing/2014/main" id="{B661B55E-A39A-499A-A88E-55F90B61534A}"/>
+                <a16:creationId xmlns:a16="http://schemas.microsoft.com/office/drawing/2014/main" id="{3EA51020-6884-4F3F-984F-94A54BD951BB}"/>
               </a:ext>
             </a:extLst>
           </p:cNvPr>
@@ -13716,7 +13716,7 @@
           <p:cNvPr id="95" name="">
             <a:extLst xmlns:a="http://schemas.openxmlformats.org/drawingml/2006/main">
               <a:ext uri="{FF2B5EF4-FFF2-40B4-BE49-F238E27FC236}">
-                <a16:creationId xmlns:a16="http://schemas.microsoft.com/office/drawing/2014/main" id="{76FAF9C0-6758-4E2A-9C32-112B939C034F}"/>
+                <a16:creationId xmlns:a16="http://schemas.microsoft.com/office/drawing/2014/main" id="{689D1E75-6BA4-41FE-B69B-11D4024E3E41}"/>
               </a:ext>
             </a:extLst>
           </p:cNvPr>
@@ -13796,7 +13796,7 @@
           <p:cNvPr id="96" name="">
             <a:extLst xmlns:a="http://schemas.openxmlformats.org/drawingml/2006/main">
               <a:ext uri="{FF2B5EF4-FFF2-40B4-BE49-F238E27FC236}">
-                <a16:creationId xmlns:a16="http://schemas.microsoft.com/office/drawing/2014/main" id="{D200C7C6-BD93-4E30-92F1-E135B5DD6112}"/>
+                <a16:creationId xmlns:a16="http://schemas.microsoft.com/office/drawing/2014/main" id="{CD64D216-BD52-4550-8D26-8FF79C10B9EB}"/>
               </a:ext>
             </a:extLst>
           </p:cNvPr>
@@ -13853,7 +13853,7 @@
           <p:cNvPr id="97" name="">
             <a:extLst xmlns:a="http://schemas.openxmlformats.org/drawingml/2006/main">
               <a:ext uri="{FF2B5EF4-FFF2-40B4-BE49-F238E27FC236}">
-                <a16:creationId xmlns:a16="http://schemas.microsoft.com/office/drawing/2014/main" id="{40D1E0C5-0D78-4B70-9873-1384ED236B98}"/>
+                <a16:creationId xmlns:a16="http://schemas.microsoft.com/office/drawing/2014/main" id="{94C6E3FF-008D-48AD-BC35-5469C0D0429E}"/>
               </a:ext>
             </a:extLst>
           </p:cNvPr>
@@ -13933,7 +13933,7 @@
           <p:cNvPr id="98" name="">
             <a:extLst xmlns:a="http://schemas.openxmlformats.org/drawingml/2006/main">
               <a:ext uri="{FF2B5EF4-FFF2-40B4-BE49-F238E27FC236}">
-                <a16:creationId xmlns:a16="http://schemas.microsoft.com/office/drawing/2014/main" id="{258761A0-F959-491B-A68F-2510208CBB36}"/>
+                <a16:creationId xmlns:a16="http://schemas.microsoft.com/office/drawing/2014/main" id="{0CF183EA-4B82-4F6F-9EE9-AF00E2EA9E2D}"/>
               </a:ext>
             </a:extLst>
           </p:cNvPr>
@@ -13990,7 +13990,7 @@
           <p:cNvPr id="99" name="">
             <a:extLst xmlns:a="http://schemas.openxmlformats.org/drawingml/2006/main">
               <a:ext uri="{FF2B5EF4-FFF2-40B4-BE49-F238E27FC236}">
-                <a16:creationId xmlns:a16="http://schemas.microsoft.com/office/drawing/2014/main" id="{1BAF9609-835E-49AE-8AC9-8F29AB2D2C53}"/>
+                <a16:creationId xmlns:a16="http://schemas.microsoft.com/office/drawing/2014/main" id="{72C66B84-C87B-4B8B-BDE8-D3D941A713D1}"/>
               </a:ext>
             </a:extLst>
           </p:cNvPr>
@@ -14070,7 +14070,7 @@
           <p:cNvPr id="100" name="">
             <a:extLst xmlns:a="http://schemas.openxmlformats.org/drawingml/2006/main">
               <a:ext uri="{FF2B5EF4-FFF2-40B4-BE49-F238E27FC236}">
-                <a16:creationId xmlns:a16="http://schemas.microsoft.com/office/drawing/2014/main" id="{5FBEC003-73A2-40CD-8B7F-A74EB982D32D}"/>
+                <a16:creationId xmlns:a16="http://schemas.microsoft.com/office/drawing/2014/main" id="{A5767F0E-B9F4-4101-87E3-569106F9ACD9}"/>
               </a:ext>
             </a:extLst>
           </p:cNvPr>
@@ -14127,7 +14127,7 @@
           <p:cNvPr id="101" name="">
             <a:extLst xmlns:a="http://schemas.openxmlformats.org/drawingml/2006/main">
               <a:ext uri="{FF2B5EF4-FFF2-40B4-BE49-F238E27FC236}">
-                <a16:creationId xmlns:a16="http://schemas.microsoft.com/office/drawing/2014/main" id="{D9A30159-62E1-4955-8242-FA1906325483}"/>
+                <a16:creationId xmlns:a16="http://schemas.microsoft.com/office/drawing/2014/main" id="{EC47FA43-94BD-4E3C-A806-D7C3D60367B8}"/>
               </a:ext>
             </a:extLst>
           </p:cNvPr>
@@ -14207,7 +14207,7 @@
           <p:cNvPr id="102" name="">
             <a:extLst xmlns:a="http://schemas.openxmlformats.org/drawingml/2006/main">
               <a:ext uri="{FF2B5EF4-FFF2-40B4-BE49-F238E27FC236}">
-                <a16:creationId xmlns:a16="http://schemas.microsoft.com/office/drawing/2014/main" id="{9829796B-C6C2-4303-AA32-691C68C676C4}"/>
+                <a16:creationId xmlns:a16="http://schemas.microsoft.com/office/drawing/2014/main" id="{4E8D87BF-C441-4D04-B9C2-FBFCBFB197DF}"/>
               </a:ext>
             </a:extLst>
           </p:cNvPr>
@@ -14264,7 +14264,7 @@
           <p:cNvPr id="103" name="">
             <a:extLst xmlns:a="http://schemas.openxmlformats.org/drawingml/2006/main">
               <a:ext uri="{FF2B5EF4-FFF2-40B4-BE49-F238E27FC236}">
-                <a16:creationId xmlns:a16="http://schemas.microsoft.com/office/drawing/2014/main" id="{8C73B1F0-21DF-4A9D-9104-8F3B65164EEC}"/>
+                <a16:creationId xmlns:a16="http://schemas.microsoft.com/office/drawing/2014/main" id="{8B17A5E6-B516-417C-9A5E-B064DB5A6F19}"/>
               </a:ext>
             </a:extLst>
           </p:cNvPr>
@@ -14342,7 +14342,7 @@
     </p:spTree>
     <p:extLst>
       <p:ext uri="{BB962C8B-B14F-4D97-AF65-F5344CB8AC3E}">
-        <p14:creationId xmlns:p14="http://schemas.microsoft.com/office/powerpoint/2010/main" val="1672101073"/>
+        <p14:creationId xmlns:p14="http://schemas.microsoft.com/office/powerpoint/2010/main" val="1162415030"/>
       </p:ext>
     </p:extLst>
   </p:cSld>
@@ -14495,7 +14495,7 @@
           <p:nvPr/>
         </p:nvPicPr>
         <p:blipFill rotWithShape="1">
-          <a:blip xmlns:r="http://schemas.openxmlformats.org/officeDocument/2006/relationships" xmlns:a="http://schemas.openxmlformats.org/drawingml/2006/main" r:embed="R60d3c611c93741ad">
+          <a:blip xmlns:r="http://schemas.openxmlformats.org/officeDocument/2006/relationships" xmlns:a="http://schemas.openxmlformats.org/drawingml/2006/main" r:embed="Ra2aede6c67c24e41">
             <a:alphaModFix/>
           </a:blip>
           <a:srcRect xmlns:a="http://schemas.openxmlformats.org/drawingml/2006/main" l="0" t="0" r="0" b="98001"/>
@@ -14523,7 +14523,7 @@
           <p:nvPr/>
         </p:nvPicPr>
         <p:blipFill>
-          <a:blip xmlns:r="http://schemas.openxmlformats.org/officeDocument/2006/relationships" xmlns:a="http://schemas.openxmlformats.org/drawingml/2006/main" r:embed="R1c836a254a8a4396">
+          <a:blip xmlns:r="http://schemas.openxmlformats.org/officeDocument/2006/relationships" xmlns:a="http://schemas.openxmlformats.org/drawingml/2006/main" r:embed="R00b1eb7ffbad42a9">
             <a:alphaModFix/>
           </a:blip>
           <a:stretch xmlns:a="http://schemas.openxmlformats.org/drawingml/2006/main">
@@ -14548,7 +14548,7 @@
           <p:cNvPr id="94" name="Google Shape;94;p18">
             <a:extLst xmlns:a="http://schemas.openxmlformats.org/drawingml/2006/main">
               <a:ext uri="{FF2B5EF4-FFF2-40B4-BE49-F238E27FC236}">
-                <a16:creationId xmlns:a16="http://schemas.microsoft.com/office/drawing/2014/main" id="{BAF438D2-5CB7-41F9-B866-E8E8849B5732}"/>
+                <a16:creationId xmlns:a16="http://schemas.microsoft.com/office/drawing/2014/main" id="{633F8EC4-3D20-498D-A114-4C098D5E942D}"/>
               </a:ext>
             </a:extLst>
           </p:cNvPr>
@@ -14599,7 +14599,7 @@
           <p:cNvPr id="95" name="Google Shape;95;p18">
             <a:extLst xmlns:a="http://schemas.openxmlformats.org/drawingml/2006/main">
               <a:ext uri="{FF2B5EF4-FFF2-40B4-BE49-F238E27FC236}">
-                <a16:creationId xmlns:a16="http://schemas.microsoft.com/office/drawing/2014/main" id="{F8760D4B-4CEC-413F-A84F-AE7E926B8935}"/>
+                <a16:creationId xmlns:a16="http://schemas.microsoft.com/office/drawing/2014/main" id="{44F0949A-D7D4-4C8A-A68C-300140A47397}"/>
               </a:ext>
             </a:extLst>
           </p:cNvPr>
@@ -14657,7 +14657,7 @@
           <p:cNvPr id="98" name="">
             <a:extLst xmlns:a="http://schemas.openxmlformats.org/drawingml/2006/main">
               <a:ext uri="{FF2B5EF4-FFF2-40B4-BE49-F238E27FC236}">
-                <a16:creationId xmlns:a16="http://schemas.microsoft.com/office/drawing/2014/main" id="{21F67C5D-38A9-426C-ADD5-A850C6AF305C}"/>
+                <a16:creationId xmlns:a16="http://schemas.microsoft.com/office/drawing/2014/main" id="{827C3E76-8482-4665-AB40-F2581F1ECF98}"/>
               </a:ext>
             </a:extLst>
           </p:cNvPr>
@@ -14714,7 +14714,7 @@
           <p:cNvPr id="99" name="">
             <a:extLst xmlns:a="http://schemas.openxmlformats.org/drawingml/2006/main">
               <a:ext uri="{FF2B5EF4-FFF2-40B4-BE49-F238E27FC236}">
-                <a16:creationId xmlns:a16="http://schemas.microsoft.com/office/drawing/2014/main" id="{C7037429-852F-4CA3-A1D1-AC5B6195362F}"/>
+                <a16:creationId xmlns:a16="http://schemas.microsoft.com/office/drawing/2014/main" id="{0A8AA499-7FB5-4D5F-9D2F-52050B572831}"/>
               </a:ext>
             </a:extLst>
           </p:cNvPr>
@@ -14771,7 +14771,7 @@
           <p:cNvPr id="100" name="">
             <a:extLst xmlns:a="http://schemas.openxmlformats.org/drawingml/2006/main">
               <a:ext uri="{FF2B5EF4-FFF2-40B4-BE49-F238E27FC236}">
-                <a16:creationId xmlns:a16="http://schemas.microsoft.com/office/drawing/2014/main" id="{DFF94307-025D-4F29-A6F9-E2A05FFAC79A}"/>
+                <a16:creationId xmlns:a16="http://schemas.microsoft.com/office/drawing/2014/main" id="{88D361BA-1A68-4200-8899-2EB94DA60AC7}"/>
               </a:ext>
             </a:extLst>
           </p:cNvPr>
@@ -14855,7 +14855,7 @@
           <p:cNvPr id="101" name="">
             <a:extLst xmlns:a="http://schemas.openxmlformats.org/drawingml/2006/main">
               <a:ext uri="{FF2B5EF4-FFF2-40B4-BE49-F238E27FC236}">
-                <a16:creationId xmlns:a16="http://schemas.microsoft.com/office/drawing/2014/main" id="{8A19E0E1-9E4B-4A59-A097-DF27EF6E7BE2}"/>
+                <a16:creationId xmlns:a16="http://schemas.microsoft.com/office/drawing/2014/main" id="{CF121717-F576-48DE-9B2C-C13E646215AB}"/>
               </a:ext>
             </a:extLst>
           </p:cNvPr>
@@ -14939,7 +14939,7 @@
           <p:cNvPr id="102" name="">
             <a:extLst xmlns:a="http://schemas.openxmlformats.org/drawingml/2006/main">
               <a:ext uri="{FF2B5EF4-FFF2-40B4-BE49-F238E27FC236}">
-                <a16:creationId xmlns:a16="http://schemas.microsoft.com/office/drawing/2014/main" id="{BA881237-6F38-4ABE-A0AF-AB4B107006B3}"/>
+                <a16:creationId xmlns:a16="http://schemas.microsoft.com/office/drawing/2014/main" id="{B8419857-71F1-438A-B61F-BDBA0AB166D7}"/>
               </a:ext>
             </a:extLst>
           </p:cNvPr>
@@ -15023,7 +15023,7 @@
           <p:cNvPr id="105" name="">
             <a:extLst xmlns:a="http://schemas.openxmlformats.org/drawingml/2006/main">
               <a:ext uri="{FF2B5EF4-FFF2-40B4-BE49-F238E27FC236}">
-                <a16:creationId xmlns:a16="http://schemas.microsoft.com/office/drawing/2014/main" id="{DFA65E0C-B1F2-4A0B-87FC-76B22AFEFEB9}"/>
+                <a16:creationId xmlns:a16="http://schemas.microsoft.com/office/drawing/2014/main" id="{A9BA7E8E-E537-4E3B-BC3C-862FB98E23E9}"/>
               </a:ext>
             </a:extLst>
           </p:cNvPr>
@@ -15107,7 +15107,7 @@
           <p:cNvPr id="106" name="">
             <a:extLst xmlns:a="http://schemas.openxmlformats.org/drawingml/2006/main">
               <a:ext uri="{FF2B5EF4-FFF2-40B4-BE49-F238E27FC236}">
-                <a16:creationId xmlns:a16="http://schemas.microsoft.com/office/drawing/2014/main" id="{0855C686-5BA8-4468-9339-B21E6E839E16}"/>
+                <a16:creationId xmlns:a16="http://schemas.microsoft.com/office/drawing/2014/main" id="{9C477001-ECCE-4C0F-975C-AC49BDB7DA8C}"/>
               </a:ext>
             </a:extLst>
           </p:cNvPr>
@@ -15191,7 +15191,7 @@
           <p:cNvPr id="107" name="">
             <a:extLst xmlns:a="http://schemas.openxmlformats.org/drawingml/2006/main">
               <a:ext uri="{FF2B5EF4-FFF2-40B4-BE49-F238E27FC236}">
-                <a16:creationId xmlns:a16="http://schemas.microsoft.com/office/drawing/2014/main" id="{1B1E31C8-DE53-4423-940E-8FA0D1E4A2CA}"/>
+                <a16:creationId xmlns:a16="http://schemas.microsoft.com/office/drawing/2014/main" id="{2BD15DCE-1053-435E-B94A-80A170868D5D}"/>
               </a:ext>
             </a:extLst>
           </p:cNvPr>
@@ -15275,7 +15275,7 @@
           <p:cNvPr id="111" name="">
             <a:extLst xmlns:a="http://schemas.openxmlformats.org/drawingml/2006/main">
               <a:ext uri="{FF2B5EF4-FFF2-40B4-BE49-F238E27FC236}">
-                <a16:creationId xmlns:a16="http://schemas.microsoft.com/office/drawing/2014/main" id="{9B06E554-6398-4877-AE84-C075090160F1}"/>
+                <a16:creationId xmlns:a16="http://schemas.microsoft.com/office/drawing/2014/main" id="{C322018E-7B0C-42BE-BC34-634944BB502F}"/>
               </a:ext>
             </a:extLst>
           </p:cNvPr>
@@ -15332,7 +15332,7 @@
           <p:cNvPr id="112" name="">
             <a:extLst xmlns:a="http://schemas.openxmlformats.org/drawingml/2006/main">
               <a:ext uri="{FF2B5EF4-FFF2-40B4-BE49-F238E27FC236}">
-                <a16:creationId xmlns:a16="http://schemas.microsoft.com/office/drawing/2014/main" id="{49467E84-2561-475B-9A08-7EB5F13C3B63}"/>
+                <a16:creationId xmlns:a16="http://schemas.microsoft.com/office/drawing/2014/main" id="{13024E9C-8B49-408F-AC3B-F525D306218F}"/>
               </a:ext>
             </a:extLst>
           </p:cNvPr>
@@ -15387,7 +15387,7 @@
     </p:spTree>
     <p:extLst>
       <p:ext uri="{BB962C8B-B14F-4D97-AF65-F5344CB8AC3E}">
-        <p14:creationId xmlns:p14="http://schemas.microsoft.com/office/powerpoint/2010/main" val="282103308"/>
+        <p14:creationId xmlns:p14="http://schemas.microsoft.com/office/powerpoint/2010/main" val="181371065"/>
       </p:ext>
     </p:extLst>
   </p:cSld>
@@ -15415,7 +15415,7 @@
           <p:nvPr/>
         </p:nvPicPr>
         <p:blipFill rotWithShape="1">
-          <a:blip xmlns:r="http://schemas.openxmlformats.org/officeDocument/2006/relationships" xmlns:a="http://schemas.openxmlformats.org/drawingml/2006/main" r:embed="R6e1d4473ff964e88">
+          <a:blip xmlns:r="http://schemas.openxmlformats.org/officeDocument/2006/relationships" xmlns:a="http://schemas.openxmlformats.org/drawingml/2006/main" r:embed="R89f099f7c09e40c6">
             <a:alphaModFix/>
           </a:blip>
           <a:srcRect xmlns:a="http://schemas.openxmlformats.org/drawingml/2006/main" l="0" t="0" r="0" b="98001"/>
@@ -15443,7 +15443,7 @@
           <p:nvPr/>
         </p:nvPicPr>
         <p:blipFill>
-          <a:blip xmlns:r="http://schemas.openxmlformats.org/officeDocument/2006/relationships" xmlns:a="http://schemas.openxmlformats.org/drawingml/2006/main" r:embed="Rf21ebc78a37145d6">
+          <a:blip xmlns:r="http://schemas.openxmlformats.org/officeDocument/2006/relationships" xmlns:a="http://schemas.openxmlformats.org/drawingml/2006/main" r:embed="R0909d0f9a2b8443e">
             <a:alphaModFix/>
           </a:blip>
           <a:stretch xmlns:a="http://schemas.openxmlformats.org/drawingml/2006/main">
@@ -15468,7 +15468,7 @@
           <p:cNvPr id="102" name="Google Shape;102;p19">
             <a:extLst xmlns:a="http://schemas.openxmlformats.org/drawingml/2006/main">
               <a:ext uri="{FF2B5EF4-FFF2-40B4-BE49-F238E27FC236}">
-                <a16:creationId xmlns:a16="http://schemas.microsoft.com/office/drawing/2014/main" id="{708BF590-B4AE-4A02-99E9-D352E8839AC9}"/>
+                <a16:creationId xmlns:a16="http://schemas.microsoft.com/office/drawing/2014/main" id="{80189D74-9C8E-49E7-9D49-B43FF294CBFF}"/>
               </a:ext>
             </a:extLst>
           </p:cNvPr>
@@ -15519,7 +15519,7 @@
           <p:cNvPr id="103" name="Google Shape;103;p19">
             <a:extLst xmlns:a="http://schemas.openxmlformats.org/drawingml/2006/main">
               <a:ext uri="{FF2B5EF4-FFF2-40B4-BE49-F238E27FC236}">
-                <a16:creationId xmlns:a16="http://schemas.microsoft.com/office/drawing/2014/main" id="{34BC4674-BFA9-45D0-B941-0E875A753160}"/>
+                <a16:creationId xmlns:a16="http://schemas.microsoft.com/office/drawing/2014/main" id="{F147AD7A-D72A-4BB1-B885-F6FEE46C8C2F}"/>
               </a:ext>
             </a:extLst>
           </p:cNvPr>
@@ -15577,7 +15577,7 @@
           <p:cNvPr id="106" name="">
             <a:extLst xmlns:a="http://schemas.openxmlformats.org/drawingml/2006/main">
               <a:ext uri="{FF2B5EF4-FFF2-40B4-BE49-F238E27FC236}">
-                <a16:creationId xmlns:a16="http://schemas.microsoft.com/office/drawing/2014/main" id="{3FA96A81-B08E-48A9-9B04-AE698A036DBC}"/>
+                <a16:creationId xmlns:a16="http://schemas.microsoft.com/office/drawing/2014/main" id="{0184F284-0151-4C0A-BCB2-DF14E13BA74E}"/>
               </a:ext>
             </a:extLst>
           </p:cNvPr>
@@ -15634,7 +15634,7 @@
           <p:cNvPr id="107" name="">
             <a:extLst xmlns:a="http://schemas.openxmlformats.org/drawingml/2006/main">
               <a:ext uri="{FF2B5EF4-FFF2-40B4-BE49-F238E27FC236}">
-                <a16:creationId xmlns:a16="http://schemas.microsoft.com/office/drawing/2014/main" id="{AF81DD1F-9680-460C-AD0E-0A54871670FE}"/>
+                <a16:creationId xmlns:a16="http://schemas.microsoft.com/office/drawing/2014/main" id="{A0849D37-9AAB-4BAD-8342-5F92E79B40F6}"/>
               </a:ext>
             </a:extLst>
           </p:cNvPr>
@@ -15691,7 +15691,7 @@
           <p:cNvPr id="108" name="">
             <a:extLst xmlns:a="http://schemas.openxmlformats.org/drawingml/2006/main">
               <a:ext uri="{FF2B5EF4-FFF2-40B4-BE49-F238E27FC236}">
-                <a16:creationId xmlns:a16="http://schemas.microsoft.com/office/drawing/2014/main" id="{C7A6918A-C64C-4CE6-991F-A6AC69AE8206}"/>
+                <a16:creationId xmlns:a16="http://schemas.microsoft.com/office/drawing/2014/main" id="{24ABF39D-77AF-45C8-BFC5-5A97442AD4F0}"/>
               </a:ext>
             </a:extLst>
           </p:cNvPr>
@@ -15752,7 +15752,7 @@
           <p:nvPr/>
         </p:nvPicPr>
         <p:blipFill>
-          <a:blip xmlns:r="http://schemas.openxmlformats.org/officeDocument/2006/relationships" xmlns:a="http://schemas.openxmlformats.org/drawingml/2006/main" r:embed="Re2c58fdebc114024"/>
+          <a:blip xmlns:r="http://schemas.openxmlformats.org/officeDocument/2006/relationships" xmlns:a="http://schemas.openxmlformats.org/drawingml/2006/main" r:embed="Re11abb81e0b0459a"/>
           <a:srcRect xmlns:a="http://schemas.openxmlformats.org/drawingml/2006/main" l="25000" t="17000" r="2500" b="0"/>
           <a:stretch xmlns:a="http://schemas.openxmlformats.org/drawingml/2006/main"/>
         </p:blipFill>
@@ -15775,7 +15775,7 @@
           <p:nvPr/>
         </p:nvPicPr>
         <p:blipFill>
-          <a:blip xmlns:r="http://schemas.openxmlformats.org/officeDocument/2006/relationships" xmlns:a="http://schemas.openxmlformats.org/drawingml/2006/main" r:embed="R9cdcd74dccc945f8"/>
+          <a:blip xmlns:r="http://schemas.openxmlformats.org/officeDocument/2006/relationships" xmlns:a="http://schemas.openxmlformats.org/drawingml/2006/main" r:embed="R639a6006c9484087"/>
           <a:srcRect xmlns:a="http://schemas.openxmlformats.org/drawingml/2006/main" l="25000" t="7000" r="2500" b="1500"/>
           <a:stretch xmlns:a="http://schemas.openxmlformats.org/drawingml/2006/main"/>
         </p:blipFill>
@@ -15794,7 +15794,7 @@
           <p:cNvPr id="111" name="">
             <a:extLst xmlns:a="http://schemas.openxmlformats.org/drawingml/2006/main">
               <a:ext uri="{FF2B5EF4-FFF2-40B4-BE49-F238E27FC236}">
-                <a16:creationId xmlns:a16="http://schemas.microsoft.com/office/drawing/2014/main" id="{B2442F5A-8A34-408B-9653-E7C1E29C91E4}"/>
+                <a16:creationId xmlns:a16="http://schemas.microsoft.com/office/drawing/2014/main" id="{E2500602-4EE0-42B7-B523-2907BC6574DA}"/>
               </a:ext>
             </a:extLst>
           </p:cNvPr>
@@ -15851,7 +15851,7 @@
           <p:cNvPr id="112" name="">
             <a:extLst xmlns:a="http://schemas.openxmlformats.org/drawingml/2006/main">
               <a:ext uri="{FF2B5EF4-FFF2-40B4-BE49-F238E27FC236}">
-                <a16:creationId xmlns:a16="http://schemas.microsoft.com/office/drawing/2014/main" id="{5B2459BA-3DC3-4BD6-9557-EBC2FF9DE77A}"/>
+                <a16:creationId xmlns:a16="http://schemas.microsoft.com/office/drawing/2014/main" id="{635B2ABA-702F-47D3-9081-642DED0163B8}"/>
               </a:ext>
             </a:extLst>
           </p:cNvPr>
@@ -15906,7 +15906,7 @@
     </p:spTree>
     <p:extLst>
       <p:ext uri="{BB962C8B-B14F-4D97-AF65-F5344CB8AC3E}">
-        <p14:creationId xmlns:p14="http://schemas.microsoft.com/office/powerpoint/2010/main" val="93640429"/>
+        <p14:creationId xmlns:p14="http://schemas.microsoft.com/office/powerpoint/2010/main" val="1350583869"/>
       </p:ext>
     </p:extLst>
   </p:cSld>
@@ -16034,7 +16034,7 @@
           <p:nvPr/>
         </p:nvPicPr>
         <p:blipFill rotWithShape="1">
-          <a:blip xmlns:r="http://schemas.openxmlformats.org/officeDocument/2006/relationships" xmlns:a="http://schemas.openxmlformats.org/drawingml/2006/main" r:embed="R49a391c595ae4ef0">
+          <a:blip xmlns:r="http://schemas.openxmlformats.org/officeDocument/2006/relationships" xmlns:a="http://schemas.openxmlformats.org/drawingml/2006/main" r:embed="R88b3f93de5ca4f63">
             <a:alphaModFix/>
           </a:blip>
           <a:srcRect xmlns:a="http://schemas.openxmlformats.org/drawingml/2006/main" l="0" t="0" r="0" b="98001"/>
@@ -16062,7 +16062,7 @@
           <p:nvPr/>
         </p:nvPicPr>
         <p:blipFill>
-          <a:blip xmlns:r="http://schemas.openxmlformats.org/officeDocument/2006/relationships" xmlns:a="http://schemas.openxmlformats.org/drawingml/2006/main" r:embed="Rb524763b5eb749c5">
+          <a:blip xmlns:r="http://schemas.openxmlformats.org/officeDocument/2006/relationships" xmlns:a="http://schemas.openxmlformats.org/drawingml/2006/main" r:embed="Ra8ae25838f1a45b6">
             <a:alphaModFix/>
           </a:blip>
           <a:stretch xmlns:a="http://schemas.openxmlformats.org/drawingml/2006/main">
@@ -16087,7 +16087,7 @@
           <p:cNvPr id="110" name="Google Shape;110;p20">
             <a:extLst xmlns:a="http://schemas.openxmlformats.org/drawingml/2006/main">
               <a:ext uri="{FF2B5EF4-FFF2-40B4-BE49-F238E27FC236}">
-                <a16:creationId xmlns:a16="http://schemas.microsoft.com/office/drawing/2014/main" id="{011716A9-03A7-4F2C-8B9C-4F018EA7DACB}"/>
+                <a16:creationId xmlns:a16="http://schemas.microsoft.com/office/drawing/2014/main" id="{65F039D7-3BDE-46EF-9D2B-90889082F416}"/>
               </a:ext>
             </a:extLst>
           </p:cNvPr>
@@ -16138,7 +16138,7 @@
           <p:cNvPr id="111" name="Google Shape;111;p20">
             <a:extLst xmlns:a="http://schemas.openxmlformats.org/drawingml/2006/main">
               <a:ext uri="{FF2B5EF4-FFF2-40B4-BE49-F238E27FC236}">
-                <a16:creationId xmlns:a16="http://schemas.microsoft.com/office/drawing/2014/main" id="{4AD38FC5-8796-4541-88CC-E527CCE74AC5}"/>
+                <a16:creationId xmlns:a16="http://schemas.microsoft.com/office/drawing/2014/main" id="{77C40374-B0E7-42F3-B115-09882DD7EC07}"/>
               </a:ext>
             </a:extLst>
           </p:cNvPr>
@@ -16196,7 +16196,7 @@
           <p:cNvPr id="114" name="">
             <a:extLst xmlns:a="http://schemas.openxmlformats.org/drawingml/2006/main">
               <a:ext uri="{FF2B5EF4-FFF2-40B4-BE49-F238E27FC236}">
-                <a16:creationId xmlns:a16="http://schemas.microsoft.com/office/drawing/2014/main" id="{A9A5EDE1-06B4-4E31-B7A9-AF060311A83D}"/>
+                <a16:creationId xmlns:a16="http://schemas.microsoft.com/office/drawing/2014/main" id="{478009B8-5321-449E-9A79-C0F00817868F}"/>
               </a:ext>
             </a:extLst>
           </p:cNvPr>
@@ -16253,7 +16253,7 @@
           <p:cNvPr id="115" name="">
             <a:extLst xmlns:a="http://schemas.openxmlformats.org/drawingml/2006/main">
               <a:ext uri="{FF2B5EF4-FFF2-40B4-BE49-F238E27FC236}">
-                <a16:creationId xmlns:a16="http://schemas.microsoft.com/office/drawing/2014/main" id="{C3C4F99D-2316-4678-B554-4E4737A06D77}"/>
+                <a16:creationId xmlns:a16="http://schemas.microsoft.com/office/drawing/2014/main" id="{CE266339-F343-40A9-8810-0B7ABC9B4A7C}"/>
               </a:ext>
             </a:extLst>
           </p:cNvPr>
@@ -16310,7 +16310,7 @@
           <p:cNvPr id="116" name="">
             <a:extLst xmlns:a="http://schemas.openxmlformats.org/drawingml/2006/main">
               <a:ext uri="{FF2B5EF4-FFF2-40B4-BE49-F238E27FC236}">
-                <a16:creationId xmlns:a16="http://schemas.microsoft.com/office/drawing/2014/main" id="{AA09C433-A3D7-455B-83AF-D203F0FCCE63}"/>
+                <a16:creationId xmlns:a16="http://schemas.microsoft.com/office/drawing/2014/main" id="{5CA19BC8-B1D4-43BA-8B02-05A6C383A0B5}"/>
               </a:ext>
             </a:extLst>
           </p:cNvPr>
@@ -16394,7 +16394,7 @@
           <p:cNvPr id="117" name="">
             <a:extLst xmlns:a="http://schemas.openxmlformats.org/drawingml/2006/main">
               <a:ext uri="{FF2B5EF4-FFF2-40B4-BE49-F238E27FC236}">
-                <a16:creationId xmlns:a16="http://schemas.microsoft.com/office/drawing/2014/main" id="{454F36F2-770F-4F12-964C-08E74942F704}"/>
+                <a16:creationId xmlns:a16="http://schemas.microsoft.com/office/drawing/2014/main" id="{B4DC9FD9-97D6-40BE-B843-B4C12E5FE1F6}"/>
               </a:ext>
             </a:extLst>
           </p:cNvPr>
@@ -16501,7 +16501,7 @@
           <p:cNvPr id="118" name="">
             <a:extLst xmlns:a="http://schemas.openxmlformats.org/drawingml/2006/main">
               <a:ext uri="{FF2B5EF4-FFF2-40B4-BE49-F238E27FC236}">
-                <a16:creationId xmlns:a16="http://schemas.microsoft.com/office/drawing/2014/main" id="{9A541ABE-9205-4D5D-8158-A1100103999E}"/>
+                <a16:creationId xmlns:a16="http://schemas.microsoft.com/office/drawing/2014/main" id="{54938F13-ABA8-484A-AB43-7E816CD9C18E}"/>
               </a:ext>
             </a:extLst>
           </p:cNvPr>
@@ -16608,7 +16608,7 @@
           <p:cNvPr id="121" name="">
             <a:extLst xmlns:a="http://schemas.openxmlformats.org/drawingml/2006/main">
               <a:ext uri="{FF2B5EF4-FFF2-40B4-BE49-F238E27FC236}">
-                <a16:creationId xmlns:a16="http://schemas.microsoft.com/office/drawing/2014/main" id="{549DD2D2-02F9-4368-9AD9-95BF0B13BCEC}"/>
+                <a16:creationId xmlns:a16="http://schemas.microsoft.com/office/drawing/2014/main" id="{6D7C62AE-EBE1-4080-A4C8-D7FEB0A8B6D6}"/>
               </a:ext>
             </a:extLst>
           </p:cNvPr>
@@ -16715,7 +16715,7 @@
           <p:cNvPr id="122" name="">
             <a:extLst xmlns:a="http://schemas.openxmlformats.org/drawingml/2006/main">
               <a:ext uri="{FF2B5EF4-FFF2-40B4-BE49-F238E27FC236}">
-                <a16:creationId xmlns:a16="http://schemas.microsoft.com/office/drawing/2014/main" id="{A46853E6-B672-4648-B425-FE7740F27BC5}"/>
+                <a16:creationId xmlns:a16="http://schemas.microsoft.com/office/drawing/2014/main" id="{63DBA83E-2A17-46A4-A35B-9B4E64F7E314}"/>
               </a:ext>
             </a:extLst>
           </p:cNvPr>
@@ -16822,7 +16822,7 @@
           <p:cNvPr id="125" name="">
             <a:extLst xmlns:a="http://schemas.openxmlformats.org/drawingml/2006/main">
               <a:ext uri="{FF2B5EF4-FFF2-40B4-BE49-F238E27FC236}">
-                <a16:creationId xmlns:a16="http://schemas.microsoft.com/office/drawing/2014/main" id="{276404BA-037D-45E2-B51A-D947172E2330}"/>
+                <a16:creationId xmlns:a16="http://schemas.microsoft.com/office/drawing/2014/main" id="{2E910AAE-DF15-4286-8B69-5EBC83F63629}"/>
               </a:ext>
             </a:extLst>
           </p:cNvPr>
@@ -16879,7 +16879,7 @@
           <p:cNvPr id="126" name="">
             <a:extLst xmlns:a="http://schemas.openxmlformats.org/drawingml/2006/main">
               <a:ext uri="{FF2B5EF4-FFF2-40B4-BE49-F238E27FC236}">
-                <a16:creationId xmlns:a16="http://schemas.microsoft.com/office/drawing/2014/main" id="{44F6EDAD-096D-46CD-A12A-06661749D584}"/>
+                <a16:creationId xmlns:a16="http://schemas.microsoft.com/office/drawing/2014/main" id="{F083E1FE-BD9F-422E-91F7-F809AE29B585}"/>
               </a:ext>
             </a:extLst>
           </p:cNvPr>
@@ -16934,7 +16934,7 @@
     </p:spTree>
     <p:extLst>
       <p:ext uri="{BB962C8B-B14F-4D97-AF65-F5344CB8AC3E}">
-        <p14:creationId xmlns:p14="http://schemas.microsoft.com/office/powerpoint/2010/main" val="225704240"/>
+        <p14:creationId xmlns:p14="http://schemas.microsoft.com/office/powerpoint/2010/main" val="1694290044"/>
       </p:ext>
     </p:extLst>
   </p:cSld>
@@ -16962,7 +16962,7 @@
           <p:nvPr/>
         </p:nvPicPr>
         <p:blipFill rotWithShape="1">
-          <a:blip xmlns:r="http://schemas.openxmlformats.org/officeDocument/2006/relationships" xmlns:a="http://schemas.openxmlformats.org/drawingml/2006/main" r:embed="R7e44f843639c492b">
+          <a:blip xmlns:r="http://schemas.openxmlformats.org/officeDocument/2006/relationships" xmlns:a="http://schemas.openxmlformats.org/drawingml/2006/main" r:embed="Rb12a526ab7334b02">
             <a:alphaModFix/>
           </a:blip>
           <a:srcRect xmlns:a="http://schemas.openxmlformats.org/drawingml/2006/main" l="0" t="0" r="0" b="98001"/>
@@ -16990,7 +16990,7 @@
           <p:nvPr/>
         </p:nvPicPr>
         <p:blipFill>
-          <a:blip xmlns:r="http://schemas.openxmlformats.org/officeDocument/2006/relationships" xmlns:a="http://schemas.openxmlformats.org/drawingml/2006/main" r:embed="R701f3176c51f4d28">
+          <a:blip xmlns:r="http://schemas.openxmlformats.org/officeDocument/2006/relationships" xmlns:a="http://schemas.openxmlformats.org/drawingml/2006/main" r:embed="Ra57e7a14d8cf4a28">
             <a:alphaModFix/>
           </a:blip>
           <a:stretch xmlns:a="http://schemas.openxmlformats.org/drawingml/2006/main">
@@ -17015,7 +17015,7 @@
           <p:cNvPr id="118" name="Google Shape;118;p21">
             <a:extLst xmlns:a="http://schemas.openxmlformats.org/drawingml/2006/main">
               <a:ext uri="{FF2B5EF4-FFF2-40B4-BE49-F238E27FC236}">
-                <a16:creationId xmlns:a16="http://schemas.microsoft.com/office/drawing/2014/main" id="{BDC9E9A8-B156-4C94-872B-08869A18A4EA}"/>
+                <a16:creationId xmlns:a16="http://schemas.microsoft.com/office/drawing/2014/main" id="{FF05AA0D-4E6D-431D-BE0B-AEB77DFF303F}"/>
               </a:ext>
             </a:extLst>
           </p:cNvPr>
@@ -17066,7 +17066,7 @@
           <p:cNvPr id="119" name="Google Shape;119;p21">
             <a:extLst xmlns:a="http://schemas.openxmlformats.org/drawingml/2006/main">
               <a:ext uri="{FF2B5EF4-FFF2-40B4-BE49-F238E27FC236}">
-                <a16:creationId xmlns:a16="http://schemas.microsoft.com/office/drawing/2014/main" id="{D5870A05-F9C3-433B-84C2-CE56F4A1CCB8}"/>
+                <a16:creationId xmlns:a16="http://schemas.microsoft.com/office/drawing/2014/main" id="{84BEA715-662B-45D8-9DDF-137B984C47E6}"/>
               </a:ext>
             </a:extLst>
           </p:cNvPr>
@@ -17124,7 +17124,7 @@
           <p:cNvPr id="122" name="">
             <a:extLst xmlns:a="http://schemas.openxmlformats.org/drawingml/2006/main">
               <a:ext uri="{FF2B5EF4-FFF2-40B4-BE49-F238E27FC236}">
-                <a16:creationId xmlns:a16="http://schemas.microsoft.com/office/drawing/2014/main" id="{08AA10DB-0D5E-41D3-889B-9A19D8716111}"/>
+                <a16:creationId xmlns:a16="http://schemas.microsoft.com/office/drawing/2014/main" id="{127E8FD2-947B-404B-86A3-4597DA5BEA5C}"/>
               </a:ext>
             </a:extLst>
           </p:cNvPr>
@@ -17181,7 +17181,7 @@
           <p:cNvPr id="123" name="">
             <a:extLst xmlns:a="http://schemas.openxmlformats.org/drawingml/2006/main">
               <a:ext uri="{FF2B5EF4-FFF2-40B4-BE49-F238E27FC236}">
-                <a16:creationId xmlns:a16="http://schemas.microsoft.com/office/drawing/2014/main" id="{E24D88D5-14B2-4A68-96B7-8C28E95FD4F1}"/>
+                <a16:creationId xmlns:a16="http://schemas.microsoft.com/office/drawing/2014/main" id="{3B2FF6B1-EE64-440A-B34D-49AE53A1AEA5}"/>
               </a:ext>
             </a:extLst>
           </p:cNvPr>
@@ -17925,7 +17925,7 @@
     </p:spTree>
     <p:extLst>
       <p:ext uri="{BB962C8B-B14F-4D97-AF65-F5344CB8AC3E}">
-        <p14:creationId xmlns:p14="http://schemas.microsoft.com/office/powerpoint/2010/main" val="534530350"/>
+        <p14:creationId xmlns:p14="http://schemas.microsoft.com/office/powerpoint/2010/main" val="520978006"/>
       </p:ext>
     </p:extLst>
   </p:cSld>

--- a/docs/submission/Irene-AI-Builder-Cup.pptx
+++ b/docs/submission/Irene-AI-Builder-Cup.pptx
@@ -2,46 +2,46 @@
 <file path=ppt/presentation.xml><?xml version="1.0" encoding="utf-8"?>
 <p:presentation xmlns:p="http://schemas.openxmlformats.org/presentationml/2006/main" embedTrueTypeFonts="1" saveSubsetFonts="0">
   <p:sldMasterIdLst>
-    <p:sldMasterId xmlns:r="http://schemas.openxmlformats.org/officeDocument/2006/relationships" id="2147483648" r:id="Rf82d6318373c4427"/>
+    <p:sldMasterId xmlns:r="http://schemas.openxmlformats.org/officeDocument/2006/relationships" id="2147483648" r:id="R20163d5cba974cc6"/>
   </p:sldMasterIdLst>
   <p:notesMasterIdLst>
-    <p:notesMasterId xmlns:r="http://schemas.openxmlformats.org/officeDocument/2006/relationships" r:id="R55af141a9a91461f"/>
+    <p:notesMasterId xmlns:r="http://schemas.openxmlformats.org/officeDocument/2006/relationships" r:id="R259699ed4c3540cc"/>
   </p:notesMasterIdLst>
   <p:sldIdLst>
-    <p:sldId xmlns:r="http://schemas.openxmlformats.org/officeDocument/2006/relationships" id="256" r:id="R90bb4c7345bc40cf"/>
-    <p:sldId xmlns:r="http://schemas.openxmlformats.org/officeDocument/2006/relationships" id="257" r:id="Rc46abe00eacc4fbd"/>
-    <p:sldId xmlns:r="http://schemas.openxmlformats.org/officeDocument/2006/relationships" id="258" r:id="Rf3714d8e49d64aa4"/>
-    <p:sldId xmlns:r="http://schemas.openxmlformats.org/officeDocument/2006/relationships" id="259" r:id="R9f3498fad9494989"/>
-    <p:sldId xmlns:r="http://schemas.openxmlformats.org/officeDocument/2006/relationships" id="260" r:id="R68455f57373a4559"/>
-    <p:sldId xmlns:r="http://schemas.openxmlformats.org/officeDocument/2006/relationships" id="261" r:id="R23fff55b99f44afa"/>
-    <p:sldId xmlns:r="http://schemas.openxmlformats.org/officeDocument/2006/relationships" id="262" r:id="Ra9c84be9d87c438c"/>
-    <p:sldId xmlns:r="http://schemas.openxmlformats.org/officeDocument/2006/relationships" id="263" r:id="Rbc3125a9dd0b4a63"/>
-    <p:sldId xmlns:r="http://schemas.openxmlformats.org/officeDocument/2006/relationships" id="264" r:id="R1cb98cf856164204"/>
-    <p:sldId xmlns:r="http://schemas.openxmlformats.org/officeDocument/2006/relationships" id="265" r:id="R01bad33f4335462e"/>
-    <p:sldId xmlns:r="http://schemas.openxmlformats.org/officeDocument/2006/relationships" id="266" r:id="Rdeb2233a0a334bad"/>
-    <p:sldId xmlns:r="http://schemas.openxmlformats.org/officeDocument/2006/relationships" id="267" r:id="R8121f76cf68e441f"/>
-    <p:sldId xmlns:r="http://schemas.openxmlformats.org/officeDocument/2006/relationships" id="268" r:id="R73e22d4bcc434f21"/>
-    <p:sldId xmlns:r="http://schemas.openxmlformats.org/officeDocument/2006/relationships" id="269" r:id="Rebfd2b0d4d124a18"/>
-    <p:sldId xmlns:r="http://schemas.openxmlformats.org/officeDocument/2006/relationships" id="270" r:id="R6a163afca3234aed"/>
-    <p:sldId xmlns:r="http://schemas.openxmlformats.org/officeDocument/2006/relationships" id="271" r:id="Rc78e485df60b4ef3"/>
+    <p:sldId xmlns:r="http://schemas.openxmlformats.org/officeDocument/2006/relationships" id="256" r:id="R590c718d31e84cce"/>
+    <p:sldId xmlns:r="http://schemas.openxmlformats.org/officeDocument/2006/relationships" id="257" r:id="Rde3dc87dbe6d4ca8"/>
+    <p:sldId xmlns:r="http://schemas.openxmlformats.org/officeDocument/2006/relationships" id="258" r:id="R23241dc47b904bd7"/>
+    <p:sldId xmlns:r="http://schemas.openxmlformats.org/officeDocument/2006/relationships" id="259" r:id="R2fc04a23822e4b0b"/>
+    <p:sldId xmlns:r="http://schemas.openxmlformats.org/officeDocument/2006/relationships" id="260" r:id="R569ab8657f7642bd"/>
+    <p:sldId xmlns:r="http://schemas.openxmlformats.org/officeDocument/2006/relationships" id="261" r:id="Rf7a165a561bd4b4e"/>
+    <p:sldId xmlns:r="http://schemas.openxmlformats.org/officeDocument/2006/relationships" id="262" r:id="R835cd0ce33ea495e"/>
+    <p:sldId xmlns:r="http://schemas.openxmlformats.org/officeDocument/2006/relationships" id="263" r:id="Rebb9ed2c3452485a"/>
+    <p:sldId xmlns:r="http://schemas.openxmlformats.org/officeDocument/2006/relationships" id="264" r:id="R057242cc300c41b5"/>
+    <p:sldId xmlns:r="http://schemas.openxmlformats.org/officeDocument/2006/relationships" id="265" r:id="R69e20ec6eaee432f"/>
+    <p:sldId xmlns:r="http://schemas.openxmlformats.org/officeDocument/2006/relationships" id="266" r:id="R03a1dc3338424d66"/>
+    <p:sldId xmlns:r="http://schemas.openxmlformats.org/officeDocument/2006/relationships" id="267" r:id="Rb737dd9e0e254b6d"/>
+    <p:sldId xmlns:r="http://schemas.openxmlformats.org/officeDocument/2006/relationships" id="268" r:id="Rac3086479dd541f1"/>
+    <p:sldId xmlns:r="http://schemas.openxmlformats.org/officeDocument/2006/relationships" id="269" r:id="R5e3ff214f8604484"/>
+    <p:sldId xmlns:r="http://schemas.openxmlformats.org/officeDocument/2006/relationships" id="270" r:id="Rd11a0c21287e4076"/>
+    <p:sldId xmlns:r="http://schemas.openxmlformats.org/officeDocument/2006/relationships" id="271" r:id="Rf28a6f30304e4834"/>
   </p:sldIdLst>
   <p:sldSz cx="9144000" cy="5143500"/>
   <p:notesSz cx="6858000" cy="9144000"/>
   <p:embeddedFontLst>
     <p:embeddedFont>
       <p:font typeface="Google Sans Flex Medium"/>
-      <p:regular xmlns:r="http://schemas.openxmlformats.org/officeDocument/2006/relationships" r:id="Rf753d3bd16ca4ade"/>
-      <p:bold xmlns:r="http://schemas.openxmlformats.org/officeDocument/2006/relationships" r:id="R680633637e434962"/>
+      <p:regular xmlns:r="http://schemas.openxmlformats.org/officeDocument/2006/relationships" r:id="R6ec692715f284aa0"/>
+      <p:bold xmlns:r="http://schemas.openxmlformats.org/officeDocument/2006/relationships" r:id="R73fc49ed79e242e4"/>
     </p:embeddedFont>
     <p:embeddedFont>
       <p:font typeface="Google Sans Flex"/>
-      <p:regular xmlns:r="http://schemas.openxmlformats.org/officeDocument/2006/relationships" r:id="R800fcb10882f4e1c"/>
-      <p:bold xmlns:r="http://schemas.openxmlformats.org/officeDocument/2006/relationships" r:id="R16f9d30fe7104131"/>
+      <p:regular xmlns:r="http://schemas.openxmlformats.org/officeDocument/2006/relationships" r:id="R6cb0d282e9d4426e"/>
+      <p:bold xmlns:r="http://schemas.openxmlformats.org/officeDocument/2006/relationships" r:id="Rcefdb3d6b7ad4e78"/>
     </p:embeddedFont>
     <p:embeddedFont>
       <p:font typeface="Google Sans Flex SemiBold"/>
-      <p:regular xmlns:r="http://schemas.openxmlformats.org/officeDocument/2006/relationships" r:id="Re52c896f7e6b43db"/>
-      <p:bold xmlns:r="http://schemas.openxmlformats.org/officeDocument/2006/relationships" r:id="Reb22b6189cef4569"/>
+      <p:regular xmlns:r="http://schemas.openxmlformats.org/officeDocument/2006/relationships" r:id="R1c2ad2964ba8459c"/>
+      <p:bold xmlns:r="http://schemas.openxmlformats.org/officeDocument/2006/relationships" r:id="Re7a6627cfb234055"/>
     </p:embeddedFont>
   </p:embeddedFontLst>
   <p:defaultTextStyle>
@@ -1984,7 +1984,7 @@
           <ns0:cNvPr id="10" name="Google Shape;10;p2">
             <ns1:extLst>
               <ns1:ext uri="{FF2B5EF4-FFF2-40B4-BE49-F238E27FC236}">
-                <ns2:creationId id="{DBBF676E-E66E-4548-81CA-57BFC5FFE9BC}"/>
+                <ns2:creationId id="{EBF00891-78AC-4019-89ED-601B92AD03DA}"/>
               </ns1:ext>
             </ns1:extLst>
           </ns0:cNvPr>
@@ -2117,7 +2117,7 @@
           <ns0:cNvPr id="11" name="Google Shape;11;p2">
             <ns1:extLst>
               <ns1:ext uri="{FF2B5EF4-FFF2-40B4-BE49-F238E27FC236}">
-                <ns2:creationId id="{2E80DC09-9B15-4CC3-A794-549C4750ECCE}"/>
+                <ns2:creationId id="{0557A22C-82CF-4277-9C10-0483E9F87F9D}"/>
               </ns1:ext>
             </ns1:extLst>
           </ns0:cNvPr>
@@ -2277,7 +2277,7 @@
           <ns0:cNvPr id="12" name="Google Shape;12;p2">
             <ns1:extLst>
               <ns1:ext uri="{FF2B5EF4-FFF2-40B4-BE49-F238E27FC236}">
-                <ns2:creationId id="{37639444-9CE8-4AF0-83C6-F27670ED7761}"/>
+                <ns2:creationId id="{CA3139DF-B5C0-416F-89B2-5A8F61FA0538}"/>
               </ns1:ext>
             </ns1:extLst>
           </ns0:cNvPr>
@@ -2378,7 +2378,7 @@
           <ns0:cNvPr id="45" name="Google Shape;45;p11">
             <ns1:extLst>
               <ns1:ext uri="{FF2B5EF4-FFF2-40B4-BE49-F238E27FC236}">
-                <ns2:creationId id="{3741BE2E-BC22-4225-A616-FD454D9C81E3}"/>
+                <ns2:creationId id="{2B6C4C04-A14A-465C-B7CA-F3CF42812AE3}"/>
               </ns1:ext>
             </ns1:extLst>
           </ns0:cNvPr>
@@ -2515,7 +2515,7 @@
           <ns0:cNvPr id="46" name="Google Shape;46;p11">
             <ns1:extLst>
               <ns1:ext uri="{FF2B5EF4-FFF2-40B4-BE49-F238E27FC236}">
-                <ns2:creationId id="{1A0E04AD-E6A4-48DA-85B8-5AC49A2B8D37}"/>
+                <ns2:creationId id="{9932507C-CA30-487C-A2E1-099704A9942E}"/>
               </ns1:ext>
             </ns1:extLst>
           </ns0:cNvPr>
@@ -2648,7 +2648,7 @@
           <ns0:cNvPr id="47" name="Google Shape;47;p11">
             <ns1:extLst>
               <ns1:ext uri="{FF2B5EF4-FFF2-40B4-BE49-F238E27FC236}">
-                <ns2:creationId id="{397E6DA4-9A0B-472A-A63D-57715575482B}"/>
+                <ns2:creationId id="{D1F3EA68-6641-4D1E-8562-BA45928D7E7E}"/>
               </ns1:ext>
             </ns1:extLst>
           </ns0:cNvPr>
@@ -2749,7 +2749,7 @@
           <ns0:cNvPr id="49" name="Google Shape;49;p12">
             <ns1:extLst>
               <ns1:ext uri="{FF2B5EF4-FFF2-40B4-BE49-F238E27FC236}">
-                <ns2:creationId id="{82B6124D-6FB5-4201-AD63-9A9D802F97BC}"/>
+                <ns2:creationId id="{44FBA244-9E40-4B79-8F1E-0C43824A3C0F}"/>
               </ns1:ext>
             </ns1:extLst>
           </ns0:cNvPr>
@@ -2850,7 +2850,7 @@
           <ns0:cNvPr id="14" name="Google Shape;14;p3">
             <ns1:extLst>
               <ns1:ext uri="{FF2B5EF4-FFF2-40B4-BE49-F238E27FC236}">
-                <ns2:creationId id="{6C1BE077-DE54-4945-95C7-8582B9DE652A}"/>
+                <ns2:creationId id="{191040F9-7FA5-4E18-837C-EAA369AD916B}"/>
               </ns1:ext>
             </ns1:extLst>
           </ns0:cNvPr>
@@ -2983,7 +2983,7 @@
           <ns0:cNvPr id="15" name="Google Shape;15;p3">
             <ns1:extLst>
               <ns1:ext uri="{FF2B5EF4-FFF2-40B4-BE49-F238E27FC236}">
-                <ns2:creationId id="{DCD6A61F-682A-4A8F-9102-27572A57EB0C}"/>
+                <ns2:creationId id="{EAC81088-C862-4217-A9B0-41D5CA1FA337}"/>
               </ns1:ext>
             </ns1:extLst>
           </ns0:cNvPr>
@@ -3084,7 +3084,7 @@
           <ns0:cNvPr id="17" name="Google Shape;17;p4">
             <ns1:extLst>
               <ns1:ext uri="{FF2B5EF4-FFF2-40B4-BE49-F238E27FC236}">
-                <ns2:creationId id="{3633E63B-7B27-4A5F-A2FB-C14C4BDCC20D}"/>
+                <ns2:creationId id="{BC2EFAEB-426B-44BB-AAF7-C5FD754F7976}"/>
               </ns1:ext>
             </ns1:extLst>
           </ns0:cNvPr>
@@ -3217,7 +3217,7 @@
           <ns0:cNvPr id="18" name="Google Shape;18;p4">
             <ns1:extLst>
               <ns1:ext uri="{FF2B5EF4-FFF2-40B4-BE49-F238E27FC236}">
-                <ns2:creationId id="{BAB20372-40C7-4FB3-9133-BE26D930FC5A}"/>
+                <ns2:creationId id="{FF1A160B-053F-47DB-85B3-9CF442A52905}"/>
               </ns1:ext>
             </ns1:extLst>
           </ns0:cNvPr>
@@ -3350,7 +3350,7 @@
           <ns0:cNvPr id="19" name="Google Shape;19;p4">
             <ns1:extLst>
               <ns1:ext uri="{FF2B5EF4-FFF2-40B4-BE49-F238E27FC236}">
-                <ns2:creationId id="{EEF2260D-163A-476D-90EF-E2DDB2CC4712}"/>
+                <ns2:creationId id="{690EB6F7-1C2D-4BA0-A08C-5A0F62274679}"/>
               </ns1:ext>
             </ns1:extLst>
           </ns0:cNvPr>
@@ -3451,7 +3451,7 @@
           <ns0:cNvPr id="21" name="Google Shape;21;p5">
             <ns1:extLst>
               <ns1:ext uri="{FF2B5EF4-FFF2-40B4-BE49-F238E27FC236}">
-                <ns2:creationId id="{104B52B5-0090-4261-AA3B-FF2ECF18900F}"/>
+                <ns2:creationId id="{C965CB2D-89DD-4DE7-821C-2BAF43C0EA2E}"/>
               </ns1:ext>
             </ns1:extLst>
           </ns0:cNvPr>
@@ -3584,7 +3584,7 @@
           <ns0:cNvPr id="22" name="Google Shape;22;p5">
             <ns1:extLst>
               <ns1:ext uri="{FF2B5EF4-FFF2-40B4-BE49-F238E27FC236}">
-                <ns2:creationId id="{DA2B9E08-11C7-47D6-BA40-7A7DB45775A2}"/>
+                <ns2:creationId id="{567F50B8-DE0C-4480-BDCF-CD4B1892BF12}"/>
               </ns1:ext>
             </ns1:extLst>
           </ns0:cNvPr>
@@ -3717,7 +3717,7 @@
           <ns0:cNvPr id="23" name="Google Shape;23;p5">
             <ns1:extLst>
               <ns1:ext uri="{FF2B5EF4-FFF2-40B4-BE49-F238E27FC236}">
-                <ns2:creationId id="{8623ADB1-4626-4567-AEB2-07794BB56A56}"/>
+                <ns2:creationId id="{BBD898DE-2C15-4F63-A4A7-614CD9347A92}"/>
               </ns1:ext>
             </ns1:extLst>
           </ns0:cNvPr>
@@ -3850,7 +3850,7 @@
           <ns0:cNvPr id="24" name="Google Shape;24;p5">
             <ns1:extLst>
               <ns1:ext uri="{FF2B5EF4-FFF2-40B4-BE49-F238E27FC236}">
-                <ns2:creationId id="{82587E6D-7562-4F04-91E1-FF4B2EA536E8}"/>
+                <ns2:creationId id="{FAE4363C-5B70-4721-8819-488C29D98689}"/>
               </ns1:ext>
             </ns1:extLst>
           </ns0:cNvPr>
@@ -3951,7 +3951,7 @@
           <ns0:cNvPr id="26" name="Google Shape;26;p6">
             <ns1:extLst>
               <ns1:ext uri="{FF2B5EF4-FFF2-40B4-BE49-F238E27FC236}">
-                <ns2:creationId id="{95A8D21E-0854-46E5-AAD0-11D4CA4C03D0}"/>
+                <ns2:creationId id="{1D0F2B15-DC49-440B-AEE6-DA52F780B784}"/>
               </ns1:ext>
             </ns1:extLst>
           </ns0:cNvPr>
@@ -4084,7 +4084,7 @@
           <ns0:cNvPr id="27" name="Google Shape;27;p6">
             <ns1:extLst>
               <ns1:ext uri="{FF2B5EF4-FFF2-40B4-BE49-F238E27FC236}">
-                <ns2:creationId id="{F1C8A8E8-3B24-4F13-B848-88E68E7C4F47}"/>
+                <ns2:creationId id="{DCBA2E7F-165B-4D26-9591-86FF0B33E281}"/>
               </ns1:ext>
             </ns1:extLst>
           </ns0:cNvPr>
@@ -4185,7 +4185,7 @@
           <ns0:cNvPr id="29" name="Google Shape;29;p7">
             <ns1:extLst>
               <ns1:ext uri="{FF2B5EF4-FFF2-40B4-BE49-F238E27FC236}">
-                <ns2:creationId id="{3AE5EDEB-F393-49F5-ABC5-82DBBE854C0C}"/>
+                <ns2:creationId id="{A66A8839-1812-4CD6-8AE8-B0810F672330}"/>
               </ns1:ext>
             </ns1:extLst>
           </ns0:cNvPr>
@@ -4318,7 +4318,7 @@
           <ns0:cNvPr id="30" name="Google Shape;30;p7">
             <ns1:extLst>
               <ns1:ext uri="{FF2B5EF4-FFF2-40B4-BE49-F238E27FC236}">
-                <ns2:creationId id="{E2422727-7620-41A6-AF89-AA51FCDE25C8}"/>
+                <ns2:creationId id="{98693306-3158-40CD-9DC2-7A7C21185DD4}"/>
               </ns1:ext>
             </ns1:extLst>
           </ns0:cNvPr>
@@ -4451,7 +4451,7 @@
           <ns0:cNvPr id="31" name="Google Shape;31;p7">
             <ns1:extLst>
               <ns1:ext uri="{FF2B5EF4-FFF2-40B4-BE49-F238E27FC236}">
-                <ns2:creationId id="{BB1DBB76-3152-4FB2-BAC7-C2643971A1EC}"/>
+                <ns2:creationId id="{42819456-C7BC-4E33-ACDB-49ADFC7FFF0B}"/>
               </ns1:ext>
             </ns1:extLst>
           </ns0:cNvPr>
@@ -4552,7 +4552,7 @@
           <ns0:cNvPr id="33" name="Google Shape;33;p8">
             <ns1:extLst>
               <ns1:ext uri="{FF2B5EF4-FFF2-40B4-BE49-F238E27FC236}">
-                <ns2:creationId id="{2D8469DF-E0F2-49DF-B0D6-38CC52881D3A}"/>
+                <ns2:creationId id="{9AE4E70B-4ABA-460F-8167-403C7F7D7D9A}"/>
               </ns1:ext>
             </ns1:extLst>
           </ns0:cNvPr>
@@ -4685,7 +4685,7 @@
           <ns0:cNvPr id="34" name="Google Shape;34;p8">
             <ns1:extLst>
               <ns1:ext uri="{FF2B5EF4-FFF2-40B4-BE49-F238E27FC236}">
-                <ns2:creationId id="{7AEF65CE-6DF5-4DE3-98C6-404296BEB6A5}"/>
+                <ns2:creationId id="{82EF22D9-7015-4155-8BB7-50F02ED9D740}"/>
               </ns1:ext>
             </ns1:extLst>
           </ns0:cNvPr>
@@ -4786,7 +4786,7 @@
           <ns0:cNvPr id="36" name="Google Shape;36;p9">
             <ns1:extLst>
               <ns1:ext uri="{FF2B5EF4-FFF2-40B4-BE49-F238E27FC236}">
-                <ns2:creationId id="{AE134925-52A6-4CC5-90BA-2067F987E5EA}"/>
+                <ns2:creationId id="{B544F621-F10D-4155-94C6-2FF817F4680B}"/>
               </ns1:ext>
             </ns1:extLst>
           </ns0:cNvPr>
@@ -4837,7 +4837,7 @@
           <ns0:cNvPr id="37" name="Google Shape;37;p9">
             <ns1:extLst>
               <ns1:ext uri="{FF2B5EF4-FFF2-40B4-BE49-F238E27FC236}">
-                <ns2:creationId id="{013FB23A-661D-4DBC-917E-5DC31603255C}"/>
+                <ns2:creationId id="{F71243F4-5BBE-4D63-A4A1-AD3CD5D21F01}"/>
               </ns1:ext>
             </ns1:extLst>
           </ns0:cNvPr>
@@ -4970,7 +4970,7 @@
           <ns0:cNvPr id="38" name="Google Shape;38;p9">
             <ns1:extLst>
               <ns1:ext uri="{FF2B5EF4-FFF2-40B4-BE49-F238E27FC236}">
-                <ns2:creationId id="{89A3672C-A45F-47B8-80F8-A3921AA79776}"/>
+                <ns2:creationId id="{CEAED73E-03CD-44C1-90D5-274586FAF778}"/>
               </ns1:ext>
             </ns1:extLst>
           </ns0:cNvPr>
@@ -5130,7 +5130,7 @@
           <ns0:cNvPr id="39" name="Google Shape;39;p9">
             <ns1:extLst>
               <ns1:ext uri="{FF2B5EF4-FFF2-40B4-BE49-F238E27FC236}">
-                <ns2:creationId id="{28488527-98FF-4BF8-95D9-F58D35860635}"/>
+                <ns2:creationId id="{938ED2A3-E508-4F5F-87B5-917FA788EA5E}"/>
               </ns1:ext>
             </ns1:extLst>
           </ns0:cNvPr>
@@ -5263,7 +5263,7 @@
           <ns0:cNvPr id="40" name="Google Shape;40;p9">
             <ns1:extLst>
               <ns1:ext uri="{FF2B5EF4-FFF2-40B4-BE49-F238E27FC236}">
-                <ns2:creationId id="{5D01E29D-204E-49D1-BAA9-E6C018ACA7B7}"/>
+                <ns2:creationId id="{EBE7132B-605D-494E-8978-A7B4BA84B371}"/>
               </ns1:ext>
             </ns1:extLst>
           </ns0:cNvPr>
@@ -5364,7 +5364,7 @@
           <ns0:cNvPr id="42" name="Google Shape;42;p10">
             <ns1:extLst>
               <ns1:ext uri="{FF2B5EF4-FFF2-40B4-BE49-F238E27FC236}">
-                <ns2:creationId id="{94EDCE73-61D0-409E-8D5E-289AEFE951A0}"/>
+                <ns2:creationId id="{C7DB788A-8623-4A42-B09D-D5EE062011DB}"/>
               </ns1:ext>
             </ns1:extLst>
           </ns0:cNvPr>
@@ -5412,7 +5412,7 @@
           <ns0:cNvPr id="43" name="Google Shape;43;p10">
             <ns1:extLst>
               <ns1:ext uri="{FF2B5EF4-FFF2-40B4-BE49-F238E27FC236}">
-                <ns2:creationId id="{8F9B2313-F063-404D-97C4-FFE724916165}"/>
+                <ns2:creationId id="{405D0566-5FD2-4B83-9178-85113402DE2A}"/>
               </ns1:ext>
             </ns1:extLst>
           </ns0:cNvPr>
@@ -5520,7 +5520,7 @@
           <ns0:cNvPr id="6" name="Google Shape;6;p1">
             <ns1:extLst>
               <ns1:ext uri="{FF2B5EF4-FFF2-40B4-BE49-F238E27FC236}">
-                <ns2:creationId id="{743C563A-B5CA-46D8-B318-714E17F29ABC}"/>
+                <ns2:creationId id="{7B090736-CB00-4E88-8D44-D8DE515CBCEC}"/>
               </ns1:ext>
             </ns1:extLst>
           </ns0:cNvPr>
@@ -5720,7 +5720,7 @@
           <ns0:cNvPr id="7" name="Google Shape;7;p1">
             <ns1:extLst>
               <ns1:ext uri="{FF2B5EF4-FFF2-40B4-BE49-F238E27FC236}">
-                <ns2:creationId id="{F504E5E2-7A15-48AD-94FF-74579E2E0D79}"/>
+                <ns2:creationId id="{19C77E1E-37FA-4EFF-B55E-7CDAA373F406}"/>
               </ns1:ext>
             </ns1:extLst>
           </ns0:cNvPr>
@@ -5947,7 +5947,7 @@
           <ns0:cNvPr id="8" name="Google Shape;8;p1">
             <ns1:extLst>
               <ns1:ext uri="{FF2B5EF4-FFF2-40B4-BE49-F238E27FC236}">
-                <ns2:creationId id="{8119565D-AF08-4DE4-A5B5-6071FDAA04B8}"/>
+                <ns2:creationId id="{D18CC3FB-A549-43D6-98D7-B389A052CFA2}"/>
               </ns1:ext>
             </ns1:extLst>
           </ns0:cNvPr>
@@ -6070,17 +6070,17 @@
   </ns0:cSld>
   <ns0:clrMap bg1="lt1" tx1="dk1" bg2="dk2" tx2="lt2" accent1="accent1" accent2="accent2" accent3="accent3" accent4="accent4" accent5="accent5" accent6="accent6" hlink="hlink" folHlink="folHlink"/>
   <ns0:sldLayoutIdLst>
-    <ns0:sldLayoutId id="2147483649" ns3:id="Rfe7aa11a9a7645c0"/>
-    <ns0:sldLayoutId id="2147483650" ns3:id="R8848c413f26e4a34"/>
-    <ns0:sldLayoutId id="2147483651" ns3:id="R81155668c3914ac7"/>
-    <ns0:sldLayoutId id="2147483652" ns3:id="R9a74d84ecfc4417f"/>
-    <ns0:sldLayoutId id="2147483653" ns3:id="R39206dbdfbdf4d61"/>
-    <ns0:sldLayoutId id="2147483654" ns3:id="R1a2fbc0bbb7246d2"/>
-    <ns0:sldLayoutId id="2147483655" ns3:id="Ra54e6fd47eac44c4"/>
-    <ns0:sldLayoutId id="2147483656" ns3:id="R35f97a78e5fb4e30"/>
-    <ns0:sldLayoutId id="2147483657" ns3:id="Ra6433f0adba14e60"/>
-    <ns0:sldLayoutId id="2147483658" ns3:id="R3a7c41157f4a482c"/>
-    <ns0:sldLayoutId id="2147483659" ns3:id="Rcf1ba87ae69448d5"/>
+    <ns0:sldLayoutId id="2147483649" ns3:id="R764d130c423247a7"/>
+    <ns0:sldLayoutId id="2147483650" ns3:id="Rd0238091be394480"/>
+    <ns0:sldLayoutId id="2147483651" ns3:id="R238140957a1a4cbb"/>
+    <ns0:sldLayoutId id="2147483652" ns3:id="R380d8c1873244368"/>
+    <ns0:sldLayoutId id="2147483653" ns3:id="Rbcd2a6518f0f41eb"/>
+    <ns0:sldLayoutId id="2147483654" ns3:id="R8f5b72747ffa4a9d"/>
+    <ns0:sldLayoutId id="2147483655" ns3:id="Rd7c9bd2fa0954033"/>
+    <ns0:sldLayoutId id="2147483656" ns3:id="R44451d071b0d44f5"/>
+    <ns0:sldLayoutId id="2147483657" ns3:id="R735178b70d9a4811"/>
+    <ns0:sldLayoutId id="2147483658" ns3:id="Rab5762998c6a49e2"/>
+    <ns0:sldLayoutId id="2147483659" ns3:id="R524b6496bd7a46b7"/>
   </ns0:sldLayoutIdLst>
   <ns0:hf sldNum="0" hdr="0" ftr="0" dt="0"/>
   <ns0:txStyles>
@@ -7027,7 +7027,7 @@
           <p:cNvPr id="54" name="Google Shape;54;p13">
             <a:extLst xmlns:a="http://schemas.openxmlformats.org/drawingml/2006/main">
               <a:ext uri="{FF2B5EF4-FFF2-40B4-BE49-F238E27FC236}">
-                <a16:creationId xmlns:a16="http://schemas.microsoft.com/office/drawing/2014/main" id="{4DC99E5C-39E6-4A87-9400-4F428F80903F}"/>
+                <a16:creationId xmlns:a16="http://schemas.microsoft.com/office/drawing/2014/main" id="{1E4305B7-AF41-49EA-B5FA-4A0228ADFC42}"/>
               </a:ext>
             </a:extLst>
           </p:cNvPr>
@@ -7089,7 +7089,7 @@
           <p:nvPr/>
         </p:nvPicPr>
         <p:blipFill>
-          <a:blip xmlns:r="http://schemas.openxmlformats.org/officeDocument/2006/relationships" xmlns:a="http://schemas.openxmlformats.org/drawingml/2006/main" r:embed="Raef72ea5647244d7">
+          <a:blip xmlns:r="http://schemas.openxmlformats.org/officeDocument/2006/relationships" xmlns:a="http://schemas.openxmlformats.org/drawingml/2006/main" r:embed="Rbbac0acec99345ee">
             <a:alphaModFix/>
           </a:blip>
           <a:stretch xmlns:a="http://schemas.openxmlformats.org/drawingml/2006/main">
@@ -7118,7 +7118,7 @@
           <p:nvPr/>
         </p:nvPicPr>
         <p:blipFill rotWithShape="1">
-          <a:blip xmlns:r="http://schemas.openxmlformats.org/officeDocument/2006/relationships" xmlns:a="http://schemas.openxmlformats.org/drawingml/2006/main" r:embed="Rf599dba51daa4875">
+          <a:blip xmlns:r="http://schemas.openxmlformats.org/officeDocument/2006/relationships" xmlns:a="http://schemas.openxmlformats.org/drawingml/2006/main" r:embed="Reb726ae49da246b3">
             <a:alphaModFix/>
           </a:blip>
           <a:srcRect xmlns:a="http://schemas.openxmlformats.org/drawingml/2006/main" l="0" t="0" r="0" b="98001"/>
@@ -7142,7 +7142,7 @@
           <p:cNvPr id="57" name="">
             <a:extLst xmlns:a="http://schemas.openxmlformats.org/drawingml/2006/main">
               <a:ext uri="{FF2B5EF4-FFF2-40B4-BE49-F238E27FC236}">
-                <a16:creationId xmlns:a16="http://schemas.microsoft.com/office/drawing/2014/main" id="{43D0B2E9-37DF-4C84-A38B-136A8EE428F4}"/>
+                <a16:creationId xmlns:a16="http://schemas.microsoft.com/office/drawing/2014/main" id="{48C6A491-EA5D-44A8-8BD4-8FC18BCECEE9}"/>
               </a:ext>
             </a:extLst>
           </p:cNvPr>
@@ -7199,7 +7199,7 @@
           <p:cNvPr id="58" name="">
             <a:extLst xmlns:a="http://schemas.openxmlformats.org/drawingml/2006/main">
               <a:ext uri="{FF2B5EF4-FFF2-40B4-BE49-F238E27FC236}">
-                <a16:creationId xmlns:a16="http://schemas.microsoft.com/office/drawing/2014/main" id="{ECE9030F-E86D-4E3F-9285-B97D567EFECD}"/>
+                <a16:creationId xmlns:a16="http://schemas.microsoft.com/office/drawing/2014/main" id="{BEC1E8FD-AC44-48B5-83B0-596E21113389}"/>
               </a:ext>
             </a:extLst>
           </p:cNvPr>
@@ -7256,7 +7256,7 @@
           <p:cNvPr id="59" name="">
             <a:extLst xmlns:a="http://schemas.openxmlformats.org/drawingml/2006/main">
               <a:ext uri="{FF2B5EF4-FFF2-40B4-BE49-F238E27FC236}">
-                <a16:creationId xmlns:a16="http://schemas.microsoft.com/office/drawing/2014/main" id="{FA257850-E044-4C45-87A9-6343700294A7}"/>
+                <a16:creationId xmlns:a16="http://schemas.microsoft.com/office/drawing/2014/main" id="{57889145-AB10-450E-8A1E-EF2A312F4791}"/>
               </a:ext>
             </a:extLst>
           </p:cNvPr>
@@ -7303,7 +7303,7 @@
                 <a:ea typeface="Google Sans Flex"/>
                 <a:cs typeface="Google Sans Flex"/>
               </a:rPr>
-              <a:t>Problem Statement: Make therapist-led group support more affordable,</a:t>
+              <a:t>Problem Statement: Make therapy or therapist-led support more affordable,</a:t>
             </a:r>
           </a:p>
           <a:p xmlns:a="http://schemas.openxmlformats.org/drawingml/2006/main">
@@ -7334,7 +7334,7 @@
     </p:spTree>
     <p:extLst>
       <p:ext uri="{BB962C8B-B14F-4D97-AF65-F5344CB8AC3E}">
-        <p14:creationId xmlns:p14="http://schemas.microsoft.com/office/powerpoint/2010/main" val="325652219"/>
+        <p14:creationId xmlns:p14="http://schemas.microsoft.com/office/powerpoint/2010/main" val="1279961695"/>
       </p:ext>
     </p:extLst>
   </p:cSld>
@@ -7362,7 +7362,7 @@
           <p:nvPr/>
         </p:nvPicPr>
         <p:blipFill rotWithShape="1">
-          <a:blip xmlns:r="http://schemas.openxmlformats.org/officeDocument/2006/relationships" xmlns:a="http://schemas.openxmlformats.org/drawingml/2006/main" r:embed="R8290d9a1d5d44be0">
+          <a:blip xmlns:r="http://schemas.openxmlformats.org/officeDocument/2006/relationships" xmlns:a="http://schemas.openxmlformats.org/drawingml/2006/main" r:embed="Ree20234aa51a4f66">
             <a:alphaModFix/>
           </a:blip>
           <a:srcRect xmlns:a="http://schemas.openxmlformats.org/drawingml/2006/main" l="0" t="0" r="0" b="98001"/>
@@ -7390,7 +7390,7 @@
           <p:nvPr/>
         </p:nvPicPr>
         <p:blipFill>
-          <a:blip xmlns:r="http://schemas.openxmlformats.org/officeDocument/2006/relationships" xmlns:a="http://schemas.openxmlformats.org/drawingml/2006/main" r:embed="R8e11143d0fc14746">
+          <a:blip xmlns:r="http://schemas.openxmlformats.org/officeDocument/2006/relationships" xmlns:a="http://schemas.openxmlformats.org/drawingml/2006/main" r:embed="R02e43fe303d74e1c">
             <a:alphaModFix/>
           </a:blip>
           <a:stretch xmlns:a="http://schemas.openxmlformats.org/drawingml/2006/main">
@@ -7415,7 +7415,7 @@
           <p:cNvPr id="126" name="Google Shape;126;p22">
             <a:extLst xmlns:a="http://schemas.openxmlformats.org/drawingml/2006/main">
               <a:ext uri="{FF2B5EF4-FFF2-40B4-BE49-F238E27FC236}">
-                <a16:creationId xmlns:a16="http://schemas.microsoft.com/office/drawing/2014/main" id="{6C07F881-8EC1-485E-8117-C29A84687152}"/>
+                <a16:creationId xmlns:a16="http://schemas.microsoft.com/office/drawing/2014/main" id="{785A6655-4CD9-4C85-89B1-717ECC33FF5F}"/>
               </a:ext>
             </a:extLst>
           </p:cNvPr>
@@ -7466,7 +7466,7 @@
           <p:cNvPr id="127" name="Google Shape;127;p22">
             <a:extLst xmlns:a="http://schemas.openxmlformats.org/drawingml/2006/main">
               <a:ext uri="{FF2B5EF4-FFF2-40B4-BE49-F238E27FC236}">
-                <a16:creationId xmlns:a16="http://schemas.microsoft.com/office/drawing/2014/main" id="{C006001B-416B-4F26-A921-A5EBB966D3AA}"/>
+                <a16:creationId xmlns:a16="http://schemas.microsoft.com/office/drawing/2014/main" id="{3E07F4E7-8C5D-4C88-99B2-A0ADB8B5A237}"/>
               </a:ext>
             </a:extLst>
           </p:cNvPr>
@@ -7524,7 +7524,7 @@
           <p:cNvPr id="130" name="">
             <a:extLst xmlns:a="http://schemas.openxmlformats.org/drawingml/2006/main">
               <a:ext uri="{FF2B5EF4-FFF2-40B4-BE49-F238E27FC236}">
-                <a16:creationId xmlns:a16="http://schemas.microsoft.com/office/drawing/2014/main" id="{0E6AB673-A6F3-43E4-8EFD-2AFF50F59058}"/>
+                <a16:creationId xmlns:a16="http://schemas.microsoft.com/office/drawing/2014/main" id="{51F08577-D8FE-41A4-8164-05D9DA540CF8}"/>
               </a:ext>
             </a:extLst>
           </p:cNvPr>
@@ -7581,7 +7581,7 @@
           <p:cNvPr id="131" name="">
             <a:extLst xmlns:a="http://schemas.openxmlformats.org/drawingml/2006/main">
               <a:ext uri="{FF2B5EF4-FFF2-40B4-BE49-F238E27FC236}">
-                <a16:creationId xmlns:a16="http://schemas.microsoft.com/office/drawing/2014/main" id="{156E6164-4544-4607-9DF0-FC0A8E4B80FA}"/>
+                <a16:creationId xmlns:a16="http://schemas.microsoft.com/office/drawing/2014/main" id="{AEA3AD3D-41A0-493B-8FB7-39C28C1CC129}"/>
               </a:ext>
             </a:extLst>
           </p:cNvPr>
@@ -7638,7 +7638,7 @@
           <p:cNvPr id="132" name="">
             <a:extLst xmlns:a="http://schemas.openxmlformats.org/drawingml/2006/main">
               <a:ext uri="{FF2B5EF4-FFF2-40B4-BE49-F238E27FC236}">
-                <a16:creationId xmlns:a16="http://schemas.microsoft.com/office/drawing/2014/main" id="{A2580528-59DC-4D3D-B9A7-0410DE560AF5}"/>
+                <a16:creationId xmlns:a16="http://schemas.microsoft.com/office/drawing/2014/main" id="{0AACF162-7A7B-4AF8-A7F9-659B1E9F9B31}"/>
               </a:ext>
             </a:extLst>
           </p:cNvPr>
@@ -7695,7 +7695,7 @@
           <p:cNvPr id="133" name="">
             <a:extLst xmlns:a="http://schemas.openxmlformats.org/drawingml/2006/main">
               <a:ext uri="{FF2B5EF4-FFF2-40B4-BE49-F238E27FC236}">
-                <a16:creationId xmlns:a16="http://schemas.microsoft.com/office/drawing/2014/main" id="{2AA2662F-D711-48CE-A05C-2C881D2AEB61}"/>
+                <a16:creationId xmlns:a16="http://schemas.microsoft.com/office/drawing/2014/main" id="{E7B9DCA5-0ECD-41CE-8818-0ECD1241B08D}"/>
               </a:ext>
             </a:extLst>
           </p:cNvPr>
@@ -7798,7 +7798,7 @@
           <p:cNvPr id="134" name="">
             <a:extLst xmlns:a="http://schemas.openxmlformats.org/drawingml/2006/main">
               <a:ext uri="{FF2B5EF4-FFF2-40B4-BE49-F238E27FC236}">
-                <a16:creationId xmlns:a16="http://schemas.microsoft.com/office/drawing/2014/main" id="{CA550382-7CED-46DD-A403-DB057BBB03A9}"/>
+                <a16:creationId xmlns:a16="http://schemas.microsoft.com/office/drawing/2014/main" id="{B65A35C0-52B9-4F30-B216-1A2BD28E21F4}"/>
               </a:ext>
             </a:extLst>
           </p:cNvPr>
@@ -7855,7 +7855,7 @@
           <p:cNvPr id="135" name="">
             <a:extLst xmlns:a="http://schemas.openxmlformats.org/drawingml/2006/main">
               <a:ext uri="{FF2B5EF4-FFF2-40B4-BE49-F238E27FC236}">
-                <a16:creationId xmlns:a16="http://schemas.microsoft.com/office/drawing/2014/main" id="{5E1B870E-DDAF-47D9-A013-B6E4C4DBA5BA}"/>
+                <a16:creationId xmlns:a16="http://schemas.microsoft.com/office/drawing/2014/main" id="{99B2D664-5BC9-4437-9D3F-8AC6FE15A2AE}"/>
               </a:ext>
             </a:extLst>
           </p:cNvPr>
@@ -7958,7 +7958,7 @@
           <p:cNvPr id="136" name="">
             <a:extLst xmlns:a="http://schemas.openxmlformats.org/drawingml/2006/main">
               <a:ext uri="{FF2B5EF4-FFF2-40B4-BE49-F238E27FC236}">
-                <a16:creationId xmlns:a16="http://schemas.microsoft.com/office/drawing/2014/main" id="{56D13A12-3657-46C9-854E-62DDC0F18676}"/>
+                <a16:creationId xmlns:a16="http://schemas.microsoft.com/office/drawing/2014/main" id="{FD1A723B-946E-403E-B062-8813098EC464}"/>
               </a:ext>
             </a:extLst>
           </p:cNvPr>
@@ -8015,7 +8015,7 @@
           <p:cNvPr id="137" name="">
             <a:extLst xmlns:a="http://schemas.openxmlformats.org/drawingml/2006/main">
               <a:ext uri="{FF2B5EF4-FFF2-40B4-BE49-F238E27FC236}">
-                <a16:creationId xmlns:a16="http://schemas.microsoft.com/office/drawing/2014/main" id="{30E72B08-18FB-4011-8051-EF922B7A1BBE}"/>
+                <a16:creationId xmlns:a16="http://schemas.microsoft.com/office/drawing/2014/main" id="{DE234B3A-E29F-49B6-B269-854C1618340B}"/>
               </a:ext>
             </a:extLst>
           </p:cNvPr>
@@ -8118,7 +8118,7 @@
           <p:cNvPr id="138" name="">
             <a:extLst xmlns:a="http://schemas.openxmlformats.org/drawingml/2006/main">
               <a:ext uri="{FF2B5EF4-FFF2-40B4-BE49-F238E27FC236}">
-                <a16:creationId xmlns:a16="http://schemas.microsoft.com/office/drawing/2014/main" id="{18111C9A-2E42-4DC4-928E-F51359E958BE}"/>
+                <a16:creationId xmlns:a16="http://schemas.microsoft.com/office/drawing/2014/main" id="{D7E57C4A-2006-4632-91CB-829B2A8F55B3}"/>
               </a:ext>
             </a:extLst>
           </p:cNvPr>
@@ -8173,7 +8173,7 @@
     </p:spTree>
     <p:extLst>
       <p:ext uri="{BB962C8B-B14F-4D97-AF65-F5344CB8AC3E}">
-        <p14:creationId xmlns:p14="http://schemas.microsoft.com/office/powerpoint/2010/main" val="418742469"/>
+        <p14:creationId xmlns:p14="http://schemas.microsoft.com/office/powerpoint/2010/main" val="2006513673"/>
       </p:ext>
     </p:extLst>
   </p:cSld>
@@ -8201,7 +8201,7 @@
           <p:nvPr/>
         </p:nvPicPr>
         <p:blipFill rotWithShape="1">
-          <a:blip xmlns:r="http://schemas.openxmlformats.org/officeDocument/2006/relationships" xmlns:a="http://schemas.openxmlformats.org/drawingml/2006/main" r:embed="R602c28aa57584698">
+          <a:blip xmlns:r="http://schemas.openxmlformats.org/officeDocument/2006/relationships" xmlns:a="http://schemas.openxmlformats.org/drawingml/2006/main" r:embed="R3bf90c64f9b94bc1">
             <a:alphaModFix/>
           </a:blip>
           <a:srcRect xmlns:a="http://schemas.openxmlformats.org/drawingml/2006/main" l="0" t="0" r="0" b="98001"/>
@@ -8229,7 +8229,7 @@
           <p:nvPr/>
         </p:nvPicPr>
         <p:blipFill>
-          <a:blip xmlns:r="http://schemas.openxmlformats.org/officeDocument/2006/relationships" xmlns:a="http://schemas.openxmlformats.org/drawingml/2006/main" r:embed="Rc8f6470172fc4d15">
+          <a:blip xmlns:r="http://schemas.openxmlformats.org/officeDocument/2006/relationships" xmlns:a="http://schemas.openxmlformats.org/drawingml/2006/main" r:embed="Rac0be61862654351">
             <a:alphaModFix/>
           </a:blip>
           <a:stretch xmlns:a="http://schemas.openxmlformats.org/drawingml/2006/main">
@@ -8254,7 +8254,7 @@
           <p:cNvPr id="134" name="Google Shape;134;p23">
             <a:extLst xmlns:a="http://schemas.openxmlformats.org/drawingml/2006/main">
               <a:ext uri="{FF2B5EF4-FFF2-40B4-BE49-F238E27FC236}">
-                <a16:creationId xmlns:a16="http://schemas.microsoft.com/office/drawing/2014/main" id="{40BFC248-C1A2-4CFB-A904-EF8D2C049687}"/>
+                <a16:creationId xmlns:a16="http://schemas.microsoft.com/office/drawing/2014/main" id="{C5B9C1C6-A9F5-4069-B13C-EC7F02D6A340}"/>
               </a:ext>
             </a:extLst>
           </p:cNvPr>
@@ -8305,7 +8305,7 @@
           <p:cNvPr id="135" name="Google Shape;135;p23">
             <a:extLst xmlns:a="http://schemas.openxmlformats.org/drawingml/2006/main">
               <a:ext uri="{FF2B5EF4-FFF2-40B4-BE49-F238E27FC236}">
-                <a16:creationId xmlns:a16="http://schemas.microsoft.com/office/drawing/2014/main" id="{B10E1687-0ADB-4A64-9D1E-E7E6549F9654}"/>
+                <a16:creationId xmlns:a16="http://schemas.microsoft.com/office/drawing/2014/main" id="{93903FD4-B5CD-4BD1-9C65-94B091A3246F}"/>
               </a:ext>
             </a:extLst>
           </p:cNvPr>
@@ -8363,7 +8363,7 @@
           <p:cNvPr id="138" name="">
             <a:extLst xmlns:a="http://schemas.openxmlformats.org/drawingml/2006/main">
               <a:ext uri="{FF2B5EF4-FFF2-40B4-BE49-F238E27FC236}">
-                <a16:creationId xmlns:a16="http://schemas.microsoft.com/office/drawing/2014/main" id="{972AE5A4-C6AC-4C90-AE0B-98D2F6D9016A}"/>
+                <a16:creationId xmlns:a16="http://schemas.microsoft.com/office/drawing/2014/main" id="{0F142F07-7844-4645-8EA9-575038F0CD12}"/>
               </a:ext>
             </a:extLst>
           </p:cNvPr>
@@ -8420,7 +8420,7 @@
           <p:cNvPr id="139" name="">
             <a:extLst xmlns:a="http://schemas.openxmlformats.org/drawingml/2006/main">
               <a:ext uri="{FF2B5EF4-FFF2-40B4-BE49-F238E27FC236}">
-                <a16:creationId xmlns:a16="http://schemas.microsoft.com/office/drawing/2014/main" id="{45AE225D-AFB3-405B-9BDA-D196389D4108}"/>
+                <a16:creationId xmlns:a16="http://schemas.microsoft.com/office/drawing/2014/main" id="{055E3AD0-B77C-448F-8A3B-13EF8166C400}"/>
               </a:ext>
             </a:extLst>
           </p:cNvPr>
@@ -8477,7 +8477,7 @@
           <p:cNvPr id="140" name="">
             <a:extLst xmlns:a="http://schemas.openxmlformats.org/drawingml/2006/main">
               <a:ext uri="{FF2B5EF4-FFF2-40B4-BE49-F238E27FC236}">
-                <a16:creationId xmlns:a16="http://schemas.microsoft.com/office/drawing/2014/main" id="{B4574AA0-300E-46E4-BBE2-3B0C8535E5C9}"/>
+                <a16:creationId xmlns:a16="http://schemas.microsoft.com/office/drawing/2014/main" id="{3842AF43-A9E8-4279-854A-C495F4CBFBE5}"/>
               </a:ext>
             </a:extLst>
           </p:cNvPr>
@@ -8538,7 +8538,7 @@
           <p:nvPr/>
         </p:nvPicPr>
         <p:blipFill>
-          <a:blip xmlns:r="http://schemas.openxmlformats.org/officeDocument/2006/relationships" xmlns:a="http://schemas.openxmlformats.org/drawingml/2006/main" r:embed="Ra21301f1a29544da"/>
+          <a:blip xmlns:r="http://schemas.openxmlformats.org/officeDocument/2006/relationships" xmlns:a="http://schemas.openxmlformats.org/drawingml/2006/main" r:embed="R7accf4a0b9db4767"/>
           <a:srcRect xmlns:a="http://schemas.openxmlformats.org/drawingml/2006/main" l="25000" t="8000" r="2500" b="6000"/>
           <a:stretch xmlns:a="http://schemas.openxmlformats.org/drawingml/2006/main"/>
         </p:blipFill>
@@ -8561,7 +8561,7 @@
           <p:nvPr/>
         </p:nvPicPr>
         <p:blipFill>
-          <a:blip xmlns:r="http://schemas.openxmlformats.org/officeDocument/2006/relationships" xmlns:a="http://schemas.openxmlformats.org/drawingml/2006/main" r:embed="Rc75d413a10044575"/>
+          <a:blip xmlns:r="http://schemas.openxmlformats.org/officeDocument/2006/relationships" xmlns:a="http://schemas.openxmlformats.org/drawingml/2006/main" r:embed="Re2f1091c45e043a9"/>
           <a:srcRect xmlns:a="http://schemas.openxmlformats.org/drawingml/2006/main" l="25000" t="17000" r="2500" b="1500"/>
           <a:stretch xmlns:a="http://schemas.openxmlformats.org/drawingml/2006/main"/>
         </p:blipFill>
@@ -8580,7 +8580,7 @@
           <p:cNvPr id="143" name="">
             <a:extLst xmlns:a="http://schemas.openxmlformats.org/drawingml/2006/main">
               <a:ext uri="{FF2B5EF4-FFF2-40B4-BE49-F238E27FC236}">
-                <a16:creationId xmlns:a16="http://schemas.microsoft.com/office/drawing/2014/main" id="{2531F245-98F9-4672-BC94-D040853030A6}"/>
+                <a16:creationId xmlns:a16="http://schemas.microsoft.com/office/drawing/2014/main" id="{ACAD9A2B-C971-4006-B4C8-A779468FD781}"/>
               </a:ext>
             </a:extLst>
           </p:cNvPr>
@@ -8637,7 +8637,7 @@
           <p:cNvPr id="144" name="">
             <a:extLst xmlns:a="http://schemas.openxmlformats.org/drawingml/2006/main">
               <a:ext uri="{FF2B5EF4-FFF2-40B4-BE49-F238E27FC236}">
-                <a16:creationId xmlns:a16="http://schemas.microsoft.com/office/drawing/2014/main" id="{73BA5A46-87FE-4FA1-8882-2FD45770E3FE}"/>
+                <a16:creationId xmlns:a16="http://schemas.microsoft.com/office/drawing/2014/main" id="{42BB1B42-E5A6-4510-AB7C-C68B34E12DFA}"/>
               </a:ext>
             </a:extLst>
           </p:cNvPr>
@@ -8692,7 +8692,7 @@
     </p:spTree>
     <p:extLst>
       <p:ext uri="{BB962C8B-B14F-4D97-AF65-F5344CB8AC3E}">
-        <p14:creationId xmlns:p14="http://schemas.microsoft.com/office/powerpoint/2010/main" val="2079700727"/>
+        <p14:creationId xmlns:p14="http://schemas.microsoft.com/office/powerpoint/2010/main" val="50160167"/>
       </p:ext>
     </p:extLst>
   </p:cSld>
@@ -8720,7 +8720,7 @@
           <p:nvPr/>
         </p:nvPicPr>
         <p:blipFill rotWithShape="1">
-          <a:blip xmlns:r="http://schemas.openxmlformats.org/officeDocument/2006/relationships" xmlns:a="http://schemas.openxmlformats.org/drawingml/2006/main" r:embed="R69c9bf2cbc6a479d">
+          <a:blip xmlns:r="http://schemas.openxmlformats.org/officeDocument/2006/relationships" xmlns:a="http://schemas.openxmlformats.org/drawingml/2006/main" r:embed="R6b821053a94a47d5">
             <a:alphaModFix/>
           </a:blip>
           <a:srcRect xmlns:a="http://schemas.openxmlformats.org/drawingml/2006/main" l="0" t="0" r="0" b="98001"/>
@@ -8748,7 +8748,7 @@
           <p:nvPr/>
         </p:nvPicPr>
         <p:blipFill>
-          <a:blip xmlns:r="http://schemas.openxmlformats.org/officeDocument/2006/relationships" xmlns:a="http://schemas.openxmlformats.org/drawingml/2006/main" r:embed="R1330e33878474eec">
+          <a:blip xmlns:r="http://schemas.openxmlformats.org/officeDocument/2006/relationships" xmlns:a="http://schemas.openxmlformats.org/drawingml/2006/main" r:embed="Rc6426f4f9e334017">
             <a:alphaModFix/>
           </a:blip>
           <a:stretch xmlns:a="http://schemas.openxmlformats.org/drawingml/2006/main">
@@ -8773,7 +8773,7 @@
           <p:cNvPr id="142" name="Google Shape;142;p24">
             <a:extLst xmlns:a="http://schemas.openxmlformats.org/drawingml/2006/main">
               <a:ext uri="{FF2B5EF4-FFF2-40B4-BE49-F238E27FC236}">
-                <a16:creationId xmlns:a16="http://schemas.microsoft.com/office/drawing/2014/main" id="{232F800C-1699-4231-8280-81CA6F1AC928}"/>
+                <a16:creationId xmlns:a16="http://schemas.microsoft.com/office/drawing/2014/main" id="{59E99845-A867-4D3A-8C80-2DC59ADE9B49}"/>
               </a:ext>
             </a:extLst>
           </p:cNvPr>
@@ -8824,7 +8824,7 @@
           <p:cNvPr id="143" name="Google Shape;143;p24">
             <a:extLst xmlns:a="http://schemas.openxmlformats.org/drawingml/2006/main">
               <a:ext uri="{FF2B5EF4-FFF2-40B4-BE49-F238E27FC236}">
-                <a16:creationId xmlns:a16="http://schemas.microsoft.com/office/drawing/2014/main" id="{6AD5076A-E82D-4FC6-A31E-2D1C8EF249A3}"/>
+                <a16:creationId xmlns:a16="http://schemas.microsoft.com/office/drawing/2014/main" id="{D0FBD72D-3ADD-45A4-AF31-0D04CB40D5B4}"/>
               </a:ext>
             </a:extLst>
           </p:cNvPr>
@@ -8882,7 +8882,7 @@
           <p:cNvPr id="146" name="">
             <a:extLst xmlns:a="http://schemas.openxmlformats.org/drawingml/2006/main">
               <a:ext uri="{FF2B5EF4-FFF2-40B4-BE49-F238E27FC236}">
-                <a16:creationId xmlns:a16="http://schemas.microsoft.com/office/drawing/2014/main" id="{F223EA7C-7099-40EA-BEAC-CF2FD3686B05}"/>
+                <a16:creationId xmlns:a16="http://schemas.microsoft.com/office/drawing/2014/main" id="{FED499BA-BB6C-430D-9291-3DFD8EDA7860}"/>
               </a:ext>
             </a:extLst>
           </p:cNvPr>
@@ -8939,7 +8939,7 @@
           <p:cNvPr id="147" name="">
             <a:extLst xmlns:a="http://schemas.openxmlformats.org/drawingml/2006/main">
               <a:ext uri="{FF2B5EF4-FFF2-40B4-BE49-F238E27FC236}">
-                <a16:creationId xmlns:a16="http://schemas.microsoft.com/office/drawing/2014/main" id="{785A12B3-FE18-4486-80E7-17348BC4D8C5}"/>
+                <a16:creationId xmlns:a16="http://schemas.microsoft.com/office/drawing/2014/main" id="{F1562C9C-272F-4EE9-873B-1DB7990A9248}"/>
               </a:ext>
             </a:extLst>
           </p:cNvPr>
@@ -8996,7 +8996,7 @@
           <p:cNvPr id="148" name="">
             <a:extLst xmlns:a="http://schemas.openxmlformats.org/drawingml/2006/main">
               <a:ext uri="{FF2B5EF4-FFF2-40B4-BE49-F238E27FC236}">
-                <a16:creationId xmlns:a16="http://schemas.microsoft.com/office/drawing/2014/main" id="{03AA726B-3AC2-40B7-8BC7-720C06C2BDC4}"/>
+                <a16:creationId xmlns:a16="http://schemas.microsoft.com/office/drawing/2014/main" id="{02942EA8-0A46-4BE8-9647-BC6AA22E28E2}"/>
               </a:ext>
             </a:extLst>
           </p:cNvPr>
@@ -9053,7 +9053,7 @@
           <p:cNvPr id="149" name="">
             <a:extLst xmlns:a="http://schemas.openxmlformats.org/drawingml/2006/main">
               <a:ext uri="{FF2B5EF4-FFF2-40B4-BE49-F238E27FC236}">
-                <a16:creationId xmlns:a16="http://schemas.microsoft.com/office/drawing/2014/main" id="{04502CC8-0BA5-49A1-B0FB-62999341499E}"/>
+                <a16:creationId xmlns:a16="http://schemas.microsoft.com/office/drawing/2014/main" id="{2E7ADB7D-B238-4ABF-AE51-752CDD879D28}"/>
               </a:ext>
             </a:extLst>
           </p:cNvPr>
@@ -9110,7 +9110,7 @@
           <p:cNvPr id="150" name="">
             <a:extLst xmlns:a="http://schemas.openxmlformats.org/drawingml/2006/main">
               <a:ext uri="{FF2B5EF4-FFF2-40B4-BE49-F238E27FC236}">
-                <a16:creationId xmlns:a16="http://schemas.microsoft.com/office/drawing/2014/main" id="{8151EB5D-6E3C-444F-80D3-A816A799DFC6}"/>
+                <a16:creationId xmlns:a16="http://schemas.microsoft.com/office/drawing/2014/main" id="{4387C573-B0F4-4A7C-9BFA-7371B7C7026E}"/>
               </a:ext>
             </a:extLst>
           </p:cNvPr>
@@ -9167,7 +9167,7 @@
           <p:cNvPr id="151" name="">
             <a:extLst xmlns:a="http://schemas.openxmlformats.org/drawingml/2006/main">
               <a:ext uri="{FF2B5EF4-FFF2-40B4-BE49-F238E27FC236}">
-                <a16:creationId xmlns:a16="http://schemas.microsoft.com/office/drawing/2014/main" id="{CAB504E0-CA66-4339-A34A-828C62468AFB}"/>
+                <a16:creationId xmlns:a16="http://schemas.microsoft.com/office/drawing/2014/main" id="{6373B6F9-436A-4867-A5EB-2DF56DD45D20}"/>
               </a:ext>
             </a:extLst>
           </p:cNvPr>
@@ -9224,7 +9224,7 @@
           <p:cNvPr id="152" name="">
             <a:extLst xmlns:a="http://schemas.openxmlformats.org/drawingml/2006/main">
               <a:ext uri="{FF2B5EF4-FFF2-40B4-BE49-F238E27FC236}">
-                <a16:creationId xmlns:a16="http://schemas.microsoft.com/office/drawing/2014/main" id="{FB51A3D3-5949-48F1-9043-156F9F379C7E}"/>
+                <a16:creationId xmlns:a16="http://schemas.microsoft.com/office/drawing/2014/main" id="{AB6EE139-697E-49FD-8242-779BF9310D76}"/>
               </a:ext>
             </a:extLst>
           </p:cNvPr>
@@ -9281,7 +9281,7 @@
           <p:cNvPr id="153" name="">
             <a:extLst xmlns:a="http://schemas.openxmlformats.org/drawingml/2006/main">
               <a:ext uri="{FF2B5EF4-FFF2-40B4-BE49-F238E27FC236}">
-                <a16:creationId xmlns:a16="http://schemas.microsoft.com/office/drawing/2014/main" id="{7D62885B-B6BD-4EDD-84CD-71EBA6DAFC6D}"/>
+                <a16:creationId xmlns:a16="http://schemas.microsoft.com/office/drawing/2014/main" id="{33ABD7B7-F835-4AC7-A43B-E6B9E08B6AB1}"/>
               </a:ext>
             </a:extLst>
           </p:cNvPr>
@@ -9338,7 +9338,7 @@
           <p:cNvPr id="154" name="">
             <a:extLst xmlns:a="http://schemas.openxmlformats.org/drawingml/2006/main">
               <a:ext uri="{FF2B5EF4-FFF2-40B4-BE49-F238E27FC236}">
-                <a16:creationId xmlns:a16="http://schemas.microsoft.com/office/drawing/2014/main" id="{5AE3D68F-9C93-40AD-B239-D9DCFFACC6E9}"/>
+                <a16:creationId xmlns:a16="http://schemas.microsoft.com/office/drawing/2014/main" id="{4D8BAA51-B280-4135-9090-9284B8BBD418}"/>
               </a:ext>
             </a:extLst>
           </p:cNvPr>
@@ -9395,7 +9395,7 @@
           <p:cNvPr id="155" name="">
             <a:extLst xmlns:a="http://schemas.openxmlformats.org/drawingml/2006/main">
               <a:ext uri="{FF2B5EF4-FFF2-40B4-BE49-F238E27FC236}">
-                <a16:creationId xmlns:a16="http://schemas.microsoft.com/office/drawing/2014/main" id="{181F0172-FBEA-4B96-8304-28CC667B3339}"/>
+                <a16:creationId xmlns:a16="http://schemas.microsoft.com/office/drawing/2014/main" id="{456EA16B-E886-47D0-B9DF-D59B67495B73}"/>
               </a:ext>
             </a:extLst>
           </p:cNvPr>
@@ -9475,7 +9475,7 @@
           <p:cNvPr id="156" name="">
             <a:extLst xmlns:a="http://schemas.openxmlformats.org/drawingml/2006/main">
               <a:ext uri="{FF2B5EF4-FFF2-40B4-BE49-F238E27FC236}">
-                <a16:creationId xmlns:a16="http://schemas.microsoft.com/office/drawing/2014/main" id="{028527F5-334E-440E-909B-CA8F3A40AE9F}"/>
+                <a16:creationId xmlns:a16="http://schemas.microsoft.com/office/drawing/2014/main" id="{C7484484-FFD4-40DD-9B6A-0BF3B9FDC5E1}"/>
               </a:ext>
             </a:extLst>
           </p:cNvPr>
@@ -9532,7 +9532,7 @@
           <p:cNvPr id="157" name="">
             <a:extLst xmlns:a="http://schemas.openxmlformats.org/drawingml/2006/main">
               <a:ext uri="{FF2B5EF4-FFF2-40B4-BE49-F238E27FC236}">
-                <a16:creationId xmlns:a16="http://schemas.microsoft.com/office/drawing/2014/main" id="{4E337374-4EB9-44E5-A7CB-88B6737ABD2C}"/>
+                <a16:creationId xmlns:a16="http://schemas.microsoft.com/office/drawing/2014/main" id="{45F58347-9F51-4ACB-A699-9BE4F0C9D532}"/>
               </a:ext>
             </a:extLst>
           </p:cNvPr>
@@ -9610,7 +9610,7 @@
     </p:spTree>
     <p:extLst>
       <p:ext uri="{BB962C8B-B14F-4D97-AF65-F5344CB8AC3E}">
-        <p14:creationId xmlns:p14="http://schemas.microsoft.com/office/powerpoint/2010/main" val="23912900"/>
+        <p14:creationId xmlns:p14="http://schemas.microsoft.com/office/powerpoint/2010/main" val="1980481285"/>
       </p:ext>
     </p:extLst>
   </p:cSld>
@@ -9638,7 +9638,7 @@
           <p:nvPr/>
         </p:nvPicPr>
         <p:blipFill rotWithShape="1">
-          <a:blip xmlns:r="http://schemas.openxmlformats.org/officeDocument/2006/relationships" xmlns:a="http://schemas.openxmlformats.org/drawingml/2006/main" r:embed="Rf08e7c7b3c914cc5">
+          <a:blip xmlns:r="http://schemas.openxmlformats.org/officeDocument/2006/relationships" xmlns:a="http://schemas.openxmlformats.org/drawingml/2006/main" r:embed="Rfc08368bc5a549da">
             <a:alphaModFix/>
           </a:blip>
           <a:srcRect xmlns:a="http://schemas.openxmlformats.org/drawingml/2006/main" l="0" t="0" r="0" b="98001"/>
@@ -9666,7 +9666,7 @@
           <p:nvPr/>
         </p:nvPicPr>
         <p:blipFill>
-          <a:blip xmlns:r="http://schemas.openxmlformats.org/officeDocument/2006/relationships" xmlns:a="http://schemas.openxmlformats.org/drawingml/2006/main" r:embed="Rd844edd81a2a4b42">
+          <a:blip xmlns:r="http://schemas.openxmlformats.org/officeDocument/2006/relationships" xmlns:a="http://schemas.openxmlformats.org/drawingml/2006/main" r:embed="Ra052684775df4970">
             <a:alphaModFix/>
           </a:blip>
           <a:stretch xmlns:a="http://schemas.openxmlformats.org/drawingml/2006/main">
@@ -9691,7 +9691,7 @@
           <p:cNvPr id="150" name="Google Shape;150;p25">
             <a:extLst xmlns:a="http://schemas.openxmlformats.org/drawingml/2006/main">
               <a:ext uri="{FF2B5EF4-FFF2-40B4-BE49-F238E27FC236}">
-                <a16:creationId xmlns:a16="http://schemas.microsoft.com/office/drawing/2014/main" id="{0589BCE8-962A-4A59-8E2F-F66BA4B441D9}"/>
+                <a16:creationId xmlns:a16="http://schemas.microsoft.com/office/drawing/2014/main" id="{51AB4E31-7BDB-4161-B2DC-F9431EA0A67C}"/>
               </a:ext>
             </a:extLst>
           </p:cNvPr>
@@ -9742,7 +9742,7 @@
           <p:cNvPr id="151" name="Google Shape;151;p25">
             <a:extLst xmlns:a="http://schemas.openxmlformats.org/drawingml/2006/main">
               <a:ext uri="{FF2B5EF4-FFF2-40B4-BE49-F238E27FC236}">
-                <a16:creationId xmlns:a16="http://schemas.microsoft.com/office/drawing/2014/main" id="{1EE4D743-E4A2-4A0A-BD98-4FE2A012F9CC}"/>
+                <a16:creationId xmlns:a16="http://schemas.microsoft.com/office/drawing/2014/main" id="{C9E61FA5-3CFF-4849-9720-B61F185CAC01}"/>
               </a:ext>
             </a:extLst>
           </p:cNvPr>
@@ -9800,7 +9800,7 @@
           <p:cNvPr id="154" name="">
             <a:extLst xmlns:a="http://schemas.openxmlformats.org/drawingml/2006/main">
               <a:ext uri="{FF2B5EF4-FFF2-40B4-BE49-F238E27FC236}">
-                <a16:creationId xmlns:a16="http://schemas.microsoft.com/office/drawing/2014/main" id="{BF8A59F0-9F13-4D9D-A91B-944764492055}"/>
+                <a16:creationId xmlns:a16="http://schemas.microsoft.com/office/drawing/2014/main" id="{6FC25FE1-3479-44CF-8DCD-9D50D9FDA27E}"/>
               </a:ext>
             </a:extLst>
           </p:cNvPr>
@@ -9857,7 +9857,7 @@
           <p:cNvPr id="155" name="">
             <a:extLst xmlns:a="http://schemas.openxmlformats.org/drawingml/2006/main">
               <a:ext uri="{FF2B5EF4-FFF2-40B4-BE49-F238E27FC236}">
-                <a16:creationId xmlns:a16="http://schemas.microsoft.com/office/drawing/2014/main" id="{34980469-B794-40B3-BF5C-2F728594475D}"/>
+                <a16:creationId xmlns:a16="http://schemas.microsoft.com/office/drawing/2014/main" id="{FECBD599-ED87-4D44-94D5-2DE5064B4130}"/>
               </a:ext>
             </a:extLst>
           </p:cNvPr>
@@ -9914,7 +9914,7 @@
           <p:cNvPr id="156" name="">
             <a:extLst xmlns:a="http://schemas.openxmlformats.org/drawingml/2006/main">
               <a:ext uri="{FF2B5EF4-FFF2-40B4-BE49-F238E27FC236}">
-                <a16:creationId xmlns:a16="http://schemas.microsoft.com/office/drawing/2014/main" id="{7A020715-259F-4730-AC7B-BA43848E52B8}"/>
+                <a16:creationId xmlns:a16="http://schemas.microsoft.com/office/drawing/2014/main" id="{ECC0A3AB-BCCE-4B01-8D88-6F013CBF7958}"/>
               </a:ext>
             </a:extLst>
           </p:cNvPr>
@@ -9971,7 +9971,7 @@
           <p:cNvPr id="157" name="">
             <a:extLst xmlns:a="http://schemas.openxmlformats.org/drawingml/2006/main">
               <a:ext uri="{FF2B5EF4-FFF2-40B4-BE49-F238E27FC236}">
-                <a16:creationId xmlns:a16="http://schemas.microsoft.com/office/drawing/2014/main" id="{BF7154BB-9782-41D0-AF47-E677972601FF}"/>
+                <a16:creationId xmlns:a16="http://schemas.microsoft.com/office/drawing/2014/main" id="{DDDEEB53-49FB-4F46-B70D-57D205B0CCD0}"/>
               </a:ext>
             </a:extLst>
           </p:cNvPr>
@@ -10051,7 +10051,7 @@
           <p:cNvPr id="158" name="">
             <a:extLst xmlns:a="http://schemas.openxmlformats.org/drawingml/2006/main">
               <a:ext uri="{FF2B5EF4-FFF2-40B4-BE49-F238E27FC236}">
-                <a16:creationId xmlns:a16="http://schemas.microsoft.com/office/drawing/2014/main" id="{F8CD0810-5E85-4A0A-9895-254BD1980AA3}"/>
+                <a16:creationId xmlns:a16="http://schemas.microsoft.com/office/drawing/2014/main" id="{AFBBCACA-679A-4FDA-8B14-FC629B5AD1E0}"/>
               </a:ext>
             </a:extLst>
           </p:cNvPr>
@@ -10108,7 +10108,7 @@
           <p:cNvPr id="159" name="">
             <a:extLst xmlns:a="http://schemas.openxmlformats.org/drawingml/2006/main">
               <a:ext uri="{FF2B5EF4-FFF2-40B4-BE49-F238E27FC236}">
-                <a16:creationId xmlns:a16="http://schemas.microsoft.com/office/drawing/2014/main" id="{5DEF2C3E-311D-4698-9249-BDB0BC9532BC}"/>
+                <a16:creationId xmlns:a16="http://schemas.microsoft.com/office/drawing/2014/main" id="{12129BAA-D20C-4B58-9F5C-22836490EAB1}"/>
               </a:ext>
             </a:extLst>
           </p:cNvPr>
@@ -10188,7 +10188,7 @@
           <p:cNvPr id="160" name="">
             <a:extLst xmlns:a="http://schemas.openxmlformats.org/drawingml/2006/main">
               <a:ext uri="{FF2B5EF4-FFF2-40B4-BE49-F238E27FC236}">
-                <a16:creationId xmlns:a16="http://schemas.microsoft.com/office/drawing/2014/main" id="{113842FD-BC1D-48A4-A7F5-386B62602280}"/>
+                <a16:creationId xmlns:a16="http://schemas.microsoft.com/office/drawing/2014/main" id="{DAF61A0A-FBAA-4960-A178-94F48A9F6E75}"/>
               </a:ext>
             </a:extLst>
           </p:cNvPr>
@@ -10245,7 +10245,7 @@
           <p:cNvPr id="161" name="">
             <a:extLst xmlns:a="http://schemas.openxmlformats.org/drawingml/2006/main">
               <a:ext uri="{FF2B5EF4-FFF2-40B4-BE49-F238E27FC236}">
-                <a16:creationId xmlns:a16="http://schemas.microsoft.com/office/drawing/2014/main" id="{3529C3AB-3725-4C5D-9A82-2A3E285BC35D}"/>
+                <a16:creationId xmlns:a16="http://schemas.microsoft.com/office/drawing/2014/main" id="{F76129F7-9F62-4E67-AD4E-43A3D11F3AF1}"/>
               </a:ext>
             </a:extLst>
           </p:cNvPr>
@@ -10323,7 +10323,7 @@
     </p:spTree>
     <p:extLst>
       <p:ext uri="{BB962C8B-B14F-4D97-AF65-F5344CB8AC3E}">
-        <p14:creationId xmlns:p14="http://schemas.microsoft.com/office/powerpoint/2010/main" val="539658165"/>
+        <p14:creationId xmlns:p14="http://schemas.microsoft.com/office/powerpoint/2010/main" val="2067534366"/>
       </p:ext>
     </p:extLst>
   </p:cSld>
@@ -10351,7 +10351,7 @@
           <p:nvPr/>
         </p:nvPicPr>
         <p:blipFill rotWithShape="1">
-          <a:blip xmlns:r="http://schemas.openxmlformats.org/officeDocument/2006/relationships" xmlns:a="http://schemas.openxmlformats.org/drawingml/2006/main" r:embed="R82de5509c1924010">
+          <a:blip xmlns:r="http://schemas.openxmlformats.org/officeDocument/2006/relationships" xmlns:a="http://schemas.openxmlformats.org/drawingml/2006/main" r:embed="R67c08e88d3774afa">
             <a:alphaModFix/>
           </a:blip>
           <a:srcRect xmlns:a="http://schemas.openxmlformats.org/drawingml/2006/main" l="0" t="0" r="0" b="98001"/>
@@ -10379,7 +10379,7 @@
           <p:nvPr/>
         </p:nvPicPr>
         <p:blipFill>
-          <a:blip xmlns:r="http://schemas.openxmlformats.org/officeDocument/2006/relationships" xmlns:a="http://schemas.openxmlformats.org/drawingml/2006/main" r:embed="R1d828aa8433a406e">
+          <a:blip xmlns:r="http://schemas.openxmlformats.org/officeDocument/2006/relationships" xmlns:a="http://schemas.openxmlformats.org/drawingml/2006/main" r:embed="Rd605c71e04c94e89">
             <a:alphaModFix/>
           </a:blip>
           <a:stretch xmlns:a="http://schemas.openxmlformats.org/drawingml/2006/main">
@@ -10404,7 +10404,7 @@
           <p:cNvPr id="158" name="Google Shape;158;p26">
             <a:extLst xmlns:a="http://schemas.openxmlformats.org/drawingml/2006/main">
               <a:ext uri="{FF2B5EF4-FFF2-40B4-BE49-F238E27FC236}">
-                <a16:creationId xmlns:a16="http://schemas.microsoft.com/office/drawing/2014/main" id="{49C59653-D308-4885-8643-69DCC53ADD80}"/>
+                <a16:creationId xmlns:a16="http://schemas.microsoft.com/office/drawing/2014/main" id="{39E144E6-D930-42DD-A210-E7CDEF423EDF}"/>
               </a:ext>
             </a:extLst>
           </p:cNvPr>
@@ -10455,7 +10455,7 @@
           <p:cNvPr id="159" name="Google Shape;159;p26">
             <a:extLst xmlns:a="http://schemas.openxmlformats.org/drawingml/2006/main">
               <a:ext uri="{FF2B5EF4-FFF2-40B4-BE49-F238E27FC236}">
-                <a16:creationId xmlns:a16="http://schemas.microsoft.com/office/drawing/2014/main" id="{0788FBE2-21BE-44A6-A935-50065C2C303B}"/>
+                <a16:creationId xmlns:a16="http://schemas.microsoft.com/office/drawing/2014/main" id="{0F3AEC77-E940-4729-97E6-DECBDFBEDF87}"/>
               </a:ext>
             </a:extLst>
           </p:cNvPr>
@@ -10513,7 +10513,7 @@
           <p:cNvPr id="162" name="">
             <a:extLst xmlns:a="http://schemas.openxmlformats.org/drawingml/2006/main">
               <a:ext uri="{FF2B5EF4-FFF2-40B4-BE49-F238E27FC236}">
-                <a16:creationId xmlns:a16="http://schemas.microsoft.com/office/drawing/2014/main" id="{5EA1535D-E9A3-4201-A450-70FAA6E4EA7E}"/>
+                <a16:creationId xmlns:a16="http://schemas.microsoft.com/office/drawing/2014/main" id="{E4DCE3C0-A6D3-40BE-8EF1-C9E3286F4EF7}"/>
               </a:ext>
             </a:extLst>
           </p:cNvPr>
@@ -10570,7 +10570,7 @@
           <p:cNvPr id="163" name="">
             <a:extLst xmlns:a="http://schemas.openxmlformats.org/drawingml/2006/main">
               <a:ext uri="{FF2B5EF4-FFF2-40B4-BE49-F238E27FC236}">
-                <a16:creationId xmlns:a16="http://schemas.microsoft.com/office/drawing/2014/main" id="{E60829E2-9585-466A-90DD-1035CD7881A5}"/>
+                <a16:creationId xmlns:a16="http://schemas.microsoft.com/office/drawing/2014/main" id="{E778A13B-38C7-420D-AD35-F4210BA89F42}"/>
               </a:ext>
             </a:extLst>
           </p:cNvPr>
@@ -10627,7 +10627,7 @@
           <p:cNvPr id="164" name="">
             <a:extLst xmlns:a="http://schemas.openxmlformats.org/drawingml/2006/main">
               <a:ext uri="{FF2B5EF4-FFF2-40B4-BE49-F238E27FC236}">
-                <a16:creationId xmlns:a16="http://schemas.microsoft.com/office/drawing/2014/main" id="{B90BABF8-0A7C-4227-8E37-AD113D897282}"/>
+                <a16:creationId xmlns:a16="http://schemas.microsoft.com/office/drawing/2014/main" id="{4AC5C718-D8A7-44FD-8334-506D83E8A6A8}"/>
               </a:ext>
             </a:extLst>
           </p:cNvPr>
@@ -10684,7 +10684,7 @@
           <p:cNvPr id="165" name="">
             <a:extLst xmlns:a="http://schemas.openxmlformats.org/drawingml/2006/main">
               <a:ext uri="{FF2B5EF4-FFF2-40B4-BE49-F238E27FC236}">
-                <a16:creationId xmlns:a16="http://schemas.microsoft.com/office/drawing/2014/main" id="{FD9B782B-C133-4EA8-9D8D-1B02041AB5AB}"/>
+                <a16:creationId xmlns:a16="http://schemas.microsoft.com/office/drawing/2014/main" id="{DD8FD0F7-509B-478F-8A7E-6A8FCA0D8908}"/>
               </a:ext>
             </a:extLst>
           </p:cNvPr>
@@ -10730,7 +10730,7 @@
                 <a:latin typeface="Google Sans Flex"/>
                 <a:ea typeface="Google Sans Flex"/>
                 <a:cs typeface="Google Sans Flex"/>
-                <a:hlinkClick xmlns:r="http://schemas.openxmlformats.org/officeDocument/2006/relationships" r:id="R5c5e6cf7e2a24a1b"/>
+                <a:hlinkClick xmlns:r="http://schemas.openxmlformats.org/officeDocument/2006/relationships" r:id="R06e51a98672f4310"/>
               </a:rPr>
               <a:t>github.com/TheAverageGatsby13/project-irene</a:t>
             </a:r>
@@ -10742,7 +10742,7 @@
           <p:cNvPr id="166" name="">
             <a:extLst xmlns:a="http://schemas.openxmlformats.org/drawingml/2006/main">
               <a:ext uri="{FF2B5EF4-FFF2-40B4-BE49-F238E27FC236}">
-                <a16:creationId xmlns:a16="http://schemas.microsoft.com/office/drawing/2014/main" id="{8F117AAC-E885-46B5-ACB2-69DF2F5F915C}"/>
+                <a16:creationId xmlns:a16="http://schemas.microsoft.com/office/drawing/2014/main" id="{B434EFEA-DCB8-4F05-B648-F030D0B1625C}"/>
               </a:ext>
             </a:extLst>
           </p:cNvPr>
@@ -10799,7 +10799,7 @@
           <p:cNvPr id="167" name="">
             <a:extLst xmlns:a="http://schemas.openxmlformats.org/drawingml/2006/main">
               <a:ext uri="{FF2B5EF4-FFF2-40B4-BE49-F238E27FC236}">
-                <a16:creationId xmlns:a16="http://schemas.microsoft.com/office/drawing/2014/main" id="{15797DBC-2E61-4C00-9F64-FDD2E76F6BB6}"/>
+                <a16:creationId xmlns:a16="http://schemas.microsoft.com/office/drawing/2014/main" id="{7DE30265-FF1D-48DA-9F6D-5099FADD777A}"/>
               </a:ext>
             </a:extLst>
           </p:cNvPr>
@@ -10856,7 +10856,7 @@
           <p:cNvPr id="168" name="">
             <a:extLst xmlns:a="http://schemas.openxmlformats.org/drawingml/2006/main">
               <a:ext uri="{FF2B5EF4-FFF2-40B4-BE49-F238E27FC236}">
-                <a16:creationId xmlns:a16="http://schemas.microsoft.com/office/drawing/2014/main" id="{857B263D-310E-4C55-88CE-2212416DA6B7}"/>
+                <a16:creationId xmlns:a16="http://schemas.microsoft.com/office/drawing/2014/main" id="{34797328-D11C-4F96-9135-8E8731A8B79E}"/>
               </a:ext>
             </a:extLst>
           </p:cNvPr>
@@ -10913,7 +10913,7 @@
           <p:cNvPr id="169" name="">
             <a:extLst xmlns:a="http://schemas.openxmlformats.org/drawingml/2006/main">
               <a:ext uri="{FF2B5EF4-FFF2-40B4-BE49-F238E27FC236}">
-                <a16:creationId xmlns:a16="http://schemas.microsoft.com/office/drawing/2014/main" id="{3594865C-30BD-4BB9-9442-87AB0AC62F71}"/>
+                <a16:creationId xmlns:a16="http://schemas.microsoft.com/office/drawing/2014/main" id="{B9C41F97-2B41-45E8-B07C-D57E4295C3FF}"/>
               </a:ext>
             </a:extLst>
           </p:cNvPr>
@@ -10959,7 +10959,7 @@
                 <a:latin typeface="Google Sans Flex"/>
                 <a:ea typeface="Google Sans Flex"/>
                 <a:cs typeface="Google Sans Flex"/>
-                <a:hlinkClick xmlns:r="http://schemas.openxmlformats.org/officeDocument/2006/relationships" r:id="R78a9432adea94257"/>
+                <a:hlinkClick xmlns:r="http://schemas.openxmlformats.org/officeDocument/2006/relationships" r:id="Rb6eb9302238c499d"/>
               </a:rPr>
               <a:t>project-irene-fd39e.web.app</a:t>
             </a:r>
@@ -10969,7 +10969,7 @@
     </p:spTree>
     <p:extLst>
       <p:ext uri="{BB962C8B-B14F-4D97-AF65-F5344CB8AC3E}">
-        <p14:creationId xmlns:p14="http://schemas.microsoft.com/office/powerpoint/2010/main" val="907229998"/>
+        <p14:creationId xmlns:p14="http://schemas.microsoft.com/office/powerpoint/2010/main" val="138150922"/>
       </p:ext>
     </p:extLst>
   </p:cSld>
@@ -10997,7 +10997,7 @@
           <p:nvPr/>
         </p:nvPicPr>
         <p:blipFill rotWithShape="1">
-          <a:blip xmlns:r="http://schemas.openxmlformats.org/officeDocument/2006/relationships" xmlns:a="http://schemas.openxmlformats.org/drawingml/2006/main" r:embed="Rf17df55246a243ed">
+          <a:blip xmlns:r="http://schemas.openxmlformats.org/officeDocument/2006/relationships" xmlns:a="http://schemas.openxmlformats.org/drawingml/2006/main" r:embed="R6f2b3f7b8b644aa5">
             <a:alphaModFix/>
           </a:blip>
           <a:srcRect xmlns:a="http://schemas.openxmlformats.org/drawingml/2006/main" l="0" t="0" r="0" b="98001"/>
@@ -11025,7 +11025,7 @@
           <p:nvPr/>
         </p:nvPicPr>
         <p:blipFill>
-          <a:blip xmlns:r="http://schemas.openxmlformats.org/officeDocument/2006/relationships" xmlns:a="http://schemas.openxmlformats.org/drawingml/2006/main" r:embed="R953a9aeb45e44872">
+          <a:blip xmlns:r="http://schemas.openxmlformats.org/officeDocument/2006/relationships" xmlns:a="http://schemas.openxmlformats.org/drawingml/2006/main" r:embed="R5ae660f811504c58">
             <a:alphaModFix/>
           </a:blip>
           <a:stretch xmlns:a="http://schemas.openxmlformats.org/drawingml/2006/main">
@@ -11050,7 +11050,7 @@
           <p:cNvPr id="166" name="Google Shape;166;p27">
             <a:extLst xmlns:a="http://schemas.openxmlformats.org/drawingml/2006/main">
               <a:ext uri="{FF2B5EF4-FFF2-40B4-BE49-F238E27FC236}">
-                <a16:creationId xmlns:a16="http://schemas.microsoft.com/office/drawing/2014/main" id="{2CB8DE78-985E-47FC-815E-C8B41EF2179B}"/>
+                <a16:creationId xmlns:a16="http://schemas.microsoft.com/office/drawing/2014/main" id="{896B3B6B-22CA-4A87-BDFB-EFFC78AF0B5C}"/>
               </a:ext>
             </a:extLst>
           </p:cNvPr>
@@ -11101,7 +11101,7 @@
           <p:cNvPr id="169" name="">
             <a:extLst xmlns:a="http://schemas.openxmlformats.org/drawingml/2006/main">
               <a:ext uri="{FF2B5EF4-FFF2-40B4-BE49-F238E27FC236}">
-                <a16:creationId xmlns:a16="http://schemas.microsoft.com/office/drawing/2014/main" id="{F3333427-8BA2-46F3-87C3-57CAD7A6BF31}"/>
+                <a16:creationId xmlns:a16="http://schemas.microsoft.com/office/drawing/2014/main" id="{B7210DF9-B397-4041-A341-76BB6D833DFC}"/>
               </a:ext>
             </a:extLst>
           </p:cNvPr>
@@ -11158,7 +11158,7 @@
           <p:cNvPr id="170" name="">
             <a:extLst xmlns:a="http://schemas.openxmlformats.org/drawingml/2006/main">
               <a:ext uri="{FF2B5EF4-FFF2-40B4-BE49-F238E27FC236}">
-                <a16:creationId xmlns:a16="http://schemas.microsoft.com/office/drawing/2014/main" id="{86F48CD7-EE74-4EA6-AB26-01DDDD35D692}"/>
+                <a16:creationId xmlns:a16="http://schemas.microsoft.com/office/drawing/2014/main" id="{A99CE310-D36F-4E73-94EB-31DC4E24A530}"/>
               </a:ext>
             </a:extLst>
           </p:cNvPr>
@@ -11215,7 +11215,7 @@
           <p:cNvPr id="171" name="">
             <a:extLst xmlns:a="http://schemas.openxmlformats.org/drawingml/2006/main">
               <a:ext uri="{FF2B5EF4-FFF2-40B4-BE49-F238E27FC236}">
-                <a16:creationId xmlns:a16="http://schemas.microsoft.com/office/drawing/2014/main" id="{97E13543-31C6-4731-9050-8E960FD8DB14}"/>
+                <a16:creationId xmlns:a16="http://schemas.microsoft.com/office/drawing/2014/main" id="{4B938E37-97E5-4C21-A19F-CBF9880265B3}"/>
               </a:ext>
             </a:extLst>
           </p:cNvPr>
@@ -11272,7 +11272,7 @@
           <p:cNvPr id="172" name="">
             <a:extLst xmlns:a="http://schemas.openxmlformats.org/drawingml/2006/main">
               <a:ext uri="{FF2B5EF4-FFF2-40B4-BE49-F238E27FC236}">
-                <a16:creationId xmlns:a16="http://schemas.microsoft.com/office/drawing/2014/main" id="{AADC9253-E845-4DBD-B698-EED822484611}"/>
+                <a16:creationId xmlns:a16="http://schemas.microsoft.com/office/drawing/2014/main" id="{0CCB9745-77EC-45AB-A53B-DA5D58C88D01}"/>
               </a:ext>
             </a:extLst>
           </p:cNvPr>
@@ -11352,7 +11352,7 @@
           <p:cNvPr id="173" name="">
             <a:extLst xmlns:a="http://schemas.openxmlformats.org/drawingml/2006/main">
               <a:ext uri="{FF2B5EF4-FFF2-40B4-BE49-F238E27FC236}">
-                <a16:creationId xmlns:a16="http://schemas.microsoft.com/office/drawing/2014/main" id="{87E84E20-6666-45A0-9DD6-2939A0D859B4}"/>
+                <a16:creationId xmlns:a16="http://schemas.microsoft.com/office/drawing/2014/main" id="{2E24DBC6-B29C-4F9F-B1BE-E419ED6DF399}"/>
               </a:ext>
             </a:extLst>
           </p:cNvPr>
@@ -11455,7 +11455,7 @@
           <p:cNvPr id="174" name="">
             <a:extLst xmlns:a="http://schemas.openxmlformats.org/drawingml/2006/main">
               <a:ext uri="{FF2B5EF4-FFF2-40B4-BE49-F238E27FC236}">
-                <a16:creationId xmlns:a16="http://schemas.microsoft.com/office/drawing/2014/main" id="{6A8FF37E-ABEF-4F33-A352-337B1019810B}"/>
+                <a16:creationId xmlns:a16="http://schemas.microsoft.com/office/drawing/2014/main" id="{2743CF8E-F660-43C6-9B7C-EB88156B01B6}"/>
               </a:ext>
             </a:extLst>
           </p:cNvPr>
@@ -11533,7 +11533,7 @@
     </p:spTree>
     <p:extLst>
       <p:ext uri="{BB962C8B-B14F-4D97-AF65-F5344CB8AC3E}">
-        <p14:creationId xmlns:p14="http://schemas.microsoft.com/office/powerpoint/2010/main" val="728019578"/>
+        <p14:creationId xmlns:p14="http://schemas.microsoft.com/office/powerpoint/2010/main" val="1815236669"/>
       </p:ext>
     </p:extLst>
   </p:cSld>
@@ -11561,7 +11561,7 @@
           <p:nvPr/>
         </p:nvPicPr>
         <p:blipFill rotWithShape="1">
-          <a:blip xmlns:r="http://schemas.openxmlformats.org/officeDocument/2006/relationships" xmlns:a="http://schemas.openxmlformats.org/drawingml/2006/main" r:embed="R3e12989d5ecd4cb1">
+          <a:blip xmlns:r="http://schemas.openxmlformats.org/officeDocument/2006/relationships" xmlns:a="http://schemas.openxmlformats.org/drawingml/2006/main" r:embed="R37f130caa1024ca7">
             <a:alphaModFix/>
           </a:blip>
           <a:srcRect xmlns:a="http://schemas.openxmlformats.org/drawingml/2006/main" l="0" t="0" r="0" b="98001"/>
@@ -11589,7 +11589,7 @@
           <p:nvPr/>
         </p:nvPicPr>
         <p:blipFill>
-          <a:blip xmlns:r="http://schemas.openxmlformats.org/officeDocument/2006/relationships" xmlns:a="http://schemas.openxmlformats.org/drawingml/2006/main" r:embed="R4e91b71b6b5d45bc">
+          <a:blip xmlns:r="http://schemas.openxmlformats.org/officeDocument/2006/relationships" xmlns:a="http://schemas.openxmlformats.org/drawingml/2006/main" r:embed="Rf8b75e6621c34fae">
             <a:alphaModFix/>
           </a:blip>
           <a:stretch xmlns:a="http://schemas.openxmlformats.org/drawingml/2006/main">
@@ -11612,7 +11612,7 @@
     </p:spTree>
     <p:extLst>
       <p:ext uri="{BB962C8B-B14F-4D97-AF65-F5344CB8AC3E}">
-        <p14:creationId xmlns:p14="http://schemas.microsoft.com/office/powerpoint/2010/main" val="1871000649"/>
+        <p14:creationId xmlns:p14="http://schemas.microsoft.com/office/powerpoint/2010/main" val="1424670088"/>
       </p:ext>
     </p:extLst>
   </p:cSld>
@@ -11640,7 +11640,7 @@
           <p:nvPr/>
         </p:nvPicPr>
         <p:blipFill rotWithShape="1">
-          <a:blip xmlns:r="http://schemas.openxmlformats.org/officeDocument/2006/relationships" xmlns:a="http://schemas.openxmlformats.org/drawingml/2006/main" r:embed="R11f4a562c4004cfb">
+          <a:blip xmlns:r="http://schemas.openxmlformats.org/officeDocument/2006/relationships" xmlns:a="http://schemas.openxmlformats.org/drawingml/2006/main" r:embed="R90541c31d3f7482d">
             <a:alphaModFix/>
           </a:blip>
           <a:srcRect xmlns:a="http://schemas.openxmlformats.org/drawingml/2006/main" l="0" t="0" r="0" b="98001"/>
@@ -11664,7 +11664,7 @@
           <p:cNvPr id="62" name="Google Shape;62;p14">
             <a:extLst xmlns:a="http://schemas.openxmlformats.org/drawingml/2006/main">
               <a:ext uri="{FF2B5EF4-FFF2-40B4-BE49-F238E27FC236}">
-                <a16:creationId xmlns:a16="http://schemas.microsoft.com/office/drawing/2014/main" id="{D157B527-DD6B-47E2-AA6E-6FAD386FD201}"/>
+                <a16:creationId xmlns:a16="http://schemas.microsoft.com/office/drawing/2014/main" id="{EA3FFFC6-7197-40D0-97E0-D6A7AAF9FFB9}"/>
               </a:ext>
             </a:extLst>
           </p:cNvPr>
@@ -11715,7 +11715,7 @@
           <p:cNvPr id="63" name="Google Shape;63;p14">
             <a:extLst xmlns:a="http://schemas.openxmlformats.org/drawingml/2006/main">
               <a:ext uri="{FF2B5EF4-FFF2-40B4-BE49-F238E27FC236}">
-                <a16:creationId xmlns:a16="http://schemas.microsoft.com/office/drawing/2014/main" id="{B0FC6282-BFF4-4F8A-9C08-E95B534EC6A1}"/>
+                <a16:creationId xmlns:a16="http://schemas.microsoft.com/office/drawing/2014/main" id="{48173C7D-9D17-48F9-8266-1F05C09B0882}"/>
               </a:ext>
             </a:extLst>
           </p:cNvPr>
@@ -11847,7 +11847,7 @@
           <p:nvPr/>
         </p:nvPicPr>
         <p:blipFill>
-          <a:blip xmlns:r="http://schemas.openxmlformats.org/officeDocument/2006/relationships" xmlns:a="http://schemas.openxmlformats.org/drawingml/2006/main" r:embed="Rb1a9e66847c94f4e">
+          <a:blip xmlns:r="http://schemas.openxmlformats.org/officeDocument/2006/relationships" xmlns:a="http://schemas.openxmlformats.org/drawingml/2006/main" r:embed="R3ee03979693547ba">
             <a:alphaModFix/>
           </a:blip>
           <a:stretch xmlns:a="http://schemas.openxmlformats.org/drawingml/2006/main">
@@ -11877,7 +11877,7 @@
     </p:spTree>
     <p:extLst>
       <p:ext uri="{BB962C8B-B14F-4D97-AF65-F5344CB8AC3E}">
-        <p14:creationId xmlns:p14="http://schemas.microsoft.com/office/powerpoint/2010/main" val="1727501649"/>
+        <p14:creationId xmlns:p14="http://schemas.microsoft.com/office/powerpoint/2010/main" val="2133866187"/>
       </p:ext>
     </p:extLst>
   </p:cSld>
@@ -11905,7 +11905,7 @@
           <p:nvPr/>
         </p:nvPicPr>
         <p:blipFill>
-          <a:blip xmlns:r="http://schemas.openxmlformats.org/officeDocument/2006/relationships" xmlns:a="http://schemas.openxmlformats.org/drawingml/2006/main" r:embed="R3aa18ca2fb1e4ff1">
+          <a:blip xmlns:r="http://schemas.openxmlformats.org/officeDocument/2006/relationships" xmlns:a="http://schemas.openxmlformats.org/drawingml/2006/main" r:embed="R6a9e9a8b7d4f4138">
             <a:alphaModFix/>
           </a:blip>
           <a:stretch xmlns:a="http://schemas.openxmlformats.org/drawingml/2006/main">
@@ -11930,7 +11930,7 @@
           <p:cNvPr id="70" name="Google Shape;70;p15">
             <a:extLst xmlns:a="http://schemas.openxmlformats.org/drawingml/2006/main">
               <a:ext uri="{FF2B5EF4-FFF2-40B4-BE49-F238E27FC236}">
-                <a16:creationId xmlns:a16="http://schemas.microsoft.com/office/drawing/2014/main" id="{D2DCD4EC-20D8-4169-BD01-AB672536E7F8}"/>
+                <a16:creationId xmlns:a16="http://schemas.microsoft.com/office/drawing/2014/main" id="{60DB28F2-9494-40FD-8130-C4EBB1E9C349}"/>
               </a:ext>
             </a:extLst>
           </p:cNvPr>
@@ -11981,7 +11981,7 @@
           <p:cNvPr id="71" name="Google Shape;71;p15">
             <a:extLst xmlns:a="http://schemas.openxmlformats.org/drawingml/2006/main">
               <a:ext uri="{FF2B5EF4-FFF2-40B4-BE49-F238E27FC236}">
-                <a16:creationId xmlns:a16="http://schemas.microsoft.com/office/drawing/2014/main" id="{80D6FC02-9BFB-49AE-B10B-EDA579692FF7}"/>
+                <a16:creationId xmlns:a16="http://schemas.microsoft.com/office/drawing/2014/main" id="{2E28CBB2-E9F8-4364-9E53-32E8EDB40BD6}"/>
               </a:ext>
             </a:extLst>
           </p:cNvPr>
@@ -12039,7 +12039,7 @@
           <p:cNvPr id="73" name="">
             <a:extLst xmlns:a="http://schemas.openxmlformats.org/drawingml/2006/main">
               <a:ext uri="{FF2B5EF4-FFF2-40B4-BE49-F238E27FC236}">
-                <a16:creationId xmlns:a16="http://schemas.microsoft.com/office/drawing/2014/main" id="{42E399E6-8C5A-447A-B61F-2AB040590889}"/>
+                <a16:creationId xmlns:a16="http://schemas.microsoft.com/office/drawing/2014/main" id="{35833026-27BA-4516-9DD4-3557936F1B86}"/>
               </a:ext>
             </a:extLst>
           </p:cNvPr>
@@ -12096,7 +12096,7 @@
           <p:cNvPr id="74" name="">
             <a:extLst xmlns:a="http://schemas.openxmlformats.org/drawingml/2006/main">
               <a:ext uri="{FF2B5EF4-FFF2-40B4-BE49-F238E27FC236}">
-                <a16:creationId xmlns:a16="http://schemas.microsoft.com/office/drawing/2014/main" id="{0990BA18-49AD-4908-BCBC-CE4FAEC6F6B6}"/>
+                <a16:creationId xmlns:a16="http://schemas.microsoft.com/office/drawing/2014/main" id="{3624C4A0-6CCF-41B4-A2BD-7348F113D160}"/>
               </a:ext>
             </a:extLst>
           </p:cNvPr>
@@ -12153,7 +12153,7 @@
           <p:cNvPr id="75" name="">
             <a:extLst xmlns:a="http://schemas.openxmlformats.org/drawingml/2006/main">
               <a:ext uri="{FF2B5EF4-FFF2-40B4-BE49-F238E27FC236}">
-                <a16:creationId xmlns:a16="http://schemas.microsoft.com/office/drawing/2014/main" id="{7E4A2C4F-BA84-40CC-B7FB-A1C123AA4BD4}"/>
+                <a16:creationId xmlns:a16="http://schemas.microsoft.com/office/drawing/2014/main" id="{BCA3F115-EE99-480C-BAE7-462D4AEE8C3D}"/>
               </a:ext>
             </a:extLst>
           </p:cNvPr>
@@ -12210,7 +12210,7 @@
           <p:cNvPr id="76" name="">
             <a:extLst xmlns:a="http://schemas.openxmlformats.org/drawingml/2006/main">
               <a:ext uri="{FF2B5EF4-FFF2-40B4-BE49-F238E27FC236}">
-                <a16:creationId xmlns:a16="http://schemas.microsoft.com/office/drawing/2014/main" id="{1B710133-DDBD-4B8F-89FA-95752EABD3B3}"/>
+                <a16:creationId xmlns:a16="http://schemas.microsoft.com/office/drawing/2014/main" id="{A3F0CA16-1650-4793-A937-4C1109684EF7}"/>
               </a:ext>
             </a:extLst>
           </p:cNvPr>
@@ -12290,7 +12290,7 @@
           <p:cNvPr id="77" name="">
             <a:extLst xmlns:a="http://schemas.openxmlformats.org/drawingml/2006/main">
               <a:ext uri="{FF2B5EF4-FFF2-40B4-BE49-F238E27FC236}">
-                <a16:creationId xmlns:a16="http://schemas.microsoft.com/office/drawing/2014/main" id="{A0695601-7345-4460-9890-5D49A65A6D45}"/>
+                <a16:creationId xmlns:a16="http://schemas.microsoft.com/office/drawing/2014/main" id="{C7BAF5AE-60E0-4E15-981E-6CC6EE0BD4BB}"/>
               </a:ext>
             </a:extLst>
           </p:cNvPr>
@@ -12347,7 +12347,7 @@
           <p:cNvPr id="78" name="">
             <a:extLst xmlns:a="http://schemas.openxmlformats.org/drawingml/2006/main">
               <a:ext uri="{FF2B5EF4-FFF2-40B4-BE49-F238E27FC236}">
-                <a16:creationId xmlns:a16="http://schemas.microsoft.com/office/drawing/2014/main" id="{03DA9020-7C49-4ED0-85F9-7E855D8CF250}"/>
+                <a16:creationId xmlns:a16="http://schemas.microsoft.com/office/drawing/2014/main" id="{86E87BDD-83A4-4A83-A9E5-B1D2540179AA}"/>
               </a:ext>
             </a:extLst>
           </p:cNvPr>
@@ -12404,7 +12404,7 @@
           <p:cNvPr id="79" name="">
             <a:extLst xmlns:a="http://schemas.openxmlformats.org/drawingml/2006/main">
               <a:ext uri="{FF2B5EF4-FFF2-40B4-BE49-F238E27FC236}">
-                <a16:creationId xmlns:a16="http://schemas.microsoft.com/office/drawing/2014/main" id="{FD20D6C4-AF70-49A7-B962-1D7FE1B2B68C}"/>
+                <a16:creationId xmlns:a16="http://schemas.microsoft.com/office/drawing/2014/main" id="{2050F6EA-2AA6-47A7-8952-63D5506CBC29}"/>
               </a:ext>
             </a:extLst>
           </p:cNvPr>
@@ -12505,7 +12505,7 @@
     </p:spTree>
     <p:extLst>
       <p:ext uri="{BB962C8B-B14F-4D97-AF65-F5344CB8AC3E}">
-        <p14:creationId xmlns:p14="http://schemas.microsoft.com/office/powerpoint/2010/main" val="225447409"/>
+        <p14:creationId xmlns:p14="http://schemas.microsoft.com/office/powerpoint/2010/main" val="199768177"/>
       </p:ext>
     </p:extLst>
   </p:cSld>
@@ -12533,7 +12533,7 @@
           <p:nvPr/>
         </p:nvPicPr>
         <p:blipFill rotWithShape="1">
-          <a:blip xmlns:r="http://schemas.openxmlformats.org/officeDocument/2006/relationships" xmlns:a="http://schemas.openxmlformats.org/drawingml/2006/main" r:embed="R33d18bd7d57e425c">
+          <a:blip xmlns:r="http://schemas.openxmlformats.org/officeDocument/2006/relationships" xmlns:a="http://schemas.openxmlformats.org/drawingml/2006/main" r:embed="R85ff6616338d4fa6">
             <a:alphaModFix/>
           </a:blip>
           <a:srcRect xmlns:a="http://schemas.openxmlformats.org/drawingml/2006/main" l="0" t="0" r="0" b="98001"/>
@@ -12561,7 +12561,7 @@
           <p:nvPr/>
         </p:nvPicPr>
         <p:blipFill>
-          <a:blip xmlns:r="http://schemas.openxmlformats.org/officeDocument/2006/relationships" xmlns:a="http://schemas.openxmlformats.org/drawingml/2006/main" r:embed="R3b44a68883ee4ee3">
+          <a:blip xmlns:r="http://schemas.openxmlformats.org/officeDocument/2006/relationships" xmlns:a="http://schemas.openxmlformats.org/drawingml/2006/main" r:embed="R3e04b2e95b9b445b">
             <a:alphaModFix/>
           </a:blip>
           <a:stretch xmlns:a="http://schemas.openxmlformats.org/drawingml/2006/main">
@@ -12586,7 +12586,7 @@
           <p:cNvPr id="78" name="Google Shape;78;p16">
             <a:extLst xmlns:a="http://schemas.openxmlformats.org/drawingml/2006/main">
               <a:ext uri="{FF2B5EF4-FFF2-40B4-BE49-F238E27FC236}">
-                <a16:creationId xmlns:a16="http://schemas.microsoft.com/office/drawing/2014/main" id="{D7F2F6C4-39C1-418C-B45B-5884D86D8EAC}"/>
+                <a16:creationId xmlns:a16="http://schemas.microsoft.com/office/drawing/2014/main" id="{0038F0F3-CBC3-4304-AD0F-54F90BB4286C}"/>
               </a:ext>
             </a:extLst>
           </p:cNvPr>
@@ -12637,7 +12637,7 @@
           <p:cNvPr id="79" name="Google Shape;79;p16">
             <a:extLst xmlns:a="http://schemas.openxmlformats.org/drawingml/2006/main">
               <a:ext uri="{FF2B5EF4-FFF2-40B4-BE49-F238E27FC236}">
-                <a16:creationId xmlns:a16="http://schemas.microsoft.com/office/drawing/2014/main" id="{69AB7D52-CB0A-4785-896B-A3DFDA0B7C39}"/>
+                <a16:creationId xmlns:a16="http://schemas.microsoft.com/office/drawing/2014/main" id="{C7A88D54-2F5F-4109-957F-AFCB8E95AE42}"/>
               </a:ext>
             </a:extLst>
           </p:cNvPr>
@@ -12695,7 +12695,7 @@
           <p:cNvPr id="82" name="">
             <a:extLst xmlns:a="http://schemas.openxmlformats.org/drawingml/2006/main">
               <a:ext uri="{FF2B5EF4-FFF2-40B4-BE49-F238E27FC236}">
-                <a16:creationId xmlns:a16="http://schemas.microsoft.com/office/drawing/2014/main" id="{F7E97993-4B27-4488-8D95-D946688659BA}"/>
+                <a16:creationId xmlns:a16="http://schemas.microsoft.com/office/drawing/2014/main" id="{D50276F9-A0FA-46E8-BD69-43D31C21E401}"/>
               </a:ext>
             </a:extLst>
           </p:cNvPr>
@@ -12752,7 +12752,7 @@
           <p:cNvPr id="83" name="">
             <a:extLst xmlns:a="http://schemas.openxmlformats.org/drawingml/2006/main">
               <a:ext uri="{FF2B5EF4-FFF2-40B4-BE49-F238E27FC236}">
-                <a16:creationId xmlns:a16="http://schemas.microsoft.com/office/drawing/2014/main" id="{FA5D01CE-AE1B-427B-A4D8-F8F2E76DD160}"/>
+                <a16:creationId xmlns:a16="http://schemas.microsoft.com/office/drawing/2014/main" id="{CBEE04CC-05A6-4081-A9C9-B1C730250246}"/>
               </a:ext>
             </a:extLst>
           </p:cNvPr>
@@ -12809,7 +12809,7 @@
           <p:cNvPr id="84" name="">
             <a:extLst xmlns:a="http://schemas.openxmlformats.org/drawingml/2006/main">
               <a:ext uri="{FF2B5EF4-FFF2-40B4-BE49-F238E27FC236}">
-                <a16:creationId xmlns:a16="http://schemas.microsoft.com/office/drawing/2014/main" id="{550325B2-31BD-4F41-91B1-69A4549A1008}"/>
+                <a16:creationId xmlns:a16="http://schemas.microsoft.com/office/drawing/2014/main" id="{24C6CF47-B387-48B9-983F-99E79306C0F2}"/>
               </a:ext>
             </a:extLst>
           </p:cNvPr>
@@ -12866,7 +12866,7 @@
           <p:cNvPr id="85" name="">
             <a:extLst xmlns:a="http://schemas.openxmlformats.org/drawingml/2006/main">
               <a:ext uri="{FF2B5EF4-FFF2-40B4-BE49-F238E27FC236}">
-                <a16:creationId xmlns:a16="http://schemas.microsoft.com/office/drawing/2014/main" id="{2DDB3936-CA78-4628-96C4-CB37FE2CE584}"/>
+                <a16:creationId xmlns:a16="http://schemas.microsoft.com/office/drawing/2014/main" id="{155554C7-8862-447D-BFBF-8BFCCAA56B08}"/>
               </a:ext>
             </a:extLst>
           </p:cNvPr>
@@ -12946,7 +12946,7 @@
           <p:cNvPr id="86" name="">
             <a:extLst xmlns:a="http://schemas.openxmlformats.org/drawingml/2006/main">
               <a:ext uri="{FF2B5EF4-FFF2-40B4-BE49-F238E27FC236}">
-                <a16:creationId xmlns:a16="http://schemas.microsoft.com/office/drawing/2014/main" id="{BB99CB79-E206-4E2A-9AB4-2377E62AA34E}"/>
+                <a16:creationId xmlns:a16="http://schemas.microsoft.com/office/drawing/2014/main" id="{45F3116A-A103-44D9-9A9C-EC55020AAA8A}"/>
               </a:ext>
             </a:extLst>
           </p:cNvPr>
@@ -13003,7 +13003,7 @@
           <p:cNvPr id="87" name="">
             <a:extLst xmlns:a="http://schemas.openxmlformats.org/drawingml/2006/main">
               <a:ext uri="{FF2B5EF4-FFF2-40B4-BE49-F238E27FC236}">
-                <a16:creationId xmlns:a16="http://schemas.microsoft.com/office/drawing/2014/main" id="{2DF4AD66-57BF-409B-AB5C-E7DEE9EE63D1}"/>
+                <a16:creationId xmlns:a16="http://schemas.microsoft.com/office/drawing/2014/main" id="{7ED9F73F-5333-466B-8EE1-D6317605BAF5}"/>
               </a:ext>
             </a:extLst>
           </p:cNvPr>
@@ -13083,7 +13083,7 @@
           <p:cNvPr id="88" name="">
             <a:extLst xmlns:a="http://schemas.openxmlformats.org/drawingml/2006/main">
               <a:ext uri="{FF2B5EF4-FFF2-40B4-BE49-F238E27FC236}">
-                <a16:creationId xmlns:a16="http://schemas.microsoft.com/office/drawing/2014/main" id="{8C7F13FB-33B5-415F-8AB3-B76AD610E360}"/>
+                <a16:creationId xmlns:a16="http://schemas.microsoft.com/office/drawing/2014/main" id="{39352D72-46FE-4218-8108-133DD514FF63}"/>
               </a:ext>
             </a:extLst>
           </p:cNvPr>
@@ -13140,7 +13140,7 @@
           <p:cNvPr id="89" name="">
             <a:extLst xmlns:a="http://schemas.openxmlformats.org/drawingml/2006/main">
               <a:ext uri="{FF2B5EF4-FFF2-40B4-BE49-F238E27FC236}">
-                <a16:creationId xmlns:a16="http://schemas.microsoft.com/office/drawing/2014/main" id="{F0F8E88E-6CE6-4B74-A850-98BF2AA0959A}"/>
+                <a16:creationId xmlns:a16="http://schemas.microsoft.com/office/drawing/2014/main" id="{6ABD574F-14AA-4DF6-8C45-30A246486C09}"/>
               </a:ext>
             </a:extLst>
           </p:cNvPr>
@@ -13218,7 +13218,7 @@
     </p:spTree>
     <p:extLst>
       <p:ext uri="{BB962C8B-B14F-4D97-AF65-F5344CB8AC3E}">
-        <p14:creationId xmlns:p14="http://schemas.microsoft.com/office/powerpoint/2010/main" val="325604593"/>
+        <p14:creationId xmlns:p14="http://schemas.microsoft.com/office/powerpoint/2010/main" val="296888266"/>
       </p:ext>
     </p:extLst>
   </p:cSld>
@@ -13246,7 +13246,7 @@
           <p:nvPr/>
         </p:nvPicPr>
         <p:blipFill rotWithShape="1">
-          <a:blip xmlns:r="http://schemas.openxmlformats.org/officeDocument/2006/relationships" xmlns:a="http://schemas.openxmlformats.org/drawingml/2006/main" r:embed="R1cb18f818bbb4fa8">
+          <a:blip xmlns:r="http://schemas.openxmlformats.org/officeDocument/2006/relationships" xmlns:a="http://schemas.openxmlformats.org/drawingml/2006/main" r:embed="R15c8f56c53d7468c">
             <a:alphaModFix/>
           </a:blip>
           <a:srcRect xmlns:a="http://schemas.openxmlformats.org/drawingml/2006/main" l="0" t="0" r="0" b="98001"/>
@@ -13274,7 +13274,7 @@
           <p:nvPr/>
         </p:nvPicPr>
         <p:blipFill>
-          <a:blip xmlns:r="http://schemas.openxmlformats.org/officeDocument/2006/relationships" xmlns:a="http://schemas.openxmlformats.org/drawingml/2006/main" r:embed="Rf26c328b516241ae">
+          <a:blip xmlns:r="http://schemas.openxmlformats.org/officeDocument/2006/relationships" xmlns:a="http://schemas.openxmlformats.org/drawingml/2006/main" r:embed="R8719f9e49ddc43c8">
             <a:alphaModFix/>
           </a:blip>
           <a:stretch xmlns:a="http://schemas.openxmlformats.org/drawingml/2006/main">
@@ -13299,7 +13299,7 @@
           <p:cNvPr id="86" name="Google Shape;86;p17">
             <a:extLst xmlns:a="http://schemas.openxmlformats.org/drawingml/2006/main">
               <a:ext uri="{FF2B5EF4-FFF2-40B4-BE49-F238E27FC236}">
-                <a16:creationId xmlns:a16="http://schemas.microsoft.com/office/drawing/2014/main" id="{170CE3A2-42A6-46EC-814E-608AC7902ECB}"/>
+                <a16:creationId xmlns:a16="http://schemas.microsoft.com/office/drawing/2014/main" id="{79C32C32-BE27-4032-94DA-E618EEBDA7E2}"/>
               </a:ext>
             </a:extLst>
           </p:cNvPr>
@@ -13350,7 +13350,7 @@
           <p:cNvPr id="87" name="Google Shape;87;p17">
             <a:extLst xmlns:a="http://schemas.openxmlformats.org/drawingml/2006/main">
               <a:ext uri="{FF2B5EF4-FFF2-40B4-BE49-F238E27FC236}">
-                <a16:creationId xmlns:a16="http://schemas.microsoft.com/office/drawing/2014/main" id="{ADEFFC55-147F-4E91-9A7B-B4A0AE9AADB5}"/>
+                <a16:creationId xmlns:a16="http://schemas.microsoft.com/office/drawing/2014/main" id="{559E7C94-B134-4B0F-B93C-EA0D5DCD25BF}"/>
               </a:ext>
             </a:extLst>
           </p:cNvPr>
@@ -13408,7 +13408,7 @@
           <p:cNvPr id="90" name="">
             <a:extLst xmlns:a="http://schemas.openxmlformats.org/drawingml/2006/main">
               <a:ext uri="{FF2B5EF4-FFF2-40B4-BE49-F238E27FC236}">
-                <a16:creationId xmlns:a16="http://schemas.microsoft.com/office/drawing/2014/main" id="{985A15C6-4045-47B4-BB1D-689F58CE1F8F}"/>
+                <a16:creationId xmlns:a16="http://schemas.microsoft.com/office/drawing/2014/main" id="{1795D5BD-67C0-4E98-9342-6DAFA4A8A92C}"/>
               </a:ext>
             </a:extLst>
           </p:cNvPr>
@@ -13465,7 +13465,7 @@
           <p:cNvPr id="91" name="">
             <a:extLst xmlns:a="http://schemas.openxmlformats.org/drawingml/2006/main">
               <a:ext uri="{FF2B5EF4-FFF2-40B4-BE49-F238E27FC236}">
-                <a16:creationId xmlns:a16="http://schemas.microsoft.com/office/drawing/2014/main" id="{3278132C-FA35-4756-B051-B6355BCAB62D}"/>
+                <a16:creationId xmlns:a16="http://schemas.microsoft.com/office/drawing/2014/main" id="{3C998B22-B7E2-4B0C-99B4-2CFF300AEC2B}"/>
               </a:ext>
             </a:extLst>
           </p:cNvPr>
@@ -13522,7 +13522,7 @@
           <p:cNvPr id="92" name="">
             <a:extLst xmlns:a="http://schemas.openxmlformats.org/drawingml/2006/main">
               <a:ext uri="{FF2B5EF4-FFF2-40B4-BE49-F238E27FC236}">
-                <a16:creationId xmlns:a16="http://schemas.microsoft.com/office/drawing/2014/main" id="{EB0277C6-0029-4A1A-AF5B-7723ACEF488C}"/>
+                <a16:creationId xmlns:a16="http://schemas.microsoft.com/office/drawing/2014/main" id="{36198FF3-6811-40B5-978A-9ECB979FC1A0}"/>
               </a:ext>
             </a:extLst>
           </p:cNvPr>
@@ -13579,7 +13579,7 @@
           <p:cNvPr id="93" name="">
             <a:extLst xmlns:a="http://schemas.openxmlformats.org/drawingml/2006/main">
               <a:ext uri="{FF2B5EF4-FFF2-40B4-BE49-F238E27FC236}">
-                <a16:creationId xmlns:a16="http://schemas.microsoft.com/office/drawing/2014/main" id="{B55E720F-21EB-4156-94BD-B77691D24887}"/>
+                <a16:creationId xmlns:a16="http://schemas.microsoft.com/office/drawing/2014/main" id="{2EBF90C9-48D5-4E17-A58A-C7C69247ED67}"/>
               </a:ext>
             </a:extLst>
           </p:cNvPr>
@@ -13659,7 +13659,7 @@
           <p:cNvPr id="94" name="">
             <a:extLst xmlns:a="http://schemas.openxmlformats.org/drawingml/2006/main">
               <a:ext uri="{FF2B5EF4-FFF2-40B4-BE49-F238E27FC236}">
-                <a16:creationId xmlns:a16="http://schemas.microsoft.com/office/drawing/2014/main" id="{3EA51020-6884-4F3F-984F-94A54BD951BB}"/>
+                <a16:creationId xmlns:a16="http://schemas.microsoft.com/office/drawing/2014/main" id="{4BE62B2C-63F9-41D2-A509-FA7408481003}"/>
               </a:ext>
             </a:extLst>
           </p:cNvPr>
@@ -13716,7 +13716,7 @@
           <p:cNvPr id="95" name="">
             <a:extLst xmlns:a="http://schemas.openxmlformats.org/drawingml/2006/main">
               <a:ext uri="{FF2B5EF4-FFF2-40B4-BE49-F238E27FC236}">
-                <a16:creationId xmlns:a16="http://schemas.microsoft.com/office/drawing/2014/main" id="{689D1E75-6BA4-41FE-B69B-11D4024E3E41}"/>
+                <a16:creationId xmlns:a16="http://schemas.microsoft.com/office/drawing/2014/main" id="{07AEAB3C-EE1E-4F56-8A1F-8423277314F8}"/>
               </a:ext>
             </a:extLst>
           </p:cNvPr>
@@ -13796,7 +13796,7 @@
           <p:cNvPr id="96" name="">
             <a:extLst xmlns:a="http://schemas.openxmlformats.org/drawingml/2006/main">
               <a:ext uri="{FF2B5EF4-FFF2-40B4-BE49-F238E27FC236}">
-                <a16:creationId xmlns:a16="http://schemas.microsoft.com/office/drawing/2014/main" id="{CD64D216-BD52-4550-8D26-8FF79C10B9EB}"/>
+                <a16:creationId xmlns:a16="http://schemas.microsoft.com/office/drawing/2014/main" id="{79194DDE-1A25-4807-ACAA-56312EECB961}"/>
               </a:ext>
             </a:extLst>
           </p:cNvPr>
@@ -13853,7 +13853,7 @@
           <p:cNvPr id="97" name="">
             <a:extLst xmlns:a="http://schemas.openxmlformats.org/drawingml/2006/main">
               <a:ext uri="{FF2B5EF4-FFF2-40B4-BE49-F238E27FC236}">
-                <a16:creationId xmlns:a16="http://schemas.microsoft.com/office/drawing/2014/main" id="{94C6E3FF-008D-48AD-BC35-5469C0D0429E}"/>
+                <a16:creationId xmlns:a16="http://schemas.microsoft.com/office/drawing/2014/main" id="{BE2A50E9-1B0C-4CC5-B617-FC00ED89C34F}"/>
               </a:ext>
             </a:extLst>
           </p:cNvPr>
@@ -13933,7 +13933,7 @@
           <p:cNvPr id="98" name="">
             <a:extLst xmlns:a="http://schemas.openxmlformats.org/drawingml/2006/main">
               <a:ext uri="{FF2B5EF4-FFF2-40B4-BE49-F238E27FC236}">
-                <a16:creationId xmlns:a16="http://schemas.microsoft.com/office/drawing/2014/main" id="{0CF183EA-4B82-4F6F-9EE9-AF00E2EA9E2D}"/>
+                <a16:creationId xmlns:a16="http://schemas.microsoft.com/office/drawing/2014/main" id="{0F856F6F-05D9-429D-99BD-991F54A6054A}"/>
               </a:ext>
             </a:extLst>
           </p:cNvPr>
@@ -13990,7 +13990,7 @@
           <p:cNvPr id="99" name="">
             <a:extLst xmlns:a="http://schemas.openxmlformats.org/drawingml/2006/main">
               <a:ext uri="{FF2B5EF4-FFF2-40B4-BE49-F238E27FC236}">
-                <a16:creationId xmlns:a16="http://schemas.microsoft.com/office/drawing/2014/main" id="{72C66B84-C87B-4B8B-BDE8-D3D941A713D1}"/>
+                <a16:creationId xmlns:a16="http://schemas.microsoft.com/office/drawing/2014/main" id="{D6E87647-174B-4150-9F74-026F4427AB44}"/>
               </a:ext>
             </a:extLst>
           </p:cNvPr>
@@ -14070,7 +14070,7 @@
           <p:cNvPr id="100" name="">
             <a:extLst xmlns:a="http://schemas.openxmlformats.org/drawingml/2006/main">
               <a:ext uri="{FF2B5EF4-FFF2-40B4-BE49-F238E27FC236}">
-                <a16:creationId xmlns:a16="http://schemas.microsoft.com/office/drawing/2014/main" id="{A5767F0E-B9F4-4101-87E3-569106F9ACD9}"/>
+                <a16:creationId xmlns:a16="http://schemas.microsoft.com/office/drawing/2014/main" id="{1350F94B-1176-4497-BB1F-5A8140BA58A2}"/>
               </a:ext>
             </a:extLst>
           </p:cNvPr>
@@ -14127,7 +14127,7 @@
           <p:cNvPr id="101" name="">
             <a:extLst xmlns:a="http://schemas.openxmlformats.org/drawingml/2006/main">
               <a:ext uri="{FF2B5EF4-FFF2-40B4-BE49-F238E27FC236}">
-                <a16:creationId xmlns:a16="http://schemas.microsoft.com/office/drawing/2014/main" id="{EC47FA43-94BD-4E3C-A806-D7C3D60367B8}"/>
+                <a16:creationId xmlns:a16="http://schemas.microsoft.com/office/drawing/2014/main" id="{FAE8C90A-A5FD-44E9-89F7-D19F4212C65D}"/>
               </a:ext>
             </a:extLst>
           </p:cNvPr>
@@ -14207,7 +14207,7 @@
           <p:cNvPr id="102" name="">
             <a:extLst xmlns:a="http://schemas.openxmlformats.org/drawingml/2006/main">
               <a:ext uri="{FF2B5EF4-FFF2-40B4-BE49-F238E27FC236}">
-                <a16:creationId xmlns:a16="http://schemas.microsoft.com/office/drawing/2014/main" id="{4E8D87BF-C441-4D04-B9C2-FBFCBFB197DF}"/>
+                <a16:creationId xmlns:a16="http://schemas.microsoft.com/office/drawing/2014/main" id="{C3684A4B-BF53-491F-82BC-24332AF3F191}"/>
               </a:ext>
             </a:extLst>
           </p:cNvPr>
@@ -14264,7 +14264,7 @@
           <p:cNvPr id="103" name="">
             <a:extLst xmlns:a="http://schemas.openxmlformats.org/drawingml/2006/main">
               <a:ext uri="{FF2B5EF4-FFF2-40B4-BE49-F238E27FC236}">
-                <a16:creationId xmlns:a16="http://schemas.microsoft.com/office/drawing/2014/main" id="{8B17A5E6-B516-417C-9A5E-B064DB5A6F19}"/>
+                <a16:creationId xmlns:a16="http://schemas.microsoft.com/office/drawing/2014/main" id="{A0006A60-D86B-4B3A-AF3F-A72DF406BC7A}"/>
               </a:ext>
             </a:extLst>
           </p:cNvPr>
@@ -14342,7 +14342,7 @@
     </p:spTree>
     <p:extLst>
       <p:ext uri="{BB962C8B-B14F-4D97-AF65-F5344CB8AC3E}">
-        <p14:creationId xmlns:p14="http://schemas.microsoft.com/office/powerpoint/2010/main" val="1162415030"/>
+        <p14:creationId xmlns:p14="http://schemas.microsoft.com/office/powerpoint/2010/main" val="1314331815"/>
       </p:ext>
     </p:extLst>
   </p:cSld>
@@ -14495,7 +14495,7 @@
           <p:nvPr/>
         </p:nvPicPr>
         <p:blipFill rotWithShape="1">
-          <a:blip xmlns:r="http://schemas.openxmlformats.org/officeDocument/2006/relationships" xmlns:a="http://schemas.openxmlformats.org/drawingml/2006/main" r:embed="Ra2aede6c67c24e41">
+          <a:blip xmlns:r="http://schemas.openxmlformats.org/officeDocument/2006/relationships" xmlns:a="http://schemas.openxmlformats.org/drawingml/2006/main" r:embed="R605e2b6ea6194f3a">
             <a:alphaModFix/>
           </a:blip>
           <a:srcRect xmlns:a="http://schemas.openxmlformats.org/drawingml/2006/main" l="0" t="0" r="0" b="98001"/>
@@ -14523,7 +14523,7 @@
           <p:nvPr/>
         </p:nvPicPr>
         <p:blipFill>
-          <a:blip xmlns:r="http://schemas.openxmlformats.org/officeDocument/2006/relationships" xmlns:a="http://schemas.openxmlformats.org/drawingml/2006/main" r:embed="R00b1eb7ffbad42a9">
+          <a:blip xmlns:r="http://schemas.openxmlformats.org/officeDocument/2006/relationships" xmlns:a="http://schemas.openxmlformats.org/drawingml/2006/main" r:embed="Rc78b2aabfd5048d2">
             <a:alphaModFix/>
           </a:blip>
           <a:stretch xmlns:a="http://schemas.openxmlformats.org/drawingml/2006/main">
@@ -14548,7 +14548,7 @@
           <p:cNvPr id="94" name="Google Shape;94;p18">
             <a:extLst xmlns:a="http://schemas.openxmlformats.org/drawingml/2006/main">
               <a:ext uri="{FF2B5EF4-FFF2-40B4-BE49-F238E27FC236}">
-                <a16:creationId xmlns:a16="http://schemas.microsoft.com/office/drawing/2014/main" id="{633F8EC4-3D20-498D-A114-4C098D5E942D}"/>
+                <a16:creationId xmlns:a16="http://schemas.microsoft.com/office/drawing/2014/main" id="{8B912238-0EE2-42E6-A8BC-ABDE9184EB6D}"/>
               </a:ext>
             </a:extLst>
           </p:cNvPr>
@@ -14599,7 +14599,7 @@
           <p:cNvPr id="95" name="Google Shape;95;p18">
             <a:extLst xmlns:a="http://schemas.openxmlformats.org/drawingml/2006/main">
               <a:ext uri="{FF2B5EF4-FFF2-40B4-BE49-F238E27FC236}">
-                <a16:creationId xmlns:a16="http://schemas.microsoft.com/office/drawing/2014/main" id="{44F0949A-D7D4-4C8A-A68C-300140A47397}"/>
+                <a16:creationId xmlns:a16="http://schemas.microsoft.com/office/drawing/2014/main" id="{0A18A3D2-A1DD-4DE7-A56E-3A3709984BFB}"/>
               </a:ext>
             </a:extLst>
           </p:cNvPr>
@@ -14657,7 +14657,7 @@
           <p:cNvPr id="98" name="">
             <a:extLst xmlns:a="http://schemas.openxmlformats.org/drawingml/2006/main">
               <a:ext uri="{FF2B5EF4-FFF2-40B4-BE49-F238E27FC236}">
-                <a16:creationId xmlns:a16="http://schemas.microsoft.com/office/drawing/2014/main" id="{827C3E76-8482-4665-AB40-F2581F1ECF98}"/>
+                <a16:creationId xmlns:a16="http://schemas.microsoft.com/office/drawing/2014/main" id="{5A403AA3-22A2-459E-B0B0-AF39F8F31836}"/>
               </a:ext>
             </a:extLst>
           </p:cNvPr>
@@ -14714,7 +14714,7 @@
           <p:cNvPr id="99" name="">
             <a:extLst xmlns:a="http://schemas.openxmlformats.org/drawingml/2006/main">
               <a:ext uri="{FF2B5EF4-FFF2-40B4-BE49-F238E27FC236}">
-                <a16:creationId xmlns:a16="http://schemas.microsoft.com/office/drawing/2014/main" id="{0A8AA499-7FB5-4D5F-9D2F-52050B572831}"/>
+                <a16:creationId xmlns:a16="http://schemas.microsoft.com/office/drawing/2014/main" id="{EAB5F636-6C87-42E3-9039-41EBFCFC1C2C}"/>
               </a:ext>
             </a:extLst>
           </p:cNvPr>
@@ -14771,7 +14771,7 @@
           <p:cNvPr id="100" name="">
             <a:extLst xmlns:a="http://schemas.openxmlformats.org/drawingml/2006/main">
               <a:ext uri="{FF2B5EF4-FFF2-40B4-BE49-F238E27FC236}">
-                <a16:creationId xmlns:a16="http://schemas.microsoft.com/office/drawing/2014/main" id="{88D361BA-1A68-4200-8899-2EB94DA60AC7}"/>
+                <a16:creationId xmlns:a16="http://schemas.microsoft.com/office/drawing/2014/main" id="{EE25438F-7767-41B9-B780-4952B29EBB40}"/>
               </a:ext>
             </a:extLst>
           </p:cNvPr>
@@ -14855,7 +14855,7 @@
           <p:cNvPr id="101" name="">
             <a:extLst xmlns:a="http://schemas.openxmlformats.org/drawingml/2006/main">
               <a:ext uri="{FF2B5EF4-FFF2-40B4-BE49-F238E27FC236}">
-                <a16:creationId xmlns:a16="http://schemas.microsoft.com/office/drawing/2014/main" id="{CF121717-F576-48DE-9B2C-C13E646215AB}"/>
+                <a16:creationId xmlns:a16="http://schemas.microsoft.com/office/drawing/2014/main" id="{C2E07CE8-1BAC-4FF8-8B3F-673076462D03}"/>
               </a:ext>
             </a:extLst>
           </p:cNvPr>
@@ -14939,7 +14939,7 @@
           <p:cNvPr id="102" name="">
             <a:extLst xmlns:a="http://schemas.openxmlformats.org/drawingml/2006/main">
               <a:ext uri="{FF2B5EF4-FFF2-40B4-BE49-F238E27FC236}">
-                <a16:creationId xmlns:a16="http://schemas.microsoft.com/office/drawing/2014/main" id="{B8419857-71F1-438A-B61F-BDBA0AB166D7}"/>
+                <a16:creationId xmlns:a16="http://schemas.microsoft.com/office/drawing/2014/main" id="{67DFB944-F7AE-482C-A3DF-E49A4788148C}"/>
               </a:ext>
             </a:extLst>
           </p:cNvPr>
@@ -15023,7 +15023,7 @@
           <p:cNvPr id="105" name="">
             <a:extLst xmlns:a="http://schemas.openxmlformats.org/drawingml/2006/main">
               <a:ext uri="{FF2B5EF4-FFF2-40B4-BE49-F238E27FC236}">
-                <a16:creationId xmlns:a16="http://schemas.microsoft.com/office/drawing/2014/main" id="{A9BA7E8E-E537-4E3B-BC3C-862FB98E23E9}"/>
+                <a16:creationId xmlns:a16="http://schemas.microsoft.com/office/drawing/2014/main" id="{7EC352FD-00A2-40EF-8A43-B792CB75E54C}"/>
               </a:ext>
             </a:extLst>
           </p:cNvPr>
@@ -15107,7 +15107,7 @@
           <p:cNvPr id="106" name="">
             <a:extLst xmlns:a="http://schemas.openxmlformats.org/drawingml/2006/main">
               <a:ext uri="{FF2B5EF4-FFF2-40B4-BE49-F238E27FC236}">
-                <a16:creationId xmlns:a16="http://schemas.microsoft.com/office/drawing/2014/main" id="{9C477001-ECCE-4C0F-975C-AC49BDB7DA8C}"/>
+                <a16:creationId xmlns:a16="http://schemas.microsoft.com/office/drawing/2014/main" id="{351339D7-EC6D-46B1-A9D9-590E82838AA2}"/>
               </a:ext>
             </a:extLst>
           </p:cNvPr>
@@ -15191,7 +15191,7 @@
           <p:cNvPr id="107" name="">
             <a:extLst xmlns:a="http://schemas.openxmlformats.org/drawingml/2006/main">
               <a:ext uri="{FF2B5EF4-FFF2-40B4-BE49-F238E27FC236}">
-                <a16:creationId xmlns:a16="http://schemas.microsoft.com/office/drawing/2014/main" id="{2BD15DCE-1053-435E-B94A-80A170868D5D}"/>
+                <a16:creationId xmlns:a16="http://schemas.microsoft.com/office/drawing/2014/main" id="{B5EF1D9E-644D-4FC4-9177-6FC462C47DD9}"/>
               </a:ext>
             </a:extLst>
           </p:cNvPr>
@@ -15275,7 +15275,7 @@
           <p:cNvPr id="111" name="">
             <a:extLst xmlns:a="http://schemas.openxmlformats.org/drawingml/2006/main">
               <a:ext uri="{FF2B5EF4-FFF2-40B4-BE49-F238E27FC236}">
-                <a16:creationId xmlns:a16="http://schemas.microsoft.com/office/drawing/2014/main" id="{C322018E-7B0C-42BE-BC34-634944BB502F}"/>
+                <a16:creationId xmlns:a16="http://schemas.microsoft.com/office/drawing/2014/main" id="{D68B40DC-6347-4C23-A371-92ED063F0BFD}"/>
               </a:ext>
             </a:extLst>
           </p:cNvPr>
@@ -15332,7 +15332,7 @@
           <p:cNvPr id="112" name="">
             <a:extLst xmlns:a="http://schemas.openxmlformats.org/drawingml/2006/main">
               <a:ext uri="{FF2B5EF4-FFF2-40B4-BE49-F238E27FC236}">
-                <a16:creationId xmlns:a16="http://schemas.microsoft.com/office/drawing/2014/main" id="{13024E9C-8B49-408F-AC3B-F525D306218F}"/>
+                <a16:creationId xmlns:a16="http://schemas.microsoft.com/office/drawing/2014/main" id="{3C291F11-F624-4DDF-9322-82C6487DBC8A}"/>
               </a:ext>
             </a:extLst>
           </p:cNvPr>
@@ -15387,7 +15387,7 @@
     </p:spTree>
     <p:extLst>
       <p:ext uri="{BB962C8B-B14F-4D97-AF65-F5344CB8AC3E}">
-        <p14:creationId xmlns:p14="http://schemas.microsoft.com/office/powerpoint/2010/main" val="181371065"/>
+        <p14:creationId xmlns:p14="http://schemas.microsoft.com/office/powerpoint/2010/main" val="1060596417"/>
       </p:ext>
     </p:extLst>
   </p:cSld>
@@ -15415,7 +15415,7 @@
           <p:nvPr/>
         </p:nvPicPr>
         <p:blipFill rotWithShape="1">
-          <a:blip xmlns:r="http://schemas.openxmlformats.org/officeDocument/2006/relationships" xmlns:a="http://schemas.openxmlformats.org/drawingml/2006/main" r:embed="R89f099f7c09e40c6">
+          <a:blip xmlns:r="http://schemas.openxmlformats.org/officeDocument/2006/relationships" xmlns:a="http://schemas.openxmlformats.org/drawingml/2006/main" r:embed="Rbcede05339c3439c">
             <a:alphaModFix/>
           </a:blip>
           <a:srcRect xmlns:a="http://schemas.openxmlformats.org/drawingml/2006/main" l="0" t="0" r="0" b="98001"/>
@@ -15443,7 +15443,7 @@
           <p:nvPr/>
         </p:nvPicPr>
         <p:blipFill>
-          <a:blip xmlns:r="http://schemas.openxmlformats.org/officeDocument/2006/relationships" xmlns:a="http://schemas.openxmlformats.org/drawingml/2006/main" r:embed="R0909d0f9a2b8443e">
+          <a:blip xmlns:r="http://schemas.openxmlformats.org/officeDocument/2006/relationships" xmlns:a="http://schemas.openxmlformats.org/drawingml/2006/main" r:embed="Rf2f71ac399b24427">
             <a:alphaModFix/>
           </a:blip>
           <a:stretch xmlns:a="http://schemas.openxmlformats.org/drawingml/2006/main">
@@ -15468,7 +15468,7 @@
           <p:cNvPr id="102" name="Google Shape;102;p19">
             <a:extLst xmlns:a="http://schemas.openxmlformats.org/drawingml/2006/main">
               <a:ext uri="{FF2B5EF4-FFF2-40B4-BE49-F238E27FC236}">
-                <a16:creationId xmlns:a16="http://schemas.microsoft.com/office/drawing/2014/main" id="{80189D74-9C8E-49E7-9D49-B43FF294CBFF}"/>
+                <a16:creationId xmlns:a16="http://schemas.microsoft.com/office/drawing/2014/main" id="{31AED720-3DB3-4D0C-9DCC-9289DF052EBF}"/>
               </a:ext>
             </a:extLst>
           </p:cNvPr>
@@ -15519,7 +15519,7 @@
           <p:cNvPr id="103" name="Google Shape;103;p19">
             <a:extLst xmlns:a="http://schemas.openxmlformats.org/drawingml/2006/main">
               <a:ext uri="{FF2B5EF4-FFF2-40B4-BE49-F238E27FC236}">
-                <a16:creationId xmlns:a16="http://schemas.microsoft.com/office/drawing/2014/main" id="{F147AD7A-D72A-4BB1-B885-F6FEE46C8C2F}"/>
+                <a16:creationId xmlns:a16="http://schemas.microsoft.com/office/drawing/2014/main" id="{CF716416-75A1-4DAC-A4B4-E77904E72116}"/>
               </a:ext>
             </a:extLst>
           </p:cNvPr>
@@ -15577,7 +15577,7 @@
           <p:cNvPr id="106" name="">
             <a:extLst xmlns:a="http://schemas.openxmlformats.org/drawingml/2006/main">
               <a:ext uri="{FF2B5EF4-FFF2-40B4-BE49-F238E27FC236}">
-                <a16:creationId xmlns:a16="http://schemas.microsoft.com/office/drawing/2014/main" id="{0184F284-0151-4C0A-BCB2-DF14E13BA74E}"/>
+                <a16:creationId xmlns:a16="http://schemas.microsoft.com/office/drawing/2014/main" id="{3EAE20E0-4461-4611-A0FC-7EC61E5D60EF}"/>
               </a:ext>
             </a:extLst>
           </p:cNvPr>
@@ -15634,7 +15634,7 @@
           <p:cNvPr id="107" name="">
             <a:extLst xmlns:a="http://schemas.openxmlformats.org/drawingml/2006/main">
               <a:ext uri="{FF2B5EF4-FFF2-40B4-BE49-F238E27FC236}">
-                <a16:creationId xmlns:a16="http://schemas.microsoft.com/office/drawing/2014/main" id="{A0849D37-9AAB-4BAD-8342-5F92E79B40F6}"/>
+                <a16:creationId xmlns:a16="http://schemas.microsoft.com/office/drawing/2014/main" id="{D3EF7752-2ABB-4BAC-BE51-413DD1FDB4A7}"/>
               </a:ext>
             </a:extLst>
           </p:cNvPr>
@@ -15691,7 +15691,7 @@
           <p:cNvPr id="108" name="">
             <a:extLst xmlns:a="http://schemas.openxmlformats.org/drawingml/2006/main">
               <a:ext uri="{FF2B5EF4-FFF2-40B4-BE49-F238E27FC236}">
-                <a16:creationId xmlns:a16="http://schemas.microsoft.com/office/drawing/2014/main" id="{24ABF39D-77AF-45C8-BFC5-5A97442AD4F0}"/>
+                <a16:creationId xmlns:a16="http://schemas.microsoft.com/office/drawing/2014/main" id="{E948FA09-B7FE-47F2-A496-77BBC9CDD444}"/>
               </a:ext>
             </a:extLst>
           </p:cNvPr>
@@ -15752,7 +15752,7 @@
           <p:nvPr/>
         </p:nvPicPr>
         <p:blipFill>
-          <a:blip xmlns:r="http://schemas.openxmlformats.org/officeDocument/2006/relationships" xmlns:a="http://schemas.openxmlformats.org/drawingml/2006/main" r:embed="Re11abb81e0b0459a"/>
+          <a:blip xmlns:r="http://schemas.openxmlformats.org/officeDocument/2006/relationships" xmlns:a="http://schemas.openxmlformats.org/drawingml/2006/main" r:embed="Rf96612a12c7847ae"/>
           <a:srcRect xmlns:a="http://schemas.openxmlformats.org/drawingml/2006/main" l="25000" t="17000" r="2500" b="0"/>
           <a:stretch xmlns:a="http://schemas.openxmlformats.org/drawingml/2006/main"/>
         </p:blipFill>
@@ -15775,7 +15775,7 @@
           <p:nvPr/>
         </p:nvPicPr>
         <p:blipFill>
-          <a:blip xmlns:r="http://schemas.openxmlformats.org/officeDocument/2006/relationships" xmlns:a="http://schemas.openxmlformats.org/drawingml/2006/main" r:embed="R639a6006c9484087"/>
+          <a:blip xmlns:r="http://schemas.openxmlformats.org/officeDocument/2006/relationships" xmlns:a="http://schemas.openxmlformats.org/drawingml/2006/main" r:embed="R3343cd7421dd41f5"/>
           <a:srcRect xmlns:a="http://schemas.openxmlformats.org/drawingml/2006/main" l="25000" t="7000" r="2500" b="1500"/>
           <a:stretch xmlns:a="http://schemas.openxmlformats.org/drawingml/2006/main"/>
         </p:blipFill>
@@ -15794,7 +15794,7 @@
           <p:cNvPr id="111" name="">
             <a:extLst xmlns:a="http://schemas.openxmlformats.org/drawingml/2006/main">
               <a:ext uri="{FF2B5EF4-FFF2-40B4-BE49-F238E27FC236}">
-                <a16:creationId xmlns:a16="http://schemas.microsoft.com/office/drawing/2014/main" id="{E2500602-4EE0-42B7-B523-2907BC6574DA}"/>
+                <a16:creationId xmlns:a16="http://schemas.microsoft.com/office/drawing/2014/main" id="{47626854-ABB1-4696-82D6-695F3943C174}"/>
               </a:ext>
             </a:extLst>
           </p:cNvPr>
@@ -15851,7 +15851,7 @@
           <p:cNvPr id="112" name="">
             <a:extLst xmlns:a="http://schemas.openxmlformats.org/drawingml/2006/main">
               <a:ext uri="{FF2B5EF4-FFF2-40B4-BE49-F238E27FC236}">
-                <a16:creationId xmlns:a16="http://schemas.microsoft.com/office/drawing/2014/main" id="{635B2ABA-702F-47D3-9081-642DED0163B8}"/>
+                <a16:creationId xmlns:a16="http://schemas.microsoft.com/office/drawing/2014/main" id="{A8ED03D2-9FE1-458C-B5B6-852E777C7924}"/>
               </a:ext>
             </a:extLst>
           </p:cNvPr>
@@ -15906,7 +15906,7 @@
     </p:spTree>
     <p:extLst>
       <p:ext uri="{BB962C8B-B14F-4D97-AF65-F5344CB8AC3E}">
-        <p14:creationId xmlns:p14="http://schemas.microsoft.com/office/powerpoint/2010/main" val="1350583869"/>
+        <p14:creationId xmlns:p14="http://schemas.microsoft.com/office/powerpoint/2010/main" val="1084745315"/>
       </p:ext>
     </p:extLst>
   </p:cSld>
@@ -16034,7 +16034,7 @@
           <p:nvPr/>
         </p:nvPicPr>
         <p:blipFill rotWithShape="1">
-          <a:blip xmlns:r="http://schemas.openxmlformats.org/officeDocument/2006/relationships" xmlns:a="http://schemas.openxmlformats.org/drawingml/2006/main" r:embed="R88b3f93de5ca4f63">
+          <a:blip xmlns:r="http://schemas.openxmlformats.org/officeDocument/2006/relationships" xmlns:a="http://schemas.openxmlformats.org/drawingml/2006/main" r:embed="Rba8d900277af4303">
             <a:alphaModFix/>
           </a:blip>
           <a:srcRect xmlns:a="http://schemas.openxmlformats.org/drawingml/2006/main" l="0" t="0" r="0" b="98001"/>
@@ -16062,7 +16062,7 @@
           <p:nvPr/>
         </p:nvPicPr>
         <p:blipFill>
-          <a:blip xmlns:r="http://schemas.openxmlformats.org/officeDocument/2006/relationships" xmlns:a="http://schemas.openxmlformats.org/drawingml/2006/main" r:embed="Ra8ae25838f1a45b6">
+          <a:blip xmlns:r="http://schemas.openxmlformats.org/officeDocument/2006/relationships" xmlns:a="http://schemas.openxmlformats.org/drawingml/2006/main" r:embed="R8e1fc54aa3654370">
             <a:alphaModFix/>
           </a:blip>
           <a:stretch xmlns:a="http://schemas.openxmlformats.org/drawingml/2006/main">
@@ -16087,7 +16087,7 @@
           <p:cNvPr id="110" name="Google Shape;110;p20">
             <a:extLst xmlns:a="http://schemas.openxmlformats.org/drawingml/2006/main">
               <a:ext uri="{FF2B5EF4-FFF2-40B4-BE49-F238E27FC236}">
-                <a16:creationId xmlns:a16="http://schemas.microsoft.com/office/drawing/2014/main" id="{65F039D7-3BDE-46EF-9D2B-90889082F416}"/>
+                <a16:creationId xmlns:a16="http://schemas.microsoft.com/office/drawing/2014/main" id="{1A0889B1-C077-46BB-BCDA-C55A38115C36}"/>
               </a:ext>
             </a:extLst>
           </p:cNvPr>
@@ -16138,7 +16138,7 @@
           <p:cNvPr id="111" name="Google Shape;111;p20">
             <a:extLst xmlns:a="http://schemas.openxmlformats.org/drawingml/2006/main">
               <a:ext uri="{FF2B5EF4-FFF2-40B4-BE49-F238E27FC236}">
-                <a16:creationId xmlns:a16="http://schemas.microsoft.com/office/drawing/2014/main" id="{77C40374-B0E7-42F3-B115-09882DD7EC07}"/>
+                <a16:creationId xmlns:a16="http://schemas.microsoft.com/office/drawing/2014/main" id="{488D970E-4EF7-4AFF-A5D9-CBC8BA3AA30C}"/>
               </a:ext>
             </a:extLst>
           </p:cNvPr>
@@ -16196,7 +16196,7 @@
           <p:cNvPr id="114" name="">
             <a:extLst xmlns:a="http://schemas.openxmlformats.org/drawingml/2006/main">
               <a:ext uri="{FF2B5EF4-FFF2-40B4-BE49-F238E27FC236}">
-                <a16:creationId xmlns:a16="http://schemas.microsoft.com/office/drawing/2014/main" id="{478009B8-5321-449E-9A79-C0F00817868F}"/>
+                <a16:creationId xmlns:a16="http://schemas.microsoft.com/office/drawing/2014/main" id="{D801A859-61BC-4FE1-AB45-6051EC808C10}"/>
               </a:ext>
             </a:extLst>
           </p:cNvPr>
@@ -16253,7 +16253,7 @@
           <p:cNvPr id="115" name="">
             <a:extLst xmlns:a="http://schemas.openxmlformats.org/drawingml/2006/main">
               <a:ext uri="{FF2B5EF4-FFF2-40B4-BE49-F238E27FC236}">
-                <a16:creationId xmlns:a16="http://schemas.microsoft.com/office/drawing/2014/main" id="{CE266339-F343-40A9-8810-0B7ABC9B4A7C}"/>
+                <a16:creationId xmlns:a16="http://schemas.microsoft.com/office/drawing/2014/main" id="{AFE3C132-C457-4B41-A440-8DFB75EDB669}"/>
               </a:ext>
             </a:extLst>
           </p:cNvPr>
@@ -16310,7 +16310,7 @@
           <p:cNvPr id="116" name="">
             <a:extLst xmlns:a="http://schemas.openxmlformats.org/drawingml/2006/main">
               <a:ext uri="{FF2B5EF4-FFF2-40B4-BE49-F238E27FC236}">
-                <a16:creationId xmlns:a16="http://schemas.microsoft.com/office/drawing/2014/main" id="{5CA19BC8-B1D4-43BA-8B02-05A6C383A0B5}"/>
+                <a16:creationId xmlns:a16="http://schemas.microsoft.com/office/drawing/2014/main" id="{37F39736-0215-4658-BED6-58A89B143067}"/>
               </a:ext>
             </a:extLst>
           </p:cNvPr>
@@ -16394,7 +16394,7 @@
           <p:cNvPr id="117" name="">
             <a:extLst xmlns:a="http://schemas.openxmlformats.org/drawingml/2006/main">
               <a:ext uri="{FF2B5EF4-FFF2-40B4-BE49-F238E27FC236}">
-                <a16:creationId xmlns:a16="http://schemas.microsoft.com/office/drawing/2014/main" id="{B4DC9FD9-97D6-40BE-B843-B4C12E5FE1F6}"/>
+                <a16:creationId xmlns:a16="http://schemas.microsoft.com/office/drawing/2014/main" id="{899FC336-0A04-4CE5-B4FB-C320B1B34ED7}"/>
               </a:ext>
             </a:extLst>
           </p:cNvPr>
@@ -16501,7 +16501,7 @@
           <p:cNvPr id="118" name="">
             <a:extLst xmlns:a="http://schemas.openxmlformats.org/drawingml/2006/main">
               <a:ext uri="{FF2B5EF4-FFF2-40B4-BE49-F238E27FC236}">
-                <a16:creationId xmlns:a16="http://schemas.microsoft.com/office/drawing/2014/main" id="{54938F13-ABA8-484A-AB43-7E816CD9C18E}"/>
+                <a16:creationId xmlns:a16="http://schemas.microsoft.com/office/drawing/2014/main" id="{70496751-336E-4A8C-80DE-2362C7C16D52}"/>
               </a:ext>
             </a:extLst>
           </p:cNvPr>
@@ -16608,7 +16608,7 @@
           <p:cNvPr id="121" name="">
             <a:extLst xmlns:a="http://schemas.openxmlformats.org/drawingml/2006/main">
               <a:ext uri="{FF2B5EF4-FFF2-40B4-BE49-F238E27FC236}">
-                <a16:creationId xmlns:a16="http://schemas.microsoft.com/office/drawing/2014/main" id="{6D7C62AE-EBE1-4080-A4C8-D7FEB0A8B6D6}"/>
+                <a16:creationId xmlns:a16="http://schemas.microsoft.com/office/drawing/2014/main" id="{0CF6C88E-1E8B-4382-94E3-E77F8EE68932}"/>
               </a:ext>
             </a:extLst>
           </p:cNvPr>
@@ -16715,7 +16715,7 @@
           <p:cNvPr id="122" name="">
             <a:extLst xmlns:a="http://schemas.openxmlformats.org/drawingml/2006/main">
               <a:ext uri="{FF2B5EF4-FFF2-40B4-BE49-F238E27FC236}">
-                <a16:creationId xmlns:a16="http://schemas.microsoft.com/office/drawing/2014/main" id="{63DBA83E-2A17-46A4-A35B-9B4E64F7E314}"/>
+                <a16:creationId xmlns:a16="http://schemas.microsoft.com/office/drawing/2014/main" id="{67770874-D246-4A50-A36B-5CAFC39D287D}"/>
               </a:ext>
             </a:extLst>
           </p:cNvPr>
@@ -16822,7 +16822,7 @@
           <p:cNvPr id="125" name="">
             <a:extLst xmlns:a="http://schemas.openxmlformats.org/drawingml/2006/main">
               <a:ext uri="{FF2B5EF4-FFF2-40B4-BE49-F238E27FC236}">
-                <a16:creationId xmlns:a16="http://schemas.microsoft.com/office/drawing/2014/main" id="{2E910AAE-DF15-4286-8B69-5EBC83F63629}"/>
+                <a16:creationId xmlns:a16="http://schemas.microsoft.com/office/drawing/2014/main" id="{CC05C26F-236D-402F-B842-BF14E40BA1B2}"/>
               </a:ext>
             </a:extLst>
           </p:cNvPr>
@@ -16879,7 +16879,7 @@
           <p:cNvPr id="126" name="">
             <a:extLst xmlns:a="http://schemas.openxmlformats.org/drawingml/2006/main">
               <a:ext uri="{FF2B5EF4-FFF2-40B4-BE49-F238E27FC236}">
-                <a16:creationId xmlns:a16="http://schemas.microsoft.com/office/drawing/2014/main" id="{F083E1FE-BD9F-422E-91F7-F809AE29B585}"/>
+                <a16:creationId xmlns:a16="http://schemas.microsoft.com/office/drawing/2014/main" id="{6AF77467-4416-4A28-8DC7-5B1CAA0AF39F}"/>
               </a:ext>
             </a:extLst>
           </p:cNvPr>
@@ -16934,7 +16934,7 @@
     </p:spTree>
     <p:extLst>
       <p:ext uri="{BB962C8B-B14F-4D97-AF65-F5344CB8AC3E}">
-        <p14:creationId xmlns:p14="http://schemas.microsoft.com/office/powerpoint/2010/main" val="1694290044"/>
+        <p14:creationId xmlns:p14="http://schemas.microsoft.com/office/powerpoint/2010/main" val="338667479"/>
       </p:ext>
     </p:extLst>
   </p:cSld>
@@ -16962,7 +16962,7 @@
           <p:nvPr/>
         </p:nvPicPr>
         <p:blipFill rotWithShape="1">
-          <a:blip xmlns:r="http://schemas.openxmlformats.org/officeDocument/2006/relationships" xmlns:a="http://schemas.openxmlformats.org/drawingml/2006/main" r:embed="Rb12a526ab7334b02">
+          <a:blip xmlns:r="http://schemas.openxmlformats.org/officeDocument/2006/relationships" xmlns:a="http://schemas.openxmlformats.org/drawingml/2006/main" r:embed="R98c1f27089a140f2">
             <a:alphaModFix/>
           </a:blip>
           <a:srcRect xmlns:a="http://schemas.openxmlformats.org/drawingml/2006/main" l="0" t="0" r="0" b="98001"/>
@@ -16990,7 +16990,7 @@
           <p:nvPr/>
         </p:nvPicPr>
         <p:blipFill>
-          <a:blip xmlns:r="http://schemas.openxmlformats.org/officeDocument/2006/relationships" xmlns:a="http://schemas.openxmlformats.org/drawingml/2006/main" r:embed="Ra57e7a14d8cf4a28">
+          <a:blip xmlns:r="http://schemas.openxmlformats.org/officeDocument/2006/relationships" xmlns:a="http://schemas.openxmlformats.org/drawingml/2006/main" r:embed="R23ef03389e674fb3">
             <a:alphaModFix/>
           </a:blip>
           <a:stretch xmlns:a="http://schemas.openxmlformats.org/drawingml/2006/main">
@@ -17015,7 +17015,7 @@
           <p:cNvPr id="118" name="Google Shape;118;p21">
             <a:extLst xmlns:a="http://schemas.openxmlformats.org/drawingml/2006/main">
               <a:ext uri="{FF2B5EF4-FFF2-40B4-BE49-F238E27FC236}">
-                <a16:creationId xmlns:a16="http://schemas.microsoft.com/office/drawing/2014/main" id="{FF05AA0D-4E6D-431D-BE0B-AEB77DFF303F}"/>
+                <a16:creationId xmlns:a16="http://schemas.microsoft.com/office/drawing/2014/main" id="{C825235A-7B85-479C-A1D5-50A120B9333C}"/>
               </a:ext>
             </a:extLst>
           </p:cNvPr>
@@ -17066,7 +17066,7 @@
           <p:cNvPr id="119" name="Google Shape;119;p21">
             <a:extLst xmlns:a="http://schemas.openxmlformats.org/drawingml/2006/main">
               <a:ext uri="{FF2B5EF4-FFF2-40B4-BE49-F238E27FC236}">
-                <a16:creationId xmlns:a16="http://schemas.microsoft.com/office/drawing/2014/main" id="{84BEA715-662B-45D8-9DDF-137B984C47E6}"/>
+                <a16:creationId xmlns:a16="http://schemas.microsoft.com/office/drawing/2014/main" id="{3EC0C01A-C91C-40AA-BE54-6293DA8945FF}"/>
               </a:ext>
             </a:extLst>
           </p:cNvPr>
@@ -17124,7 +17124,7 @@
           <p:cNvPr id="122" name="">
             <a:extLst xmlns:a="http://schemas.openxmlformats.org/drawingml/2006/main">
               <a:ext uri="{FF2B5EF4-FFF2-40B4-BE49-F238E27FC236}">
-                <a16:creationId xmlns:a16="http://schemas.microsoft.com/office/drawing/2014/main" id="{127E8FD2-947B-404B-86A3-4597DA5BEA5C}"/>
+                <a16:creationId xmlns:a16="http://schemas.microsoft.com/office/drawing/2014/main" id="{2D8121EA-F3C8-4E60-8A5F-9263AD542E8A}"/>
               </a:ext>
             </a:extLst>
           </p:cNvPr>
@@ -17181,7 +17181,7 @@
           <p:cNvPr id="123" name="">
             <a:extLst xmlns:a="http://schemas.openxmlformats.org/drawingml/2006/main">
               <a:ext uri="{FF2B5EF4-FFF2-40B4-BE49-F238E27FC236}">
-                <a16:creationId xmlns:a16="http://schemas.microsoft.com/office/drawing/2014/main" id="{3B2FF6B1-EE64-440A-B34D-49AE53A1AEA5}"/>
+                <a16:creationId xmlns:a16="http://schemas.microsoft.com/office/drawing/2014/main" id="{1FBF6EE8-CA72-4DF3-B9C9-779FB8AF4EFF}"/>
               </a:ext>
             </a:extLst>
           </p:cNvPr>
@@ -17925,7 +17925,7 @@
     </p:spTree>
     <p:extLst>
       <p:ext uri="{BB962C8B-B14F-4D97-AF65-F5344CB8AC3E}">
-        <p14:creationId xmlns:p14="http://schemas.microsoft.com/office/powerpoint/2010/main" val="520978006"/>
+        <p14:creationId xmlns:p14="http://schemas.microsoft.com/office/powerpoint/2010/main" val="1720335971"/>
       </p:ext>
     </p:extLst>
   </p:cSld>

--- a/docs/submission/Irene-AI-Builder-Cup.pptx
+++ b/docs/submission/Irene-AI-Builder-Cup.pptx
@@ -2,46 +2,46 @@
 <file path=ppt/presentation.xml><?xml version="1.0" encoding="utf-8"?>
 <p:presentation xmlns:p="http://schemas.openxmlformats.org/presentationml/2006/main" embedTrueTypeFonts="1" saveSubsetFonts="0">
   <p:sldMasterIdLst>
-    <p:sldMasterId xmlns:r="http://schemas.openxmlformats.org/officeDocument/2006/relationships" id="2147483648" r:id="R20163d5cba974cc6"/>
+    <p:sldMasterId xmlns:r="http://schemas.openxmlformats.org/officeDocument/2006/relationships" id="2147483648" r:id="R0f63942aea8b4f83"/>
   </p:sldMasterIdLst>
   <p:notesMasterIdLst>
-    <p:notesMasterId xmlns:r="http://schemas.openxmlformats.org/officeDocument/2006/relationships" r:id="R259699ed4c3540cc"/>
+    <p:notesMasterId xmlns:r="http://schemas.openxmlformats.org/officeDocument/2006/relationships" r:id="R885bc2a6276d42dc"/>
   </p:notesMasterIdLst>
   <p:sldIdLst>
-    <p:sldId xmlns:r="http://schemas.openxmlformats.org/officeDocument/2006/relationships" id="256" r:id="R590c718d31e84cce"/>
-    <p:sldId xmlns:r="http://schemas.openxmlformats.org/officeDocument/2006/relationships" id="257" r:id="Rde3dc87dbe6d4ca8"/>
-    <p:sldId xmlns:r="http://schemas.openxmlformats.org/officeDocument/2006/relationships" id="258" r:id="R23241dc47b904bd7"/>
-    <p:sldId xmlns:r="http://schemas.openxmlformats.org/officeDocument/2006/relationships" id="259" r:id="R2fc04a23822e4b0b"/>
-    <p:sldId xmlns:r="http://schemas.openxmlformats.org/officeDocument/2006/relationships" id="260" r:id="R569ab8657f7642bd"/>
-    <p:sldId xmlns:r="http://schemas.openxmlformats.org/officeDocument/2006/relationships" id="261" r:id="Rf7a165a561bd4b4e"/>
-    <p:sldId xmlns:r="http://schemas.openxmlformats.org/officeDocument/2006/relationships" id="262" r:id="R835cd0ce33ea495e"/>
-    <p:sldId xmlns:r="http://schemas.openxmlformats.org/officeDocument/2006/relationships" id="263" r:id="Rebb9ed2c3452485a"/>
-    <p:sldId xmlns:r="http://schemas.openxmlformats.org/officeDocument/2006/relationships" id="264" r:id="R057242cc300c41b5"/>
-    <p:sldId xmlns:r="http://schemas.openxmlformats.org/officeDocument/2006/relationships" id="265" r:id="R69e20ec6eaee432f"/>
-    <p:sldId xmlns:r="http://schemas.openxmlformats.org/officeDocument/2006/relationships" id="266" r:id="R03a1dc3338424d66"/>
-    <p:sldId xmlns:r="http://schemas.openxmlformats.org/officeDocument/2006/relationships" id="267" r:id="Rb737dd9e0e254b6d"/>
-    <p:sldId xmlns:r="http://schemas.openxmlformats.org/officeDocument/2006/relationships" id="268" r:id="Rac3086479dd541f1"/>
-    <p:sldId xmlns:r="http://schemas.openxmlformats.org/officeDocument/2006/relationships" id="269" r:id="R5e3ff214f8604484"/>
-    <p:sldId xmlns:r="http://schemas.openxmlformats.org/officeDocument/2006/relationships" id="270" r:id="Rd11a0c21287e4076"/>
-    <p:sldId xmlns:r="http://schemas.openxmlformats.org/officeDocument/2006/relationships" id="271" r:id="Rf28a6f30304e4834"/>
+    <p:sldId xmlns:r="http://schemas.openxmlformats.org/officeDocument/2006/relationships" id="256" r:id="R5f126e5a2ccb49f6"/>
+    <p:sldId xmlns:r="http://schemas.openxmlformats.org/officeDocument/2006/relationships" id="257" r:id="R1e564ede1333451c"/>
+    <p:sldId xmlns:r="http://schemas.openxmlformats.org/officeDocument/2006/relationships" id="258" r:id="Rcf089ba9a9f0494f"/>
+    <p:sldId xmlns:r="http://schemas.openxmlformats.org/officeDocument/2006/relationships" id="259" r:id="Rfac11cb66a404e93"/>
+    <p:sldId xmlns:r="http://schemas.openxmlformats.org/officeDocument/2006/relationships" id="260" r:id="R9c55d8056dd74f07"/>
+    <p:sldId xmlns:r="http://schemas.openxmlformats.org/officeDocument/2006/relationships" id="261" r:id="R0d3dc1b1482c45c5"/>
+    <p:sldId xmlns:r="http://schemas.openxmlformats.org/officeDocument/2006/relationships" id="262" r:id="R11a957a7631248d3"/>
+    <p:sldId xmlns:r="http://schemas.openxmlformats.org/officeDocument/2006/relationships" id="263" r:id="R4a71194a330e4398"/>
+    <p:sldId xmlns:r="http://schemas.openxmlformats.org/officeDocument/2006/relationships" id="264" r:id="R2384c5875f084bf8"/>
+    <p:sldId xmlns:r="http://schemas.openxmlformats.org/officeDocument/2006/relationships" id="265" r:id="R7b7a2eb83fda415e"/>
+    <p:sldId xmlns:r="http://schemas.openxmlformats.org/officeDocument/2006/relationships" id="266" r:id="R62e0612a5fb74201"/>
+    <p:sldId xmlns:r="http://schemas.openxmlformats.org/officeDocument/2006/relationships" id="267" r:id="R8c0238d8173b4ede"/>
+    <p:sldId xmlns:r="http://schemas.openxmlformats.org/officeDocument/2006/relationships" id="268" r:id="Rdd0f34137c4d49b9"/>
+    <p:sldId xmlns:r="http://schemas.openxmlformats.org/officeDocument/2006/relationships" id="269" r:id="R1c43a2e37a874bb7"/>
+    <p:sldId xmlns:r="http://schemas.openxmlformats.org/officeDocument/2006/relationships" id="270" r:id="R442825bad2584ab9"/>
+    <p:sldId xmlns:r="http://schemas.openxmlformats.org/officeDocument/2006/relationships" id="271" r:id="Rad86e94b0f4548af"/>
   </p:sldIdLst>
   <p:sldSz cx="9144000" cy="5143500"/>
   <p:notesSz cx="6858000" cy="9144000"/>
   <p:embeddedFontLst>
     <p:embeddedFont>
       <p:font typeface="Google Sans Flex Medium"/>
-      <p:regular xmlns:r="http://schemas.openxmlformats.org/officeDocument/2006/relationships" r:id="R6ec692715f284aa0"/>
-      <p:bold xmlns:r="http://schemas.openxmlformats.org/officeDocument/2006/relationships" r:id="R73fc49ed79e242e4"/>
+      <p:regular xmlns:r="http://schemas.openxmlformats.org/officeDocument/2006/relationships" r:id="R35b1a914e1bf49a2"/>
+      <p:bold xmlns:r="http://schemas.openxmlformats.org/officeDocument/2006/relationships" r:id="R8efdf34dc4c249a1"/>
     </p:embeddedFont>
     <p:embeddedFont>
       <p:font typeface="Google Sans Flex"/>
-      <p:regular xmlns:r="http://schemas.openxmlformats.org/officeDocument/2006/relationships" r:id="R6cb0d282e9d4426e"/>
-      <p:bold xmlns:r="http://schemas.openxmlformats.org/officeDocument/2006/relationships" r:id="Rcefdb3d6b7ad4e78"/>
+      <p:regular xmlns:r="http://schemas.openxmlformats.org/officeDocument/2006/relationships" r:id="R01ae96f1ed8f4746"/>
+      <p:bold xmlns:r="http://schemas.openxmlformats.org/officeDocument/2006/relationships" r:id="Ra45dc2c8e4524c32"/>
     </p:embeddedFont>
     <p:embeddedFont>
       <p:font typeface="Google Sans Flex SemiBold"/>
-      <p:regular xmlns:r="http://schemas.openxmlformats.org/officeDocument/2006/relationships" r:id="R1c2ad2964ba8459c"/>
-      <p:bold xmlns:r="http://schemas.openxmlformats.org/officeDocument/2006/relationships" r:id="Re7a6627cfb234055"/>
+      <p:regular xmlns:r="http://schemas.openxmlformats.org/officeDocument/2006/relationships" r:id="R3b26086c78a64e20"/>
+      <p:bold xmlns:r="http://schemas.openxmlformats.org/officeDocument/2006/relationships" r:id="R96543934028b428e"/>
     </p:embeddedFont>
   </p:embeddedFontLst>
   <p:defaultTextStyle>
@@ -1136,7 +1136,7 @@
               <a:buNone/>
             </a:pPr>
             <a:r>
-              <a:t>Repository and deployment links must be checked without account access before submission. Public demo-video URL must be supplied before submitting this deck if the pending label remains. Prepared video: docs/submission/video/Irene-Demo-English.mp4, under three minutes, 1920x1080 with Indian English synthetic narration and captions.</a:t>
+              <a:t>Repository and deployment links must be checked without account access before submission. Google Drive demo is shared with anyone who has the link as a viewer. Prepared video: docs/submission/video/Irene-Demo-English.mp4, under three minutes, 1920x1080 with a youthful Aoede synthetic voice and captions.</a:t>
             </a:r>
             <a:endParaRPr/>
           </a:p>
@@ -1984,7 +1984,7 @@
           <ns0:cNvPr id="10" name="Google Shape;10;p2">
             <ns1:extLst>
               <ns1:ext uri="{FF2B5EF4-FFF2-40B4-BE49-F238E27FC236}">
-                <ns2:creationId id="{EBF00891-78AC-4019-89ED-601B92AD03DA}"/>
+                <ns2:creationId id="{25C1FFE6-8860-45AE-A630-B8EAEF292741}"/>
               </ns1:ext>
             </ns1:extLst>
           </ns0:cNvPr>
@@ -2117,7 +2117,7 @@
           <ns0:cNvPr id="11" name="Google Shape;11;p2">
             <ns1:extLst>
               <ns1:ext uri="{FF2B5EF4-FFF2-40B4-BE49-F238E27FC236}">
-                <ns2:creationId id="{0557A22C-82CF-4277-9C10-0483E9F87F9D}"/>
+                <ns2:creationId id="{5BC6AF1F-13CB-4412-819E-387A2787DA8B}"/>
               </ns1:ext>
             </ns1:extLst>
           </ns0:cNvPr>
@@ -2277,7 +2277,7 @@
           <ns0:cNvPr id="12" name="Google Shape;12;p2">
             <ns1:extLst>
               <ns1:ext uri="{FF2B5EF4-FFF2-40B4-BE49-F238E27FC236}">
-                <ns2:creationId id="{CA3139DF-B5C0-416F-89B2-5A8F61FA0538}"/>
+                <ns2:creationId id="{52D72623-9361-4749-AED5-D8381E6046CA}"/>
               </ns1:ext>
             </ns1:extLst>
           </ns0:cNvPr>
@@ -2378,7 +2378,7 @@
           <ns0:cNvPr id="45" name="Google Shape;45;p11">
             <ns1:extLst>
               <ns1:ext uri="{FF2B5EF4-FFF2-40B4-BE49-F238E27FC236}">
-                <ns2:creationId id="{2B6C4C04-A14A-465C-B7CA-F3CF42812AE3}"/>
+                <ns2:creationId id="{72822FD2-ADB7-43A5-A428-1D6AF8364C5D}"/>
               </ns1:ext>
             </ns1:extLst>
           </ns0:cNvPr>
@@ -2515,7 +2515,7 @@
           <ns0:cNvPr id="46" name="Google Shape;46;p11">
             <ns1:extLst>
               <ns1:ext uri="{FF2B5EF4-FFF2-40B4-BE49-F238E27FC236}">
-                <ns2:creationId id="{9932507C-CA30-487C-A2E1-099704A9942E}"/>
+                <ns2:creationId id="{C0F427D0-554C-482F-8959-3E1328B3BE4B}"/>
               </ns1:ext>
             </ns1:extLst>
           </ns0:cNvPr>
@@ -2648,7 +2648,7 @@
           <ns0:cNvPr id="47" name="Google Shape;47;p11">
             <ns1:extLst>
               <ns1:ext uri="{FF2B5EF4-FFF2-40B4-BE49-F238E27FC236}">
-                <ns2:creationId id="{D1F3EA68-6641-4D1E-8562-BA45928D7E7E}"/>
+                <ns2:creationId id="{6717DB13-785B-48EA-8DCB-2FB97514B8A0}"/>
               </ns1:ext>
             </ns1:extLst>
           </ns0:cNvPr>
@@ -2749,7 +2749,7 @@
           <ns0:cNvPr id="49" name="Google Shape;49;p12">
             <ns1:extLst>
               <ns1:ext uri="{FF2B5EF4-FFF2-40B4-BE49-F238E27FC236}">
-                <ns2:creationId id="{44FBA244-9E40-4B79-8F1E-0C43824A3C0F}"/>
+                <ns2:creationId id="{A98D42DF-B89E-4033-AE05-9112ADCD2ED8}"/>
               </ns1:ext>
             </ns1:extLst>
           </ns0:cNvPr>
@@ -2850,7 +2850,7 @@
           <ns0:cNvPr id="14" name="Google Shape;14;p3">
             <ns1:extLst>
               <ns1:ext uri="{FF2B5EF4-FFF2-40B4-BE49-F238E27FC236}">
-                <ns2:creationId id="{191040F9-7FA5-4E18-837C-EAA369AD916B}"/>
+                <ns2:creationId id="{49A423D7-1567-4DF9-BFAD-E34C5ED6013D}"/>
               </ns1:ext>
             </ns1:extLst>
           </ns0:cNvPr>
@@ -2983,7 +2983,7 @@
           <ns0:cNvPr id="15" name="Google Shape;15;p3">
             <ns1:extLst>
               <ns1:ext uri="{FF2B5EF4-FFF2-40B4-BE49-F238E27FC236}">
-                <ns2:creationId id="{EAC81088-C862-4217-A9B0-41D5CA1FA337}"/>
+                <ns2:creationId id="{CD37AFAF-5AFA-4DEA-A414-5248D09371BC}"/>
               </ns1:ext>
             </ns1:extLst>
           </ns0:cNvPr>
@@ -3084,7 +3084,7 @@
           <ns0:cNvPr id="17" name="Google Shape;17;p4">
             <ns1:extLst>
               <ns1:ext uri="{FF2B5EF4-FFF2-40B4-BE49-F238E27FC236}">
-                <ns2:creationId id="{BC2EFAEB-426B-44BB-AAF7-C5FD754F7976}"/>
+                <ns2:creationId id="{1D909D46-C574-49ED-94BD-BDB4DB17D9B9}"/>
               </ns1:ext>
             </ns1:extLst>
           </ns0:cNvPr>
@@ -3217,7 +3217,7 @@
           <ns0:cNvPr id="18" name="Google Shape;18;p4">
             <ns1:extLst>
               <ns1:ext uri="{FF2B5EF4-FFF2-40B4-BE49-F238E27FC236}">
-                <ns2:creationId id="{FF1A160B-053F-47DB-85B3-9CF442A52905}"/>
+                <ns2:creationId id="{9A54EE1D-2A4D-4CC3-B37B-CAE5AD93D1BC}"/>
               </ns1:ext>
             </ns1:extLst>
           </ns0:cNvPr>
@@ -3350,7 +3350,7 @@
           <ns0:cNvPr id="19" name="Google Shape;19;p4">
             <ns1:extLst>
               <ns1:ext uri="{FF2B5EF4-FFF2-40B4-BE49-F238E27FC236}">
-                <ns2:creationId id="{690EB6F7-1C2D-4BA0-A08C-5A0F62274679}"/>
+                <ns2:creationId id="{1A15E81C-A28D-4ED9-A33E-16C6D41463E1}"/>
               </ns1:ext>
             </ns1:extLst>
           </ns0:cNvPr>
@@ -3451,7 +3451,7 @@
           <ns0:cNvPr id="21" name="Google Shape;21;p5">
             <ns1:extLst>
               <ns1:ext uri="{FF2B5EF4-FFF2-40B4-BE49-F238E27FC236}">
-                <ns2:creationId id="{C965CB2D-89DD-4DE7-821C-2BAF43C0EA2E}"/>
+                <ns2:creationId id="{13D8140C-7440-4561-B4FD-B96BA17343C7}"/>
               </ns1:ext>
             </ns1:extLst>
           </ns0:cNvPr>
@@ -3584,7 +3584,7 @@
           <ns0:cNvPr id="22" name="Google Shape;22;p5">
             <ns1:extLst>
               <ns1:ext uri="{FF2B5EF4-FFF2-40B4-BE49-F238E27FC236}">
-                <ns2:creationId id="{567F50B8-DE0C-4480-BDCF-CD4B1892BF12}"/>
+                <ns2:creationId id="{70AC46A6-2BD7-4648-867F-938633A225C9}"/>
               </ns1:ext>
             </ns1:extLst>
           </ns0:cNvPr>
@@ -3717,7 +3717,7 @@
           <ns0:cNvPr id="23" name="Google Shape;23;p5">
             <ns1:extLst>
               <ns1:ext uri="{FF2B5EF4-FFF2-40B4-BE49-F238E27FC236}">
-                <ns2:creationId id="{BBD898DE-2C15-4F63-A4A7-614CD9347A92}"/>
+                <ns2:creationId id="{1BE54541-DB1E-4CE0-9CEC-5888FD95DB20}"/>
               </ns1:ext>
             </ns1:extLst>
           </ns0:cNvPr>
@@ -3850,7 +3850,7 @@
           <ns0:cNvPr id="24" name="Google Shape;24;p5">
             <ns1:extLst>
               <ns1:ext uri="{FF2B5EF4-FFF2-40B4-BE49-F238E27FC236}">
-                <ns2:creationId id="{FAE4363C-5B70-4721-8819-488C29D98689}"/>
+                <ns2:creationId id="{8DC0D989-2C3D-4445-A700-BDBFD1AD07F8}"/>
               </ns1:ext>
             </ns1:extLst>
           </ns0:cNvPr>
@@ -3951,7 +3951,7 @@
           <ns0:cNvPr id="26" name="Google Shape;26;p6">
             <ns1:extLst>
               <ns1:ext uri="{FF2B5EF4-FFF2-40B4-BE49-F238E27FC236}">
-                <ns2:creationId id="{1D0F2B15-DC49-440B-AEE6-DA52F780B784}"/>
+                <ns2:creationId id="{A5BBADF8-3719-46D0-961F-FF6DE8C305DF}"/>
               </ns1:ext>
             </ns1:extLst>
           </ns0:cNvPr>
@@ -4084,7 +4084,7 @@
           <ns0:cNvPr id="27" name="Google Shape;27;p6">
             <ns1:extLst>
               <ns1:ext uri="{FF2B5EF4-FFF2-40B4-BE49-F238E27FC236}">
-                <ns2:creationId id="{DCBA2E7F-165B-4D26-9591-86FF0B33E281}"/>
+                <ns2:creationId id="{3A5E224D-A7D0-4EAE-97AC-5903D328A480}"/>
               </ns1:ext>
             </ns1:extLst>
           </ns0:cNvPr>
@@ -4185,7 +4185,7 @@
           <ns0:cNvPr id="29" name="Google Shape;29;p7">
             <ns1:extLst>
               <ns1:ext uri="{FF2B5EF4-FFF2-40B4-BE49-F238E27FC236}">
-                <ns2:creationId id="{A66A8839-1812-4CD6-8AE8-B0810F672330}"/>
+                <ns2:creationId id="{F86AFB59-296F-455D-AD73-D5402E6AADB9}"/>
               </ns1:ext>
             </ns1:extLst>
           </ns0:cNvPr>
@@ -4318,7 +4318,7 @@
           <ns0:cNvPr id="30" name="Google Shape;30;p7">
             <ns1:extLst>
               <ns1:ext uri="{FF2B5EF4-FFF2-40B4-BE49-F238E27FC236}">
-                <ns2:creationId id="{98693306-3158-40CD-9DC2-7A7C21185DD4}"/>
+                <ns2:creationId id="{6BDF9F9F-7D92-4A4A-8125-4DC0CFEB98C7}"/>
               </ns1:ext>
             </ns1:extLst>
           </ns0:cNvPr>
@@ -4451,7 +4451,7 @@
           <ns0:cNvPr id="31" name="Google Shape;31;p7">
             <ns1:extLst>
               <ns1:ext uri="{FF2B5EF4-FFF2-40B4-BE49-F238E27FC236}">
-                <ns2:creationId id="{42819456-C7BC-4E33-ACDB-49ADFC7FFF0B}"/>
+                <ns2:creationId id="{28C45F07-9A14-4E3D-9CBD-6E682D1D017C}"/>
               </ns1:ext>
             </ns1:extLst>
           </ns0:cNvPr>
@@ -4552,7 +4552,7 @@
           <ns0:cNvPr id="33" name="Google Shape;33;p8">
             <ns1:extLst>
               <ns1:ext uri="{FF2B5EF4-FFF2-40B4-BE49-F238E27FC236}">
-                <ns2:creationId id="{9AE4E70B-4ABA-460F-8167-403C7F7D7D9A}"/>
+                <ns2:creationId id="{0FAC9F41-A757-4426-BBA2-431CFA395548}"/>
               </ns1:ext>
             </ns1:extLst>
           </ns0:cNvPr>
@@ -4685,7 +4685,7 @@
           <ns0:cNvPr id="34" name="Google Shape;34;p8">
             <ns1:extLst>
               <ns1:ext uri="{FF2B5EF4-FFF2-40B4-BE49-F238E27FC236}">
-                <ns2:creationId id="{82EF22D9-7015-4155-8BB7-50F02ED9D740}"/>
+                <ns2:creationId id="{5E11DE94-4356-4A5C-A950-A4B9ADB92724}"/>
               </ns1:ext>
             </ns1:extLst>
           </ns0:cNvPr>
@@ -4786,7 +4786,7 @@
           <ns0:cNvPr id="36" name="Google Shape;36;p9">
             <ns1:extLst>
               <ns1:ext uri="{FF2B5EF4-FFF2-40B4-BE49-F238E27FC236}">
-                <ns2:creationId id="{B544F621-F10D-4155-94C6-2FF817F4680B}"/>
+                <ns2:creationId id="{94F569B0-0F2C-4A44-B8A2-2A2894E459A9}"/>
               </ns1:ext>
             </ns1:extLst>
           </ns0:cNvPr>
@@ -4837,7 +4837,7 @@
           <ns0:cNvPr id="37" name="Google Shape;37;p9">
             <ns1:extLst>
               <ns1:ext uri="{FF2B5EF4-FFF2-40B4-BE49-F238E27FC236}">
-                <ns2:creationId id="{F71243F4-5BBE-4D63-A4A1-AD3CD5D21F01}"/>
+                <ns2:creationId id="{CBF204C2-4D65-4ED3-A7AA-AF93C5A6FFE9}"/>
               </ns1:ext>
             </ns1:extLst>
           </ns0:cNvPr>
@@ -4970,7 +4970,7 @@
           <ns0:cNvPr id="38" name="Google Shape;38;p9">
             <ns1:extLst>
               <ns1:ext uri="{FF2B5EF4-FFF2-40B4-BE49-F238E27FC236}">
-                <ns2:creationId id="{CEAED73E-03CD-44C1-90D5-274586FAF778}"/>
+                <ns2:creationId id="{20B02E30-129B-4D25-8EA3-9D58E3B4F4CB}"/>
               </ns1:ext>
             </ns1:extLst>
           </ns0:cNvPr>
@@ -5130,7 +5130,7 @@
           <ns0:cNvPr id="39" name="Google Shape;39;p9">
             <ns1:extLst>
               <ns1:ext uri="{FF2B5EF4-FFF2-40B4-BE49-F238E27FC236}">
-                <ns2:creationId id="{938ED2A3-E508-4F5F-87B5-917FA788EA5E}"/>
+                <ns2:creationId id="{E6481FAE-368D-415C-AB30-6DF90BEB4E0E}"/>
               </ns1:ext>
             </ns1:extLst>
           </ns0:cNvPr>
@@ -5263,7 +5263,7 @@
           <ns0:cNvPr id="40" name="Google Shape;40;p9">
             <ns1:extLst>
               <ns1:ext uri="{FF2B5EF4-FFF2-40B4-BE49-F238E27FC236}">
-                <ns2:creationId id="{EBE7132B-605D-494E-8978-A7B4BA84B371}"/>
+                <ns2:creationId id="{7B610C10-A976-4D1A-ABCB-FCDF69A3A432}"/>
               </ns1:ext>
             </ns1:extLst>
           </ns0:cNvPr>
@@ -5364,7 +5364,7 @@
           <ns0:cNvPr id="42" name="Google Shape;42;p10">
             <ns1:extLst>
               <ns1:ext uri="{FF2B5EF4-FFF2-40B4-BE49-F238E27FC236}">
-                <ns2:creationId id="{C7DB788A-8623-4A42-B09D-D5EE062011DB}"/>
+                <ns2:creationId id="{3A258693-02A9-4765-9C6E-4AF04D2A0D83}"/>
               </ns1:ext>
             </ns1:extLst>
           </ns0:cNvPr>
@@ -5412,7 +5412,7 @@
           <ns0:cNvPr id="43" name="Google Shape;43;p10">
             <ns1:extLst>
               <ns1:ext uri="{FF2B5EF4-FFF2-40B4-BE49-F238E27FC236}">
-                <ns2:creationId id="{405D0566-5FD2-4B83-9178-85113402DE2A}"/>
+                <ns2:creationId id="{92253C80-7C16-4E56-9C8F-3C24A4B5961F}"/>
               </ns1:ext>
             </ns1:extLst>
           </ns0:cNvPr>
@@ -5520,7 +5520,7 @@
           <ns0:cNvPr id="6" name="Google Shape;6;p1">
             <ns1:extLst>
               <ns1:ext uri="{FF2B5EF4-FFF2-40B4-BE49-F238E27FC236}">
-                <ns2:creationId id="{7B090736-CB00-4E88-8D44-D8DE515CBCEC}"/>
+                <ns2:creationId id="{F418B78A-01FB-4375-BA49-3EE819A547CE}"/>
               </ns1:ext>
             </ns1:extLst>
           </ns0:cNvPr>
@@ -5720,7 +5720,7 @@
           <ns0:cNvPr id="7" name="Google Shape;7;p1">
             <ns1:extLst>
               <ns1:ext uri="{FF2B5EF4-FFF2-40B4-BE49-F238E27FC236}">
-                <ns2:creationId id="{19C77E1E-37FA-4EFF-B55E-7CDAA373F406}"/>
+                <ns2:creationId id="{9F072F9F-63C0-4C71-9B23-F4DD5D0E092E}"/>
               </ns1:ext>
             </ns1:extLst>
           </ns0:cNvPr>
@@ -5947,7 +5947,7 @@
           <ns0:cNvPr id="8" name="Google Shape;8;p1">
             <ns1:extLst>
               <ns1:ext uri="{FF2B5EF4-FFF2-40B4-BE49-F238E27FC236}">
-                <ns2:creationId id="{D18CC3FB-A549-43D6-98D7-B389A052CFA2}"/>
+                <ns2:creationId id="{5F8B2626-B94B-46A9-B2E2-F77C9892285F}"/>
               </ns1:ext>
             </ns1:extLst>
           </ns0:cNvPr>
@@ -6070,17 +6070,17 @@
   </ns0:cSld>
   <ns0:clrMap bg1="lt1" tx1="dk1" bg2="dk2" tx2="lt2" accent1="accent1" accent2="accent2" accent3="accent3" accent4="accent4" accent5="accent5" accent6="accent6" hlink="hlink" folHlink="folHlink"/>
   <ns0:sldLayoutIdLst>
-    <ns0:sldLayoutId id="2147483649" ns3:id="R764d130c423247a7"/>
-    <ns0:sldLayoutId id="2147483650" ns3:id="Rd0238091be394480"/>
-    <ns0:sldLayoutId id="2147483651" ns3:id="R238140957a1a4cbb"/>
-    <ns0:sldLayoutId id="2147483652" ns3:id="R380d8c1873244368"/>
-    <ns0:sldLayoutId id="2147483653" ns3:id="Rbcd2a6518f0f41eb"/>
-    <ns0:sldLayoutId id="2147483654" ns3:id="R8f5b72747ffa4a9d"/>
-    <ns0:sldLayoutId id="2147483655" ns3:id="Rd7c9bd2fa0954033"/>
-    <ns0:sldLayoutId id="2147483656" ns3:id="R44451d071b0d44f5"/>
-    <ns0:sldLayoutId id="2147483657" ns3:id="R735178b70d9a4811"/>
-    <ns0:sldLayoutId id="2147483658" ns3:id="Rab5762998c6a49e2"/>
-    <ns0:sldLayoutId id="2147483659" ns3:id="R524b6496bd7a46b7"/>
+    <ns0:sldLayoutId id="2147483649" ns3:id="R212bd6908e914eaa"/>
+    <ns0:sldLayoutId id="2147483650" ns3:id="R1c32e67bb91d4a01"/>
+    <ns0:sldLayoutId id="2147483651" ns3:id="Racd3c3b155aa40a7"/>
+    <ns0:sldLayoutId id="2147483652" ns3:id="R4652567fd39e4892"/>
+    <ns0:sldLayoutId id="2147483653" ns3:id="R9833ea546498424b"/>
+    <ns0:sldLayoutId id="2147483654" ns3:id="R59ab18f5c1f74ef2"/>
+    <ns0:sldLayoutId id="2147483655" ns3:id="R794281b63c9c42ff"/>
+    <ns0:sldLayoutId id="2147483656" ns3:id="R4e2e5621601b48bb"/>
+    <ns0:sldLayoutId id="2147483657" ns3:id="Rd0e4aeec6c1d47e3"/>
+    <ns0:sldLayoutId id="2147483658" ns3:id="R521388e491904139"/>
+    <ns0:sldLayoutId id="2147483659" ns3:id="Re34749cf88b84a8d"/>
   </ns0:sldLayoutIdLst>
   <ns0:hf sldNum="0" hdr="0" ftr="0" dt="0"/>
   <ns0:txStyles>
@@ -7027,7 +7027,7 @@
           <p:cNvPr id="54" name="Google Shape;54;p13">
             <a:extLst xmlns:a="http://schemas.openxmlformats.org/drawingml/2006/main">
               <a:ext uri="{FF2B5EF4-FFF2-40B4-BE49-F238E27FC236}">
-                <a16:creationId xmlns:a16="http://schemas.microsoft.com/office/drawing/2014/main" id="{1E4305B7-AF41-49EA-B5FA-4A0228ADFC42}"/>
+                <a16:creationId xmlns:a16="http://schemas.microsoft.com/office/drawing/2014/main" id="{6503478E-47AC-4242-8E2A-27F586996F9C}"/>
               </a:ext>
             </a:extLst>
           </p:cNvPr>
@@ -7089,7 +7089,7 @@
           <p:nvPr/>
         </p:nvPicPr>
         <p:blipFill>
-          <a:blip xmlns:r="http://schemas.openxmlformats.org/officeDocument/2006/relationships" xmlns:a="http://schemas.openxmlformats.org/drawingml/2006/main" r:embed="Rbbac0acec99345ee">
+          <a:blip xmlns:r="http://schemas.openxmlformats.org/officeDocument/2006/relationships" xmlns:a="http://schemas.openxmlformats.org/drawingml/2006/main" r:embed="R8e4f301c349348fa">
             <a:alphaModFix/>
           </a:blip>
           <a:stretch xmlns:a="http://schemas.openxmlformats.org/drawingml/2006/main">
@@ -7118,7 +7118,7 @@
           <p:nvPr/>
         </p:nvPicPr>
         <p:blipFill rotWithShape="1">
-          <a:blip xmlns:r="http://schemas.openxmlformats.org/officeDocument/2006/relationships" xmlns:a="http://schemas.openxmlformats.org/drawingml/2006/main" r:embed="Reb726ae49da246b3">
+          <a:blip xmlns:r="http://schemas.openxmlformats.org/officeDocument/2006/relationships" xmlns:a="http://schemas.openxmlformats.org/drawingml/2006/main" r:embed="R435b547343ce42b2">
             <a:alphaModFix/>
           </a:blip>
           <a:srcRect xmlns:a="http://schemas.openxmlformats.org/drawingml/2006/main" l="0" t="0" r="0" b="98001"/>
@@ -7142,7 +7142,7 @@
           <p:cNvPr id="57" name="">
             <a:extLst xmlns:a="http://schemas.openxmlformats.org/drawingml/2006/main">
               <a:ext uri="{FF2B5EF4-FFF2-40B4-BE49-F238E27FC236}">
-                <a16:creationId xmlns:a16="http://schemas.microsoft.com/office/drawing/2014/main" id="{48C6A491-EA5D-44A8-8BD4-8FC18BCECEE9}"/>
+                <a16:creationId xmlns:a16="http://schemas.microsoft.com/office/drawing/2014/main" id="{9F78581F-87A9-4911-A3FB-027F58BCBCAD}"/>
               </a:ext>
             </a:extLst>
           </p:cNvPr>
@@ -7199,7 +7199,7 @@
           <p:cNvPr id="58" name="">
             <a:extLst xmlns:a="http://schemas.openxmlformats.org/drawingml/2006/main">
               <a:ext uri="{FF2B5EF4-FFF2-40B4-BE49-F238E27FC236}">
-                <a16:creationId xmlns:a16="http://schemas.microsoft.com/office/drawing/2014/main" id="{BEC1E8FD-AC44-48B5-83B0-596E21113389}"/>
+                <a16:creationId xmlns:a16="http://schemas.microsoft.com/office/drawing/2014/main" id="{03FC508D-DA48-4E8F-BFD1-F1773967FCB1}"/>
               </a:ext>
             </a:extLst>
           </p:cNvPr>
@@ -7256,7 +7256,7 @@
           <p:cNvPr id="59" name="">
             <a:extLst xmlns:a="http://schemas.openxmlformats.org/drawingml/2006/main">
               <a:ext uri="{FF2B5EF4-FFF2-40B4-BE49-F238E27FC236}">
-                <a16:creationId xmlns:a16="http://schemas.microsoft.com/office/drawing/2014/main" id="{57889145-AB10-450E-8A1E-EF2A312F4791}"/>
+                <a16:creationId xmlns:a16="http://schemas.microsoft.com/office/drawing/2014/main" id="{46CB2A0F-EFD2-49B0-AB58-70983240BEC4}"/>
               </a:ext>
             </a:extLst>
           </p:cNvPr>
@@ -7334,7 +7334,7 @@
     </p:spTree>
     <p:extLst>
       <p:ext uri="{BB962C8B-B14F-4D97-AF65-F5344CB8AC3E}">
-        <p14:creationId xmlns:p14="http://schemas.microsoft.com/office/powerpoint/2010/main" val="1279961695"/>
+        <p14:creationId xmlns:p14="http://schemas.microsoft.com/office/powerpoint/2010/main" val="1601610305"/>
       </p:ext>
     </p:extLst>
   </p:cSld>
@@ -7362,7 +7362,7 @@
           <p:nvPr/>
         </p:nvPicPr>
         <p:blipFill rotWithShape="1">
-          <a:blip xmlns:r="http://schemas.openxmlformats.org/officeDocument/2006/relationships" xmlns:a="http://schemas.openxmlformats.org/drawingml/2006/main" r:embed="Ree20234aa51a4f66">
+          <a:blip xmlns:r="http://schemas.openxmlformats.org/officeDocument/2006/relationships" xmlns:a="http://schemas.openxmlformats.org/drawingml/2006/main" r:embed="R70d781a8941f46e4">
             <a:alphaModFix/>
           </a:blip>
           <a:srcRect xmlns:a="http://schemas.openxmlformats.org/drawingml/2006/main" l="0" t="0" r="0" b="98001"/>
@@ -7390,7 +7390,7 @@
           <p:nvPr/>
         </p:nvPicPr>
         <p:blipFill>
-          <a:blip xmlns:r="http://schemas.openxmlformats.org/officeDocument/2006/relationships" xmlns:a="http://schemas.openxmlformats.org/drawingml/2006/main" r:embed="R02e43fe303d74e1c">
+          <a:blip xmlns:r="http://schemas.openxmlformats.org/officeDocument/2006/relationships" xmlns:a="http://schemas.openxmlformats.org/drawingml/2006/main" r:embed="R0e3c81b2ff4c455d">
             <a:alphaModFix/>
           </a:blip>
           <a:stretch xmlns:a="http://schemas.openxmlformats.org/drawingml/2006/main">
@@ -7415,7 +7415,7 @@
           <p:cNvPr id="126" name="Google Shape;126;p22">
             <a:extLst xmlns:a="http://schemas.openxmlformats.org/drawingml/2006/main">
               <a:ext uri="{FF2B5EF4-FFF2-40B4-BE49-F238E27FC236}">
-                <a16:creationId xmlns:a16="http://schemas.microsoft.com/office/drawing/2014/main" id="{785A6655-4CD9-4C85-89B1-717ECC33FF5F}"/>
+                <a16:creationId xmlns:a16="http://schemas.microsoft.com/office/drawing/2014/main" id="{AF59A6C5-8D15-4264-8F7A-0705E5A428EA}"/>
               </a:ext>
             </a:extLst>
           </p:cNvPr>
@@ -7466,7 +7466,7 @@
           <p:cNvPr id="127" name="Google Shape;127;p22">
             <a:extLst xmlns:a="http://schemas.openxmlformats.org/drawingml/2006/main">
               <a:ext uri="{FF2B5EF4-FFF2-40B4-BE49-F238E27FC236}">
-                <a16:creationId xmlns:a16="http://schemas.microsoft.com/office/drawing/2014/main" id="{3E07F4E7-8C5D-4C88-99B2-A0ADB8B5A237}"/>
+                <a16:creationId xmlns:a16="http://schemas.microsoft.com/office/drawing/2014/main" id="{C359E93E-FAAE-423A-9FE9-77200386DBF1}"/>
               </a:ext>
             </a:extLst>
           </p:cNvPr>
@@ -7524,7 +7524,7 @@
           <p:cNvPr id="130" name="">
             <a:extLst xmlns:a="http://schemas.openxmlformats.org/drawingml/2006/main">
               <a:ext uri="{FF2B5EF4-FFF2-40B4-BE49-F238E27FC236}">
-                <a16:creationId xmlns:a16="http://schemas.microsoft.com/office/drawing/2014/main" id="{51F08577-D8FE-41A4-8164-05D9DA540CF8}"/>
+                <a16:creationId xmlns:a16="http://schemas.microsoft.com/office/drawing/2014/main" id="{5FF1F891-DD66-47C8-9C2A-FC47D3A60C42}"/>
               </a:ext>
             </a:extLst>
           </p:cNvPr>
@@ -7581,7 +7581,7 @@
           <p:cNvPr id="131" name="">
             <a:extLst xmlns:a="http://schemas.openxmlformats.org/drawingml/2006/main">
               <a:ext uri="{FF2B5EF4-FFF2-40B4-BE49-F238E27FC236}">
-                <a16:creationId xmlns:a16="http://schemas.microsoft.com/office/drawing/2014/main" id="{AEA3AD3D-41A0-493B-8FB7-39C28C1CC129}"/>
+                <a16:creationId xmlns:a16="http://schemas.microsoft.com/office/drawing/2014/main" id="{7A8B6A3F-3BBB-490C-8A1A-01E7CC7D7E5C}"/>
               </a:ext>
             </a:extLst>
           </p:cNvPr>
@@ -7638,7 +7638,7 @@
           <p:cNvPr id="132" name="">
             <a:extLst xmlns:a="http://schemas.openxmlformats.org/drawingml/2006/main">
               <a:ext uri="{FF2B5EF4-FFF2-40B4-BE49-F238E27FC236}">
-                <a16:creationId xmlns:a16="http://schemas.microsoft.com/office/drawing/2014/main" id="{0AACF162-7A7B-4AF8-A7F9-659B1E9F9B31}"/>
+                <a16:creationId xmlns:a16="http://schemas.microsoft.com/office/drawing/2014/main" id="{9F46DDD1-9420-43E8-8EAF-E0924FA57388}"/>
               </a:ext>
             </a:extLst>
           </p:cNvPr>
@@ -7695,7 +7695,7 @@
           <p:cNvPr id="133" name="">
             <a:extLst xmlns:a="http://schemas.openxmlformats.org/drawingml/2006/main">
               <a:ext uri="{FF2B5EF4-FFF2-40B4-BE49-F238E27FC236}">
-                <a16:creationId xmlns:a16="http://schemas.microsoft.com/office/drawing/2014/main" id="{E7B9DCA5-0ECD-41CE-8818-0ECD1241B08D}"/>
+                <a16:creationId xmlns:a16="http://schemas.microsoft.com/office/drawing/2014/main" id="{F0D07AA5-EC11-4207-9DD7-B8CBE0A3CCCD}"/>
               </a:ext>
             </a:extLst>
           </p:cNvPr>
@@ -7798,7 +7798,7 @@
           <p:cNvPr id="134" name="">
             <a:extLst xmlns:a="http://schemas.openxmlformats.org/drawingml/2006/main">
               <a:ext uri="{FF2B5EF4-FFF2-40B4-BE49-F238E27FC236}">
-                <a16:creationId xmlns:a16="http://schemas.microsoft.com/office/drawing/2014/main" id="{B65A35C0-52B9-4F30-B216-1A2BD28E21F4}"/>
+                <a16:creationId xmlns:a16="http://schemas.microsoft.com/office/drawing/2014/main" id="{2061F01A-3120-4E76-A16E-F6EEFEEDD782}"/>
               </a:ext>
             </a:extLst>
           </p:cNvPr>
@@ -7855,7 +7855,7 @@
           <p:cNvPr id="135" name="">
             <a:extLst xmlns:a="http://schemas.openxmlformats.org/drawingml/2006/main">
               <a:ext uri="{FF2B5EF4-FFF2-40B4-BE49-F238E27FC236}">
-                <a16:creationId xmlns:a16="http://schemas.microsoft.com/office/drawing/2014/main" id="{99B2D664-5BC9-4437-9D3F-8AC6FE15A2AE}"/>
+                <a16:creationId xmlns:a16="http://schemas.microsoft.com/office/drawing/2014/main" id="{275126C0-8465-49A1-9509-6D46B814BD0E}"/>
               </a:ext>
             </a:extLst>
           </p:cNvPr>
@@ -7958,7 +7958,7 @@
           <p:cNvPr id="136" name="">
             <a:extLst xmlns:a="http://schemas.openxmlformats.org/drawingml/2006/main">
               <a:ext uri="{FF2B5EF4-FFF2-40B4-BE49-F238E27FC236}">
-                <a16:creationId xmlns:a16="http://schemas.microsoft.com/office/drawing/2014/main" id="{FD1A723B-946E-403E-B062-8813098EC464}"/>
+                <a16:creationId xmlns:a16="http://schemas.microsoft.com/office/drawing/2014/main" id="{93B31799-EB36-4909-8930-B20AF99D495E}"/>
               </a:ext>
             </a:extLst>
           </p:cNvPr>
@@ -8015,7 +8015,7 @@
           <p:cNvPr id="137" name="">
             <a:extLst xmlns:a="http://schemas.openxmlformats.org/drawingml/2006/main">
               <a:ext uri="{FF2B5EF4-FFF2-40B4-BE49-F238E27FC236}">
-                <a16:creationId xmlns:a16="http://schemas.microsoft.com/office/drawing/2014/main" id="{DE234B3A-E29F-49B6-B269-854C1618340B}"/>
+                <a16:creationId xmlns:a16="http://schemas.microsoft.com/office/drawing/2014/main" id="{F9C2144B-74F7-4918-9AAC-3D044166C496}"/>
               </a:ext>
             </a:extLst>
           </p:cNvPr>
@@ -8118,7 +8118,7 @@
           <p:cNvPr id="138" name="">
             <a:extLst xmlns:a="http://schemas.openxmlformats.org/drawingml/2006/main">
               <a:ext uri="{FF2B5EF4-FFF2-40B4-BE49-F238E27FC236}">
-                <a16:creationId xmlns:a16="http://schemas.microsoft.com/office/drawing/2014/main" id="{D7E57C4A-2006-4632-91CB-829B2A8F55B3}"/>
+                <a16:creationId xmlns:a16="http://schemas.microsoft.com/office/drawing/2014/main" id="{86320DDC-AD49-48E8-9AD5-9774621B67F6}"/>
               </a:ext>
             </a:extLst>
           </p:cNvPr>
@@ -8173,7 +8173,7 @@
     </p:spTree>
     <p:extLst>
       <p:ext uri="{BB962C8B-B14F-4D97-AF65-F5344CB8AC3E}">
-        <p14:creationId xmlns:p14="http://schemas.microsoft.com/office/powerpoint/2010/main" val="2006513673"/>
+        <p14:creationId xmlns:p14="http://schemas.microsoft.com/office/powerpoint/2010/main" val="359426609"/>
       </p:ext>
     </p:extLst>
   </p:cSld>
@@ -8201,7 +8201,7 @@
           <p:nvPr/>
         </p:nvPicPr>
         <p:blipFill rotWithShape="1">
-          <a:blip xmlns:r="http://schemas.openxmlformats.org/officeDocument/2006/relationships" xmlns:a="http://schemas.openxmlformats.org/drawingml/2006/main" r:embed="R3bf90c64f9b94bc1">
+          <a:blip xmlns:r="http://schemas.openxmlformats.org/officeDocument/2006/relationships" xmlns:a="http://schemas.openxmlformats.org/drawingml/2006/main" r:embed="Rd374cc00ea874e49">
             <a:alphaModFix/>
           </a:blip>
           <a:srcRect xmlns:a="http://schemas.openxmlformats.org/drawingml/2006/main" l="0" t="0" r="0" b="98001"/>
@@ -8229,7 +8229,7 @@
           <p:nvPr/>
         </p:nvPicPr>
         <p:blipFill>
-          <a:blip xmlns:r="http://schemas.openxmlformats.org/officeDocument/2006/relationships" xmlns:a="http://schemas.openxmlformats.org/drawingml/2006/main" r:embed="Rac0be61862654351">
+          <a:blip xmlns:r="http://schemas.openxmlformats.org/officeDocument/2006/relationships" xmlns:a="http://schemas.openxmlformats.org/drawingml/2006/main" r:embed="R36b43fd236d9464a">
             <a:alphaModFix/>
           </a:blip>
           <a:stretch xmlns:a="http://schemas.openxmlformats.org/drawingml/2006/main">
@@ -8254,7 +8254,7 @@
           <p:cNvPr id="134" name="Google Shape;134;p23">
             <a:extLst xmlns:a="http://schemas.openxmlformats.org/drawingml/2006/main">
               <a:ext uri="{FF2B5EF4-FFF2-40B4-BE49-F238E27FC236}">
-                <a16:creationId xmlns:a16="http://schemas.microsoft.com/office/drawing/2014/main" id="{C5B9C1C6-A9F5-4069-B13C-EC7F02D6A340}"/>
+                <a16:creationId xmlns:a16="http://schemas.microsoft.com/office/drawing/2014/main" id="{FB391523-BFCE-4234-9E6C-26DF3047D4AE}"/>
               </a:ext>
             </a:extLst>
           </p:cNvPr>
@@ -8305,7 +8305,7 @@
           <p:cNvPr id="135" name="Google Shape;135;p23">
             <a:extLst xmlns:a="http://schemas.openxmlformats.org/drawingml/2006/main">
               <a:ext uri="{FF2B5EF4-FFF2-40B4-BE49-F238E27FC236}">
-                <a16:creationId xmlns:a16="http://schemas.microsoft.com/office/drawing/2014/main" id="{93903FD4-B5CD-4BD1-9C65-94B091A3246F}"/>
+                <a16:creationId xmlns:a16="http://schemas.microsoft.com/office/drawing/2014/main" id="{ACEAF9C6-AC7F-4AEB-8CA2-FB550AD9DE1C}"/>
               </a:ext>
             </a:extLst>
           </p:cNvPr>
@@ -8363,7 +8363,7 @@
           <p:cNvPr id="138" name="">
             <a:extLst xmlns:a="http://schemas.openxmlformats.org/drawingml/2006/main">
               <a:ext uri="{FF2B5EF4-FFF2-40B4-BE49-F238E27FC236}">
-                <a16:creationId xmlns:a16="http://schemas.microsoft.com/office/drawing/2014/main" id="{0F142F07-7844-4645-8EA9-575038F0CD12}"/>
+                <a16:creationId xmlns:a16="http://schemas.microsoft.com/office/drawing/2014/main" id="{59B366F9-6CB7-4228-BBB4-79B8F8DCB234}"/>
               </a:ext>
             </a:extLst>
           </p:cNvPr>
@@ -8420,7 +8420,7 @@
           <p:cNvPr id="139" name="">
             <a:extLst xmlns:a="http://schemas.openxmlformats.org/drawingml/2006/main">
               <a:ext uri="{FF2B5EF4-FFF2-40B4-BE49-F238E27FC236}">
-                <a16:creationId xmlns:a16="http://schemas.microsoft.com/office/drawing/2014/main" id="{055E3AD0-B77C-448F-8A3B-13EF8166C400}"/>
+                <a16:creationId xmlns:a16="http://schemas.microsoft.com/office/drawing/2014/main" id="{710713A2-92C3-408B-AC54-2A41D67C9235}"/>
               </a:ext>
             </a:extLst>
           </p:cNvPr>
@@ -8477,7 +8477,7 @@
           <p:cNvPr id="140" name="">
             <a:extLst xmlns:a="http://schemas.openxmlformats.org/drawingml/2006/main">
               <a:ext uri="{FF2B5EF4-FFF2-40B4-BE49-F238E27FC236}">
-                <a16:creationId xmlns:a16="http://schemas.microsoft.com/office/drawing/2014/main" id="{3842AF43-A9E8-4279-854A-C495F4CBFBE5}"/>
+                <a16:creationId xmlns:a16="http://schemas.microsoft.com/office/drawing/2014/main" id="{9FAA8497-6377-4431-821B-EA636DDDE60A}"/>
               </a:ext>
             </a:extLst>
           </p:cNvPr>
@@ -8538,7 +8538,7 @@
           <p:nvPr/>
         </p:nvPicPr>
         <p:blipFill>
-          <a:blip xmlns:r="http://schemas.openxmlformats.org/officeDocument/2006/relationships" xmlns:a="http://schemas.openxmlformats.org/drawingml/2006/main" r:embed="R7accf4a0b9db4767"/>
+          <a:blip xmlns:r="http://schemas.openxmlformats.org/officeDocument/2006/relationships" xmlns:a="http://schemas.openxmlformats.org/drawingml/2006/main" r:embed="R9c1e47b8677440df"/>
           <a:srcRect xmlns:a="http://schemas.openxmlformats.org/drawingml/2006/main" l="25000" t="8000" r="2500" b="6000"/>
           <a:stretch xmlns:a="http://schemas.openxmlformats.org/drawingml/2006/main"/>
         </p:blipFill>
@@ -8561,7 +8561,7 @@
           <p:nvPr/>
         </p:nvPicPr>
         <p:blipFill>
-          <a:blip xmlns:r="http://schemas.openxmlformats.org/officeDocument/2006/relationships" xmlns:a="http://schemas.openxmlformats.org/drawingml/2006/main" r:embed="Re2f1091c45e043a9"/>
+          <a:blip xmlns:r="http://schemas.openxmlformats.org/officeDocument/2006/relationships" xmlns:a="http://schemas.openxmlformats.org/drawingml/2006/main" r:embed="Rf0be7fff124c4b44"/>
           <a:srcRect xmlns:a="http://schemas.openxmlformats.org/drawingml/2006/main" l="25000" t="17000" r="2500" b="1500"/>
           <a:stretch xmlns:a="http://schemas.openxmlformats.org/drawingml/2006/main"/>
         </p:blipFill>
@@ -8580,7 +8580,7 @@
           <p:cNvPr id="143" name="">
             <a:extLst xmlns:a="http://schemas.openxmlformats.org/drawingml/2006/main">
               <a:ext uri="{FF2B5EF4-FFF2-40B4-BE49-F238E27FC236}">
-                <a16:creationId xmlns:a16="http://schemas.microsoft.com/office/drawing/2014/main" id="{ACAD9A2B-C971-4006-B4C8-A779468FD781}"/>
+                <a16:creationId xmlns:a16="http://schemas.microsoft.com/office/drawing/2014/main" id="{EC42D9AC-C22D-4067-AA5E-B37038893325}"/>
               </a:ext>
             </a:extLst>
           </p:cNvPr>
@@ -8637,7 +8637,7 @@
           <p:cNvPr id="144" name="">
             <a:extLst xmlns:a="http://schemas.openxmlformats.org/drawingml/2006/main">
               <a:ext uri="{FF2B5EF4-FFF2-40B4-BE49-F238E27FC236}">
-                <a16:creationId xmlns:a16="http://schemas.microsoft.com/office/drawing/2014/main" id="{42BB1B42-E5A6-4510-AB7C-C68B34E12DFA}"/>
+                <a16:creationId xmlns:a16="http://schemas.microsoft.com/office/drawing/2014/main" id="{66B8A913-12E7-445E-A244-DF63C6DAF78A}"/>
               </a:ext>
             </a:extLst>
           </p:cNvPr>
@@ -8692,7 +8692,7 @@
     </p:spTree>
     <p:extLst>
       <p:ext uri="{BB962C8B-B14F-4D97-AF65-F5344CB8AC3E}">
-        <p14:creationId xmlns:p14="http://schemas.microsoft.com/office/powerpoint/2010/main" val="50160167"/>
+        <p14:creationId xmlns:p14="http://schemas.microsoft.com/office/powerpoint/2010/main" val="1988143699"/>
       </p:ext>
     </p:extLst>
   </p:cSld>
@@ -8720,7 +8720,7 @@
           <p:nvPr/>
         </p:nvPicPr>
         <p:blipFill rotWithShape="1">
-          <a:blip xmlns:r="http://schemas.openxmlformats.org/officeDocument/2006/relationships" xmlns:a="http://schemas.openxmlformats.org/drawingml/2006/main" r:embed="R6b821053a94a47d5">
+          <a:blip xmlns:r="http://schemas.openxmlformats.org/officeDocument/2006/relationships" xmlns:a="http://schemas.openxmlformats.org/drawingml/2006/main" r:embed="R78e561055e664c19">
             <a:alphaModFix/>
           </a:blip>
           <a:srcRect xmlns:a="http://schemas.openxmlformats.org/drawingml/2006/main" l="0" t="0" r="0" b="98001"/>
@@ -8748,7 +8748,7 @@
           <p:nvPr/>
         </p:nvPicPr>
         <p:blipFill>
-          <a:blip xmlns:r="http://schemas.openxmlformats.org/officeDocument/2006/relationships" xmlns:a="http://schemas.openxmlformats.org/drawingml/2006/main" r:embed="Rc6426f4f9e334017">
+          <a:blip xmlns:r="http://schemas.openxmlformats.org/officeDocument/2006/relationships" xmlns:a="http://schemas.openxmlformats.org/drawingml/2006/main" r:embed="R46c7c109ac6c4bd2">
             <a:alphaModFix/>
           </a:blip>
           <a:stretch xmlns:a="http://schemas.openxmlformats.org/drawingml/2006/main">
@@ -8773,7 +8773,7 @@
           <p:cNvPr id="142" name="Google Shape;142;p24">
             <a:extLst xmlns:a="http://schemas.openxmlformats.org/drawingml/2006/main">
               <a:ext uri="{FF2B5EF4-FFF2-40B4-BE49-F238E27FC236}">
-                <a16:creationId xmlns:a16="http://schemas.microsoft.com/office/drawing/2014/main" id="{59E99845-A867-4D3A-8C80-2DC59ADE9B49}"/>
+                <a16:creationId xmlns:a16="http://schemas.microsoft.com/office/drawing/2014/main" id="{46900DFF-ECCE-40E0-BB30-3AF521B7820B}"/>
               </a:ext>
             </a:extLst>
           </p:cNvPr>
@@ -8824,7 +8824,7 @@
           <p:cNvPr id="143" name="Google Shape;143;p24">
             <a:extLst xmlns:a="http://schemas.openxmlformats.org/drawingml/2006/main">
               <a:ext uri="{FF2B5EF4-FFF2-40B4-BE49-F238E27FC236}">
-                <a16:creationId xmlns:a16="http://schemas.microsoft.com/office/drawing/2014/main" id="{D0FBD72D-3ADD-45A4-AF31-0D04CB40D5B4}"/>
+                <a16:creationId xmlns:a16="http://schemas.microsoft.com/office/drawing/2014/main" id="{77778287-E232-43CB-8BA9-BF4AC3219FE9}"/>
               </a:ext>
             </a:extLst>
           </p:cNvPr>
@@ -8882,7 +8882,7 @@
           <p:cNvPr id="146" name="">
             <a:extLst xmlns:a="http://schemas.openxmlformats.org/drawingml/2006/main">
               <a:ext uri="{FF2B5EF4-FFF2-40B4-BE49-F238E27FC236}">
-                <a16:creationId xmlns:a16="http://schemas.microsoft.com/office/drawing/2014/main" id="{FED499BA-BB6C-430D-9291-3DFD8EDA7860}"/>
+                <a16:creationId xmlns:a16="http://schemas.microsoft.com/office/drawing/2014/main" id="{3952C849-0578-4ADC-89BF-EA6107018C99}"/>
               </a:ext>
             </a:extLst>
           </p:cNvPr>
@@ -8939,7 +8939,7 @@
           <p:cNvPr id="147" name="">
             <a:extLst xmlns:a="http://schemas.openxmlformats.org/drawingml/2006/main">
               <a:ext uri="{FF2B5EF4-FFF2-40B4-BE49-F238E27FC236}">
-                <a16:creationId xmlns:a16="http://schemas.microsoft.com/office/drawing/2014/main" id="{F1562C9C-272F-4EE9-873B-1DB7990A9248}"/>
+                <a16:creationId xmlns:a16="http://schemas.microsoft.com/office/drawing/2014/main" id="{17B6D1BF-2139-4AB0-B8B8-CFBBB1BC2C9C}"/>
               </a:ext>
             </a:extLst>
           </p:cNvPr>
@@ -8996,7 +8996,7 @@
           <p:cNvPr id="148" name="">
             <a:extLst xmlns:a="http://schemas.openxmlformats.org/drawingml/2006/main">
               <a:ext uri="{FF2B5EF4-FFF2-40B4-BE49-F238E27FC236}">
-                <a16:creationId xmlns:a16="http://schemas.microsoft.com/office/drawing/2014/main" id="{02942EA8-0A46-4BE8-9647-BC6AA22E28E2}"/>
+                <a16:creationId xmlns:a16="http://schemas.microsoft.com/office/drawing/2014/main" id="{181F8D28-583E-44BC-9181-146CD8B73F65}"/>
               </a:ext>
             </a:extLst>
           </p:cNvPr>
@@ -9053,7 +9053,7 @@
           <p:cNvPr id="149" name="">
             <a:extLst xmlns:a="http://schemas.openxmlformats.org/drawingml/2006/main">
               <a:ext uri="{FF2B5EF4-FFF2-40B4-BE49-F238E27FC236}">
-                <a16:creationId xmlns:a16="http://schemas.microsoft.com/office/drawing/2014/main" id="{2E7ADB7D-B238-4ABF-AE51-752CDD879D28}"/>
+                <a16:creationId xmlns:a16="http://schemas.microsoft.com/office/drawing/2014/main" id="{2A7421E4-DB54-401B-8CB1-765A5DA50E71}"/>
               </a:ext>
             </a:extLst>
           </p:cNvPr>
@@ -9110,7 +9110,7 @@
           <p:cNvPr id="150" name="">
             <a:extLst xmlns:a="http://schemas.openxmlformats.org/drawingml/2006/main">
               <a:ext uri="{FF2B5EF4-FFF2-40B4-BE49-F238E27FC236}">
-                <a16:creationId xmlns:a16="http://schemas.microsoft.com/office/drawing/2014/main" id="{4387C573-B0F4-4A7C-9BFA-7371B7C7026E}"/>
+                <a16:creationId xmlns:a16="http://schemas.microsoft.com/office/drawing/2014/main" id="{7E387550-2DB2-4659-B8D8-90D2A7D466B9}"/>
               </a:ext>
             </a:extLst>
           </p:cNvPr>
@@ -9167,7 +9167,7 @@
           <p:cNvPr id="151" name="">
             <a:extLst xmlns:a="http://schemas.openxmlformats.org/drawingml/2006/main">
               <a:ext uri="{FF2B5EF4-FFF2-40B4-BE49-F238E27FC236}">
-                <a16:creationId xmlns:a16="http://schemas.microsoft.com/office/drawing/2014/main" id="{6373B6F9-436A-4867-A5EB-2DF56DD45D20}"/>
+                <a16:creationId xmlns:a16="http://schemas.microsoft.com/office/drawing/2014/main" id="{DB082AEA-5FEA-43CC-9D3A-038C25F28A3D}"/>
               </a:ext>
             </a:extLst>
           </p:cNvPr>
@@ -9224,7 +9224,7 @@
           <p:cNvPr id="152" name="">
             <a:extLst xmlns:a="http://schemas.openxmlformats.org/drawingml/2006/main">
               <a:ext uri="{FF2B5EF4-FFF2-40B4-BE49-F238E27FC236}">
-                <a16:creationId xmlns:a16="http://schemas.microsoft.com/office/drawing/2014/main" id="{AB6EE139-697E-49FD-8242-779BF9310D76}"/>
+                <a16:creationId xmlns:a16="http://schemas.microsoft.com/office/drawing/2014/main" id="{198B320F-E443-40A4-83DF-89DB9A2CCDAE}"/>
               </a:ext>
             </a:extLst>
           </p:cNvPr>
@@ -9281,7 +9281,7 @@
           <p:cNvPr id="153" name="">
             <a:extLst xmlns:a="http://schemas.openxmlformats.org/drawingml/2006/main">
               <a:ext uri="{FF2B5EF4-FFF2-40B4-BE49-F238E27FC236}">
-                <a16:creationId xmlns:a16="http://schemas.microsoft.com/office/drawing/2014/main" id="{33ABD7B7-F835-4AC7-A43B-E6B9E08B6AB1}"/>
+                <a16:creationId xmlns:a16="http://schemas.microsoft.com/office/drawing/2014/main" id="{922B700B-9C9F-4CDC-828C-33BBCBFD0B94}"/>
               </a:ext>
             </a:extLst>
           </p:cNvPr>
@@ -9338,7 +9338,7 @@
           <p:cNvPr id="154" name="">
             <a:extLst xmlns:a="http://schemas.openxmlformats.org/drawingml/2006/main">
               <a:ext uri="{FF2B5EF4-FFF2-40B4-BE49-F238E27FC236}">
-                <a16:creationId xmlns:a16="http://schemas.microsoft.com/office/drawing/2014/main" id="{4D8BAA51-B280-4135-9090-9284B8BBD418}"/>
+                <a16:creationId xmlns:a16="http://schemas.microsoft.com/office/drawing/2014/main" id="{48409C42-7C14-439E-A5B2-E3884DE1CDD4}"/>
               </a:ext>
             </a:extLst>
           </p:cNvPr>
@@ -9395,7 +9395,7 @@
           <p:cNvPr id="155" name="">
             <a:extLst xmlns:a="http://schemas.openxmlformats.org/drawingml/2006/main">
               <a:ext uri="{FF2B5EF4-FFF2-40B4-BE49-F238E27FC236}">
-                <a16:creationId xmlns:a16="http://schemas.microsoft.com/office/drawing/2014/main" id="{456EA16B-E886-47D0-B9DF-D59B67495B73}"/>
+                <a16:creationId xmlns:a16="http://schemas.microsoft.com/office/drawing/2014/main" id="{80A21E3B-96F8-460B-80D0-A0416E5FB1E0}"/>
               </a:ext>
             </a:extLst>
           </p:cNvPr>
@@ -9475,7 +9475,7 @@
           <p:cNvPr id="156" name="">
             <a:extLst xmlns:a="http://schemas.openxmlformats.org/drawingml/2006/main">
               <a:ext uri="{FF2B5EF4-FFF2-40B4-BE49-F238E27FC236}">
-                <a16:creationId xmlns:a16="http://schemas.microsoft.com/office/drawing/2014/main" id="{C7484484-FFD4-40DD-9B6A-0BF3B9FDC5E1}"/>
+                <a16:creationId xmlns:a16="http://schemas.microsoft.com/office/drawing/2014/main" id="{EAA8943D-3E3A-405F-9D65-D50C7362DC69}"/>
               </a:ext>
             </a:extLst>
           </p:cNvPr>
@@ -9532,7 +9532,7 @@
           <p:cNvPr id="157" name="">
             <a:extLst xmlns:a="http://schemas.openxmlformats.org/drawingml/2006/main">
               <a:ext uri="{FF2B5EF4-FFF2-40B4-BE49-F238E27FC236}">
-                <a16:creationId xmlns:a16="http://schemas.microsoft.com/office/drawing/2014/main" id="{45F58347-9F51-4ACB-A699-9BE4F0C9D532}"/>
+                <a16:creationId xmlns:a16="http://schemas.microsoft.com/office/drawing/2014/main" id="{C8CED7C7-DA32-4769-B878-16EAB434751E}"/>
               </a:ext>
             </a:extLst>
           </p:cNvPr>
@@ -9610,7 +9610,7 @@
     </p:spTree>
     <p:extLst>
       <p:ext uri="{BB962C8B-B14F-4D97-AF65-F5344CB8AC3E}">
-        <p14:creationId xmlns:p14="http://schemas.microsoft.com/office/powerpoint/2010/main" val="1980481285"/>
+        <p14:creationId xmlns:p14="http://schemas.microsoft.com/office/powerpoint/2010/main" val="667890055"/>
       </p:ext>
     </p:extLst>
   </p:cSld>
@@ -9638,7 +9638,7 @@
           <p:nvPr/>
         </p:nvPicPr>
         <p:blipFill rotWithShape="1">
-          <a:blip xmlns:r="http://schemas.openxmlformats.org/officeDocument/2006/relationships" xmlns:a="http://schemas.openxmlformats.org/drawingml/2006/main" r:embed="Rfc08368bc5a549da">
+          <a:blip xmlns:r="http://schemas.openxmlformats.org/officeDocument/2006/relationships" xmlns:a="http://schemas.openxmlformats.org/drawingml/2006/main" r:embed="R3334e4811af341d0">
             <a:alphaModFix/>
           </a:blip>
           <a:srcRect xmlns:a="http://schemas.openxmlformats.org/drawingml/2006/main" l="0" t="0" r="0" b="98001"/>
@@ -9666,7 +9666,7 @@
           <p:nvPr/>
         </p:nvPicPr>
         <p:blipFill>
-          <a:blip xmlns:r="http://schemas.openxmlformats.org/officeDocument/2006/relationships" xmlns:a="http://schemas.openxmlformats.org/drawingml/2006/main" r:embed="Ra052684775df4970">
+          <a:blip xmlns:r="http://schemas.openxmlformats.org/officeDocument/2006/relationships" xmlns:a="http://schemas.openxmlformats.org/drawingml/2006/main" r:embed="R55d2fa4f29e643a0">
             <a:alphaModFix/>
           </a:blip>
           <a:stretch xmlns:a="http://schemas.openxmlformats.org/drawingml/2006/main">
@@ -9691,7 +9691,7 @@
           <p:cNvPr id="150" name="Google Shape;150;p25">
             <a:extLst xmlns:a="http://schemas.openxmlformats.org/drawingml/2006/main">
               <a:ext uri="{FF2B5EF4-FFF2-40B4-BE49-F238E27FC236}">
-                <a16:creationId xmlns:a16="http://schemas.microsoft.com/office/drawing/2014/main" id="{51AB4E31-7BDB-4161-B2DC-F9431EA0A67C}"/>
+                <a16:creationId xmlns:a16="http://schemas.microsoft.com/office/drawing/2014/main" id="{83A1CD62-1D20-4D7D-BAAA-B76E119E98F6}"/>
               </a:ext>
             </a:extLst>
           </p:cNvPr>
@@ -9742,7 +9742,7 @@
           <p:cNvPr id="151" name="Google Shape;151;p25">
             <a:extLst xmlns:a="http://schemas.openxmlformats.org/drawingml/2006/main">
               <a:ext uri="{FF2B5EF4-FFF2-40B4-BE49-F238E27FC236}">
-                <a16:creationId xmlns:a16="http://schemas.microsoft.com/office/drawing/2014/main" id="{C9E61FA5-3CFF-4849-9720-B61F185CAC01}"/>
+                <a16:creationId xmlns:a16="http://schemas.microsoft.com/office/drawing/2014/main" id="{CA9353A1-7580-4F1C-89C5-CE7874D1C47E}"/>
               </a:ext>
             </a:extLst>
           </p:cNvPr>
@@ -9800,7 +9800,7 @@
           <p:cNvPr id="154" name="">
             <a:extLst xmlns:a="http://schemas.openxmlformats.org/drawingml/2006/main">
               <a:ext uri="{FF2B5EF4-FFF2-40B4-BE49-F238E27FC236}">
-                <a16:creationId xmlns:a16="http://schemas.microsoft.com/office/drawing/2014/main" id="{6FC25FE1-3479-44CF-8DCD-9D50D9FDA27E}"/>
+                <a16:creationId xmlns:a16="http://schemas.microsoft.com/office/drawing/2014/main" id="{91D655AC-331F-4FC4-AD87-0DDF88475088}"/>
               </a:ext>
             </a:extLst>
           </p:cNvPr>
@@ -9857,7 +9857,7 @@
           <p:cNvPr id="155" name="">
             <a:extLst xmlns:a="http://schemas.openxmlformats.org/drawingml/2006/main">
               <a:ext uri="{FF2B5EF4-FFF2-40B4-BE49-F238E27FC236}">
-                <a16:creationId xmlns:a16="http://schemas.microsoft.com/office/drawing/2014/main" id="{FECBD599-ED87-4D44-94D5-2DE5064B4130}"/>
+                <a16:creationId xmlns:a16="http://schemas.microsoft.com/office/drawing/2014/main" id="{58C45D15-9B99-4BE2-940B-D8A1AB47CAA9}"/>
               </a:ext>
             </a:extLst>
           </p:cNvPr>
@@ -9914,7 +9914,7 @@
           <p:cNvPr id="156" name="">
             <a:extLst xmlns:a="http://schemas.openxmlformats.org/drawingml/2006/main">
               <a:ext uri="{FF2B5EF4-FFF2-40B4-BE49-F238E27FC236}">
-                <a16:creationId xmlns:a16="http://schemas.microsoft.com/office/drawing/2014/main" id="{ECC0A3AB-BCCE-4B01-8D88-6F013CBF7958}"/>
+                <a16:creationId xmlns:a16="http://schemas.microsoft.com/office/drawing/2014/main" id="{303785EC-DDDD-4E04-AF62-52EBC4B63663}"/>
               </a:ext>
             </a:extLst>
           </p:cNvPr>
@@ -9971,7 +9971,7 @@
           <p:cNvPr id="157" name="">
             <a:extLst xmlns:a="http://schemas.openxmlformats.org/drawingml/2006/main">
               <a:ext uri="{FF2B5EF4-FFF2-40B4-BE49-F238E27FC236}">
-                <a16:creationId xmlns:a16="http://schemas.microsoft.com/office/drawing/2014/main" id="{DDDEEB53-49FB-4F46-B70D-57D205B0CCD0}"/>
+                <a16:creationId xmlns:a16="http://schemas.microsoft.com/office/drawing/2014/main" id="{CB96E005-94D5-4B97-8C3A-517721ED7C96}"/>
               </a:ext>
             </a:extLst>
           </p:cNvPr>
@@ -10051,7 +10051,7 @@
           <p:cNvPr id="158" name="">
             <a:extLst xmlns:a="http://schemas.openxmlformats.org/drawingml/2006/main">
               <a:ext uri="{FF2B5EF4-FFF2-40B4-BE49-F238E27FC236}">
-                <a16:creationId xmlns:a16="http://schemas.microsoft.com/office/drawing/2014/main" id="{AFBBCACA-679A-4FDA-8B14-FC629B5AD1E0}"/>
+                <a16:creationId xmlns:a16="http://schemas.microsoft.com/office/drawing/2014/main" id="{781CC15C-084A-4B62-BB9D-D5BA6462F868}"/>
               </a:ext>
             </a:extLst>
           </p:cNvPr>
@@ -10108,7 +10108,7 @@
           <p:cNvPr id="159" name="">
             <a:extLst xmlns:a="http://schemas.openxmlformats.org/drawingml/2006/main">
               <a:ext uri="{FF2B5EF4-FFF2-40B4-BE49-F238E27FC236}">
-                <a16:creationId xmlns:a16="http://schemas.microsoft.com/office/drawing/2014/main" id="{12129BAA-D20C-4B58-9F5C-22836490EAB1}"/>
+                <a16:creationId xmlns:a16="http://schemas.microsoft.com/office/drawing/2014/main" id="{EDAB8894-F34E-46C2-B4EE-1741E6004132}"/>
               </a:ext>
             </a:extLst>
           </p:cNvPr>
@@ -10188,7 +10188,7 @@
           <p:cNvPr id="160" name="">
             <a:extLst xmlns:a="http://schemas.openxmlformats.org/drawingml/2006/main">
               <a:ext uri="{FF2B5EF4-FFF2-40B4-BE49-F238E27FC236}">
-                <a16:creationId xmlns:a16="http://schemas.microsoft.com/office/drawing/2014/main" id="{DAF61A0A-FBAA-4960-A178-94F48A9F6E75}"/>
+                <a16:creationId xmlns:a16="http://schemas.microsoft.com/office/drawing/2014/main" id="{74116E78-8D4E-494E-9F86-32F11E27C843}"/>
               </a:ext>
             </a:extLst>
           </p:cNvPr>
@@ -10245,7 +10245,7 @@
           <p:cNvPr id="161" name="">
             <a:extLst xmlns:a="http://schemas.openxmlformats.org/drawingml/2006/main">
               <a:ext uri="{FF2B5EF4-FFF2-40B4-BE49-F238E27FC236}">
-                <a16:creationId xmlns:a16="http://schemas.microsoft.com/office/drawing/2014/main" id="{F76129F7-9F62-4E67-AD4E-43A3D11F3AF1}"/>
+                <a16:creationId xmlns:a16="http://schemas.microsoft.com/office/drawing/2014/main" id="{015CF14C-4B13-4ACC-A6A2-9B05982050AF}"/>
               </a:ext>
             </a:extLst>
           </p:cNvPr>
@@ -10323,7 +10323,7 @@
     </p:spTree>
     <p:extLst>
       <p:ext uri="{BB962C8B-B14F-4D97-AF65-F5344CB8AC3E}">
-        <p14:creationId xmlns:p14="http://schemas.microsoft.com/office/powerpoint/2010/main" val="2067534366"/>
+        <p14:creationId xmlns:p14="http://schemas.microsoft.com/office/powerpoint/2010/main" val="489764248"/>
       </p:ext>
     </p:extLst>
   </p:cSld>
@@ -10351,7 +10351,7 @@
           <p:nvPr/>
         </p:nvPicPr>
         <p:blipFill rotWithShape="1">
-          <a:blip xmlns:r="http://schemas.openxmlformats.org/officeDocument/2006/relationships" xmlns:a="http://schemas.openxmlformats.org/drawingml/2006/main" r:embed="R67c08e88d3774afa">
+          <a:blip xmlns:r="http://schemas.openxmlformats.org/officeDocument/2006/relationships" xmlns:a="http://schemas.openxmlformats.org/drawingml/2006/main" r:embed="R960dad68b27d4db2">
             <a:alphaModFix/>
           </a:blip>
           <a:srcRect xmlns:a="http://schemas.openxmlformats.org/drawingml/2006/main" l="0" t="0" r="0" b="98001"/>
@@ -10379,7 +10379,7 @@
           <p:nvPr/>
         </p:nvPicPr>
         <p:blipFill>
-          <a:blip xmlns:r="http://schemas.openxmlformats.org/officeDocument/2006/relationships" xmlns:a="http://schemas.openxmlformats.org/drawingml/2006/main" r:embed="Rd605c71e04c94e89">
+          <a:blip xmlns:r="http://schemas.openxmlformats.org/officeDocument/2006/relationships" xmlns:a="http://schemas.openxmlformats.org/drawingml/2006/main" r:embed="R99cb5746ac2449e0">
             <a:alphaModFix/>
           </a:blip>
           <a:stretch xmlns:a="http://schemas.openxmlformats.org/drawingml/2006/main">
@@ -10404,7 +10404,7 @@
           <p:cNvPr id="158" name="Google Shape;158;p26">
             <a:extLst xmlns:a="http://schemas.openxmlformats.org/drawingml/2006/main">
               <a:ext uri="{FF2B5EF4-FFF2-40B4-BE49-F238E27FC236}">
-                <a16:creationId xmlns:a16="http://schemas.microsoft.com/office/drawing/2014/main" id="{39E144E6-D930-42DD-A210-E7CDEF423EDF}"/>
+                <a16:creationId xmlns:a16="http://schemas.microsoft.com/office/drawing/2014/main" id="{B42F94BD-82BD-4397-973C-43D54F9EC9CE}"/>
               </a:ext>
             </a:extLst>
           </p:cNvPr>
@@ -10455,7 +10455,7 @@
           <p:cNvPr id="159" name="Google Shape;159;p26">
             <a:extLst xmlns:a="http://schemas.openxmlformats.org/drawingml/2006/main">
               <a:ext uri="{FF2B5EF4-FFF2-40B4-BE49-F238E27FC236}">
-                <a16:creationId xmlns:a16="http://schemas.microsoft.com/office/drawing/2014/main" id="{0F3AEC77-E940-4729-97E6-DECBDFBEDF87}"/>
+                <a16:creationId xmlns:a16="http://schemas.microsoft.com/office/drawing/2014/main" id="{5AE946A6-2DFD-4707-80D0-BFBF09CA9F26}"/>
               </a:ext>
             </a:extLst>
           </p:cNvPr>
@@ -10513,7 +10513,7 @@
           <p:cNvPr id="162" name="">
             <a:extLst xmlns:a="http://schemas.openxmlformats.org/drawingml/2006/main">
               <a:ext uri="{FF2B5EF4-FFF2-40B4-BE49-F238E27FC236}">
-                <a16:creationId xmlns:a16="http://schemas.microsoft.com/office/drawing/2014/main" id="{E4DCE3C0-A6D3-40BE-8EF1-C9E3286F4EF7}"/>
+                <a16:creationId xmlns:a16="http://schemas.microsoft.com/office/drawing/2014/main" id="{68FF7426-B9CB-4F0F-AC7D-EA71FBCE1777}"/>
               </a:ext>
             </a:extLst>
           </p:cNvPr>
@@ -10570,7 +10570,7 @@
           <p:cNvPr id="163" name="">
             <a:extLst xmlns:a="http://schemas.openxmlformats.org/drawingml/2006/main">
               <a:ext uri="{FF2B5EF4-FFF2-40B4-BE49-F238E27FC236}">
-                <a16:creationId xmlns:a16="http://schemas.microsoft.com/office/drawing/2014/main" id="{E778A13B-38C7-420D-AD35-F4210BA89F42}"/>
+                <a16:creationId xmlns:a16="http://schemas.microsoft.com/office/drawing/2014/main" id="{494B70E6-BCB3-45C0-A8E9-67904334E95A}"/>
               </a:ext>
             </a:extLst>
           </p:cNvPr>
@@ -10627,7 +10627,7 @@
           <p:cNvPr id="164" name="">
             <a:extLst xmlns:a="http://schemas.openxmlformats.org/drawingml/2006/main">
               <a:ext uri="{FF2B5EF4-FFF2-40B4-BE49-F238E27FC236}">
-                <a16:creationId xmlns:a16="http://schemas.microsoft.com/office/drawing/2014/main" id="{4AC5C718-D8A7-44FD-8334-506D83E8A6A8}"/>
+                <a16:creationId xmlns:a16="http://schemas.microsoft.com/office/drawing/2014/main" id="{126472D1-8B04-4072-9483-FC86C90B194B}"/>
               </a:ext>
             </a:extLst>
           </p:cNvPr>
@@ -10684,7 +10684,7 @@
           <p:cNvPr id="165" name="">
             <a:extLst xmlns:a="http://schemas.openxmlformats.org/drawingml/2006/main">
               <a:ext uri="{FF2B5EF4-FFF2-40B4-BE49-F238E27FC236}">
-                <a16:creationId xmlns:a16="http://schemas.microsoft.com/office/drawing/2014/main" id="{DD8FD0F7-509B-478F-8A7E-6A8FCA0D8908}"/>
+                <a16:creationId xmlns:a16="http://schemas.microsoft.com/office/drawing/2014/main" id="{3EB82CB6-EB99-424A-8649-55182B5A36B1}"/>
               </a:ext>
             </a:extLst>
           </p:cNvPr>
@@ -10730,7 +10730,7 @@
                 <a:latin typeface="Google Sans Flex"/>
                 <a:ea typeface="Google Sans Flex"/>
                 <a:cs typeface="Google Sans Flex"/>
-                <a:hlinkClick xmlns:r="http://schemas.openxmlformats.org/officeDocument/2006/relationships" r:id="R06e51a98672f4310"/>
+                <a:hlinkClick xmlns:r="http://schemas.openxmlformats.org/officeDocument/2006/relationships" r:id="R57167eeabaae4b26"/>
               </a:rPr>
               <a:t>github.com/TheAverageGatsby13/project-irene</a:t>
             </a:r>
@@ -10742,7 +10742,7 @@
           <p:cNvPr id="166" name="">
             <a:extLst xmlns:a="http://schemas.openxmlformats.org/drawingml/2006/main">
               <a:ext uri="{FF2B5EF4-FFF2-40B4-BE49-F238E27FC236}">
-                <a16:creationId xmlns:a16="http://schemas.microsoft.com/office/drawing/2014/main" id="{B434EFEA-DCB8-4F05-B648-F030D0B1625C}"/>
+                <a16:creationId xmlns:a16="http://schemas.microsoft.com/office/drawing/2014/main" id="{813952C1-A598-409F-9BF1-DDEA9AF7E161}"/>
               </a:ext>
             </a:extLst>
           </p:cNvPr>
@@ -10799,7 +10799,7 @@
           <p:cNvPr id="167" name="">
             <a:extLst xmlns:a="http://schemas.openxmlformats.org/drawingml/2006/main">
               <a:ext uri="{FF2B5EF4-FFF2-40B4-BE49-F238E27FC236}">
-                <a16:creationId xmlns:a16="http://schemas.microsoft.com/office/drawing/2014/main" id="{7DE30265-FF1D-48DA-9F6D-5099FADD777A}"/>
+                <a16:creationId xmlns:a16="http://schemas.microsoft.com/office/drawing/2014/main" id="{9B19DA00-4945-44B5-89F5-326EFCC18B16}"/>
               </a:ext>
             </a:extLst>
           </p:cNvPr>
@@ -10811,7 +10811,7 @@
         <p:spPr>
           <a:xfrm xmlns:a="http://schemas.openxmlformats.org/drawingml/2006/main">
             <a:off x="361950" y="2924175"/>
-            <a:ext cx="8420100" cy="428625"/>
+            <a:ext cx="8286750" cy="419100"/>
           </a:xfrm>
           <a:prstGeom xmlns:a="http://schemas.openxmlformats.org/drawingml/2006/main" prst="rect">
             <a:avLst/>
@@ -10828,9 +10828,9 @@
           <a:lstStyle xmlns:a="http://schemas.openxmlformats.org/drawingml/2006/main"/>
           <a:p xmlns:a="http://schemas.openxmlformats.org/drawingml/2006/main">
             <a:pPr>
-              <a:defRPr sz="1500" b="0">
-                <a:solidFill>
-                  <a:srgbClr val="665D57"/>
+              <a:defRPr sz="1425" b="0">
+                <a:solidFill>
+                  <a:srgbClr val="A9422A"/>
                 </a:solidFill>
                 <a:latin typeface="Google Sans Flex"/>
                 <a:ea typeface="Google Sans Flex"/>
@@ -10838,15 +10838,16 @@
               </a:defRPr>
             </a:pPr>
             <a:r>
-              <a:rPr sz="1500" b="0">
-                <a:solidFill>
-                  <a:srgbClr val="665D57"/>
-                </a:solidFill>
-                <a:latin typeface="Google Sans Flex"/>
-                <a:ea typeface="Google Sans Flex"/>
-                <a:cs typeface="Google Sans Flex"/>
+              <a:rPr sz="1425" b="0">
+                <a:solidFill>
+                  <a:srgbClr val="A9422A"/>
+                </a:solidFill>
+                <a:latin typeface="Google Sans Flex"/>
+                <a:ea typeface="Google Sans Flex"/>
+                <a:cs typeface="Google Sans Flex"/>
+                <a:hlinkClick xmlns:r="http://schemas.openxmlformats.org/officeDocument/2006/relationships" r:id="Re2b64da0ee2142f0"/>
               </a:rPr>
-              <a:t>Indian English demo prepared · public upload link pending</a:t>
+              <a:t>Watch the narrated product demo</a:t>
             </a:r>
           </a:p>
         </p:txBody>
@@ -10856,7 +10857,7 @@
           <p:cNvPr id="168" name="">
             <a:extLst xmlns:a="http://schemas.openxmlformats.org/drawingml/2006/main">
               <a:ext uri="{FF2B5EF4-FFF2-40B4-BE49-F238E27FC236}">
-                <a16:creationId xmlns:a16="http://schemas.microsoft.com/office/drawing/2014/main" id="{34797328-D11C-4F96-9135-8E8731A8B79E}"/>
+                <a16:creationId xmlns:a16="http://schemas.microsoft.com/office/drawing/2014/main" id="{FE66CAA1-6DFD-4331-9B31-F810641D3953}"/>
               </a:ext>
             </a:extLst>
           </p:cNvPr>
@@ -10913,7 +10914,7 @@
           <p:cNvPr id="169" name="">
             <a:extLst xmlns:a="http://schemas.openxmlformats.org/drawingml/2006/main">
               <a:ext uri="{FF2B5EF4-FFF2-40B4-BE49-F238E27FC236}">
-                <a16:creationId xmlns:a16="http://schemas.microsoft.com/office/drawing/2014/main" id="{B9C41F97-2B41-45E8-B07C-D57E4295C3FF}"/>
+                <a16:creationId xmlns:a16="http://schemas.microsoft.com/office/drawing/2014/main" id="{996AC6DA-2313-43E0-9D93-C0810F1A9356}"/>
               </a:ext>
             </a:extLst>
           </p:cNvPr>
@@ -10959,7 +10960,7 @@
                 <a:latin typeface="Google Sans Flex"/>
                 <a:ea typeface="Google Sans Flex"/>
                 <a:cs typeface="Google Sans Flex"/>
-                <a:hlinkClick xmlns:r="http://schemas.openxmlformats.org/officeDocument/2006/relationships" r:id="Rb6eb9302238c499d"/>
+                <a:hlinkClick xmlns:r="http://schemas.openxmlformats.org/officeDocument/2006/relationships" r:id="R31c76fab7e3a4e79"/>
               </a:rPr>
               <a:t>project-irene-fd39e.web.app</a:t>
             </a:r>
@@ -10969,7 +10970,7 @@
     </p:spTree>
     <p:extLst>
       <p:ext uri="{BB962C8B-B14F-4D97-AF65-F5344CB8AC3E}">
-        <p14:creationId xmlns:p14="http://schemas.microsoft.com/office/powerpoint/2010/main" val="138150922"/>
+        <p14:creationId xmlns:p14="http://schemas.microsoft.com/office/powerpoint/2010/main" val="1047454472"/>
       </p:ext>
     </p:extLst>
   </p:cSld>
@@ -10997,7 +10998,7 @@
           <p:nvPr/>
         </p:nvPicPr>
         <p:blipFill rotWithShape="1">
-          <a:blip xmlns:r="http://schemas.openxmlformats.org/officeDocument/2006/relationships" xmlns:a="http://schemas.openxmlformats.org/drawingml/2006/main" r:embed="R6f2b3f7b8b644aa5">
+          <a:blip xmlns:r="http://schemas.openxmlformats.org/officeDocument/2006/relationships" xmlns:a="http://schemas.openxmlformats.org/drawingml/2006/main" r:embed="R2f6868d7a2234aa6">
             <a:alphaModFix/>
           </a:blip>
           <a:srcRect xmlns:a="http://schemas.openxmlformats.org/drawingml/2006/main" l="0" t="0" r="0" b="98001"/>
@@ -11025,7 +11026,7 @@
           <p:nvPr/>
         </p:nvPicPr>
         <p:blipFill>
-          <a:blip xmlns:r="http://schemas.openxmlformats.org/officeDocument/2006/relationships" xmlns:a="http://schemas.openxmlformats.org/drawingml/2006/main" r:embed="R5ae660f811504c58">
+          <a:blip xmlns:r="http://schemas.openxmlformats.org/officeDocument/2006/relationships" xmlns:a="http://schemas.openxmlformats.org/drawingml/2006/main" r:embed="Rdd1804de500a452b">
             <a:alphaModFix/>
           </a:blip>
           <a:stretch xmlns:a="http://schemas.openxmlformats.org/drawingml/2006/main">
@@ -11050,7 +11051,7 @@
           <p:cNvPr id="166" name="Google Shape;166;p27">
             <a:extLst xmlns:a="http://schemas.openxmlformats.org/drawingml/2006/main">
               <a:ext uri="{FF2B5EF4-FFF2-40B4-BE49-F238E27FC236}">
-                <a16:creationId xmlns:a16="http://schemas.microsoft.com/office/drawing/2014/main" id="{896B3B6B-22CA-4A87-BDFB-EFFC78AF0B5C}"/>
+                <a16:creationId xmlns:a16="http://schemas.microsoft.com/office/drawing/2014/main" id="{CB03C572-80F7-4D7D-9B6E-6CEDEA542FB2}"/>
               </a:ext>
             </a:extLst>
           </p:cNvPr>
@@ -11101,7 +11102,7 @@
           <p:cNvPr id="169" name="">
             <a:extLst xmlns:a="http://schemas.openxmlformats.org/drawingml/2006/main">
               <a:ext uri="{FF2B5EF4-FFF2-40B4-BE49-F238E27FC236}">
-                <a16:creationId xmlns:a16="http://schemas.microsoft.com/office/drawing/2014/main" id="{B7210DF9-B397-4041-A341-76BB6D833DFC}"/>
+                <a16:creationId xmlns:a16="http://schemas.microsoft.com/office/drawing/2014/main" id="{BBB6F3A3-F937-45D6-90DE-B5AB13B4D453}"/>
               </a:ext>
             </a:extLst>
           </p:cNvPr>
@@ -11158,7 +11159,7 @@
           <p:cNvPr id="170" name="">
             <a:extLst xmlns:a="http://schemas.openxmlformats.org/drawingml/2006/main">
               <a:ext uri="{FF2B5EF4-FFF2-40B4-BE49-F238E27FC236}">
-                <a16:creationId xmlns:a16="http://schemas.microsoft.com/office/drawing/2014/main" id="{A99CE310-D36F-4E73-94EB-31DC4E24A530}"/>
+                <a16:creationId xmlns:a16="http://schemas.microsoft.com/office/drawing/2014/main" id="{6E438569-09E0-4B57-9FC0-4F5B555CB38F}"/>
               </a:ext>
             </a:extLst>
           </p:cNvPr>
@@ -11215,7 +11216,7 @@
           <p:cNvPr id="171" name="">
             <a:extLst xmlns:a="http://schemas.openxmlformats.org/drawingml/2006/main">
               <a:ext uri="{FF2B5EF4-FFF2-40B4-BE49-F238E27FC236}">
-                <a16:creationId xmlns:a16="http://schemas.microsoft.com/office/drawing/2014/main" id="{4B938E37-97E5-4C21-A19F-CBF9880265B3}"/>
+                <a16:creationId xmlns:a16="http://schemas.microsoft.com/office/drawing/2014/main" id="{DD014F07-9B46-40BF-8076-B9C8FFA9CD21}"/>
               </a:ext>
             </a:extLst>
           </p:cNvPr>
@@ -11272,7 +11273,7 @@
           <p:cNvPr id="172" name="">
             <a:extLst xmlns:a="http://schemas.openxmlformats.org/drawingml/2006/main">
               <a:ext uri="{FF2B5EF4-FFF2-40B4-BE49-F238E27FC236}">
-                <a16:creationId xmlns:a16="http://schemas.microsoft.com/office/drawing/2014/main" id="{0CCB9745-77EC-45AB-A53B-DA5D58C88D01}"/>
+                <a16:creationId xmlns:a16="http://schemas.microsoft.com/office/drawing/2014/main" id="{CE91B3FB-6EC2-48EF-9757-AF4B19E7781A}"/>
               </a:ext>
             </a:extLst>
           </p:cNvPr>
@@ -11352,7 +11353,7 @@
           <p:cNvPr id="173" name="">
             <a:extLst xmlns:a="http://schemas.openxmlformats.org/drawingml/2006/main">
               <a:ext uri="{FF2B5EF4-FFF2-40B4-BE49-F238E27FC236}">
-                <a16:creationId xmlns:a16="http://schemas.microsoft.com/office/drawing/2014/main" id="{2E24DBC6-B29C-4F9F-B1BE-E419ED6DF399}"/>
+                <a16:creationId xmlns:a16="http://schemas.microsoft.com/office/drawing/2014/main" id="{02B31466-B9F4-4702-B901-5090FC7EDEBA}"/>
               </a:ext>
             </a:extLst>
           </p:cNvPr>
@@ -11455,7 +11456,7 @@
           <p:cNvPr id="174" name="">
             <a:extLst xmlns:a="http://schemas.openxmlformats.org/drawingml/2006/main">
               <a:ext uri="{FF2B5EF4-FFF2-40B4-BE49-F238E27FC236}">
-                <a16:creationId xmlns:a16="http://schemas.microsoft.com/office/drawing/2014/main" id="{2743CF8E-F660-43C6-9B7C-EB88156B01B6}"/>
+                <a16:creationId xmlns:a16="http://schemas.microsoft.com/office/drawing/2014/main" id="{42D5DDB1-3E1F-4DEB-B020-F0991E852CCE}"/>
               </a:ext>
             </a:extLst>
           </p:cNvPr>
@@ -11533,7 +11534,7 @@
     </p:spTree>
     <p:extLst>
       <p:ext uri="{BB962C8B-B14F-4D97-AF65-F5344CB8AC3E}">
-        <p14:creationId xmlns:p14="http://schemas.microsoft.com/office/powerpoint/2010/main" val="1815236669"/>
+        <p14:creationId xmlns:p14="http://schemas.microsoft.com/office/powerpoint/2010/main" val="2053286833"/>
       </p:ext>
     </p:extLst>
   </p:cSld>
@@ -11561,7 +11562,7 @@
           <p:nvPr/>
         </p:nvPicPr>
         <p:blipFill rotWithShape="1">
-          <a:blip xmlns:r="http://schemas.openxmlformats.org/officeDocument/2006/relationships" xmlns:a="http://schemas.openxmlformats.org/drawingml/2006/main" r:embed="R37f130caa1024ca7">
+          <a:blip xmlns:r="http://schemas.openxmlformats.org/officeDocument/2006/relationships" xmlns:a="http://schemas.openxmlformats.org/drawingml/2006/main" r:embed="Re04fe5df852f42e3">
             <a:alphaModFix/>
           </a:blip>
           <a:srcRect xmlns:a="http://schemas.openxmlformats.org/drawingml/2006/main" l="0" t="0" r="0" b="98001"/>
@@ -11589,7 +11590,7 @@
           <p:nvPr/>
         </p:nvPicPr>
         <p:blipFill>
-          <a:blip xmlns:r="http://schemas.openxmlformats.org/officeDocument/2006/relationships" xmlns:a="http://schemas.openxmlformats.org/drawingml/2006/main" r:embed="Rf8b75e6621c34fae">
+          <a:blip xmlns:r="http://schemas.openxmlformats.org/officeDocument/2006/relationships" xmlns:a="http://schemas.openxmlformats.org/drawingml/2006/main" r:embed="Ra2263d6640574669">
             <a:alphaModFix/>
           </a:blip>
           <a:stretch xmlns:a="http://schemas.openxmlformats.org/drawingml/2006/main">
@@ -11612,7 +11613,7 @@
     </p:spTree>
     <p:extLst>
       <p:ext uri="{BB962C8B-B14F-4D97-AF65-F5344CB8AC3E}">
-        <p14:creationId xmlns:p14="http://schemas.microsoft.com/office/powerpoint/2010/main" val="1424670088"/>
+        <p14:creationId xmlns:p14="http://schemas.microsoft.com/office/powerpoint/2010/main" val="414420392"/>
       </p:ext>
     </p:extLst>
   </p:cSld>
@@ -11640,7 +11641,7 @@
           <p:nvPr/>
         </p:nvPicPr>
         <p:blipFill rotWithShape="1">
-          <a:blip xmlns:r="http://schemas.openxmlformats.org/officeDocument/2006/relationships" xmlns:a="http://schemas.openxmlformats.org/drawingml/2006/main" r:embed="R90541c31d3f7482d">
+          <a:blip xmlns:r="http://schemas.openxmlformats.org/officeDocument/2006/relationships" xmlns:a="http://schemas.openxmlformats.org/drawingml/2006/main" r:embed="Re32e3e20ddec41c1">
             <a:alphaModFix/>
           </a:blip>
           <a:srcRect xmlns:a="http://schemas.openxmlformats.org/drawingml/2006/main" l="0" t="0" r="0" b="98001"/>
@@ -11664,7 +11665,7 @@
           <p:cNvPr id="62" name="Google Shape;62;p14">
             <a:extLst xmlns:a="http://schemas.openxmlformats.org/drawingml/2006/main">
               <a:ext uri="{FF2B5EF4-FFF2-40B4-BE49-F238E27FC236}">
-                <a16:creationId xmlns:a16="http://schemas.microsoft.com/office/drawing/2014/main" id="{EA3FFFC6-7197-40D0-97E0-D6A7AAF9FFB9}"/>
+                <a16:creationId xmlns:a16="http://schemas.microsoft.com/office/drawing/2014/main" id="{F4A855ED-9213-407B-80A3-5383E802098B}"/>
               </a:ext>
             </a:extLst>
           </p:cNvPr>
@@ -11715,7 +11716,7 @@
           <p:cNvPr id="63" name="Google Shape;63;p14">
             <a:extLst xmlns:a="http://schemas.openxmlformats.org/drawingml/2006/main">
               <a:ext uri="{FF2B5EF4-FFF2-40B4-BE49-F238E27FC236}">
-                <a16:creationId xmlns:a16="http://schemas.microsoft.com/office/drawing/2014/main" id="{48173C7D-9D17-48F9-8266-1F05C09B0882}"/>
+                <a16:creationId xmlns:a16="http://schemas.microsoft.com/office/drawing/2014/main" id="{7A478077-185A-4890-9ACC-CCD75D28F36E}"/>
               </a:ext>
             </a:extLst>
           </p:cNvPr>
@@ -11847,7 +11848,7 @@
           <p:nvPr/>
         </p:nvPicPr>
         <p:blipFill>
-          <a:blip xmlns:r="http://schemas.openxmlformats.org/officeDocument/2006/relationships" xmlns:a="http://schemas.openxmlformats.org/drawingml/2006/main" r:embed="R3ee03979693547ba">
+          <a:blip xmlns:r="http://schemas.openxmlformats.org/officeDocument/2006/relationships" xmlns:a="http://schemas.openxmlformats.org/drawingml/2006/main" r:embed="Rb31e60f4dff64f41">
             <a:alphaModFix/>
           </a:blip>
           <a:stretch xmlns:a="http://schemas.openxmlformats.org/drawingml/2006/main">
@@ -11877,7 +11878,7 @@
     </p:spTree>
     <p:extLst>
       <p:ext uri="{BB962C8B-B14F-4D97-AF65-F5344CB8AC3E}">
-        <p14:creationId xmlns:p14="http://schemas.microsoft.com/office/powerpoint/2010/main" val="2133866187"/>
+        <p14:creationId xmlns:p14="http://schemas.microsoft.com/office/powerpoint/2010/main" val="1604953832"/>
       </p:ext>
     </p:extLst>
   </p:cSld>
@@ -11905,7 +11906,7 @@
           <p:nvPr/>
         </p:nvPicPr>
         <p:blipFill>
-          <a:blip xmlns:r="http://schemas.openxmlformats.org/officeDocument/2006/relationships" xmlns:a="http://schemas.openxmlformats.org/drawingml/2006/main" r:embed="R6a9e9a8b7d4f4138">
+          <a:blip xmlns:r="http://schemas.openxmlformats.org/officeDocument/2006/relationships" xmlns:a="http://schemas.openxmlformats.org/drawingml/2006/main" r:embed="Re4eee9f0d3984963">
             <a:alphaModFix/>
           </a:blip>
           <a:stretch xmlns:a="http://schemas.openxmlformats.org/drawingml/2006/main">
@@ -11930,7 +11931,7 @@
           <p:cNvPr id="70" name="Google Shape;70;p15">
             <a:extLst xmlns:a="http://schemas.openxmlformats.org/drawingml/2006/main">
               <a:ext uri="{FF2B5EF4-FFF2-40B4-BE49-F238E27FC236}">
-                <a16:creationId xmlns:a16="http://schemas.microsoft.com/office/drawing/2014/main" id="{60DB28F2-9494-40FD-8130-C4EBB1E9C349}"/>
+                <a16:creationId xmlns:a16="http://schemas.microsoft.com/office/drawing/2014/main" id="{FCD94F7F-9C21-4721-9C03-93708EE1A80E}"/>
               </a:ext>
             </a:extLst>
           </p:cNvPr>
@@ -11981,7 +11982,7 @@
           <p:cNvPr id="71" name="Google Shape;71;p15">
             <a:extLst xmlns:a="http://schemas.openxmlformats.org/drawingml/2006/main">
               <a:ext uri="{FF2B5EF4-FFF2-40B4-BE49-F238E27FC236}">
-                <a16:creationId xmlns:a16="http://schemas.microsoft.com/office/drawing/2014/main" id="{2E28CBB2-E9F8-4364-9E53-32E8EDB40BD6}"/>
+                <a16:creationId xmlns:a16="http://schemas.microsoft.com/office/drawing/2014/main" id="{933AC734-BE68-4B26-9142-63AA1AE61F17}"/>
               </a:ext>
             </a:extLst>
           </p:cNvPr>
@@ -12039,7 +12040,7 @@
           <p:cNvPr id="73" name="">
             <a:extLst xmlns:a="http://schemas.openxmlformats.org/drawingml/2006/main">
               <a:ext uri="{FF2B5EF4-FFF2-40B4-BE49-F238E27FC236}">
-                <a16:creationId xmlns:a16="http://schemas.microsoft.com/office/drawing/2014/main" id="{35833026-27BA-4516-9DD4-3557936F1B86}"/>
+                <a16:creationId xmlns:a16="http://schemas.microsoft.com/office/drawing/2014/main" id="{D9D50496-3479-4316-B7B7-93B503C7511F}"/>
               </a:ext>
             </a:extLst>
           </p:cNvPr>
@@ -12096,7 +12097,7 @@
           <p:cNvPr id="74" name="">
             <a:extLst xmlns:a="http://schemas.openxmlformats.org/drawingml/2006/main">
               <a:ext uri="{FF2B5EF4-FFF2-40B4-BE49-F238E27FC236}">
-                <a16:creationId xmlns:a16="http://schemas.microsoft.com/office/drawing/2014/main" id="{3624C4A0-6CCF-41B4-A2BD-7348F113D160}"/>
+                <a16:creationId xmlns:a16="http://schemas.microsoft.com/office/drawing/2014/main" id="{B7FA8F29-BBFE-4EDA-A85C-A7C48BB2A1EB}"/>
               </a:ext>
             </a:extLst>
           </p:cNvPr>
@@ -12153,7 +12154,7 @@
           <p:cNvPr id="75" name="">
             <a:extLst xmlns:a="http://schemas.openxmlformats.org/drawingml/2006/main">
               <a:ext uri="{FF2B5EF4-FFF2-40B4-BE49-F238E27FC236}">
-                <a16:creationId xmlns:a16="http://schemas.microsoft.com/office/drawing/2014/main" id="{BCA3F115-EE99-480C-BAE7-462D4AEE8C3D}"/>
+                <a16:creationId xmlns:a16="http://schemas.microsoft.com/office/drawing/2014/main" id="{65CAB575-3AAB-452B-8110-EC176E71D63C}"/>
               </a:ext>
             </a:extLst>
           </p:cNvPr>
@@ -12210,7 +12211,7 @@
           <p:cNvPr id="76" name="">
             <a:extLst xmlns:a="http://schemas.openxmlformats.org/drawingml/2006/main">
               <a:ext uri="{FF2B5EF4-FFF2-40B4-BE49-F238E27FC236}">
-                <a16:creationId xmlns:a16="http://schemas.microsoft.com/office/drawing/2014/main" id="{A3F0CA16-1650-4793-A937-4C1109684EF7}"/>
+                <a16:creationId xmlns:a16="http://schemas.microsoft.com/office/drawing/2014/main" id="{4DFC24CC-BF3E-4B2C-A684-A895DA0E5523}"/>
               </a:ext>
             </a:extLst>
           </p:cNvPr>
@@ -12290,7 +12291,7 @@
           <p:cNvPr id="77" name="">
             <a:extLst xmlns:a="http://schemas.openxmlformats.org/drawingml/2006/main">
               <a:ext uri="{FF2B5EF4-FFF2-40B4-BE49-F238E27FC236}">
-                <a16:creationId xmlns:a16="http://schemas.microsoft.com/office/drawing/2014/main" id="{C7BAF5AE-60E0-4E15-981E-6CC6EE0BD4BB}"/>
+                <a16:creationId xmlns:a16="http://schemas.microsoft.com/office/drawing/2014/main" id="{9E008326-CCAE-42B3-A0B0-47456CF82E20}"/>
               </a:ext>
             </a:extLst>
           </p:cNvPr>
@@ -12347,7 +12348,7 @@
           <p:cNvPr id="78" name="">
             <a:extLst xmlns:a="http://schemas.openxmlformats.org/drawingml/2006/main">
               <a:ext uri="{FF2B5EF4-FFF2-40B4-BE49-F238E27FC236}">
-                <a16:creationId xmlns:a16="http://schemas.microsoft.com/office/drawing/2014/main" id="{86E87BDD-83A4-4A83-A9E5-B1D2540179AA}"/>
+                <a16:creationId xmlns:a16="http://schemas.microsoft.com/office/drawing/2014/main" id="{7EBA4B40-8318-40DC-B3CA-D177352A7E5D}"/>
               </a:ext>
             </a:extLst>
           </p:cNvPr>
@@ -12404,7 +12405,7 @@
           <p:cNvPr id="79" name="">
             <a:extLst xmlns:a="http://schemas.openxmlformats.org/drawingml/2006/main">
               <a:ext uri="{FF2B5EF4-FFF2-40B4-BE49-F238E27FC236}">
-                <a16:creationId xmlns:a16="http://schemas.microsoft.com/office/drawing/2014/main" id="{2050F6EA-2AA6-47A7-8952-63D5506CBC29}"/>
+                <a16:creationId xmlns:a16="http://schemas.microsoft.com/office/drawing/2014/main" id="{8ADE1E46-726B-444B-9D15-79E25F915938}"/>
               </a:ext>
             </a:extLst>
           </p:cNvPr>
@@ -12505,7 +12506,7 @@
     </p:spTree>
     <p:extLst>
       <p:ext uri="{BB962C8B-B14F-4D97-AF65-F5344CB8AC3E}">
-        <p14:creationId xmlns:p14="http://schemas.microsoft.com/office/powerpoint/2010/main" val="199768177"/>
+        <p14:creationId xmlns:p14="http://schemas.microsoft.com/office/powerpoint/2010/main" val="1649993156"/>
       </p:ext>
     </p:extLst>
   </p:cSld>
@@ -12533,7 +12534,7 @@
           <p:nvPr/>
         </p:nvPicPr>
         <p:blipFill rotWithShape="1">
-          <a:blip xmlns:r="http://schemas.openxmlformats.org/officeDocument/2006/relationships" xmlns:a="http://schemas.openxmlformats.org/drawingml/2006/main" r:embed="R85ff6616338d4fa6">
+          <a:blip xmlns:r="http://schemas.openxmlformats.org/officeDocument/2006/relationships" xmlns:a="http://schemas.openxmlformats.org/drawingml/2006/main" r:embed="R68a9b3eb10e44ae9">
             <a:alphaModFix/>
           </a:blip>
           <a:srcRect xmlns:a="http://schemas.openxmlformats.org/drawingml/2006/main" l="0" t="0" r="0" b="98001"/>
@@ -12561,7 +12562,7 @@
           <p:nvPr/>
         </p:nvPicPr>
         <p:blipFill>
-          <a:blip xmlns:r="http://schemas.openxmlformats.org/officeDocument/2006/relationships" xmlns:a="http://schemas.openxmlformats.org/drawingml/2006/main" r:embed="R3e04b2e95b9b445b">
+          <a:blip xmlns:r="http://schemas.openxmlformats.org/officeDocument/2006/relationships" xmlns:a="http://schemas.openxmlformats.org/drawingml/2006/main" r:embed="R93169858fec54245">
             <a:alphaModFix/>
           </a:blip>
           <a:stretch xmlns:a="http://schemas.openxmlformats.org/drawingml/2006/main">
@@ -12586,7 +12587,7 @@
           <p:cNvPr id="78" name="Google Shape;78;p16">
             <a:extLst xmlns:a="http://schemas.openxmlformats.org/drawingml/2006/main">
               <a:ext uri="{FF2B5EF4-FFF2-40B4-BE49-F238E27FC236}">
-                <a16:creationId xmlns:a16="http://schemas.microsoft.com/office/drawing/2014/main" id="{0038F0F3-CBC3-4304-AD0F-54F90BB4286C}"/>
+                <a16:creationId xmlns:a16="http://schemas.microsoft.com/office/drawing/2014/main" id="{EF70E8F4-77D3-4956-98FF-B4865407BB93}"/>
               </a:ext>
             </a:extLst>
           </p:cNvPr>
@@ -12637,7 +12638,7 @@
           <p:cNvPr id="79" name="Google Shape;79;p16">
             <a:extLst xmlns:a="http://schemas.openxmlformats.org/drawingml/2006/main">
               <a:ext uri="{FF2B5EF4-FFF2-40B4-BE49-F238E27FC236}">
-                <a16:creationId xmlns:a16="http://schemas.microsoft.com/office/drawing/2014/main" id="{C7A88D54-2F5F-4109-957F-AFCB8E95AE42}"/>
+                <a16:creationId xmlns:a16="http://schemas.microsoft.com/office/drawing/2014/main" id="{BED5DCDA-EDAF-432B-9D82-1703DB0D8A42}"/>
               </a:ext>
             </a:extLst>
           </p:cNvPr>
@@ -12695,7 +12696,7 @@
           <p:cNvPr id="82" name="">
             <a:extLst xmlns:a="http://schemas.openxmlformats.org/drawingml/2006/main">
               <a:ext uri="{FF2B5EF4-FFF2-40B4-BE49-F238E27FC236}">
-                <a16:creationId xmlns:a16="http://schemas.microsoft.com/office/drawing/2014/main" id="{D50276F9-A0FA-46E8-BD69-43D31C21E401}"/>
+                <a16:creationId xmlns:a16="http://schemas.microsoft.com/office/drawing/2014/main" id="{E4451D94-8FBB-454D-8DBE-0E0DE73EEA39}"/>
               </a:ext>
             </a:extLst>
           </p:cNvPr>
@@ -12752,7 +12753,7 @@
           <p:cNvPr id="83" name="">
             <a:extLst xmlns:a="http://schemas.openxmlformats.org/drawingml/2006/main">
               <a:ext uri="{FF2B5EF4-FFF2-40B4-BE49-F238E27FC236}">
-                <a16:creationId xmlns:a16="http://schemas.microsoft.com/office/drawing/2014/main" id="{CBEE04CC-05A6-4081-A9C9-B1C730250246}"/>
+                <a16:creationId xmlns:a16="http://schemas.microsoft.com/office/drawing/2014/main" id="{53BE35EA-E1FE-4C4D-9150-B72C60FD7499}"/>
               </a:ext>
             </a:extLst>
           </p:cNvPr>
@@ -12809,7 +12810,7 @@
           <p:cNvPr id="84" name="">
             <a:extLst xmlns:a="http://schemas.openxmlformats.org/drawingml/2006/main">
               <a:ext uri="{FF2B5EF4-FFF2-40B4-BE49-F238E27FC236}">
-                <a16:creationId xmlns:a16="http://schemas.microsoft.com/office/drawing/2014/main" id="{24C6CF47-B387-48B9-983F-99E79306C0F2}"/>
+                <a16:creationId xmlns:a16="http://schemas.microsoft.com/office/drawing/2014/main" id="{1D943EAC-999B-41E4-9EB9-E40E86D7AE65}"/>
               </a:ext>
             </a:extLst>
           </p:cNvPr>
@@ -12866,7 +12867,7 @@
           <p:cNvPr id="85" name="">
             <a:extLst xmlns:a="http://schemas.openxmlformats.org/drawingml/2006/main">
               <a:ext uri="{FF2B5EF4-FFF2-40B4-BE49-F238E27FC236}">
-                <a16:creationId xmlns:a16="http://schemas.microsoft.com/office/drawing/2014/main" id="{155554C7-8862-447D-BFBF-8BFCCAA56B08}"/>
+                <a16:creationId xmlns:a16="http://schemas.microsoft.com/office/drawing/2014/main" id="{770A646B-7BA4-4351-B74D-633466FD711C}"/>
               </a:ext>
             </a:extLst>
           </p:cNvPr>
@@ -12946,7 +12947,7 @@
           <p:cNvPr id="86" name="">
             <a:extLst xmlns:a="http://schemas.openxmlformats.org/drawingml/2006/main">
               <a:ext uri="{FF2B5EF4-FFF2-40B4-BE49-F238E27FC236}">
-                <a16:creationId xmlns:a16="http://schemas.microsoft.com/office/drawing/2014/main" id="{45F3116A-A103-44D9-9A9C-EC55020AAA8A}"/>
+                <a16:creationId xmlns:a16="http://schemas.microsoft.com/office/drawing/2014/main" id="{1856E7FB-AAE5-40E7-A749-68C617AB85C6}"/>
               </a:ext>
             </a:extLst>
           </p:cNvPr>
@@ -13003,7 +13004,7 @@
           <p:cNvPr id="87" name="">
             <a:extLst xmlns:a="http://schemas.openxmlformats.org/drawingml/2006/main">
               <a:ext uri="{FF2B5EF4-FFF2-40B4-BE49-F238E27FC236}">
-                <a16:creationId xmlns:a16="http://schemas.microsoft.com/office/drawing/2014/main" id="{7ED9F73F-5333-466B-8EE1-D6317605BAF5}"/>
+                <a16:creationId xmlns:a16="http://schemas.microsoft.com/office/drawing/2014/main" id="{6E4A3028-00D3-40A6-9637-677983AB22CF}"/>
               </a:ext>
             </a:extLst>
           </p:cNvPr>
@@ -13083,7 +13084,7 @@
           <p:cNvPr id="88" name="">
             <a:extLst xmlns:a="http://schemas.openxmlformats.org/drawingml/2006/main">
               <a:ext uri="{FF2B5EF4-FFF2-40B4-BE49-F238E27FC236}">
-                <a16:creationId xmlns:a16="http://schemas.microsoft.com/office/drawing/2014/main" id="{39352D72-46FE-4218-8108-133DD514FF63}"/>
+                <a16:creationId xmlns:a16="http://schemas.microsoft.com/office/drawing/2014/main" id="{884742AD-6699-4EF0-841A-C42945E8E441}"/>
               </a:ext>
             </a:extLst>
           </p:cNvPr>
@@ -13140,7 +13141,7 @@
           <p:cNvPr id="89" name="">
             <a:extLst xmlns:a="http://schemas.openxmlformats.org/drawingml/2006/main">
               <a:ext uri="{FF2B5EF4-FFF2-40B4-BE49-F238E27FC236}">
-                <a16:creationId xmlns:a16="http://schemas.microsoft.com/office/drawing/2014/main" id="{6ABD574F-14AA-4DF6-8C45-30A246486C09}"/>
+                <a16:creationId xmlns:a16="http://schemas.microsoft.com/office/drawing/2014/main" id="{CA55638D-8EEB-4026-B23C-60C7237F9522}"/>
               </a:ext>
             </a:extLst>
           </p:cNvPr>
@@ -13218,7 +13219,7 @@
     </p:spTree>
     <p:extLst>
       <p:ext uri="{BB962C8B-B14F-4D97-AF65-F5344CB8AC3E}">
-        <p14:creationId xmlns:p14="http://schemas.microsoft.com/office/powerpoint/2010/main" val="296888266"/>
+        <p14:creationId xmlns:p14="http://schemas.microsoft.com/office/powerpoint/2010/main" val="533656644"/>
       </p:ext>
     </p:extLst>
   </p:cSld>
@@ -13246,7 +13247,7 @@
           <p:nvPr/>
         </p:nvPicPr>
         <p:blipFill rotWithShape="1">
-          <a:blip xmlns:r="http://schemas.openxmlformats.org/officeDocument/2006/relationships" xmlns:a="http://schemas.openxmlformats.org/drawingml/2006/main" r:embed="R15c8f56c53d7468c">
+          <a:blip xmlns:r="http://schemas.openxmlformats.org/officeDocument/2006/relationships" xmlns:a="http://schemas.openxmlformats.org/drawingml/2006/main" r:embed="R84eddf5bb1c04636">
             <a:alphaModFix/>
           </a:blip>
           <a:srcRect xmlns:a="http://schemas.openxmlformats.org/drawingml/2006/main" l="0" t="0" r="0" b="98001"/>
@@ -13274,7 +13275,7 @@
           <p:nvPr/>
         </p:nvPicPr>
         <p:blipFill>
-          <a:blip xmlns:r="http://schemas.openxmlformats.org/officeDocument/2006/relationships" xmlns:a="http://schemas.openxmlformats.org/drawingml/2006/main" r:embed="R8719f9e49ddc43c8">
+          <a:blip xmlns:r="http://schemas.openxmlformats.org/officeDocument/2006/relationships" xmlns:a="http://schemas.openxmlformats.org/drawingml/2006/main" r:embed="Rdef0b68b0dc2409f">
             <a:alphaModFix/>
           </a:blip>
           <a:stretch xmlns:a="http://schemas.openxmlformats.org/drawingml/2006/main">
@@ -13299,7 +13300,7 @@
           <p:cNvPr id="86" name="Google Shape;86;p17">
             <a:extLst xmlns:a="http://schemas.openxmlformats.org/drawingml/2006/main">
               <a:ext uri="{FF2B5EF4-FFF2-40B4-BE49-F238E27FC236}">
-                <a16:creationId xmlns:a16="http://schemas.microsoft.com/office/drawing/2014/main" id="{79C32C32-BE27-4032-94DA-E618EEBDA7E2}"/>
+                <a16:creationId xmlns:a16="http://schemas.microsoft.com/office/drawing/2014/main" id="{7642507E-9F15-428B-AE69-A450680AE83E}"/>
               </a:ext>
             </a:extLst>
           </p:cNvPr>
@@ -13350,7 +13351,7 @@
           <p:cNvPr id="87" name="Google Shape;87;p17">
             <a:extLst xmlns:a="http://schemas.openxmlformats.org/drawingml/2006/main">
               <a:ext uri="{FF2B5EF4-FFF2-40B4-BE49-F238E27FC236}">
-                <a16:creationId xmlns:a16="http://schemas.microsoft.com/office/drawing/2014/main" id="{559E7C94-B134-4B0F-B93C-EA0D5DCD25BF}"/>
+                <a16:creationId xmlns:a16="http://schemas.microsoft.com/office/drawing/2014/main" id="{3094DDBC-E15E-4F19-A9FA-983CEB2A7EAB}"/>
               </a:ext>
             </a:extLst>
           </p:cNvPr>
@@ -13408,7 +13409,7 @@
           <p:cNvPr id="90" name="">
             <a:extLst xmlns:a="http://schemas.openxmlformats.org/drawingml/2006/main">
               <a:ext uri="{FF2B5EF4-FFF2-40B4-BE49-F238E27FC236}">
-                <a16:creationId xmlns:a16="http://schemas.microsoft.com/office/drawing/2014/main" id="{1795D5BD-67C0-4E98-9342-6DAFA4A8A92C}"/>
+                <a16:creationId xmlns:a16="http://schemas.microsoft.com/office/drawing/2014/main" id="{D4A26F49-3792-49A2-AB79-304C9313E9F1}"/>
               </a:ext>
             </a:extLst>
           </p:cNvPr>
@@ -13465,7 +13466,7 @@
           <p:cNvPr id="91" name="">
             <a:extLst xmlns:a="http://schemas.openxmlformats.org/drawingml/2006/main">
               <a:ext uri="{FF2B5EF4-FFF2-40B4-BE49-F238E27FC236}">
-                <a16:creationId xmlns:a16="http://schemas.microsoft.com/office/drawing/2014/main" id="{3C998B22-B7E2-4B0C-99B4-2CFF300AEC2B}"/>
+                <a16:creationId xmlns:a16="http://schemas.microsoft.com/office/drawing/2014/main" id="{6BB8893B-E397-4F12-B513-2014DE7F6BDE}"/>
               </a:ext>
             </a:extLst>
           </p:cNvPr>
@@ -13522,7 +13523,7 @@
           <p:cNvPr id="92" name="">
             <a:extLst xmlns:a="http://schemas.openxmlformats.org/drawingml/2006/main">
               <a:ext uri="{FF2B5EF4-FFF2-40B4-BE49-F238E27FC236}">
-                <a16:creationId xmlns:a16="http://schemas.microsoft.com/office/drawing/2014/main" id="{36198FF3-6811-40B5-978A-9ECB979FC1A0}"/>
+                <a16:creationId xmlns:a16="http://schemas.microsoft.com/office/drawing/2014/main" id="{78BB3283-6E7B-4C79-85DC-77432B8FEA3D}"/>
               </a:ext>
             </a:extLst>
           </p:cNvPr>
@@ -13579,7 +13580,7 @@
           <p:cNvPr id="93" name="">
             <a:extLst xmlns:a="http://schemas.openxmlformats.org/drawingml/2006/main">
               <a:ext uri="{FF2B5EF4-FFF2-40B4-BE49-F238E27FC236}">
-                <a16:creationId xmlns:a16="http://schemas.microsoft.com/office/drawing/2014/main" id="{2EBF90C9-48D5-4E17-A58A-C7C69247ED67}"/>
+                <a16:creationId xmlns:a16="http://schemas.microsoft.com/office/drawing/2014/main" id="{655226A9-24FD-4578-85A9-5173C8815A7B}"/>
               </a:ext>
             </a:extLst>
           </p:cNvPr>
@@ -13659,7 +13660,7 @@
           <p:cNvPr id="94" name="">
             <a:extLst xmlns:a="http://schemas.openxmlformats.org/drawingml/2006/main">
               <a:ext uri="{FF2B5EF4-FFF2-40B4-BE49-F238E27FC236}">
-                <a16:creationId xmlns:a16="http://schemas.microsoft.com/office/drawing/2014/main" id="{4BE62B2C-63F9-41D2-A509-FA7408481003}"/>
+                <a16:creationId xmlns:a16="http://schemas.microsoft.com/office/drawing/2014/main" id="{4BD2C119-6900-4268-997A-73DA0864E8AC}"/>
               </a:ext>
             </a:extLst>
           </p:cNvPr>
@@ -13716,7 +13717,7 @@
           <p:cNvPr id="95" name="">
             <a:extLst xmlns:a="http://schemas.openxmlformats.org/drawingml/2006/main">
               <a:ext uri="{FF2B5EF4-FFF2-40B4-BE49-F238E27FC236}">
-                <a16:creationId xmlns:a16="http://schemas.microsoft.com/office/drawing/2014/main" id="{07AEAB3C-EE1E-4F56-8A1F-8423277314F8}"/>
+                <a16:creationId xmlns:a16="http://schemas.microsoft.com/office/drawing/2014/main" id="{9348C18C-5953-47D9-8A97-29E374EB1C7B}"/>
               </a:ext>
             </a:extLst>
           </p:cNvPr>
@@ -13796,7 +13797,7 @@
           <p:cNvPr id="96" name="">
             <a:extLst xmlns:a="http://schemas.openxmlformats.org/drawingml/2006/main">
               <a:ext uri="{FF2B5EF4-FFF2-40B4-BE49-F238E27FC236}">
-                <a16:creationId xmlns:a16="http://schemas.microsoft.com/office/drawing/2014/main" id="{79194DDE-1A25-4807-ACAA-56312EECB961}"/>
+                <a16:creationId xmlns:a16="http://schemas.microsoft.com/office/drawing/2014/main" id="{00877C37-99A3-489B-91FA-7AC67D5DFA66}"/>
               </a:ext>
             </a:extLst>
           </p:cNvPr>
@@ -13853,7 +13854,7 @@
           <p:cNvPr id="97" name="">
             <a:extLst xmlns:a="http://schemas.openxmlformats.org/drawingml/2006/main">
               <a:ext uri="{FF2B5EF4-FFF2-40B4-BE49-F238E27FC236}">
-                <a16:creationId xmlns:a16="http://schemas.microsoft.com/office/drawing/2014/main" id="{BE2A50E9-1B0C-4CC5-B617-FC00ED89C34F}"/>
+                <a16:creationId xmlns:a16="http://schemas.microsoft.com/office/drawing/2014/main" id="{4D9F5737-8E05-455A-BD00-F4C06F67EB6E}"/>
               </a:ext>
             </a:extLst>
           </p:cNvPr>
@@ -13933,7 +13934,7 @@
           <p:cNvPr id="98" name="">
             <a:extLst xmlns:a="http://schemas.openxmlformats.org/drawingml/2006/main">
               <a:ext uri="{FF2B5EF4-FFF2-40B4-BE49-F238E27FC236}">
-                <a16:creationId xmlns:a16="http://schemas.microsoft.com/office/drawing/2014/main" id="{0F856F6F-05D9-429D-99BD-991F54A6054A}"/>
+                <a16:creationId xmlns:a16="http://schemas.microsoft.com/office/drawing/2014/main" id="{3B9699D6-893F-4AC1-BF21-C37B39C111F1}"/>
               </a:ext>
             </a:extLst>
           </p:cNvPr>
@@ -13990,7 +13991,7 @@
           <p:cNvPr id="99" name="">
             <a:extLst xmlns:a="http://schemas.openxmlformats.org/drawingml/2006/main">
               <a:ext uri="{FF2B5EF4-FFF2-40B4-BE49-F238E27FC236}">
-                <a16:creationId xmlns:a16="http://schemas.microsoft.com/office/drawing/2014/main" id="{D6E87647-174B-4150-9F74-026F4427AB44}"/>
+                <a16:creationId xmlns:a16="http://schemas.microsoft.com/office/drawing/2014/main" id="{5C996B85-903C-4F1C-9098-0FB198CFE1C1}"/>
               </a:ext>
             </a:extLst>
           </p:cNvPr>
@@ -14070,7 +14071,7 @@
           <p:cNvPr id="100" name="">
             <a:extLst xmlns:a="http://schemas.openxmlformats.org/drawingml/2006/main">
               <a:ext uri="{FF2B5EF4-FFF2-40B4-BE49-F238E27FC236}">
-                <a16:creationId xmlns:a16="http://schemas.microsoft.com/office/drawing/2014/main" id="{1350F94B-1176-4497-BB1F-5A8140BA58A2}"/>
+                <a16:creationId xmlns:a16="http://schemas.microsoft.com/office/drawing/2014/main" id="{D53A28E5-834E-418D-8D8F-F85DC404DF94}"/>
               </a:ext>
             </a:extLst>
           </p:cNvPr>
@@ -14127,7 +14128,7 @@
           <p:cNvPr id="101" name="">
             <a:extLst xmlns:a="http://schemas.openxmlformats.org/drawingml/2006/main">
               <a:ext uri="{FF2B5EF4-FFF2-40B4-BE49-F238E27FC236}">
-                <a16:creationId xmlns:a16="http://schemas.microsoft.com/office/drawing/2014/main" id="{FAE8C90A-A5FD-44E9-89F7-D19F4212C65D}"/>
+                <a16:creationId xmlns:a16="http://schemas.microsoft.com/office/drawing/2014/main" id="{5F276008-E844-467F-BA40-1D51C9EC323C}"/>
               </a:ext>
             </a:extLst>
           </p:cNvPr>
@@ -14207,7 +14208,7 @@
           <p:cNvPr id="102" name="">
             <a:extLst xmlns:a="http://schemas.openxmlformats.org/drawingml/2006/main">
               <a:ext uri="{FF2B5EF4-FFF2-40B4-BE49-F238E27FC236}">
-                <a16:creationId xmlns:a16="http://schemas.microsoft.com/office/drawing/2014/main" id="{C3684A4B-BF53-491F-82BC-24332AF3F191}"/>
+                <a16:creationId xmlns:a16="http://schemas.microsoft.com/office/drawing/2014/main" id="{122F3E67-2EA3-4051-A37D-A7B23F292729}"/>
               </a:ext>
             </a:extLst>
           </p:cNvPr>
@@ -14264,7 +14265,7 @@
           <p:cNvPr id="103" name="">
             <a:extLst xmlns:a="http://schemas.openxmlformats.org/drawingml/2006/main">
               <a:ext uri="{FF2B5EF4-FFF2-40B4-BE49-F238E27FC236}">
-                <a16:creationId xmlns:a16="http://schemas.microsoft.com/office/drawing/2014/main" id="{A0006A60-D86B-4B3A-AF3F-A72DF406BC7A}"/>
+                <a16:creationId xmlns:a16="http://schemas.microsoft.com/office/drawing/2014/main" id="{8C85E958-C188-4941-AFDF-D040DAD09170}"/>
               </a:ext>
             </a:extLst>
           </p:cNvPr>
@@ -14342,7 +14343,7 @@
     </p:spTree>
     <p:extLst>
       <p:ext uri="{BB962C8B-B14F-4D97-AF65-F5344CB8AC3E}">
-        <p14:creationId xmlns:p14="http://schemas.microsoft.com/office/powerpoint/2010/main" val="1314331815"/>
+        <p14:creationId xmlns:p14="http://schemas.microsoft.com/office/powerpoint/2010/main" val="1656801853"/>
       </p:ext>
     </p:extLst>
   </p:cSld>
@@ -14495,7 +14496,7 @@
           <p:nvPr/>
         </p:nvPicPr>
         <p:blipFill rotWithShape="1">
-          <a:blip xmlns:r="http://schemas.openxmlformats.org/officeDocument/2006/relationships" xmlns:a="http://schemas.openxmlformats.org/drawingml/2006/main" r:embed="R605e2b6ea6194f3a">
+          <a:blip xmlns:r="http://schemas.openxmlformats.org/officeDocument/2006/relationships" xmlns:a="http://schemas.openxmlformats.org/drawingml/2006/main" r:embed="R37f4b6c870aa4bb4">
             <a:alphaModFix/>
           </a:blip>
           <a:srcRect xmlns:a="http://schemas.openxmlformats.org/drawingml/2006/main" l="0" t="0" r="0" b="98001"/>
@@ -14523,7 +14524,7 @@
           <p:nvPr/>
         </p:nvPicPr>
         <p:blipFill>
-          <a:blip xmlns:r="http://schemas.openxmlformats.org/officeDocument/2006/relationships" xmlns:a="http://schemas.openxmlformats.org/drawingml/2006/main" r:embed="Rc78b2aabfd5048d2">
+          <a:blip xmlns:r="http://schemas.openxmlformats.org/officeDocument/2006/relationships" xmlns:a="http://schemas.openxmlformats.org/drawingml/2006/main" r:embed="Rfb1156f203284af7">
             <a:alphaModFix/>
           </a:blip>
           <a:stretch xmlns:a="http://schemas.openxmlformats.org/drawingml/2006/main">
@@ -14548,7 +14549,7 @@
           <p:cNvPr id="94" name="Google Shape;94;p18">
             <a:extLst xmlns:a="http://schemas.openxmlformats.org/drawingml/2006/main">
               <a:ext uri="{FF2B5EF4-FFF2-40B4-BE49-F238E27FC236}">
-                <a16:creationId xmlns:a16="http://schemas.microsoft.com/office/drawing/2014/main" id="{8B912238-0EE2-42E6-A8BC-ABDE9184EB6D}"/>
+                <a16:creationId xmlns:a16="http://schemas.microsoft.com/office/drawing/2014/main" id="{190BF41D-86E4-4912-AB6E-FFE03D5F51CA}"/>
               </a:ext>
             </a:extLst>
           </p:cNvPr>
@@ -14599,7 +14600,7 @@
           <p:cNvPr id="95" name="Google Shape;95;p18">
             <a:extLst xmlns:a="http://schemas.openxmlformats.org/drawingml/2006/main">
               <a:ext uri="{FF2B5EF4-FFF2-40B4-BE49-F238E27FC236}">
-                <a16:creationId xmlns:a16="http://schemas.microsoft.com/office/drawing/2014/main" id="{0A18A3D2-A1DD-4DE7-A56E-3A3709984BFB}"/>
+                <a16:creationId xmlns:a16="http://schemas.microsoft.com/office/drawing/2014/main" id="{E7D9A250-15B4-4213-B56C-F98ECFB2AE16}"/>
               </a:ext>
             </a:extLst>
           </p:cNvPr>
@@ -14657,7 +14658,7 @@
           <p:cNvPr id="98" name="">
             <a:extLst xmlns:a="http://schemas.openxmlformats.org/drawingml/2006/main">
               <a:ext uri="{FF2B5EF4-FFF2-40B4-BE49-F238E27FC236}">
-                <a16:creationId xmlns:a16="http://schemas.microsoft.com/office/drawing/2014/main" id="{5A403AA3-22A2-459E-B0B0-AF39F8F31836}"/>
+                <a16:creationId xmlns:a16="http://schemas.microsoft.com/office/drawing/2014/main" id="{BC5FF1B4-B890-4F46-90DE-7DED5542AFC0}"/>
               </a:ext>
             </a:extLst>
           </p:cNvPr>
@@ -14714,7 +14715,7 @@
           <p:cNvPr id="99" name="">
             <a:extLst xmlns:a="http://schemas.openxmlformats.org/drawingml/2006/main">
               <a:ext uri="{FF2B5EF4-FFF2-40B4-BE49-F238E27FC236}">
-                <a16:creationId xmlns:a16="http://schemas.microsoft.com/office/drawing/2014/main" id="{EAB5F636-6C87-42E3-9039-41EBFCFC1C2C}"/>
+                <a16:creationId xmlns:a16="http://schemas.microsoft.com/office/drawing/2014/main" id="{9C3EACF8-DDE7-41BD-B161-B304914931E7}"/>
               </a:ext>
             </a:extLst>
           </p:cNvPr>
@@ -14771,7 +14772,7 @@
           <p:cNvPr id="100" name="">
             <a:extLst xmlns:a="http://schemas.openxmlformats.org/drawingml/2006/main">
               <a:ext uri="{FF2B5EF4-FFF2-40B4-BE49-F238E27FC236}">
-                <a16:creationId xmlns:a16="http://schemas.microsoft.com/office/drawing/2014/main" id="{EE25438F-7767-41B9-B780-4952B29EBB40}"/>
+                <a16:creationId xmlns:a16="http://schemas.microsoft.com/office/drawing/2014/main" id="{C7895BC9-9940-456F-8E1A-BEC95F96A21D}"/>
               </a:ext>
             </a:extLst>
           </p:cNvPr>
@@ -14855,7 +14856,7 @@
           <p:cNvPr id="101" name="">
             <a:extLst xmlns:a="http://schemas.openxmlformats.org/drawingml/2006/main">
               <a:ext uri="{FF2B5EF4-FFF2-40B4-BE49-F238E27FC236}">
-                <a16:creationId xmlns:a16="http://schemas.microsoft.com/office/drawing/2014/main" id="{C2E07CE8-1BAC-4FF8-8B3F-673076462D03}"/>
+                <a16:creationId xmlns:a16="http://schemas.microsoft.com/office/drawing/2014/main" id="{AA1FE216-EB12-4A53-B10E-976ADF590F76}"/>
               </a:ext>
             </a:extLst>
           </p:cNvPr>
@@ -14939,7 +14940,7 @@
           <p:cNvPr id="102" name="">
             <a:extLst xmlns:a="http://schemas.openxmlformats.org/drawingml/2006/main">
               <a:ext uri="{FF2B5EF4-FFF2-40B4-BE49-F238E27FC236}">
-                <a16:creationId xmlns:a16="http://schemas.microsoft.com/office/drawing/2014/main" id="{67DFB944-F7AE-482C-A3DF-E49A4788148C}"/>
+                <a16:creationId xmlns:a16="http://schemas.microsoft.com/office/drawing/2014/main" id="{7DB83C6A-C103-4E36-BA08-3BEB98DB52A1}"/>
               </a:ext>
             </a:extLst>
           </p:cNvPr>
@@ -15023,7 +15024,7 @@
           <p:cNvPr id="105" name="">
             <a:extLst xmlns:a="http://schemas.openxmlformats.org/drawingml/2006/main">
               <a:ext uri="{FF2B5EF4-FFF2-40B4-BE49-F238E27FC236}">
-                <a16:creationId xmlns:a16="http://schemas.microsoft.com/office/drawing/2014/main" id="{7EC352FD-00A2-40EF-8A43-B792CB75E54C}"/>
+                <a16:creationId xmlns:a16="http://schemas.microsoft.com/office/drawing/2014/main" id="{E4362E4B-E1A5-4953-A89E-8EA8395D3842}"/>
               </a:ext>
             </a:extLst>
           </p:cNvPr>
@@ -15107,7 +15108,7 @@
           <p:cNvPr id="106" name="">
             <a:extLst xmlns:a="http://schemas.openxmlformats.org/drawingml/2006/main">
               <a:ext uri="{FF2B5EF4-FFF2-40B4-BE49-F238E27FC236}">
-                <a16:creationId xmlns:a16="http://schemas.microsoft.com/office/drawing/2014/main" id="{351339D7-EC6D-46B1-A9D9-590E82838AA2}"/>
+                <a16:creationId xmlns:a16="http://schemas.microsoft.com/office/drawing/2014/main" id="{95F64865-BAC7-4FFE-9661-D54B831EE6D8}"/>
               </a:ext>
             </a:extLst>
           </p:cNvPr>
@@ -15191,7 +15192,7 @@
           <p:cNvPr id="107" name="">
             <a:extLst xmlns:a="http://schemas.openxmlformats.org/drawingml/2006/main">
               <a:ext uri="{FF2B5EF4-FFF2-40B4-BE49-F238E27FC236}">
-                <a16:creationId xmlns:a16="http://schemas.microsoft.com/office/drawing/2014/main" id="{B5EF1D9E-644D-4FC4-9177-6FC462C47DD9}"/>
+                <a16:creationId xmlns:a16="http://schemas.microsoft.com/office/drawing/2014/main" id="{C8E2B6E7-0D64-49C3-ACC7-9EC6C5E5573B}"/>
               </a:ext>
             </a:extLst>
           </p:cNvPr>
@@ -15275,7 +15276,7 @@
           <p:cNvPr id="111" name="">
             <a:extLst xmlns:a="http://schemas.openxmlformats.org/drawingml/2006/main">
               <a:ext uri="{FF2B5EF4-FFF2-40B4-BE49-F238E27FC236}">
-                <a16:creationId xmlns:a16="http://schemas.microsoft.com/office/drawing/2014/main" id="{D68B40DC-6347-4C23-A371-92ED063F0BFD}"/>
+                <a16:creationId xmlns:a16="http://schemas.microsoft.com/office/drawing/2014/main" id="{63E3F802-0DE6-430E-A971-C058763C8EA4}"/>
               </a:ext>
             </a:extLst>
           </p:cNvPr>
@@ -15332,7 +15333,7 @@
           <p:cNvPr id="112" name="">
             <a:extLst xmlns:a="http://schemas.openxmlformats.org/drawingml/2006/main">
               <a:ext uri="{FF2B5EF4-FFF2-40B4-BE49-F238E27FC236}">
-                <a16:creationId xmlns:a16="http://schemas.microsoft.com/office/drawing/2014/main" id="{3C291F11-F624-4DDF-9322-82C6487DBC8A}"/>
+                <a16:creationId xmlns:a16="http://schemas.microsoft.com/office/drawing/2014/main" id="{61BE0910-2B91-4776-8F34-17A06F200A30}"/>
               </a:ext>
             </a:extLst>
           </p:cNvPr>
@@ -15387,7 +15388,7 @@
     </p:spTree>
     <p:extLst>
       <p:ext uri="{BB962C8B-B14F-4D97-AF65-F5344CB8AC3E}">
-        <p14:creationId xmlns:p14="http://schemas.microsoft.com/office/powerpoint/2010/main" val="1060596417"/>
+        <p14:creationId xmlns:p14="http://schemas.microsoft.com/office/powerpoint/2010/main" val="2102373375"/>
       </p:ext>
     </p:extLst>
   </p:cSld>
@@ -15415,7 +15416,7 @@
           <p:nvPr/>
         </p:nvPicPr>
         <p:blipFill rotWithShape="1">
-          <a:blip xmlns:r="http://schemas.openxmlformats.org/officeDocument/2006/relationships" xmlns:a="http://schemas.openxmlformats.org/drawingml/2006/main" r:embed="Rbcede05339c3439c">
+          <a:blip xmlns:r="http://schemas.openxmlformats.org/officeDocument/2006/relationships" xmlns:a="http://schemas.openxmlformats.org/drawingml/2006/main" r:embed="Rc18ba59b5c3f44a4">
             <a:alphaModFix/>
           </a:blip>
           <a:srcRect xmlns:a="http://schemas.openxmlformats.org/drawingml/2006/main" l="0" t="0" r="0" b="98001"/>
@@ -15443,7 +15444,7 @@
           <p:nvPr/>
         </p:nvPicPr>
         <p:blipFill>
-          <a:blip xmlns:r="http://schemas.openxmlformats.org/officeDocument/2006/relationships" xmlns:a="http://schemas.openxmlformats.org/drawingml/2006/main" r:embed="Rf2f71ac399b24427">
+          <a:blip xmlns:r="http://schemas.openxmlformats.org/officeDocument/2006/relationships" xmlns:a="http://schemas.openxmlformats.org/drawingml/2006/main" r:embed="Rd8183a2dfcdf4848">
             <a:alphaModFix/>
           </a:blip>
           <a:stretch xmlns:a="http://schemas.openxmlformats.org/drawingml/2006/main">
@@ -15468,7 +15469,7 @@
           <p:cNvPr id="102" name="Google Shape;102;p19">
             <a:extLst xmlns:a="http://schemas.openxmlformats.org/drawingml/2006/main">
               <a:ext uri="{FF2B5EF4-FFF2-40B4-BE49-F238E27FC236}">
-                <a16:creationId xmlns:a16="http://schemas.microsoft.com/office/drawing/2014/main" id="{31AED720-3DB3-4D0C-9DCC-9289DF052EBF}"/>
+                <a16:creationId xmlns:a16="http://schemas.microsoft.com/office/drawing/2014/main" id="{4646482A-07C9-4D24-A0D8-C6D944681339}"/>
               </a:ext>
             </a:extLst>
           </p:cNvPr>
@@ -15519,7 +15520,7 @@
           <p:cNvPr id="103" name="Google Shape;103;p19">
             <a:extLst xmlns:a="http://schemas.openxmlformats.org/drawingml/2006/main">
               <a:ext uri="{FF2B5EF4-FFF2-40B4-BE49-F238E27FC236}">
-                <a16:creationId xmlns:a16="http://schemas.microsoft.com/office/drawing/2014/main" id="{CF716416-75A1-4DAC-A4B4-E77904E72116}"/>
+                <a16:creationId xmlns:a16="http://schemas.microsoft.com/office/drawing/2014/main" id="{6CCD6351-16AD-4ECA-983C-4510AE01B1B0}"/>
               </a:ext>
             </a:extLst>
           </p:cNvPr>
@@ -15577,7 +15578,7 @@
           <p:cNvPr id="106" name="">
             <a:extLst xmlns:a="http://schemas.openxmlformats.org/drawingml/2006/main">
               <a:ext uri="{FF2B5EF4-FFF2-40B4-BE49-F238E27FC236}">
-                <a16:creationId xmlns:a16="http://schemas.microsoft.com/office/drawing/2014/main" id="{3EAE20E0-4461-4611-A0FC-7EC61E5D60EF}"/>
+                <a16:creationId xmlns:a16="http://schemas.microsoft.com/office/drawing/2014/main" id="{1A330373-33E0-4416-B3CD-E1113A77170A}"/>
               </a:ext>
             </a:extLst>
           </p:cNvPr>
@@ -15634,7 +15635,7 @@
           <p:cNvPr id="107" name="">
             <a:extLst xmlns:a="http://schemas.openxmlformats.org/drawingml/2006/main">
               <a:ext uri="{FF2B5EF4-FFF2-40B4-BE49-F238E27FC236}">
-                <a16:creationId xmlns:a16="http://schemas.microsoft.com/office/drawing/2014/main" id="{D3EF7752-2ABB-4BAC-BE51-413DD1FDB4A7}"/>
+                <a16:creationId xmlns:a16="http://schemas.microsoft.com/office/drawing/2014/main" id="{1969FF16-71AF-4C95-8F82-6C84B75B58E3}"/>
               </a:ext>
             </a:extLst>
           </p:cNvPr>
@@ -15691,7 +15692,7 @@
           <p:cNvPr id="108" name="">
             <a:extLst xmlns:a="http://schemas.openxmlformats.org/drawingml/2006/main">
               <a:ext uri="{FF2B5EF4-FFF2-40B4-BE49-F238E27FC236}">
-                <a16:creationId xmlns:a16="http://schemas.microsoft.com/office/drawing/2014/main" id="{E948FA09-B7FE-47F2-A496-77BBC9CDD444}"/>
+                <a16:creationId xmlns:a16="http://schemas.microsoft.com/office/drawing/2014/main" id="{B4360DB8-05CD-4A89-AA86-43E49EBC30B1}"/>
               </a:ext>
             </a:extLst>
           </p:cNvPr>
@@ -15752,7 +15753,7 @@
           <p:nvPr/>
         </p:nvPicPr>
         <p:blipFill>
-          <a:blip xmlns:r="http://schemas.openxmlformats.org/officeDocument/2006/relationships" xmlns:a="http://schemas.openxmlformats.org/drawingml/2006/main" r:embed="Rf96612a12c7847ae"/>
+          <a:blip xmlns:r="http://schemas.openxmlformats.org/officeDocument/2006/relationships" xmlns:a="http://schemas.openxmlformats.org/drawingml/2006/main" r:embed="R2d7acfa909584f80"/>
           <a:srcRect xmlns:a="http://schemas.openxmlformats.org/drawingml/2006/main" l="25000" t="17000" r="2500" b="0"/>
           <a:stretch xmlns:a="http://schemas.openxmlformats.org/drawingml/2006/main"/>
         </p:blipFill>
@@ -15775,7 +15776,7 @@
           <p:nvPr/>
         </p:nvPicPr>
         <p:blipFill>
-          <a:blip xmlns:r="http://schemas.openxmlformats.org/officeDocument/2006/relationships" xmlns:a="http://schemas.openxmlformats.org/drawingml/2006/main" r:embed="R3343cd7421dd41f5"/>
+          <a:blip xmlns:r="http://schemas.openxmlformats.org/officeDocument/2006/relationships" xmlns:a="http://schemas.openxmlformats.org/drawingml/2006/main" r:embed="R8055c334f56543e9"/>
           <a:srcRect xmlns:a="http://schemas.openxmlformats.org/drawingml/2006/main" l="25000" t="7000" r="2500" b="1500"/>
           <a:stretch xmlns:a="http://schemas.openxmlformats.org/drawingml/2006/main"/>
         </p:blipFill>
@@ -15794,7 +15795,7 @@
           <p:cNvPr id="111" name="">
             <a:extLst xmlns:a="http://schemas.openxmlformats.org/drawingml/2006/main">
               <a:ext uri="{FF2B5EF4-FFF2-40B4-BE49-F238E27FC236}">
-                <a16:creationId xmlns:a16="http://schemas.microsoft.com/office/drawing/2014/main" id="{47626854-ABB1-4696-82D6-695F3943C174}"/>
+                <a16:creationId xmlns:a16="http://schemas.microsoft.com/office/drawing/2014/main" id="{E3125E6F-D010-4F0A-A0C3-ABA9F4D6EFB6}"/>
               </a:ext>
             </a:extLst>
           </p:cNvPr>
@@ -15851,7 +15852,7 @@
           <p:cNvPr id="112" name="">
             <a:extLst xmlns:a="http://schemas.openxmlformats.org/drawingml/2006/main">
               <a:ext uri="{FF2B5EF4-FFF2-40B4-BE49-F238E27FC236}">
-                <a16:creationId xmlns:a16="http://schemas.microsoft.com/office/drawing/2014/main" id="{A8ED03D2-9FE1-458C-B5B6-852E777C7924}"/>
+                <a16:creationId xmlns:a16="http://schemas.microsoft.com/office/drawing/2014/main" id="{37A68E4D-D61F-49F7-8A8C-64EA94C513EE}"/>
               </a:ext>
             </a:extLst>
           </p:cNvPr>
@@ -15906,7 +15907,7 @@
     </p:spTree>
     <p:extLst>
       <p:ext uri="{BB962C8B-B14F-4D97-AF65-F5344CB8AC3E}">
-        <p14:creationId xmlns:p14="http://schemas.microsoft.com/office/powerpoint/2010/main" val="1084745315"/>
+        <p14:creationId xmlns:p14="http://schemas.microsoft.com/office/powerpoint/2010/main" val="1052675137"/>
       </p:ext>
     </p:extLst>
   </p:cSld>
@@ -16034,7 +16035,7 @@
           <p:nvPr/>
         </p:nvPicPr>
         <p:blipFill rotWithShape="1">
-          <a:blip xmlns:r="http://schemas.openxmlformats.org/officeDocument/2006/relationships" xmlns:a="http://schemas.openxmlformats.org/drawingml/2006/main" r:embed="Rba8d900277af4303">
+          <a:blip xmlns:r="http://schemas.openxmlformats.org/officeDocument/2006/relationships" xmlns:a="http://schemas.openxmlformats.org/drawingml/2006/main" r:embed="R9f70995a72c34965">
             <a:alphaModFix/>
           </a:blip>
           <a:srcRect xmlns:a="http://schemas.openxmlformats.org/drawingml/2006/main" l="0" t="0" r="0" b="98001"/>
@@ -16062,7 +16063,7 @@
           <p:nvPr/>
         </p:nvPicPr>
         <p:blipFill>
-          <a:blip xmlns:r="http://schemas.openxmlformats.org/officeDocument/2006/relationships" xmlns:a="http://schemas.openxmlformats.org/drawingml/2006/main" r:embed="R8e1fc54aa3654370">
+          <a:blip xmlns:r="http://schemas.openxmlformats.org/officeDocument/2006/relationships" xmlns:a="http://schemas.openxmlformats.org/drawingml/2006/main" r:embed="Rd797345020b64d25">
             <a:alphaModFix/>
           </a:blip>
           <a:stretch xmlns:a="http://schemas.openxmlformats.org/drawingml/2006/main">
@@ -16087,7 +16088,7 @@
           <p:cNvPr id="110" name="Google Shape;110;p20">
             <a:extLst xmlns:a="http://schemas.openxmlformats.org/drawingml/2006/main">
               <a:ext uri="{FF2B5EF4-FFF2-40B4-BE49-F238E27FC236}">
-                <a16:creationId xmlns:a16="http://schemas.microsoft.com/office/drawing/2014/main" id="{1A0889B1-C077-46BB-BCDA-C55A38115C36}"/>
+                <a16:creationId xmlns:a16="http://schemas.microsoft.com/office/drawing/2014/main" id="{F4B6EEE7-4250-47C5-8CE0-203505F2DBB4}"/>
               </a:ext>
             </a:extLst>
           </p:cNvPr>
@@ -16138,7 +16139,7 @@
           <p:cNvPr id="111" name="Google Shape;111;p20">
             <a:extLst xmlns:a="http://schemas.openxmlformats.org/drawingml/2006/main">
               <a:ext uri="{FF2B5EF4-FFF2-40B4-BE49-F238E27FC236}">
-                <a16:creationId xmlns:a16="http://schemas.microsoft.com/office/drawing/2014/main" id="{488D970E-4EF7-4AFF-A5D9-CBC8BA3AA30C}"/>
+                <a16:creationId xmlns:a16="http://schemas.microsoft.com/office/drawing/2014/main" id="{3B184878-E1B7-417B-B94E-4D1FF9AB7999}"/>
               </a:ext>
             </a:extLst>
           </p:cNvPr>
@@ -16196,7 +16197,7 @@
           <p:cNvPr id="114" name="">
             <a:extLst xmlns:a="http://schemas.openxmlformats.org/drawingml/2006/main">
               <a:ext uri="{FF2B5EF4-FFF2-40B4-BE49-F238E27FC236}">
-                <a16:creationId xmlns:a16="http://schemas.microsoft.com/office/drawing/2014/main" id="{D801A859-61BC-4FE1-AB45-6051EC808C10}"/>
+                <a16:creationId xmlns:a16="http://schemas.microsoft.com/office/drawing/2014/main" id="{C90A3EE0-A28F-4AAA-9154-06CADEA1567C}"/>
               </a:ext>
             </a:extLst>
           </p:cNvPr>
@@ -16253,7 +16254,7 @@
           <p:cNvPr id="115" name="">
             <a:extLst xmlns:a="http://schemas.openxmlformats.org/drawingml/2006/main">
               <a:ext uri="{FF2B5EF4-FFF2-40B4-BE49-F238E27FC236}">
-                <a16:creationId xmlns:a16="http://schemas.microsoft.com/office/drawing/2014/main" id="{AFE3C132-C457-4B41-A440-8DFB75EDB669}"/>
+                <a16:creationId xmlns:a16="http://schemas.microsoft.com/office/drawing/2014/main" id="{3ABE8A49-DBB9-4AB8-9311-E20CE3807CBD}"/>
               </a:ext>
             </a:extLst>
           </p:cNvPr>
@@ -16310,7 +16311,7 @@
           <p:cNvPr id="116" name="">
             <a:extLst xmlns:a="http://schemas.openxmlformats.org/drawingml/2006/main">
               <a:ext uri="{FF2B5EF4-FFF2-40B4-BE49-F238E27FC236}">
-                <a16:creationId xmlns:a16="http://schemas.microsoft.com/office/drawing/2014/main" id="{37F39736-0215-4658-BED6-58A89B143067}"/>
+                <a16:creationId xmlns:a16="http://schemas.microsoft.com/office/drawing/2014/main" id="{D3FDE85C-882B-47F7-B812-2C52CB7EAE4E}"/>
               </a:ext>
             </a:extLst>
           </p:cNvPr>
@@ -16394,7 +16395,7 @@
           <p:cNvPr id="117" name="">
             <a:extLst xmlns:a="http://schemas.openxmlformats.org/drawingml/2006/main">
               <a:ext uri="{FF2B5EF4-FFF2-40B4-BE49-F238E27FC236}">
-                <a16:creationId xmlns:a16="http://schemas.microsoft.com/office/drawing/2014/main" id="{899FC336-0A04-4CE5-B4FB-C320B1B34ED7}"/>
+                <a16:creationId xmlns:a16="http://schemas.microsoft.com/office/drawing/2014/main" id="{FCBD812C-8B5E-4605-A2A1-C66307EB6804}"/>
               </a:ext>
             </a:extLst>
           </p:cNvPr>
@@ -16501,7 +16502,7 @@
           <p:cNvPr id="118" name="">
             <a:extLst xmlns:a="http://schemas.openxmlformats.org/drawingml/2006/main">
               <a:ext uri="{FF2B5EF4-FFF2-40B4-BE49-F238E27FC236}">
-                <a16:creationId xmlns:a16="http://schemas.microsoft.com/office/drawing/2014/main" id="{70496751-336E-4A8C-80DE-2362C7C16D52}"/>
+                <a16:creationId xmlns:a16="http://schemas.microsoft.com/office/drawing/2014/main" id="{4C6121AD-7EA5-4A1A-AEE3-33D228C18AAB}"/>
               </a:ext>
             </a:extLst>
           </p:cNvPr>
@@ -16608,7 +16609,7 @@
           <p:cNvPr id="121" name="">
             <a:extLst xmlns:a="http://schemas.openxmlformats.org/drawingml/2006/main">
               <a:ext uri="{FF2B5EF4-FFF2-40B4-BE49-F238E27FC236}">
-                <a16:creationId xmlns:a16="http://schemas.microsoft.com/office/drawing/2014/main" id="{0CF6C88E-1E8B-4382-94E3-E77F8EE68932}"/>
+                <a16:creationId xmlns:a16="http://schemas.microsoft.com/office/drawing/2014/main" id="{15A0B617-DC3A-4657-BE2D-7B14ADAAA721}"/>
               </a:ext>
             </a:extLst>
           </p:cNvPr>
@@ -16715,7 +16716,7 @@
           <p:cNvPr id="122" name="">
             <a:extLst xmlns:a="http://schemas.openxmlformats.org/drawingml/2006/main">
               <a:ext uri="{FF2B5EF4-FFF2-40B4-BE49-F238E27FC236}">
-                <a16:creationId xmlns:a16="http://schemas.microsoft.com/office/drawing/2014/main" id="{67770874-D246-4A50-A36B-5CAFC39D287D}"/>
+                <a16:creationId xmlns:a16="http://schemas.microsoft.com/office/drawing/2014/main" id="{E0BA73DA-8C5B-406B-8648-0D9BB84B530A}"/>
               </a:ext>
             </a:extLst>
           </p:cNvPr>
@@ -16822,7 +16823,7 @@
           <p:cNvPr id="125" name="">
             <a:extLst xmlns:a="http://schemas.openxmlformats.org/drawingml/2006/main">
               <a:ext uri="{FF2B5EF4-FFF2-40B4-BE49-F238E27FC236}">
-                <a16:creationId xmlns:a16="http://schemas.microsoft.com/office/drawing/2014/main" id="{CC05C26F-236D-402F-B842-BF14E40BA1B2}"/>
+                <a16:creationId xmlns:a16="http://schemas.microsoft.com/office/drawing/2014/main" id="{71ACF69F-B943-4F3A-9B55-A2C7D328CA6C}"/>
               </a:ext>
             </a:extLst>
           </p:cNvPr>
@@ -16879,7 +16880,7 @@
           <p:cNvPr id="126" name="">
             <a:extLst xmlns:a="http://schemas.openxmlformats.org/drawingml/2006/main">
               <a:ext uri="{FF2B5EF4-FFF2-40B4-BE49-F238E27FC236}">
-                <a16:creationId xmlns:a16="http://schemas.microsoft.com/office/drawing/2014/main" id="{6AF77467-4416-4A28-8DC7-5B1CAA0AF39F}"/>
+                <a16:creationId xmlns:a16="http://schemas.microsoft.com/office/drawing/2014/main" id="{B00BDCE6-2BFA-4B10-BF34-FC058E1DE48F}"/>
               </a:ext>
             </a:extLst>
           </p:cNvPr>
@@ -16934,7 +16935,7 @@
     </p:spTree>
     <p:extLst>
       <p:ext uri="{BB962C8B-B14F-4D97-AF65-F5344CB8AC3E}">
-        <p14:creationId xmlns:p14="http://schemas.microsoft.com/office/powerpoint/2010/main" val="338667479"/>
+        <p14:creationId xmlns:p14="http://schemas.microsoft.com/office/powerpoint/2010/main" val="1147687950"/>
       </p:ext>
     </p:extLst>
   </p:cSld>
@@ -16962,7 +16963,7 @@
           <p:nvPr/>
         </p:nvPicPr>
         <p:blipFill rotWithShape="1">
-          <a:blip xmlns:r="http://schemas.openxmlformats.org/officeDocument/2006/relationships" xmlns:a="http://schemas.openxmlformats.org/drawingml/2006/main" r:embed="R98c1f27089a140f2">
+          <a:blip xmlns:r="http://schemas.openxmlformats.org/officeDocument/2006/relationships" xmlns:a="http://schemas.openxmlformats.org/drawingml/2006/main" r:embed="Rb0b4ca595eb843da">
             <a:alphaModFix/>
           </a:blip>
           <a:srcRect xmlns:a="http://schemas.openxmlformats.org/drawingml/2006/main" l="0" t="0" r="0" b="98001"/>
@@ -16990,7 +16991,7 @@
           <p:nvPr/>
         </p:nvPicPr>
         <p:blipFill>
-          <a:blip xmlns:r="http://schemas.openxmlformats.org/officeDocument/2006/relationships" xmlns:a="http://schemas.openxmlformats.org/drawingml/2006/main" r:embed="R23ef03389e674fb3">
+          <a:blip xmlns:r="http://schemas.openxmlformats.org/officeDocument/2006/relationships" xmlns:a="http://schemas.openxmlformats.org/drawingml/2006/main" r:embed="R34a2abcab0a3442e">
             <a:alphaModFix/>
           </a:blip>
           <a:stretch xmlns:a="http://schemas.openxmlformats.org/drawingml/2006/main">
@@ -17015,7 +17016,7 @@
           <p:cNvPr id="118" name="Google Shape;118;p21">
             <a:extLst xmlns:a="http://schemas.openxmlformats.org/drawingml/2006/main">
               <a:ext uri="{FF2B5EF4-FFF2-40B4-BE49-F238E27FC236}">
-                <a16:creationId xmlns:a16="http://schemas.microsoft.com/office/drawing/2014/main" id="{C825235A-7B85-479C-A1D5-50A120B9333C}"/>
+                <a16:creationId xmlns:a16="http://schemas.microsoft.com/office/drawing/2014/main" id="{750BF3E1-5DE6-47FD-824F-727417ACA428}"/>
               </a:ext>
             </a:extLst>
           </p:cNvPr>
@@ -17066,7 +17067,7 @@
           <p:cNvPr id="119" name="Google Shape;119;p21">
             <a:extLst xmlns:a="http://schemas.openxmlformats.org/drawingml/2006/main">
               <a:ext uri="{FF2B5EF4-FFF2-40B4-BE49-F238E27FC236}">
-                <a16:creationId xmlns:a16="http://schemas.microsoft.com/office/drawing/2014/main" id="{3EC0C01A-C91C-40AA-BE54-6293DA8945FF}"/>
+                <a16:creationId xmlns:a16="http://schemas.microsoft.com/office/drawing/2014/main" id="{A3562B3C-44AB-40DD-AB1F-D0DDB97D8B2D}"/>
               </a:ext>
             </a:extLst>
           </p:cNvPr>
@@ -17124,7 +17125,7 @@
           <p:cNvPr id="122" name="">
             <a:extLst xmlns:a="http://schemas.openxmlformats.org/drawingml/2006/main">
               <a:ext uri="{FF2B5EF4-FFF2-40B4-BE49-F238E27FC236}">
-                <a16:creationId xmlns:a16="http://schemas.microsoft.com/office/drawing/2014/main" id="{2D8121EA-F3C8-4E60-8A5F-9263AD542E8A}"/>
+                <a16:creationId xmlns:a16="http://schemas.microsoft.com/office/drawing/2014/main" id="{C35946FF-5844-4325-B652-2178652EB4AE}"/>
               </a:ext>
             </a:extLst>
           </p:cNvPr>
@@ -17181,7 +17182,7 @@
           <p:cNvPr id="123" name="">
             <a:extLst xmlns:a="http://schemas.openxmlformats.org/drawingml/2006/main">
               <a:ext uri="{FF2B5EF4-FFF2-40B4-BE49-F238E27FC236}">
-                <a16:creationId xmlns:a16="http://schemas.microsoft.com/office/drawing/2014/main" id="{1FBF6EE8-CA72-4DF3-B9C9-779FB8AF4EFF}"/>
+                <a16:creationId xmlns:a16="http://schemas.microsoft.com/office/drawing/2014/main" id="{D0E54961-4FC2-48D6-A3AD-FA30CA62D1EE}"/>
               </a:ext>
             </a:extLst>
           </p:cNvPr>
@@ -17925,7 +17926,7 @@
     </p:spTree>
     <p:extLst>
       <p:ext uri="{BB962C8B-B14F-4D97-AF65-F5344CB8AC3E}">
-        <p14:creationId xmlns:p14="http://schemas.microsoft.com/office/powerpoint/2010/main" val="1720335971"/>
+        <p14:creationId xmlns:p14="http://schemas.microsoft.com/office/powerpoint/2010/main" val="1236234854"/>
       </p:ext>
     </p:extLst>
   </p:cSld>
